--- a/V2授课PPT/W01-第2次课-列表与字典：C里没有的武器.pptx
+++ b/V2授课PPT/W01-第2次课-列表与字典：C里没有的武器.pptx
@@ -8,6 +8,9 @@
     <p:sldId id="256" r:id="rId7"/>
     <p:sldId id="280" r:id="rId32"/>
     <p:sldId id="310" r:id="rId62"/>
+    <p:sldId id="368" r:id="rId15"/>
+    <p:sldId id="369" r:id="rId16"/>
+    <p:sldId id="370" r:id="rId17"/>
     <p:sldId id="339" r:id="rId91"/>
     <p:sldId id="341" r:id="rId93"/>
     <p:sldId id="366" r:id="rId118"/>
@@ -4309,6 +4312,658 @@
 </p:sld>
 </file>
 
+<file path=ppt/slides/slide10.xml><?xml version="1.0" encoding="utf-8"?>
+<p:sld xmlns:a="http://schemas.openxmlformats.org/drawingml/2006/main" xmlns:p="http://schemas.openxmlformats.org/presentationml/2006/main" xmlns:r="http://schemas.openxmlformats.org/officeDocument/2006/relationships">
+  <p:cSld>
+    <p:spTree>
+      <p:nvGrpSpPr>
+        <p:cNvPr id="1" name=""/>
+        <p:cNvGrpSpPr/>
+        <p:nvPr/>
+      </p:nvGrpSpPr>
+      <p:grpSpPr/>
+      <p:sp>
+        <p:nvSpPr>
+          <p:cNvPr id="2" name="Rounded Rectangle 1"/>
+          <p:cNvSpPr/>
+          <p:nvPr/>
+        </p:nvSpPr>
+        <p:spPr>
+          <a:xfrm>
+            <a:off x="0" y="0"/>
+            <a:ext cx="12191695" cy="64008"/>
+          </a:xfrm>
+          <a:prstGeom prst="roundRect">
+            <a:avLst>
+              <a:gd name="adj" fmla="val 50000"/>
+            </a:avLst>
+          </a:prstGeom>
+          <a:solidFill>
+            <a:srgbClr val="0B5E54"/>
+          </a:solidFill>
+          <a:ln>
+            <a:noFill/>
+          </a:ln>
+          <a:effectLst/>
+        </p:spPr>
+        <p:style>
+          <a:lnRef idx="1">
+            <a:schemeClr val="accent1"/>
+          </a:lnRef>
+          <a:fillRef idx="3">
+            <a:schemeClr val="accent1"/>
+          </a:fillRef>
+          <a:effectRef idx="2">
+            <a:schemeClr val="accent1"/>
+          </a:effectRef>
+          <a:fontRef idx="minor">
+            <a:schemeClr val="lt1"/>
+          </a:fontRef>
+        </p:style>
+        <p:txBody>
+          <a:bodyPr rtlCol="0" anchor="ctr"/>
+          <a:lstStyle/>
+          <a:p>
+            <a:pPr algn="ctr"/>
+          </a:p>
+        </p:txBody>
+      </p:sp>
+      <p:sp>
+        <p:nvSpPr>
+          <p:cNvPr id="3" name="TextBox 2"/>
+          <p:cNvSpPr txBox="1"/>
+          <p:nvPr/>
+        </p:nvSpPr>
+        <p:spPr>
+          <a:xfrm>
+            <a:off x="475488" y="146304"/>
+            <a:ext cx="8229600" cy="292608"/>
+          </a:xfrm>
+          <a:prstGeom prst="rect">
+            <a:avLst/>
+          </a:prstGeom>
+          <a:noFill/>
+        </p:spPr>
+        <p:txBody>
+          <a:bodyPr wrap="square" anchor="t" lIns="0" rIns="0" tIns="0" bIns="0">
+            <a:spAutoFit/>
+          </a:bodyPr>
+          <a:lstStyle/>
+          <a:p>
+            <a:pPr algn="l">
+              <a:lnSpc>
+                <a:spcPct val="114000"/>
+              </a:lnSpc>
+            </a:pPr>
+            <a:r>
+              <a:rPr sz="1100" b="1">
+                <a:solidFill>
+                  <a:srgbClr val="0B5E54"/>
+                </a:solidFill>
+              </a:rPr>
+              <a:t>工单实战 · 运行留证</a:t>
+            </a:r>
+          </a:p>
+        </p:txBody>
+      </p:sp>
+      <p:sp>
+        <p:nvSpPr>
+          <p:cNvPr id="4" name="Rounded Rectangle 3"/>
+          <p:cNvSpPr/>
+          <p:nvPr/>
+        </p:nvSpPr>
+        <p:spPr>
+          <a:xfrm>
+            <a:off x="475488" y="475488"/>
+            <a:ext cx="2027872" cy="310896"/>
+          </a:xfrm>
+          <a:prstGeom prst="roundRect">
+            <a:avLst>
+              <a:gd name="adj" fmla="val 50000"/>
+            </a:avLst>
+          </a:prstGeom>
+          <a:solidFill>
+            <a:srgbClr val="C9A227"/>
+          </a:solidFill>
+          <a:ln>
+            <a:noFill/>
+          </a:ln>
+          <a:effectLst/>
+        </p:spPr>
+        <p:style>
+          <a:lnRef idx="1">
+            <a:schemeClr val="accent1"/>
+          </a:lnRef>
+          <a:fillRef idx="3">
+            <a:schemeClr val="accent1"/>
+          </a:fillRef>
+          <a:effectRef idx="2">
+            <a:schemeClr val="accent1"/>
+          </a:effectRef>
+          <a:fontRef idx="minor">
+            <a:schemeClr val="lt1"/>
+          </a:fontRef>
+        </p:style>
+        <p:txBody>
+          <a:bodyPr rtlCol="0" anchor="ctr"/>
+          <a:lstStyle/>
+          <a:p>
+            <a:pPr algn="ctr"/>
+          </a:p>
+        </p:txBody>
+      </p:sp>
+      <p:sp>
+        <p:nvSpPr>
+          <p:cNvPr id="5" name="TextBox 4"/>
+          <p:cNvSpPr txBox="1"/>
+          <p:nvPr/>
+        </p:nvSpPr>
+        <p:spPr>
+          <a:xfrm>
+            <a:off x="475488" y="475488"/>
+            <a:ext cx="2027872" cy="310896"/>
+          </a:xfrm>
+          <a:prstGeom prst="rect">
+            <a:avLst/>
+          </a:prstGeom>
+          <a:noFill/>
+        </p:spPr>
+        <p:txBody>
+          <a:bodyPr wrap="square" anchor="ctr" lIns="0" rIns="0" tIns="0" bIns="0">
+            <a:spAutoFit/>
+          </a:bodyPr>
+          <a:lstStyle/>
+          <a:p>
+            <a:pPr algn="ctr">
+              <a:lnSpc>
+                <a:spcPct val="114000"/>
+              </a:lnSpc>
+            </a:pPr>
+            <a:r>
+              <a:rPr sz="1050" b="1">
+                <a:solidFill>
+                  <a:srgbClr val="FFFFFF"/>
+                </a:solidFill>
+              </a:rPr>
+              <a:t>SCREENSHOT · 终端逐字截图</a:t>
+            </a:r>
+          </a:p>
+        </p:txBody>
+      </p:sp>
+      <p:sp>
+        <p:nvSpPr>
+          <p:cNvPr id="6" name="TextBox 5"/>
+          <p:cNvSpPr txBox="1"/>
+          <p:nvPr/>
+        </p:nvSpPr>
+        <p:spPr>
+          <a:xfrm>
+            <a:off x="475488" y="859536"/>
+            <a:ext cx="11237976" cy="502920"/>
+          </a:xfrm>
+          <a:prstGeom prst="rect">
+            <a:avLst/>
+          </a:prstGeom>
+          <a:noFill/>
+        </p:spPr>
+        <p:txBody>
+          <a:bodyPr wrap="square" anchor="t" lIns="0" rIns="0" tIns="0" bIns="0">
+            <a:spAutoFit/>
+          </a:bodyPr>
+          <a:lstStyle/>
+          <a:p>
+            <a:pPr algn="l">
+              <a:lnSpc>
+                <a:spcPct val="114000"/>
+              </a:lnSpc>
+            </a:pPr>
+            <a:r>
+              <a:rPr sz="2200" b="1">
+                <a:solidFill>
+                  <a:srgbClr val="1B2B28"/>
+                </a:solidFill>
+              </a:rPr>
+              <a:t>P1.1 · 测试全绿证据＋pytest 全量实跑</a:t>
+            </a:r>
+          </a:p>
+        </p:txBody>
+      </p:sp>
+      <p:sp>
+        <p:nvSpPr>
+          <p:cNvPr id="7" name="Rounded Rectangle 6"/>
+          <p:cNvSpPr/>
+          <p:nvPr/>
+        </p:nvSpPr>
+        <p:spPr>
+          <a:xfrm>
+            <a:off x="475488" y="1389888"/>
+            <a:ext cx="1234440" cy="27432"/>
+          </a:xfrm>
+          <a:prstGeom prst="roundRect">
+            <a:avLst>
+              <a:gd name="adj" fmla="val 50000"/>
+            </a:avLst>
+          </a:prstGeom>
+          <a:solidFill>
+            <a:srgbClr val="C9A227"/>
+          </a:solidFill>
+          <a:ln>
+            <a:noFill/>
+          </a:ln>
+          <a:effectLst/>
+        </p:spPr>
+        <p:style>
+          <a:lnRef idx="1">
+            <a:schemeClr val="accent1"/>
+          </a:lnRef>
+          <a:fillRef idx="3">
+            <a:schemeClr val="accent1"/>
+          </a:fillRef>
+          <a:effectRef idx="2">
+            <a:schemeClr val="accent1"/>
+          </a:effectRef>
+          <a:fontRef idx="minor">
+            <a:schemeClr val="lt1"/>
+          </a:fontRef>
+        </p:style>
+        <p:txBody>
+          <a:bodyPr rtlCol="0" anchor="ctr"/>
+          <a:lstStyle/>
+          <a:p>
+            <a:pPr algn="ctr"/>
+          </a:p>
+        </p:txBody>
+      </p:sp>
+      <p:sp>
+        <p:nvSpPr>
+          <p:cNvPr id="8" name="Rounded Rectangle 7"/>
+          <p:cNvSpPr/>
+          <p:nvPr/>
+        </p:nvSpPr>
+        <p:spPr>
+          <a:xfrm>
+            <a:off x="475488" y="6419088"/>
+            <a:ext cx="11237976" cy="10972"/>
+          </a:xfrm>
+          <a:prstGeom prst="roundRect">
+            <a:avLst>
+              <a:gd name="adj" fmla="val 50000"/>
+            </a:avLst>
+          </a:prstGeom>
+          <a:solidFill>
+            <a:srgbClr val="E4F1EE"/>
+          </a:solidFill>
+          <a:ln>
+            <a:noFill/>
+          </a:ln>
+          <a:effectLst/>
+        </p:spPr>
+        <p:style>
+          <a:lnRef idx="1">
+            <a:schemeClr val="accent1"/>
+          </a:lnRef>
+          <a:fillRef idx="3">
+            <a:schemeClr val="accent1"/>
+          </a:fillRef>
+          <a:effectRef idx="2">
+            <a:schemeClr val="accent1"/>
+          </a:effectRef>
+          <a:fontRef idx="minor">
+            <a:schemeClr val="lt1"/>
+          </a:fontRef>
+        </p:style>
+        <p:txBody>
+          <a:bodyPr rtlCol="0" anchor="ctr"/>
+          <a:lstStyle/>
+          <a:p>
+            <a:pPr algn="ctr"/>
+          </a:p>
+        </p:txBody>
+      </p:sp>
+      <p:sp>
+        <p:nvSpPr>
+          <p:cNvPr id="9" name="TextBox 8"/>
+          <p:cNvSpPr txBox="1"/>
+          <p:nvPr/>
+        </p:nvSpPr>
+        <p:spPr>
+          <a:xfrm>
+            <a:off x="475488" y="6455664"/>
+            <a:ext cx="7315200" cy="292608"/>
+          </a:xfrm>
+          <a:prstGeom prst="rect">
+            <a:avLst/>
+          </a:prstGeom>
+          <a:noFill/>
+        </p:spPr>
+        <p:txBody>
+          <a:bodyPr wrap="square" anchor="t" lIns="0" rIns="0" tIns="0" bIns="0">
+            <a:spAutoFit/>
+          </a:bodyPr>
+          <a:lstStyle/>
+          <a:p>
+            <a:pPr algn="l">
+              <a:lnSpc>
+                <a:spcPct val="114000"/>
+              </a:lnSpc>
+            </a:pPr>
+            <a:r>
+              <a:rPr sz="900" b="0">
+                <a:solidFill>
+                  <a:srgbClr val="5C6E6A"/>
+                </a:solidFill>
+              </a:rPr>
+              <a:t>两江智造集团 · Python程序设计（项目实战）</a:t>
+            </a:r>
+          </a:p>
+        </p:txBody>
+      </p:sp>
+      <p:sp>
+        <p:nvSpPr>
+          <p:cNvPr id="10" name="TextBox 9"/>
+          <p:cNvSpPr txBox="1"/>
+          <p:nvPr/>
+        </p:nvSpPr>
+        <p:spPr>
+          <a:xfrm>
+            <a:off x="10597896" y="6537960"/>
+            <a:ext cx="996696" cy="301752"/>
+          </a:xfrm>
+          <a:prstGeom prst="rect">
+            <a:avLst/>
+          </a:prstGeom>
+          <a:noFill/>
+        </p:spPr>
+        <p:txBody>
+          <a:bodyPr wrap="square" anchor="t" lIns="0" rIns="0" tIns="0" bIns="0">
+            <a:spAutoFit/>
+          </a:bodyPr>
+          <a:lstStyle/>
+          <a:p>
+            <a:pPr algn="r">
+              <a:lnSpc>
+                <a:spcPct val="114000"/>
+              </a:lnSpc>
+            </a:pPr>
+            <a:r>
+              <a:rPr sz="1000" b="0">
+                <a:solidFill>
+                  <a:srgbClr val="8A97B5"/>
+                </a:solidFill>
+              </a:rPr>
+              <a:t>6 / 10</a:t>
+            </a:r>
+          </a:p>
+        </p:txBody>
+      </p:sp>
+      <p:sp>
+        <p:nvSpPr>
+          <p:cNvPr id="11" name="TextBox 10"/>
+          <p:cNvSpPr txBox="1"/>
+          <p:nvPr/>
+        </p:nvSpPr>
+        <p:spPr>
+          <a:xfrm>
+            <a:off x="475488" y="1517904"/>
+            <a:ext cx="11237976" cy="237744"/>
+          </a:xfrm>
+          <a:prstGeom prst="rect">
+            <a:avLst/>
+          </a:prstGeom>
+          <a:noFill/>
+        </p:spPr>
+        <p:txBody>
+          <a:bodyPr wrap="square" anchor="t" lIns="0" rIns="0" tIns="0" bIns="0">
+            <a:spAutoFit/>
+          </a:bodyPr>
+          <a:lstStyle/>
+          <a:p>
+            <a:pPr algn="l">
+              <a:lnSpc>
+                <a:spcPct val="114000"/>
+              </a:lnSpc>
+            </a:pPr>
+            <a:r>
+              <a:rPr sz="1000" b="0">
+                <a:solidFill>
+                  <a:srgbClr val="5C6E6A"/>
+                </a:solidFill>
+              </a:rPr>
+              <a:t>pytest 全量实跑：本机真实运行输出，非示例、非节选</a:t>
+            </a:r>
+          </a:p>
+        </p:txBody>
+      </p:sp>
+      <p:pic>
+        <p:nvPicPr>
+          <p:cNvPr id="12" name="Picture 11" descr="p11_exercises_pytest.png"/>
+          <p:cNvPicPr>
+            <a:picLocks noChangeAspect="1"/>
+          </p:cNvPicPr>
+          <p:nvPr/>
+        </p:nvPicPr>
+        <p:blipFill>
+          <a:blip r:embed="rId2"/>
+          <a:stretch>
+            <a:fillRect/>
+          </a:stretch>
+        </p:blipFill>
+        <p:spPr>
+          <a:xfrm>
+            <a:off x="475488" y="2265275"/>
+            <a:ext cx="11237976" cy="1989122"/>
+          </a:xfrm>
+          <a:prstGeom prst="rect">
+            <a:avLst/>
+          </a:prstGeom>
+        </p:spPr>
+      </p:pic>
+      <p:sp>
+        <p:nvSpPr>
+          <p:cNvPr id="13" name="TextBox 12"/>
+          <p:cNvSpPr txBox="1"/>
+          <p:nvPr/>
+        </p:nvSpPr>
+        <p:spPr>
+          <a:xfrm>
+            <a:off x="475488" y="4290972"/>
+            <a:ext cx="11237976" cy="256032"/>
+          </a:xfrm>
+          <a:prstGeom prst="rect">
+            <a:avLst/>
+          </a:prstGeom>
+          <a:noFill/>
+        </p:spPr>
+        <p:txBody>
+          <a:bodyPr wrap="square" anchor="t" lIns="0" rIns="0" tIns="0" bIns="0">
+            <a:spAutoFit/>
+          </a:bodyPr>
+          <a:lstStyle/>
+          <a:p>
+            <a:pPr algn="l">
+              <a:lnSpc>
+                <a:spcPct val="114000"/>
+              </a:lnSpc>
+            </a:pPr>
+            <a:r>
+              <a:rPr sz="850" b="0">
+                <a:solidFill>
+                  <a:srgbClr val="5C6E6A"/>
+                </a:solidFill>
+              </a:rPr>
+              <a:t>▲ pytest：190 passed in 12.95s（本机实跑，非示例）</a:t>
+            </a:r>
+          </a:p>
+        </p:txBody>
+      </p:sp>
+      <p:sp>
+        <p:nvSpPr>
+          <p:cNvPr id="14" name="Rounded Rectangle 13"/>
+          <p:cNvSpPr/>
+          <p:nvPr/>
+        </p:nvSpPr>
+        <p:spPr>
+          <a:xfrm>
+            <a:off x="475488" y="4656732"/>
+            <a:ext cx="11237976" cy="822960"/>
+          </a:xfrm>
+          <a:prstGeom prst="roundRect">
+            <a:avLst>
+              <a:gd name="adj" fmla="val 5000"/>
+            </a:avLst>
+          </a:prstGeom>
+          <a:solidFill>
+            <a:srgbClr val="E4F1EE"/>
+          </a:solidFill>
+          <a:ln>
+            <a:noFill/>
+          </a:ln>
+          <a:effectLst/>
+        </p:spPr>
+        <p:style>
+          <a:lnRef idx="1">
+            <a:schemeClr val="accent1"/>
+          </a:lnRef>
+          <a:fillRef idx="3">
+            <a:schemeClr val="accent1"/>
+          </a:fillRef>
+          <a:effectRef idx="2">
+            <a:schemeClr val="accent1"/>
+          </a:effectRef>
+          <a:fontRef idx="minor">
+            <a:schemeClr val="lt1"/>
+          </a:fontRef>
+        </p:style>
+        <p:txBody>
+          <a:bodyPr rtlCol="0" anchor="ctr"/>
+          <a:lstStyle/>
+          <a:p>
+            <a:pPr algn="ctr"/>
+          </a:p>
+        </p:txBody>
+      </p:sp>
+      <p:sp>
+        <p:nvSpPr>
+          <p:cNvPr id="15" name="Rounded Rectangle 14"/>
+          <p:cNvSpPr/>
+          <p:nvPr/>
+        </p:nvSpPr>
+        <p:spPr>
+          <a:xfrm>
+            <a:off x="475488" y="4656732"/>
+            <a:ext cx="54864" cy="822960"/>
+          </a:xfrm>
+          <a:prstGeom prst="roundRect">
+            <a:avLst>
+              <a:gd name="adj" fmla="val 50000"/>
+            </a:avLst>
+          </a:prstGeom>
+          <a:solidFill>
+            <a:srgbClr val="C9A227"/>
+          </a:solidFill>
+          <a:ln>
+            <a:noFill/>
+          </a:ln>
+          <a:effectLst/>
+        </p:spPr>
+        <p:style>
+          <a:lnRef idx="1">
+            <a:schemeClr val="accent1"/>
+          </a:lnRef>
+          <a:fillRef idx="3">
+            <a:schemeClr val="accent1"/>
+          </a:fillRef>
+          <a:effectRef idx="2">
+            <a:schemeClr val="accent1"/>
+          </a:effectRef>
+          <a:fontRef idx="minor">
+            <a:schemeClr val="lt1"/>
+          </a:fontRef>
+        </p:style>
+        <p:txBody>
+          <a:bodyPr rtlCol="0" anchor="ctr"/>
+          <a:lstStyle/>
+          <a:p>
+            <a:pPr algn="ctr"/>
+          </a:p>
+        </p:txBody>
+      </p:sp>
+      <p:sp>
+        <p:nvSpPr>
+          <p:cNvPr id="16" name="TextBox 15"/>
+          <p:cNvSpPr txBox="1"/>
+          <p:nvPr/>
+        </p:nvSpPr>
+        <p:spPr>
+          <a:xfrm>
+            <a:off x="676656" y="4739028"/>
+            <a:ext cx="10908792" cy="658368"/>
+          </a:xfrm>
+          <a:prstGeom prst="rect">
+            <a:avLst/>
+          </a:prstGeom>
+          <a:noFill/>
+        </p:spPr>
+        <p:txBody>
+          <a:bodyPr wrap="square" anchor="t" lIns="0" rIns="0" tIns="0" bIns="0">
+            <a:spAutoFit/>
+          </a:bodyPr>
+          <a:lstStyle/>
+          <a:p>
+            <a:pPr algn="l">
+              <a:lnSpc>
+                <a:spcPct val="126000"/>
+              </a:lnSpc>
+            </a:pPr>
+            <a:r>
+              <a:rPr sz="850" b="0">
+                <a:solidFill>
+                  <a:srgbClr val="1B2B28"/>
+                </a:solidFill>
+              </a:rPr>
+              <a:t>本项目四档只有一套阶梯口径（课堂 D/C/B/A 即工单及格/良好/优秀/超优），逐字实测见上一页截图；本页补的是测试全绿证据。</a:t>
+            </a:r>
+          </a:p>
+          <a:p>
+            <a:pPr algn="l">
+              <a:lnSpc>
+                <a:spcPct val="126000"/>
+              </a:lnSpc>
+            </a:pPr>
+            <a:r>
+              <a:rPr sz="850" b="0">
+                <a:solidFill>
+                  <a:srgbClr val="1B2B28"/>
+                </a:solidFill>
+              </a:rPr>
+              <a:t>复现：cd 工程化项目/p11_exercises &amp;&amp; python -m pytest -q -o addopts=''</a:t>
+            </a:r>
+          </a:p>
+          <a:p>
+            <a:pPr algn="l">
+              <a:lnSpc>
+                <a:spcPct val="126000"/>
+              </a:lnSpc>
+            </a:pPr>
+            <a:r>
+              <a:rPr sz="850" b="0">
+                <a:solidFill>
+                  <a:srgbClr val="1B2B28"/>
+                </a:solidFill>
+              </a:rPr>
+              <a:t>工单提交：截图需含终端标题栏的文件名与完整输出，退出码 0 才算全绿。</a:t>
+            </a:r>
+          </a:p>
+        </p:txBody>
+      </p:sp>
+    </p:spTree>
+  </p:cSld>
+  <p:clrMapOvr>
+    <a:masterClrMapping/>
+  </p:clrMapOvr>
+</p:sld>
+</file>
+
 <file path=ppt/slides/slide2.xml><?xml version="1.0" encoding="utf-8"?>
 <p:sld xmlns:a="http://schemas.openxmlformats.org/drawingml/2006/main" xmlns:p="http://schemas.openxmlformats.org/presentationml/2006/main" xmlns:r="http://schemas.openxmlformats.org/officeDocument/2006/relationships">
   <p:cSld>
@@ -4770,7 +5425,7 @@
                 </a:solidFill>
                 <a:latin typeface="微软雅黑"/>
               </a:rPr>
-              <a:t>2 / 7</a:t>
+              <a:t>2 / 10</a:t>
             </a:r>
           </a:p>
         </p:txBody>
@@ -5562,7 +6217,7 @@
                 </a:solidFill>
                 <a:latin typeface="微软雅黑"/>
               </a:rPr>
-              <a:t>3 / 7</a:t>
+              <a:t>3 / 10</a:t>
             </a:r>
           </a:p>
         </p:txBody>
@@ -6147,7 +6802,7 @@
                 </a:solidFill>
                 <a:latin typeface="微软雅黑"/>
               </a:rPr>
-              <a:t>4 / 7</a:t>
+              <a:t>7 / 10</a:t>
             </a:r>
           </a:p>
         </p:txBody>
@@ -6741,7 +7396,7 @@
                 </a:solidFill>
                 <a:latin typeface="微软雅黑"/>
               </a:rPr>
-              <a:t>5 / 7</a:t>
+              <a:t>8 / 10</a:t>
             </a:r>
           </a:p>
         </p:txBody>
@@ -7125,7 +7780,7 @@
                 </a:solidFill>
                 <a:latin typeface="微软雅黑"/>
               </a:rPr>
-              <a:t>6 / 7</a:t>
+              <a:t>9 / 10</a:t>
             </a:r>
           </a:p>
         </p:txBody>
@@ -7484,6 +8139,2466 @@
                 <a:latin typeface="微软雅黑"/>
               </a:rPr>
               <a:t>带着问题来上课——Predict先于Run</a:t>
+            </a:r>
+          </a:p>
+        </p:txBody>
+      </p:sp>
+    </p:spTree>
+  </p:cSld>
+  <p:clrMapOvr>
+    <a:masterClrMapping/>
+  </p:clrMapOvr>
+</p:sld>
+</file>
+
+<file path=ppt/slides/slide8.xml><?xml version="1.0" encoding="utf-8"?>
+<p:sld xmlns:a="http://schemas.openxmlformats.org/drawingml/2006/main" xmlns:p="http://schemas.openxmlformats.org/presentationml/2006/main" xmlns:r="http://schemas.openxmlformats.org/officeDocument/2006/relationships">
+  <p:cSld>
+    <p:spTree>
+      <p:nvGrpSpPr>
+        <p:cNvPr id="1" name=""/>
+        <p:cNvGrpSpPr/>
+        <p:nvPr/>
+      </p:nvGrpSpPr>
+      <p:grpSpPr/>
+      <p:sp>
+        <p:nvSpPr>
+          <p:cNvPr id="2" name="Rounded Rectangle 1"/>
+          <p:cNvSpPr/>
+          <p:nvPr/>
+        </p:nvSpPr>
+        <p:spPr>
+          <a:xfrm>
+            <a:off x="0" y="0"/>
+            <a:ext cx="12191695" cy="64008"/>
+          </a:xfrm>
+          <a:prstGeom prst="roundRect">
+            <a:avLst>
+              <a:gd name="adj" fmla="val 50000"/>
+            </a:avLst>
+          </a:prstGeom>
+          <a:solidFill>
+            <a:srgbClr val="0B5E54"/>
+          </a:solidFill>
+          <a:ln>
+            <a:noFill/>
+          </a:ln>
+          <a:effectLst/>
+        </p:spPr>
+        <p:style>
+          <a:lnRef idx="1">
+            <a:schemeClr val="accent1"/>
+          </a:lnRef>
+          <a:fillRef idx="3">
+            <a:schemeClr val="accent1"/>
+          </a:fillRef>
+          <a:effectRef idx="2">
+            <a:schemeClr val="accent1"/>
+          </a:effectRef>
+          <a:fontRef idx="minor">
+            <a:schemeClr val="lt1"/>
+          </a:fontRef>
+        </p:style>
+        <p:txBody>
+          <a:bodyPr rtlCol="0" anchor="ctr"/>
+          <a:lstStyle/>
+          <a:p>
+            <a:pPr algn="ctr"/>
+          </a:p>
+        </p:txBody>
+      </p:sp>
+      <p:sp>
+        <p:nvSpPr>
+          <p:cNvPr id="3" name="TextBox 2"/>
+          <p:cNvSpPr txBox="1"/>
+          <p:nvPr/>
+        </p:nvSpPr>
+        <p:spPr>
+          <a:xfrm>
+            <a:off x="475488" y="146304"/>
+            <a:ext cx="8229600" cy="292608"/>
+          </a:xfrm>
+          <a:prstGeom prst="rect">
+            <a:avLst/>
+          </a:prstGeom>
+          <a:noFill/>
+        </p:spPr>
+        <p:txBody>
+          <a:bodyPr wrap="square" anchor="t" lIns="0" rIns="0" tIns="0" bIns="0">
+            <a:spAutoFit/>
+          </a:bodyPr>
+          <a:lstStyle/>
+          <a:p>
+            <a:pPr algn="l">
+              <a:lnSpc>
+                <a:spcPct val="114000"/>
+              </a:lnSpc>
+            </a:pPr>
+            <a:r>
+              <a:rPr sz="1100" b="1">
+                <a:solidFill>
+                  <a:srgbClr val="0B5E54"/>
+                </a:solidFill>
+              </a:rPr>
+              <a:t>工单实战 · 本次实跑结果</a:t>
+            </a:r>
+          </a:p>
+        </p:txBody>
+      </p:sp>
+      <p:sp>
+        <p:nvSpPr>
+          <p:cNvPr id="4" name="Rounded Rectangle 3"/>
+          <p:cNvSpPr/>
+          <p:nvPr/>
+        </p:nvSpPr>
+        <p:spPr>
+          <a:xfrm>
+            <a:off x="475488" y="475488"/>
+            <a:ext cx="1881187" cy="310896"/>
+          </a:xfrm>
+          <a:prstGeom prst="roundRect">
+            <a:avLst>
+              <a:gd name="adj" fmla="val 50000"/>
+            </a:avLst>
+          </a:prstGeom>
+          <a:solidFill>
+            <a:srgbClr val="C9A227"/>
+          </a:solidFill>
+          <a:ln>
+            <a:noFill/>
+          </a:ln>
+          <a:effectLst/>
+        </p:spPr>
+        <p:style>
+          <a:lnRef idx="1">
+            <a:schemeClr val="accent1"/>
+          </a:lnRef>
+          <a:fillRef idx="3">
+            <a:schemeClr val="accent1"/>
+          </a:fillRef>
+          <a:effectRef idx="2">
+            <a:schemeClr val="accent1"/>
+          </a:effectRef>
+          <a:fontRef idx="minor">
+            <a:schemeClr val="lt1"/>
+          </a:fontRef>
+        </p:style>
+        <p:txBody>
+          <a:bodyPr rtlCol="0" anchor="ctr"/>
+          <a:lstStyle/>
+          <a:p>
+            <a:pPr algn="ctr"/>
+          </a:p>
+        </p:txBody>
+      </p:sp>
+      <p:sp>
+        <p:nvSpPr>
+          <p:cNvPr id="5" name="TextBox 4"/>
+          <p:cNvSpPr txBox="1"/>
+          <p:nvPr/>
+        </p:nvSpPr>
+        <p:spPr>
+          <a:xfrm>
+            <a:off x="475488" y="475488"/>
+            <a:ext cx="1881187" cy="310896"/>
+          </a:xfrm>
+          <a:prstGeom prst="rect">
+            <a:avLst/>
+          </a:prstGeom>
+          <a:noFill/>
+        </p:spPr>
+        <p:txBody>
+          <a:bodyPr wrap="square" anchor="ctr" lIns="0" rIns="0" tIns="0" bIns="0">
+            <a:spAutoFit/>
+          </a:bodyPr>
+          <a:lstStyle/>
+          <a:p>
+            <a:pPr algn="ctr">
+              <a:lnSpc>
+                <a:spcPct val="114000"/>
+              </a:lnSpc>
+            </a:pPr>
+            <a:r>
+              <a:rPr sz="1050" b="1">
+                <a:solidFill>
+                  <a:srgbClr val="FFFFFF"/>
+                </a:solidFill>
+              </a:rPr>
+              <a:t>REAL RUN · 四档逐字实测</a:t>
+            </a:r>
+          </a:p>
+        </p:txBody>
+      </p:sp>
+      <p:sp>
+        <p:nvSpPr>
+          <p:cNvPr id="6" name="TextBox 5"/>
+          <p:cNvSpPr txBox="1"/>
+          <p:nvPr/>
+        </p:nvSpPr>
+        <p:spPr>
+          <a:xfrm>
+            <a:off x="475488" y="859536"/>
+            <a:ext cx="11237976" cy="502920"/>
+          </a:xfrm>
+          <a:prstGeom prst="rect">
+            <a:avLst/>
+          </a:prstGeom>
+          <a:noFill/>
+        </p:spPr>
+        <p:txBody>
+          <a:bodyPr wrap="square" anchor="t" lIns="0" rIns="0" tIns="0" bIns="0">
+            <a:spAutoFit/>
+          </a:bodyPr>
+          <a:lstStyle/>
+          <a:p>
+            <a:pPr algn="l">
+              <a:lnSpc>
+                <a:spcPct val="114000"/>
+              </a:lnSpc>
+            </a:pPr>
+            <a:r>
+              <a:rPr sz="2200" b="1">
+                <a:solidFill>
+                  <a:srgbClr val="1B2B28"/>
+                </a:solidFill>
+              </a:rPr>
+              <a:t>P1.1 p11_exercises：本次 D/C/B/A 四档实测</a:t>
+            </a:r>
+          </a:p>
+        </p:txBody>
+      </p:sp>
+      <p:sp>
+        <p:nvSpPr>
+          <p:cNvPr id="7" name="Rounded Rectangle 6"/>
+          <p:cNvSpPr/>
+          <p:nvPr/>
+        </p:nvSpPr>
+        <p:spPr>
+          <a:xfrm>
+            <a:off x="475488" y="1389888"/>
+            <a:ext cx="1234440" cy="27432"/>
+          </a:xfrm>
+          <a:prstGeom prst="roundRect">
+            <a:avLst>
+              <a:gd name="adj" fmla="val 50000"/>
+            </a:avLst>
+          </a:prstGeom>
+          <a:solidFill>
+            <a:srgbClr val="C9A227"/>
+          </a:solidFill>
+          <a:ln>
+            <a:noFill/>
+          </a:ln>
+          <a:effectLst/>
+        </p:spPr>
+        <p:style>
+          <a:lnRef idx="1">
+            <a:schemeClr val="accent1"/>
+          </a:lnRef>
+          <a:fillRef idx="3">
+            <a:schemeClr val="accent1"/>
+          </a:fillRef>
+          <a:effectRef idx="2">
+            <a:schemeClr val="accent1"/>
+          </a:effectRef>
+          <a:fontRef idx="minor">
+            <a:schemeClr val="lt1"/>
+          </a:fontRef>
+        </p:style>
+        <p:txBody>
+          <a:bodyPr rtlCol="0" anchor="ctr"/>
+          <a:lstStyle/>
+          <a:p>
+            <a:pPr algn="ctr"/>
+          </a:p>
+        </p:txBody>
+      </p:sp>
+      <p:sp>
+        <p:nvSpPr>
+          <p:cNvPr id="8" name="Rounded Rectangle 7"/>
+          <p:cNvSpPr/>
+          <p:nvPr/>
+        </p:nvSpPr>
+        <p:spPr>
+          <a:xfrm>
+            <a:off x="475488" y="6419088"/>
+            <a:ext cx="11237976" cy="10972"/>
+          </a:xfrm>
+          <a:prstGeom prst="roundRect">
+            <a:avLst>
+              <a:gd name="adj" fmla="val 50000"/>
+            </a:avLst>
+          </a:prstGeom>
+          <a:solidFill>
+            <a:srgbClr val="E4F1EE"/>
+          </a:solidFill>
+          <a:ln>
+            <a:noFill/>
+          </a:ln>
+          <a:effectLst/>
+        </p:spPr>
+        <p:style>
+          <a:lnRef idx="1">
+            <a:schemeClr val="accent1"/>
+          </a:lnRef>
+          <a:fillRef idx="3">
+            <a:schemeClr val="accent1"/>
+          </a:fillRef>
+          <a:effectRef idx="2">
+            <a:schemeClr val="accent1"/>
+          </a:effectRef>
+          <a:fontRef idx="minor">
+            <a:schemeClr val="lt1"/>
+          </a:fontRef>
+        </p:style>
+        <p:txBody>
+          <a:bodyPr rtlCol="0" anchor="ctr"/>
+          <a:lstStyle/>
+          <a:p>
+            <a:pPr algn="ctr"/>
+          </a:p>
+        </p:txBody>
+      </p:sp>
+      <p:sp>
+        <p:nvSpPr>
+          <p:cNvPr id="9" name="TextBox 8"/>
+          <p:cNvSpPr txBox="1"/>
+          <p:nvPr/>
+        </p:nvSpPr>
+        <p:spPr>
+          <a:xfrm>
+            <a:off x="475488" y="6455664"/>
+            <a:ext cx="7315200" cy="292608"/>
+          </a:xfrm>
+          <a:prstGeom prst="rect">
+            <a:avLst/>
+          </a:prstGeom>
+          <a:noFill/>
+        </p:spPr>
+        <p:txBody>
+          <a:bodyPr wrap="square" anchor="t" lIns="0" rIns="0" tIns="0" bIns="0">
+            <a:spAutoFit/>
+          </a:bodyPr>
+          <a:lstStyle/>
+          <a:p>
+            <a:pPr algn="l">
+              <a:lnSpc>
+                <a:spcPct val="114000"/>
+              </a:lnSpc>
+            </a:pPr>
+            <a:r>
+              <a:rPr sz="900" b="0">
+                <a:solidFill>
+                  <a:srgbClr val="5C6E6A"/>
+                </a:solidFill>
+              </a:rPr>
+              <a:t>两江智造集团 · Python程序设计（项目实战）</a:t>
+            </a:r>
+          </a:p>
+        </p:txBody>
+      </p:sp>
+      <p:sp>
+        <p:nvSpPr>
+          <p:cNvPr id="10" name="TextBox 9"/>
+          <p:cNvSpPr txBox="1"/>
+          <p:nvPr/>
+        </p:nvSpPr>
+        <p:spPr>
+          <a:xfrm>
+            <a:off x="10597896" y="6537960"/>
+            <a:ext cx="996696" cy="301752"/>
+          </a:xfrm>
+          <a:prstGeom prst="rect">
+            <a:avLst/>
+          </a:prstGeom>
+          <a:noFill/>
+        </p:spPr>
+        <p:txBody>
+          <a:bodyPr wrap="square" anchor="t" lIns="0" rIns="0" tIns="0" bIns="0">
+            <a:spAutoFit/>
+          </a:bodyPr>
+          <a:lstStyle/>
+          <a:p>
+            <a:pPr algn="r">
+              <a:lnSpc>
+                <a:spcPct val="114000"/>
+              </a:lnSpc>
+            </a:pPr>
+            <a:r>
+              <a:rPr sz="1000" b="0">
+                <a:solidFill>
+                  <a:srgbClr val="8A97B5"/>
+                </a:solidFill>
+              </a:rPr>
+              <a:t>4 / 10</a:t>
+            </a:r>
+          </a:p>
+        </p:txBody>
+      </p:sp>
+      <p:sp>
+        <p:nvSpPr>
+          <p:cNvPr id="11" name="Rounded Rectangle 10"/>
+          <p:cNvSpPr/>
+          <p:nvPr/>
+        </p:nvSpPr>
+        <p:spPr>
+          <a:xfrm>
+            <a:off x="475488" y="1554480"/>
+            <a:ext cx="11237976" cy="916686"/>
+          </a:xfrm>
+          <a:prstGeom prst="roundRect">
+            <a:avLst>
+              <a:gd name="adj" fmla="val 6000"/>
+            </a:avLst>
+          </a:prstGeom>
+          <a:solidFill>
+            <a:srgbClr val="FFFFFF"/>
+          </a:solidFill>
+          <a:ln w="9525">
+            <a:solidFill>
+              <a:srgbClr val="E4F1EE"/>
+            </a:solidFill>
+          </a:ln>
+          <a:effectLst/>
+        </p:spPr>
+        <p:style>
+          <a:lnRef idx="1">
+            <a:schemeClr val="accent1"/>
+          </a:lnRef>
+          <a:fillRef idx="3">
+            <a:schemeClr val="accent1"/>
+          </a:fillRef>
+          <a:effectRef idx="2">
+            <a:schemeClr val="accent1"/>
+          </a:effectRef>
+          <a:fontRef idx="minor">
+            <a:schemeClr val="lt1"/>
+          </a:fontRef>
+        </p:style>
+        <p:txBody>
+          <a:bodyPr rtlCol="0" anchor="ctr"/>
+          <a:lstStyle/>
+          <a:p>
+            <a:pPr algn="ctr"/>
+          </a:p>
+        </p:txBody>
+      </p:sp>
+      <p:sp>
+        <p:nvSpPr>
+          <p:cNvPr id="12" name="Rounded Rectangle 11"/>
+          <p:cNvSpPr/>
+          <p:nvPr/>
+        </p:nvSpPr>
+        <p:spPr>
+          <a:xfrm>
+            <a:off x="475488" y="1554480"/>
+            <a:ext cx="54864" cy="916686"/>
+          </a:xfrm>
+          <a:prstGeom prst="roundRect">
+            <a:avLst>
+              <a:gd name="adj" fmla="val 50000"/>
+            </a:avLst>
+          </a:prstGeom>
+          <a:solidFill>
+            <a:srgbClr val="5C6E6A"/>
+          </a:solidFill>
+          <a:ln>
+            <a:noFill/>
+          </a:ln>
+          <a:effectLst/>
+        </p:spPr>
+        <p:style>
+          <a:lnRef idx="1">
+            <a:schemeClr val="accent1"/>
+          </a:lnRef>
+          <a:fillRef idx="3">
+            <a:schemeClr val="accent1"/>
+          </a:fillRef>
+          <a:effectRef idx="2">
+            <a:schemeClr val="accent1"/>
+          </a:effectRef>
+          <a:fontRef idx="minor">
+            <a:schemeClr val="lt1"/>
+          </a:fontRef>
+        </p:style>
+        <p:txBody>
+          <a:bodyPr rtlCol="0" anchor="ctr"/>
+          <a:lstStyle/>
+          <a:p>
+            <a:pPr algn="ctr"/>
+          </a:p>
+        </p:txBody>
+      </p:sp>
+      <p:sp>
+        <p:nvSpPr>
+          <p:cNvPr id="13" name="Rounded Rectangle 12"/>
+          <p:cNvSpPr/>
+          <p:nvPr/>
+        </p:nvSpPr>
+        <p:spPr>
+          <a:xfrm>
+            <a:off x="621792" y="1636776"/>
+            <a:ext cx="237744" cy="237744"/>
+          </a:xfrm>
+          <a:prstGeom prst="roundRect">
+            <a:avLst>
+              <a:gd name="adj" fmla="val 28000"/>
+            </a:avLst>
+          </a:prstGeom>
+          <a:solidFill>
+            <a:srgbClr val="5C6E6A"/>
+          </a:solidFill>
+          <a:ln>
+            <a:noFill/>
+          </a:ln>
+          <a:effectLst/>
+        </p:spPr>
+        <p:style>
+          <a:lnRef idx="1">
+            <a:schemeClr val="accent1"/>
+          </a:lnRef>
+          <a:fillRef idx="3">
+            <a:schemeClr val="accent1"/>
+          </a:fillRef>
+          <a:effectRef idx="2">
+            <a:schemeClr val="accent1"/>
+          </a:effectRef>
+          <a:fontRef idx="minor">
+            <a:schemeClr val="lt1"/>
+          </a:fontRef>
+        </p:style>
+        <p:txBody>
+          <a:bodyPr rtlCol="0" anchor="ctr"/>
+          <a:lstStyle/>
+          <a:p>
+            <a:pPr algn="ctr"/>
+          </a:p>
+        </p:txBody>
+      </p:sp>
+      <p:sp>
+        <p:nvSpPr>
+          <p:cNvPr id="14" name="TextBox 13"/>
+          <p:cNvSpPr txBox="1"/>
+          <p:nvPr/>
+        </p:nvSpPr>
+        <p:spPr>
+          <a:xfrm>
+            <a:off x="621792" y="1636776"/>
+            <a:ext cx="237744" cy="237744"/>
+          </a:xfrm>
+          <a:prstGeom prst="rect">
+            <a:avLst/>
+          </a:prstGeom>
+          <a:noFill/>
+        </p:spPr>
+        <p:txBody>
+          <a:bodyPr wrap="square" anchor="ctr" lIns="0" rIns="0" tIns="0" bIns="0">
+            <a:spAutoFit/>
+          </a:bodyPr>
+          <a:lstStyle/>
+          <a:p>
+            <a:pPr algn="ctr">
+              <a:lnSpc>
+                <a:spcPct val="114000"/>
+              </a:lnSpc>
+            </a:pPr>
+            <a:r>
+              <a:rPr sz="1000" b="1">
+                <a:solidFill>
+                  <a:srgbClr val="FFFFFF"/>
+                </a:solidFill>
+              </a:rPr>
+              <a:t>D</a:t>
+            </a:r>
+          </a:p>
+        </p:txBody>
+      </p:sp>
+      <p:sp>
+        <p:nvSpPr>
+          <p:cNvPr id="15" name="TextBox 14"/>
+          <p:cNvSpPr txBox="1"/>
+          <p:nvPr/>
+        </p:nvSpPr>
+        <p:spPr>
+          <a:xfrm>
+            <a:off x="932688" y="1618488"/>
+            <a:ext cx="8778240" cy="274320"/>
+          </a:xfrm>
+          <a:prstGeom prst="rect">
+            <a:avLst/>
+          </a:prstGeom>
+          <a:noFill/>
+        </p:spPr>
+        <p:txBody>
+          <a:bodyPr wrap="square" anchor="ctr" lIns="0" rIns="0" tIns="0" bIns="0">
+            <a:spAutoFit/>
+          </a:bodyPr>
+          <a:lstStyle/>
+          <a:p>
+            <a:pPr algn="l">
+              <a:lnSpc>
+                <a:spcPct val="114000"/>
+              </a:lnSpc>
+            </a:pPr>
+            <a:r>
+              <a:rPr sz="1050" b="1">
+                <a:solidFill>
+                  <a:srgbClr val="1B2B28"/>
+                </a:solidFill>
+              </a:rPr>
+              <a:t>及格</a:t>
+            </a:r>
+            <a:r>
+              <a:rPr sz="850" b="0">
+                <a:solidFill>
+                  <a:srgbClr val="5C6E6A"/>
+                </a:solidFill>
+              </a:rPr>
+              <a:t>   验收口径：</a:t>
+            </a:r>
+            <a:r>
+              <a:rPr sz="850" b="0">
+                <a:solidFill>
+                  <a:srgbClr val="5C6E6A"/>
+                </a:solidFill>
+              </a:rPr>
+              <a:t>≥3题正确运行；PEP 8≥75%；有基础注释</a:t>
+            </a:r>
+          </a:p>
+        </p:txBody>
+      </p:sp>
+      <p:sp>
+        <p:nvSpPr>
+          <p:cNvPr id="16" name="Rounded Rectangle 15"/>
+          <p:cNvSpPr/>
+          <p:nvPr/>
+        </p:nvSpPr>
+        <p:spPr>
+          <a:xfrm>
+            <a:off x="11131803" y="1645920"/>
+            <a:ext cx="453644" cy="237744"/>
+          </a:xfrm>
+          <a:prstGeom prst="roundRect">
+            <a:avLst>
+              <a:gd name="adj" fmla="val 50000"/>
+            </a:avLst>
+          </a:prstGeom>
+          <a:solidFill>
+            <a:srgbClr val="0B5E54"/>
+          </a:solidFill>
+          <a:ln>
+            <a:noFill/>
+          </a:ln>
+          <a:effectLst/>
+        </p:spPr>
+        <p:style>
+          <a:lnRef idx="1">
+            <a:schemeClr val="accent1"/>
+          </a:lnRef>
+          <a:fillRef idx="3">
+            <a:schemeClr val="accent1"/>
+          </a:fillRef>
+          <a:effectRef idx="2">
+            <a:schemeClr val="accent1"/>
+          </a:effectRef>
+          <a:fontRef idx="minor">
+            <a:schemeClr val="lt1"/>
+          </a:fontRef>
+        </p:style>
+        <p:txBody>
+          <a:bodyPr rtlCol="0" anchor="ctr"/>
+          <a:lstStyle/>
+          <a:p>
+            <a:pPr algn="ctr"/>
+          </a:p>
+        </p:txBody>
+      </p:sp>
+      <p:sp>
+        <p:nvSpPr>
+          <p:cNvPr id="17" name="TextBox 16"/>
+          <p:cNvSpPr txBox="1"/>
+          <p:nvPr/>
+        </p:nvSpPr>
+        <p:spPr>
+          <a:xfrm>
+            <a:off x="11131803" y="1645920"/>
+            <a:ext cx="453644" cy="237744"/>
+          </a:xfrm>
+          <a:prstGeom prst="rect">
+            <a:avLst/>
+          </a:prstGeom>
+          <a:noFill/>
+        </p:spPr>
+        <p:txBody>
+          <a:bodyPr wrap="square" anchor="ctr" lIns="0" rIns="0" tIns="0" bIns="0">
+            <a:spAutoFit/>
+          </a:bodyPr>
+          <a:lstStyle/>
+          <a:p>
+            <a:pPr algn="ctr">
+              <a:lnSpc>
+                <a:spcPct val="114000"/>
+              </a:lnSpc>
+            </a:pPr>
+            <a:r>
+              <a:rPr sz="850" b="1">
+                <a:solidFill>
+                  <a:srgbClr val="FFFFFF"/>
+                </a:solidFill>
+              </a:rPr>
+              <a:t>达标</a:t>
+            </a:r>
+          </a:p>
+        </p:txBody>
+      </p:sp>
+      <p:sp>
+        <p:nvSpPr>
+          <p:cNvPr id="18" name="TextBox 17"/>
+          <p:cNvSpPr txBox="1"/>
+          <p:nvPr/>
+        </p:nvSpPr>
+        <p:spPr>
+          <a:xfrm>
+            <a:off x="932688" y="1901952"/>
+            <a:ext cx="10671047" cy="514350"/>
+          </a:xfrm>
+          <a:prstGeom prst="rect">
+            <a:avLst/>
+          </a:prstGeom>
+          <a:noFill/>
+        </p:spPr>
+        <p:txBody>
+          <a:bodyPr wrap="square" anchor="t" lIns="0" rIns="0" tIns="0" bIns="0">
+            <a:spAutoFit/>
+          </a:bodyPr>
+          <a:lstStyle/>
+          <a:p>
+            <a:pPr algn="l">
+              <a:lnSpc>
+                <a:spcPct val="114000"/>
+              </a:lnSpc>
+            </a:pPr>
+            <a:r>
+              <a:rPr sz="950" b="0">
+                <a:solidFill>
+                  <a:srgbClr val="1B2B28"/>
+                </a:solidFill>
+              </a:rPr>
+              <a:t>正确 5/5 题｜PEP 8 子集达标率 100.0%（检查项通过 4794/4795）≥ 75.0%｜有 docstring 的公开函数 53/53、模块 13/13</a:t>
+            </a:r>
+          </a:p>
+        </p:txBody>
+      </p:sp>
+      <p:sp>
+        <p:nvSpPr>
+          <p:cNvPr id="19" name="Rounded Rectangle 18"/>
+          <p:cNvSpPr/>
+          <p:nvPr/>
+        </p:nvSpPr>
+        <p:spPr>
+          <a:xfrm>
+            <a:off x="475488" y="2535174"/>
+            <a:ext cx="11237976" cy="916686"/>
+          </a:xfrm>
+          <a:prstGeom prst="roundRect">
+            <a:avLst>
+              <a:gd name="adj" fmla="val 6000"/>
+            </a:avLst>
+          </a:prstGeom>
+          <a:solidFill>
+            <a:srgbClr val="FFFFFF"/>
+          </a:solidFill>
+          <a:ln w="9525">
+            <a:solidFill>
+              <a:srgbClr val="E4F1EE"/>
+            </a:solidFill>
+          </a:ln>
+          <a:effectLst/>
+        </p:spPr>
+        <p:style>
+          <a:lnRef idx="1">
+            <a:schemeClr val="accent1"/>
+          </a:lnRef>
+          <a:fillRef idx="3">
+            <a:schemeClr val="accent1"/>
+          </a:fillRef>
+          <a:effectRef idx="2">
+            <a:schemeClr val="accent1"/>
+          </a:effectRef>
+          <a:fontRef idx="minor">
+            <a:schemeClr val="lt1"/>
+          </a:fontRef>
+        </p:style>
+        <p:txBody>
+          <a:bodyPr rtlCol="0" anchor="ctr"/>
+          <a:lstStyle/>
+          <a:p>
+            <a:pPr algn="ctr"/>
+          </a:p>
+        </p:txBody>
+      </p:sp>
+      <p:sp>
+        <p:nvSpPr>
+          <p:cNvPr id="20" name="Rounded Rectangle 19"/>
+          <p:cNvSpPr/>
+          <p:nvPr/>
+        </p:nvSpPr>
+        <p:spPr>
+          <a:xfrm>
+            <a:off x="475488" y="2535174"/>
+            <a:ext cx="54864" cy="916686"/>
+          </a:xfrm>
+          <a:prstGeom prst="roundRect">
+            <a:avLst>
+              <a:gd name="adj" fmla="val 50000"/>
+            </a:avLst>
+          </a:prstGeom>
+          <a:solidFill>
+            <a:srgbClr val="157A6D"/>
+          </a:solidFill>
+          <a:ln>
+            <a:noFill/>
+          </a:ln>
+          <a:effectLst/>
+        </p:spPr>
+        <p:style>
+          <a:lnRef idx="1">
+            <a:schemeClr val="accent1"/>
+          </a:lnRef>
+          <a:fillRef idx="3">
+            <a:schemeClr val="accent1"/>
+          </a:fillRef>
+          <a:effectRef idx="2">
+            <a:schemeClr val="accent1"/>
+          </a:effectRef>
+          <a:fontRef idx="minor">
+            <a:schemeClr val="lt1"/>
+          </a:fontRef>
+        </p:style>
+        <p:txBody>
+          <a:bodyPr rtlCol="0" anchor="ctr"/>
+          <a:lstStyle/>
+          <a:p>
+            <a:pPr algn="ctr"/>
+          </a:p>
+        </p:txBody>
+      </p:sp>
+      <p:sp>
+        <p:nvSpPr>
+          <p:cNvPr id="21" name="Rounded Rectangle 20"/>
+          <p:cNvSpPr/>
+          <p:nvPr/>
+        </p:nvSpPr>
+        <p:spPr>
+          <a:xfrm>
+            <a:off x="621792" y="2617470"/>
+            <a:ext cx="237744" cy="237744"/>
+          </a:xfrm>
+          <a:prstGeom prst="roundRect">
+            <a:avLst>
+              <a:gd name="adj" fmla="val 28000"/>
+            </a:avLst>
+          </a:prstGeom>
+          <a:solidFill>
+            <a:srgbClr val="157A6D"/>
+          </a:solidFill>
+          <a:ln>
+            <a:noFill/>
+          </a:ln>
+          <a:effectLst/>
+        </p:spPr>
+        <p:style>
+          <a:lnRef idx="1">
+            <a:schemeClr val="accent1"/>
+          </a:lnRef>
+          <a:fillRef idx="3">
+            <a:schemeClr val="accent1"/>
+          </a:fillRef>
+          <a:effectRef idx="2">
+            <a:schemeClr val="accent1"/>
+          </a:effectRef>
+          <a:fontRef idx="minor">
+            <a:schemeClr val="lt1"/>
+          </a:fontRef>
+        </p:style>
+        <p:txBody>
+          <a:bodyPr rtlCol="0" anchor="ctr"/>
+          <a:lstStyle/>
+          <a:p>
+            <a:pPr algn="ctr"/>
+          </a:p>
+        </p:txBody>
+      </p:sp>
+      <p:sp>
+        <p:nvSpPr>
+          <p:cNvPr id="22" name="TextBox 21"/>
+          <p:cNvSpPr txBox="1"/>
+          <p:nvPr/>
+        </p:nvSpPr>
+        <p:spPr>
+          <a:xfrm>
+            <a:off x="621792" y="2617470"/>
+            <a:ext cx="237744" cy="237744"/>
+          </a:xfrm>
+          <a:prstGeom prst="rect">
+            <a:avLst/>
+          </a:prstGeom>
+          <a:noFill/>
+        </p:spPr>
+        <p:txBody>
+          <a:bodyPr wrap="square" anchor="ctr" lIns="0" rIns="0" tIns="0" bIns="0">
+            <a:spAutoFit/>
+          </a:bodyPr>
+          <a:lstStyle/>
+          <a:p>
+            <a:pPr algn="ctr">
+              <a:lnSpc>
+                <a:spcPct val="114000"/>
+              </a:lnSpc>
+            </a:pPr>
+            <a:r>
+              <a:rPr sz="1000" b="1">
+                <a:solidFill>
+                  <a:srgbClr val="FFFFFF"/>
+                </a:solidFill>
+              </a:rPr>
+              <a:t>C</a:t>
+            </a:r>
+          </a:p>
+        </p:txBody>
+      </p:sp>
+      <p:sp>
+        <p:nvSpPr>
+          <p:cNvPr id="23" name="TextBox 22"/>
+          <p:cNvSpPr txBox="1"/>
+          <p:nvPr/>
+        </p:nvSpPr>
+        <p:spPr>
+          <a:xfrm>
+            <a:off x="932688" y="2599182"/>
+            <a:ext cx="8778240" cy="274320"/>
+          </a:xfrm>
+          <a:prstGeom prst="rect">
+            <a:avLst/>
+          </a:prstGeom>
+          <a:noFill/>
+        </p:spPr>
+        <p:txBody>
+          <a:bodyPr wrap="square" anchor="ctr" lIns="0" rIns="0" tIns="0" bIns="0">
+            <a:spAutoFit/>
+          </a:bodyPr>
+          <a:lstStyle/>
+          <a:p>
+            <a:pPr algn="l">
+              <a:lnSpc>
+                <a:spcPct val="114000"/>
+              </a:lnSpc>
+            </a:pPr>
+            <a:r>
+              <a:rPr sz="1050" b="1">
+                <a:solidFill>
+                  <a:srgbClr val="1B2B28"/>
+                </a:solidFill>
+              </a:rPr>
+              <a:t>良好</a:t>
+            </a:r>
+            <a:r>
+              <a:rPr sz="850" b="0">
+                <a:solidFill>
+                  <a:srgbClr val="5C6E6A"/>
+                </a:solidFill>
+              </a:rPr>
+              <a:t>   验收口径：</a:t>
+            </a:r>
+            <a:r>
+              <a:rPr sz="850" b="0">
+                <a:solidFill>
+                  <a:srgbClr val="5C6E6A"/>
+                </a:solidFill>
+              </a:rPr>
+              <a:t>4题；命名有意义</a:t>
+            </a:r>
+          </a:p>
+        </p:txBody>
+      </p:sp>
+      <p:sp>
+        <p:nvSpPr>
+          <p:cNvPr id="24" name="Rounded Rectangle 23"/>
+          <p:cNvSpPr/>
+          <p:nvPr/>
+        </p:nvSpPr>
+        <p:spPr>
+          <a:xfrm>
+            <a:off x="11131803" y="2626614"/>
+            <a:ext cx="453644" cy="237744"/>
+          </a:xfrm>
+          <a:prstGeom prst="roundRect">
+            <a:avLst>
+              <a:gd name="adj" fmla="val 50000"/>
+            </a:avLst>
+          </a:prstGeom>
+          <a:solidFill>
+            <a:srgbClr val="0B5E54"/>
+          </a:solidFill>
+          <a:ln>
+            <a:noFill/>
+          </a:ln>
+          <a:effectLst/>
+        </p:spPr>
+        <p:style>
+          <a:lnRef idx="1">
+            <a:schemeClr val="accent1"/>
+          </a:lnRef>
+          <a:fillRef idx="3">
+            <a:schemeClr val="accent1"/>
+          </a:fillRef>
+          <a:effectRef idx="2">
+            <a:schemeClr val="accent1"/>
+          </a:effectRef>
+          <a:fontRef idx="minor">
+            <a:schemeClr val="lt1"/>
+          </a:fontRef>
+        </p:style>
+        <p:txBody>
+          <a:bodyPr rtlCol="0" anchor="ctr"/>
+          <a:lstStyle/>
+          <a:p>
+            <a:pPr algn="ctr"/>
+          </a:p>
+        </p:txBody>
+      </p:sp>
+      <p:sp>
+        <p:nvSpPr>
+          <p:cNvPr id="25" name="TextBox 24"/>
+          <p:cNvSpPr txBox="1"/>
+          <p:nvPr/>
+        </p:nvSpPr>
+        <p:spPr>
+          <a:xfrm>
+            <a:off x="11131803" y="2626614"/>
+            <a:ext cx="453644" cy="237744"/>
+          </a:xfrm>
+          <a:prstGeom prst="rect">
+            <a:avLst/>
+          </a:prstGeom>
+          <a:noFill/>
+        </p:spPr>
+        <p:txBody>
+          <a:bodyPr wrap="square" anchor="ctr" lIns="0" rIns="0" tIns="0" bIns="0">
+            <a:spAutoFit/>
+          </a:bodyPr>
+          <a:lstStyle/>
+          <a:p>
+            <a:pPr algn="ctr">
+              <a:lnSpc>
+                <a:spcPct val="114000"/>
+              </a:lnSpc>
+            </a:pPr>
+            <a:r>
+              <a:rPr sz="850" b="1">
+                <a:solidFill>
+                  <a:srgbClr val="FFFFFF"/>
+                </a:solidFill>
+              </a:rPr>
+              <a:t>达标</a:t>
+            </a:r>
+          </a:p>
+        </p:txBody>
+      </p:sp>
+      <p:sp>
+        <p:nvSpPr>
+          <p:cNvPr id="26" name="TextBox 25"/>
+          <p:cNvSpPr txBox="1"/>
+          <p:nvPr/>
+        </p:nvSpPr>
+        <p:spPr>
+          <a:xfrm>
+            <a:off x="932688" y="2882646"/>
+            <a:ext cx="10671047" cy="514350"/>
+          </a:xfrm>
+          <a:prstGeom prst="rect">
+            <a:avLst/>
+          </a:prstGeom>
+          <a:noFill/>
+        </p:spPr>
+        <p:txBody>
+          <a:bodyPr wrap="square" anchor="t" lIns="0" rIns="0" tIns="0" bIns="0">
+            <a:spAutoFit/>
+          </a:bodyPr>
+          <a:lstStyle/>
+          <a:p>
+            <a:pPr algn="l">
+              <a:lnSpc>
+                <a:spcPct val="114000"/>
+              </a:lnSpc>
+            </a:pPr>
+            <a:r>
+              <a:rPr sz="950" b="0">
+                <a:solidFill>
+                  <a:srgbClr val="1B2B28"/>
+                </a:solidFill>
+              </a:rPr>
+              <a:t>第4题 正确、正确 5/5（线 ≥4）｜命名有意义达标率 100.0%（合格 72/72）≥ 90.0%</a:t>
+            </a:r>
+          </a:p>
+        </p:txBody>
+      </p:sp>
+      <p:sp>
+        <p:nvSpPr>
+          <p:cNvPr id="27" name="Rounded Rectangle 26"/>
+          <p:cNvSpPr/>
+          <p:nvPr/>
+        </p:nvSpPr>
+        <p:spPr>
+          <a:xfrm>
+            <a:off x="475488" y="3515868"/>
+            <a:ext cx="11237976" cy="916686"/>
+          </a:xfrm>
+          <a:prstGeom prst="roundRect">
+            <a:avLst>
+              <a:gd name="adj" fmla="val 6000"/>
+            </a:avLst>
+          </a:prstGeom>
+          <a:solidFill>
+            <a:srgbClr val="FFFFFF"/>
+          </a:solidFill>
+          <a:ln w="9525">
+            <a:solidFill>
+              <a:srgbClr val="E4F1EE"/>
+            </a:solidFill>
+          </a:ln>
+          <a:effectLst/>
+        </p:spPr>
+        <p:style>
+          <a:lnRef idx="1">
+            <a:schemeClr val="accent1"/>
+          </a:lnRef>
+          <a:fillRef idx="3">
+            <a:schemeClr val="accent1"/>
+          </a:fillRef>
+          <a:effectRef idx="2">
+            <a:schemeClr val="accent1"/>
+          </a:effectRef>
+          <a:fontRef idx="minor">
+            <a:schemeClr val="lt1"/>
+          </a:fontRef>
+        </p:style>
+        <p:txBody>
+          <a:bodyPr rtlCol="0" anchor="ctr"/>
+          <a:lstStyle/>
+          <a:p>
+            <a:pPr algn="ctr"/>
+          </a:p>
+        </p:txBody>
+      </p:sp>
+      <p:sp>
+        <p:nvSpPr>
+          <p:cNvPr id="28" name="Rounded Rectangle 27"/>
+          <p:cNvSpPr/>
+          <p:nvPr/>
+        </p:nvSpPr>
+        <p:spPr>
+          <a:xfrm>
+            <a:off x="475488" y="3515868"/>
+            <a:ext cx="54864" cy="916686"/>
+          </a:xfrm>
+          <a:prstGeom prst="roundRect">
+            <a:avLst>
+              <a:gd name="adj" fmla="val 50000"/>
+            </a:avLst>
+          </a:prstGeom>
+          <a:solidFill>
+            <a:srgbClr val="0B5E54"/>
+          </a:solidFill>
+          <a:ln>
+            <a:noFill/>
+          </a:ln>
+          <a:effectLst/>
+        </p:spPr>
+        <p:style>
+          <a:lnRef idx="1">
+            <a:schemeClr val="accent1"/>
+          </a:lnRef>
+          <a:fillRef idx="3">
+            <a:schemeClr val="accent1"/>
+          </a:fillRef>
+          <a:effectRef idx="2">
+            <a:schemeClr val="accent1"/>
+          </a:effectRef>
+          <a:fontRef idx="minor">
+            <a:schemeClr val="lt1"/>
+          </a:fontRef>
+        </p:style>
+        <p:txBody>
+          <a:bodyPr rtlCol="0" anchor="ctr"/>
+          <a:lstStyle/>
+          <a:p>
+            <a:pPr algn="ctr"/>
+          </a:p>
+        </p:txBody>
+      </p:sp>
+      <p:sp>
+        <p:nvSpPr>
+          <p:cNvPr id="29" name="Rounded Rectangle 28"/>
+          <p:cNvSpPr/>
+          <p:nvPr/>
+        </p:nvSpPr>
+        <p:spPr>
+          <a:xfrm>
+            <a:off x="621792" y="3598163"/>
+            <a:ext cx="237744" cy="237744"/>
+          </a:xfrm>
+          <a:prstGeom prst="roundRect">
+            <a:avLst>
+              <a:gd name="adj" fmla="val 28000"/>
+            </a:avLst>
+          </a:prstGeom>
+          <a:solidFill>
+            <a:srgbClr val="0B5E54"/>
+          </a:solidFill>
+          <a:ln>
+            <a:noFill/>
+          </a:ln>
+          <a:effectLst/>
+        </p:spPr>
+        <p:style>
+          <a:lnRef idx="1">
+            <a:schemeClr val="accent1"/>
+          </a:lnRef>
+          <a:fillRef idx="3">
+            <a:schemeClr val="accent1"/>
+          </a:fillRef>
+          <a:effectRef idx="2">
+            <a:schemeClr val="accent1"/>
+          </a:effectRef>
+          <a:fontRef idx="minor">
+            <a:schemeClr val="lt1"/>
+          </a:fontRef>
+        </p:style>
+        <p:txBody>
+          <a:bodyPr rtlCol="0" anchor="ctr"/>
+          <a:lstStyle/>
+          <a:p>
+            <a:pPr algn="ctr"/>
+          </a:p>
+        </p:txBody>
+      </p:sp>
+      <p:sp>
+        <p:nvSpPr>
+          <p:cNvPr id="30" name="TextBox 29"/>
+          <p:cNvSpPr txBox="1"/>
+          <p:nvPr/>
+        </p:nvSpPr>
+        <p:spPr>
+          <a:xfrm>
+            <a:off x="621792" y="3598163"/>
+            <a:ext cx="237744" cy="237744"/>
+          </a:xfrm>
+          <a:prstGeom prst="rect">
+            <a:avLst/>
+          </a:prstGeom>
+          <a:noFill/>
+        </p:spPr>
+        <p:txBody>
+          <a:bodyPr wrap="square" anchor="ctr" lIns="0" rIns="0" tIns="0" bIns="0">
+            <a:spAutoFit/>
+          </a:bodyPr>
+          <a:lstStyle/>
+          <a:p>
+            <a:pPr algn="ctr">
+              <a:lnSpc>
+                <a:spcPct val="114000"/>
+              </a:lnSpc>
+            </a:pPr>
+            <a:r>
+              <a:rPr sz="1000" b="1">
+                <a:solidFill>
+                  <a:srgbClr val="FFFFFF"/>
+                </a:solidFill>
+              </a:rPr>
+              <a:t>B</a:t>
+            </a:r>
+          </a:p>
+        </p:txBody>
+      </p:sp>
+      <p:sp>
+        <p:nvSpPr>
+          <p:cNvPr id="31" name="TextBox 30"/>
+          <p:cNvSpPr txBox="1"/>
+          <p:nvPr/>
+        </p:nvSpPr>
+        <p:spPr>
+          <a:xfrm>
+            <a:off x="932688" y="3579875"/>
+            <a:ext cx="8778240" cy="274320"/>
+          </a:xfrm>
+          <a:prstGeom prst="rect">
+            <a:avLst/>
+          </a:prstGeom>
+          <a:noFill/>
+        </p:spPr>
+        <p:txBody>
+          <a:bodyPr wrap="square" anchor="ctr" lIns="0" rIns="0" tIns="0" bIns="0">
+            <a:spAutoFit/>
+          </a:bodyPr>
+          <a:lstStyle/>
+          <a:p>
+            <a:pPr algn="l">
+              <a:lnSpc>
+                <a:spcPct val="114000"/>
+              </a:lnSpc>
+            </a:pPr>
+            <a:r>
+              <a:rPr sz="1050" b="1">
+                <a:solidFill>
+                  <a:srgbClr val="1B2B28"/>
+                </a:solidFill>
+              </a:rPr>
+              <a:t>优秀</a:t>
+            </a:r>
+            <a:r>
+              <a:rPr sz="850" b="0">
+                <a:solidFill>
+                  <a:srgbClr val="5C6E6A"/>
+                </a:solidFill>
+              </a:rPr>
+              <a:t>   验收口径：</a:t>
+            </a:r>
+            <a:r>
+              <a:rPr sz="850" b="0">
+                <a:solidFill>
+                  <a:srgbClr val="5C6E6A"/>
+                </a:solidFill>
+              </a:rPr>
+              <a:t>5题全对；PEP 8≥85%；结构清晰</a:t>
+            </a:r>
+          </a:p>
+        </p:txBody>
+      </p:sp>
+      <p:sp>
+        <p:nvSpPr>
+          <p:cNvPr id="32" name="Rounded Rectangle 31"/>
+          <p:cNvSpPr/>
+          <p:nvPr/>
+        </p:nvSpPr>
+        <p:spPr>
+          <a:xfrm>
+            <a:off x="11131803" y="3607308"/>
+            <a:ext cx="453644" cy="237744"/>
+          </a:xfrm>
+          <a:prstGeom prst="roundRect">
+            <a:avLst>
+              <a:gd name="adj" fmla="val 50000"/>
+            </a:avLst>
+          </a:prstGeom>
+          <a:solidFill>
+            <a:srgbClr val="0B5E54"/>
+          </a:solidFill>
+          <a:ln>
+            <a:noFill/>
+          </a:ln>
+          <a:effectLst/>
+        </p:spPr>
+        <p:style>
+          <a:lnRef idx="1">
+            <a:schemeClr val="accent1"/>
+          </a:lnRef>
+          <a:fillRef idx="3">
+            <a:schemeClr val="accent1"/>
+          </a:fillRef>
+          <a:effectRef idx="2">
+            <a:schemeClr val="accent1"/>
+          </a:effectRef>
+          <a:fontRef idx="minor">
+            <a:schemeClr val="lt1"/>
+          </a:fontRef>
+        </p:style>
+        <p:txBody>
+          <a:bodyPr rtlCol="0" anchor="ctr"/>
+          <a:lstStyle/>
+          <a:p>
+            <a:pPr algn="ctr"/>
+          </a:p>
+        </p:txBody>
+      </p:sp>
+      <p:sp>
+        <p:nvSpPr>
+          <p:cNvPr id="33" name="TextBox 32"/>
+          <p:cNvSpPr txBox="1"/>
+          <p:nvPr/>
+        </p:nvSpPr>
+        <p:spPr>
+          <a:xfrm>
+            <a:off x="11131803" y="3607308"/>
+            <a:ext cx="453644" cy="237744"/>
+          </a:xfrm>
+          <a:prstGeom prst="rect">
+            <a:avLst/>
+          </a:prstGeom>
+          <a:noFill/>
+        </p:spPr>
+        <p:txBody>
+          <a:bodyPr wrap="square" anchor="ctr" lIns="0" rIns="0" tIns="0" bIns="0">
+            <a:spAutoFit/>
+          </a:bodyPr>
+          <a:lstStyle/>
+          <a:p>
+            <a:pPr algn="ctr">
+              <a:lnSpc>
+                <a:spcPct val="114000"/>
+              </a:lnSpc>
+            </a:pPr>
+            <a:r>
+              <a:rPr sz="850" b="1">
+                <a:solidFill>
+                  <a:srgbClr val="FFFFFF"/>
+                </a:solidFill>
+              </a:rPr>
+              <a:t>达标</a:t>
+            </a:r>
+          </a:p>
+        </p:txBody>
+      </p:sp>
+      <p:sp>
+        <p:nvSpPr>
+          <p:cNvPr id="34" name="TextBox 33"/>
+          <p:cNvSpPr txBox="1"/>
+          <p:nvPr/>
+        </p:nvSpPr>
+        <p:spPr>
+          <a:xfrm>
+            <a:off x="932688" y="3863339"/>
+            <a:ext cx="10671047" cy="514350"/>
+          </a:xfrm>
+          <a:prstGeom prst="rect">
+            <a:avLst/>
+          </a:prstGeom>
+          <a:noFill/>
+        </p:spPr>
+        <p:txBody>
+          <a:bodyPr wrap="square" anchor="t" lIns="0" rIns="0" tIns="0" bIns="0">
+            <a:spAutoFit/>
+          </a:bodyPr>
+          <a:lstStyle/>
+          <a:p>
+            <a:pPr algn="l">
+              <a:lnSpc>
+                <a:spcPct val="114000"/>
+              </a:lnSpc>
+            </a:pPr>
+            <a:r>
+              <a:rPr sz="950" b="0">
+                <a:solidFill>
+                  <a:srgbClr val="1B2B28"/>
+                </a:solidFill>
+              </a:rPr>
+              <a:t>正确 5/5｜PEP 8 子集达标率 100.0%（检查项通过 4794/4795）≥ 85.0%｜结构：四件套 4/4、一题一函数 5/5、src 模块 docstring 12/12</a:t>
+            </a:r>
+          </a:p>
+        </p:txBody>
+      </p:sp>
+      <p:sp>
+        <p:nvSpPr>
+          <p:cNvPr id="35" name="Rounded Rectangle 34"/>
+          <p:cNvSpPr/>
+          <p:nvPr/>
+        </p:nvSpPr>
+        <p:spPr>
+          <a:xfrm>
+            <a:off x="475488" y="4496562"/>
+            <a:ext cx="11237976" cy="916686"/>
+          </a:xfrm>
+          <a:prstGeom prst="roundRect">
+            <a:avLst>
+              <a:gd name="adj" fmla="val 6000"/>
+            </a:avLst>
+          </a:prstGeom>
+          <a:solidFill>
+            <a:srgbClr val="FFFFFF"/>
+          </a:solidFill>
+          <a:ln w="9525">
+            <a:solidFill>
+              <a:srgbClr val="E4F1EE"/>
+            </a:solidFill>
+          </a:ln>
+          <a:effectLst/>
+        </p:spPr>
+        <p:style>
+          <a:lnRef idx="1">
+            <a:schemeClr val="accent1"/>
+          </a:lnRef>
+          <a:fillRef idx="3">
+            <a:schemeClr val="accent1"/>
+          </a:fillRef>
+          <a:effectRef idx="2">
+            <a:schemeClr val="accent1"/>
+          </a:effectRef>
+          <a:fontRef idx="minor">
+            <a:schemeClr val="lt1"/>
+          </a:fontRef>
+        </p:style>
+        <p:txBody>
+          <a:bodyPr rtlCol="0" anchor="ctr"/>
+          <a:lstStyle/>
+          <a:p>
+            <a:pPr algn="ctr"/>
+          </a:p>
+        </p:txBody>
+      </p:sp>
+      <p:sp>
+        <p:nvSpPr>
+          <p:cNvPr id="36" name="Rounded Rectangle 35"/>
+          <p:cNvSpPr/>
+          <p:nvPr/>
+        </p:nvSpPr>
+        <p:spPr>
+          <a:xfrm>
+            <a:off x="475488" y="4496562"/>
+            <a:ext cx="54864" cy="916686"/>
+          </a:xfrm>
+          <a:prstGeom prst="roundRect">
+            <a:avLst>
+              <a:gd name="adj" fmla="val 50000"/>
+            </a:avLst>
+          </a:prstGeom>
+          <a:solidFill>
+            <a:srgbClr val="C9A227"/>
+          </a:solidFill>
+          <a:ln>
+            <a:noFill/>
+          </a:ln>
+          <a:effectLst/>
+        </p:spPr>
+        <p:style>
+          <a:lnRef idx="1">
+            <a:schemeClr val="accent1"/>
+          </a:lnRef>
+          <a:fillRef idx="3">
+            <a:schemeClr val="accent1"/>
+          </a:fillRef>
+          <a:effectRef idx="2">
+            <a:schemeClr val="accent1"/>
+          </a:effectRef>
+          <a:fontRef idx="minor">
+            <a:schemeClr val="lt1"/>
+          </a:fontRef>
+        </p:style>
+        <p:txBody>
+          <a:bodyPr rtlCol="0" anchor="ctr"/>
+          <a:lstStyle/>
+          <a:p>
+            <a:pPr algn="ctr"/>
+          </a:p>
+        </p:txBody>
+      </p:sp>
+      <p:sp>
+        <p:nvSpPr>
+          <p:cNvPr id="37" name="Rounded Rectangle 36"/>
+          <p:cNvSpPr/>
+          <p:nvPr/>
+        </p:nvSpPr>
+        <p:spPr>
+          <a:xfrm>
+            <a:off x="621792" y="4578857"/>
+            <a:ext cx="237744" cy="237744"/>
+          </a:xfrm>
+          <a:prstGeom prst="roundRect">
+            <a:avLst>
+              <a:gd name="adj" fmla="val 28000"/>
+            </a:avLst>
+          </a:prstGeom>
+          <a:solidFill>
+            <a:srgbClr val="C9A227"/>
+          </a:solidFill>
+          <a:ln>
+            <a:noFill/>
+          </a:ln>
+          <a:effectLst/>
+        </p:spPr>
+        <p:style>
+          <a:lnRef idx="1">
+            <a:schemeClr val="accent1"/>
+          </a:lnRef>
+          <a:fillRef idx="3">
+            <a:schemeClr val="accent1"/>
+          </a:fillRef>
+          <a:effectRef idx="2">
+            <a:schemeClr val="accent1"/>
+          </a:effectRef>
+          <a:fontRef idx="minor">
+            <a:schemeClr val="lt1"/>
+          </a:fontRef>
+        </p:style>
+        <p:txBody>
+          <a:bodyPr rtlCol="0" anchor="ctr"/>
+          <a:lstStyle/>
+          <a:p>
+            <a:pPr algn="ctr"/>
+          </a:p>
+        </p:txBody>
+      </p:sp>
+      <p:sp>
+        <p:nvSpPr>
+          <p:cNvPr id="38" name="TextBox 37"/>
+          <p:cNvSpPr txBox="1"/>
+          <p:nvPr/>
+        </p:nvSpPr>
+        <p:spPr>
+          <a:xfrm>
+            <a:off x="621792" y="4578857"/>
+            <a:ext cx="237744" cy="237744"/>
+          </a:xfrm>
+          <a:prstGeom prst="rect">
+            <a:avLst/>
+          </a:prstGeom>
+          <a:noFill/>
+        </p:spPr>
+        <p:txBody>
+          <a:bodyPr wrap="square" anchor="ctr" lIns="0" rIns="0" tIns="0" bIns="0">
+            <a:spAutoFit/>
+          </a:bodyPr>
+          <a:lstStyle/>
+          <a:p>
+            <a:pPr algn="ctr">
+              <a:lnSpc>
+                <a:spcPct val="114000"/>
+              </a:lnSpc>
+            </a:pPr>
+            <a:r>
+              <a:rPr sz="1000" b="1">
+                <a:solidFill>
+                  <a:srgbClr val="FFFFFF"/>
+                </a:solidFill>
+              </a:rPr>
+              <a:t>A</a:t>
+            </a:r>
+          </a:p>
+        </p:txBody>
+      </p:sp>
+      <p:sp>
+        <p:nvSpPr>
+          <p:cNvPr id="39" name="TextBox 38"/>
+          <p:cNvSpPr txBox="1"/>
+          <p:nvPr/>
+        </p:nvSpPr>
+        <p:spPr>
+          <a:xfrm>
+            <a:off x="932688" y="4560570"/>
+            <a:ext cx="8778240" cy="274320"/>
+          </a:xfrm>
+          <a:prstGeom prst="rect">
+            <a:avLst/>
+          </a:prstGeom>
+          <a:noFill/>
+        </p:spPr>
+        <p:txBody>
+          <a:bodyPr wrap="square" anchor="ctr" lIns="0" rIns="0" tIns="0" bIns="0">
+            <a:spAutoFit/>
+          </a:bodyPr>
+          <a:lstStyle/>
+          <a:p>
+            <a:pPr algn="l">
+              <a:lnSpc>
+                <a:spcPct val="114000"/>
+              </a:lnSpc>
+            </a:pPr>
+            <a:r>
+              <a:rPr sz="1050" b="1">
+                <a:solidFill>
+                  <a:srgbClr val="1B2B28"/>
+                </a:solidFill>
+              </a:rPr>
+              <a:t>超优</a:t>
+            </a:r>
+            <a:r>
+              <a:rPr sz="850" b="0">
+                <a:solidFill>
+                  <a:srgbClr val="5C6E6A"/>
+                </a:solidFill>
+              </a:rPr>
+              <a:t>   验收口径：</a:t>
+            </a:r>
+            <a:r>
+              <a:rPr sz="850" b="0">
+                <a:solidFill>
+                  <a:srgbClr val="5C6E6A"/>
+                </a:solidFill>
+              </a:rPr>
+              <a:t>优秀+每题附测试用例与《迁移笔记》</a:t>
+            </a:r>
+          </a:p>
+        </p:txBody>
+      </p:sp>
+      <p:sp>
+        <p:nvSpPr>
+          <p:cNvPr id="40" name="Rounded Rectangle 39"/>
+          <p:cNvSpPr/>
+          <p:nvPr/>
+        </p:nvSpPr>
+        <p:spPr>
+          <a:xfrm>
+            <a:off x="11131803" y="4588001"/>
+            <a:ext cx="453644" cy="237744"/>
+          </a:xfrm>
+          <a:prstGeom prst="roundRect">
+            <a:avLst>
+              <a:gd name="adj" fmla="val 50000"/>
+            </a:avLst>
+          </a:prstGeom>
+          <a:solidFill>
+            <a:srgbClr val="0B5E54"/>
+          </a:solidFill>
+          <a:ln>
+            <a:noFill/>
+          </a:ln>
+          <a:effectLst/>
+        </p:spPr>
+        <p:style>
+          <a:lnRef idx="1">
+            <a:schemeClr val="accent1"/>
+          </a:lnRef>
+          <a:fillRef idx="3">
+            <a:schemeClr val="accent1"/>
+          </a:fillRef>
+          <a:effectRef idx="2">
+            <a:schemeClr val="accent1"/>
+          </a:effectRef>
+          <a:fontRef idx="minor">
+            <a:schemeClr val="lt1"/>
+          </a:fontRef>
+        </p:style>
+        <p:txBody>
+          <a:bodyPr rtlCol="0" anchor="ctr"/>
+          <a:lstStyle/>
+          <a:p>
+            <a:pPr algn="ctr"/>
+          </a:p>
+        </p:txBody>
+      </p:sp>
+      <p:sp>
+        <p:nvSpPr>
+          <p:cNvPr id="41" name="TextBox 40"/>
+          <p:cNvSpPr txBox="1"/>
+          <p:nvPr/>
+        </p:nvSpPr>
+        <p:spPr>
+          <a:xfrm>
+            <a:off x="11131803" y="4588001"/>
+            <a:ext cx="453644" cy="237744"/>
+          </a:xfrm>
+          <a:prstGeom prst="rect">
+            <a:avLst/>
+          </a:prstGeom>
+          <a:noFill/>
+        </p:spPr>
+        <p:txBody>
+          <a:bodyPr wrap="square" anchor="ctr" lIns="0" rIns="0" tIns="0" bIns="0">
+            <a:spAutoFit/>
+          </a:bodyPr>
+          <a:lstStyle/>
+          <a:p>
+            <a:pPr algn="ctr">
+              <a:lnSpc>
+                <a:spcPct val="114000"/>
+              </a:lnSpc>
+            </a:pPr>
+            <a:r>
+              <a:rPr sz="850" b="1">
+                <a:solidFill>
+                  <a:srgbClr val="FFFFFF"/>
+                </a:solidFill>
+              </a:rPr>
+              <a:t>达标</a:t>
+            </a:r>
+          </a:p>
+        </p:txBody>
+      </p:sp>
+      <p:sp>
+        <p:nvSpPr>
+          <p:cNvPr id="42" name="TextBox 41"/>
+          <p:cNvSpPr txBox="1"/>
+          <p:nvPr/>
+        </p:nvSpPr>
+        <p:spPr>
+          <a:xfrm>
+            <a:off x="932688" y="4844033"/>
+            <a:ext cx="10671047" cy="514350"/>
+          </a:xfrm>
+          <a:prstGeom prst="rect">
+            <a:avLst/>
+          </a:prstGeom>
+          <a:noFill/>
+        </p:spPr>
+        <p:txBody>
+          <a:bodyPr wrap="square" anchor="t" lIns="0" rIns="0" tIns="0" bIns="0">
+            <a:spAutoFit/>
+          </a:bodyPr>
+          <a:lstStyle/>
+          <a:p>
+            <a:pPr algn="l">
+              <a:lnSpc>
+                <a:spcPct val="114000"/>
+              </a:lnSpc>
+            </a:pPr>
+            <a:r>
+              <a:rPr sz="950" b="0">
+                <a:solidFill>
+                  <a:srgbClr val="1B2B28"/>
+                </a:solidFill>
+              </a:rPr>
+              <a:t>每题 pytest 用例 题1 24｜题2 17｜题3 26｜题4 19｜题5 18（线 ≥1）｜迁移笔记 存在=是 正文 15 条（≥10）逐题易错点 5/5 必备章节=是</a:t>
+            </a:r>
+          </a:p>
+        </p:txBody>
+      </p:sp>
+      <p:sp>
+        <p:nvSpPr>
+          <p:cNvPr id="43" name="Rounded Rectangle 42"/>
+          <p:cNvSpPr/>
+          <p:nvPr/>
+        </p:nvSpPr>
+        <p:spPr>
+          <a:xfrm>
+            <a:off x="475488" y="5477255"/>
+            <a:ext cx="11237976" cy="941832"/>
+          </a:xfrm>
+          <a:prstGeom prst="roundRect">
+            <a:avLst>
+              <a:gd name="adj" fmla="val 5000"/>
+            </a:avLst>
+          </a:prstGeom>
+          <a:solidFill>
+            <a:srgbClr val="E4F1EE"/>
+          </a:solidFill>
+          <a:ln>
+            <a:noFill/>
+          </a:ln>
+          <a:effectLst/>
+        </p:spPr>
+        <p:style>
+          <a:lnRef idx="1">
+            <a:schemeClr val="accent1"/>
+          </a:lnRef>
+          <a:fillRef idx="3">
+            <a:schemeClr val="accent1"/>
+          </a:fillRef>
+          <a:effectRef idx="2">
+            <a:schemeClr val="accent1"/>
+          </a:effectRef>
+          <a:fontRef idx="minor">
+            <a:schemeClr val="lt1"/>
+          </a:fontRef>
+        </p:style>
+        <p:txBody>
+          <a:bodyPr rtlCol="0" anchor="ctr"/>
+          <a:lstStyle/>
+          <a:p>
+            <a:pPr algn="ctr"/>
+          </a:p>
+        </p:txBody>
+      </p:sp>
+      <p:sp>
+        <p:nvSpPr>
+          <p:cNvPr id="44" name="Rounded Rectangle 43"/>
+          <p:cNvSpPr/>
+          <p:nvPr/>
+        </p:nvSpPr>
+        <p:spPr>
+          <a:xfrm>
+            <a:off x="475488" y="5477255"/>
+            <a:ext cx="54864" cy="941832"/>
+          </a:xfrm>
+          <a:prstGeom prst="roundRect">
+            <a:avLst>
+              <a:gd name="adj" fmla="val 50000"/>
+            </a:avLst>
+          </a:prstGeom>
+          <a:solidFill>
+            <a:srgbClr val="C9A227"/>
+          </a:solidFill>
+          <a:ln>
+            <a:noFill/>
+          </a:ln>
+          <a:effectLst/>
+        </p:spPr>
+        <p:style>
+          <a:lnRef idx="1">
+            <a:schemeClr val="accent1"/>
+          </a:lnRef>
+          <a:fillRef idx="3">
+            <a:schemeClr val="accent1"/>
+          </a:fillRef>
+          <a:effectRef idx="2">
+            <a:schemeClr val="accent1"/>
+          </a:effectRef>
+          <a:fontRef idx="minor">
+            <a:schemeClr val="lt1"/>
+          </a:fontRef>
+        </p:style>
+        <p:txBody>
+          <a:bodyPr rtlCol="0" anchor="ctr"/>
+          <a:lstStyle/>
+          <a:p>
+            <a:pPr algn="ctr"/>
+          </a:p>
+        </p:txBody>
+      </p:sp>
+      <p:sp>
+        <p:nvSpPr>
+          <p:cNvPr id="45" name="TextBox 44"/>
+          <p:cNvSpPr txBox="1"/>
+          <p:nvPr/>
+        </p:nvSpPr>
+        <p:spPr>
+          <a:xfrm>
+            <a:off x="676656" y="5550407"/>
+            <a:ext cx="10908792" cy="795528"/>
+          </a:xfrm>
+          <a:prstGeom prst="rect">
+            <a:avLst/>
+          </a:prstGeom>
+          <a:noFill/>
+        </p:spPr>
+        <p:txBody>
+          <a:bodyPr wrap="square" anchor="t" lIns="0" rIns="0" tIns="0" bIns="0">
+            <a:spAutoFit/>
+          </a:bodyPr>
+          <a:lstStyle/>
+          <a:p>
+            <a:pPr algn="l">
+              <a:lnSpc>
+                <a:spcPct val="124000"/>
+              </a:lnSpc>
+            </a:pPr>
+            <a:r>
+              <a:rPr sz="850" b="0">
+                <a:solidFill>
+                  <a:srgbClr val="1B2B28"/>
+                </a:solidFill>
+              </a:rPr>
+              <a:t>出处：工程化项目/p11_exercises/output/report.txt 第 54 节「分层达标」——本机 2026-10-28 05:06 实跑落盘，上表数字逐字摘录、未改写。</a:t>
+            </a:r>
+          </a:p>
+          <a:p>
+            <a:pPr algn="l">
+              <a:lnSpc>
+                <a:spcPct val="124000"/>
+              </a:lnSpc>
+            </a:pPr>
+            <a:r>
+              <a:rPr sz="850" b="0">
+                <a:solidFill>
+                  <a:srgbClr val="1B2B28"/>
+                </a:solidFill>
+              </a:rPr>
+              <a:t>复现：cd 工程化项目/p11_exercises &amp;&amp; python run.py &amp;&amp; python -m pytest -q -o addopts=''</a:t>
+            </a:r>
+          </a:p>
+          <a:p>
+            <a:pPr algn="l">
+              <a:lnSpc>
+                <a:spcPct val="124000"/>
+              </a:lnSpc>
+            </a:pPr>
+            <a:r>
+              <a:rPr sz="850" b="0">
+                <a:solidFill>
+                  <a:srgbClr val="1B2B28"/>
+                </a:solidFill>
+              </a:rPr>
+              <a:t>口径：表中「判定」沿用报告原词——绿=达标/通过，黄=仅本节取证项通过（未取证子项在报告里逐条点名），红=未达标。</a:t>
+            </a:r>
+          </a:p>
+        </p:txBody>
+      </p:sp>
+    </p:spTree>
+  </p:cSld>
+  <p:clrMapOvr>
+    <a:masterClrMapping/>
+  </p:clrMapOvr>
+</p:sld>
+</file>
+
+<file path=ppt/slides/slide9.xml><?xml version="1.0" encoding="utf-8"?>
+<p:sld xmlns:a="http://schemas.openxmlformats.org/drawingml/2006/main" xmlns:p="http://schemas.openxmlformats.org/presentationml/2006/main" xmlns:r="http://schemas.openxmlformats.org/officeDocument/2006/relationships">
+  <p:cSld>
+    <p:spTree>
+      <p:nvGrpSpPr>
+        <p:cNvPr id="1" name=""/>
+        <p:cNvGrpSpPr/>
+        <p:nvPr/>
+      </p:nvGrpSpPr>
+      <p:grpSpPr/>
+      <p:sp>
+        <p:nvSpPr>
+          <p:cNvPr id="2" name="Rounded Rectangle 1"/>
+          <p:cNvSpPr/>
+          <p:nvPr/>
+        </p:nvSpPr>
+        <p:spPr>
+          <a:xfrm>
+            <a:off x="0" y="0"/>
+            <a:ext cx="12191695" cy="64008"/>
+          </a:xfrm>
+          <a:prstGeom prst="roundRect">
+            <a:avLst>
+              <a:gd name="adj" fmla="val 50000"/>
+            </a:avLst>
+          </a:prstGeom>
+          <a:solidFill>
+            <a:srgbClr val="0B5E54"/>
+          </a:solidFill>
+          <a:ln>
+            <a:noFill/>
+          </a:ln>
+          <a:effectLst/>
+        </p:spPr>
+        <p:style>
+          <a:lnRef idx="1">
+            <a:schemeClr val="accent1"/>
+          </a:lnRef>
+          <a:fillRef idx="3">
+            <a:schemeClr val="accent1"/>
+          </a:fillRef>
+          <a:effectRef idx="2">
+            <a:schemeClr val="accent1"/>
+          </a:effectRef>
+          <a:fontRef idx="minor">
+            <a:schemeClr val="lt1"/>
+          </a:fontRef>
+        </p:style>
+        <p:txBody>
+          <a:bodyPr rtlCol="0" anchor="ctr"/>
+          <a:lstStyle/>
+          <a:p>
+            <a:pPr algn="ctr"/>
+          </a:p>
+        </p:txBody>
+      </p:sp>
+      <p:sp>
+        <p:nvSpPr>
+          <p:cNvPr id="3" name="TextBox 2"/>
+          <p:cNvSpPr txBox="1"/>
+          <p:nvPr/>
+        </p:nvSpPr>
+        <p:spPr>
+          <a:xfrm>
+            <a:off x="475488" y="146304"/>
+            <a:ext cx="8229600" cy="292608"/>
+          </a:xfrm>
+          <a:prstGeom prst="rect">
+            <a:avLst/>
+          </a:prstGeom>
+          <a:noFill/>
+        </p:spPr>
+        <p:txBody>
+          <a:bodyPr wrap="square" anchor="t" lIns="0" rIns="0" tIns="0" bIns="0">
+            <a:spAutoFit/>
+          </a:bodyPr>
+          <a:lstStyle/>
+          <a:p>
+            <a:pPr algn="l">
+              <a:lnSpc>
+                <a:spcPct val="114000"/>
+              </a:lnSpc>
+            </a:pPr>
+            <a:r>
+              <a:rPr sz="1100" b="1">
+                <a:solidFill>
+                  <a:srgbClr val="0B5E54"/>
+                </a:solidFill>
+              </a:rPr>
+              <a:t>工单实战 · 运行留证</a:t>
+            </a:r>
+          </a:p>
+        </p:txBody>
+      </p:sp>
+      <p:sp>
+        <p:nvSpPr>
+          <p:cNvPr id="4" name="Rounded Rectangle 3"/>
+          <p:cNvSpPr/>
+          <p:nvPr/>
+        </p:nvSpPr>
+        <p:spPr>
+          <a:xfrm>
+            <a:off x="475488" y="475488"/>
+            <a:ext cx="2027872" cy="310896"/>
+          </a:xfrm>
+          <a:prstGeom prst="roundRect">
+            <a:avLst>
+              <a:gd name="adj" fmla="val 50000"/>
+            </a:avLst>
+          </a:prstGeom>
+          <a:solidFill>
+            <a:srgbClr val="C9A227"/>
+          </a:solidFill>
+          <a:ln>
+            <a:noFill/>
+          </a:ln>
+          <a:effectLst/>
+        </p:spPr>
+        <p:style>
+          <a:lnRef idx="1">
+            <a:schemeClr val="accent1"/>
+          </a:lnRef>
+          <a:fillRef idx="3">
+            <a:schemeClr val="accent1"/>
+          </a:fillRef>
+          <a:effectRef idx="2">
+            <a:schemeClr val="accent1"/>
+          </a:effectRef>
+          <a:fontRef idx="minor">
+            <a:schemeClr val="lt1"/>
+          </a:fontRef>
+        </p:style>
+        <p:txBody>
+          <a:bodyPr rtlCol="0" anchor="ctr"/>
+          <a:lstStyle/>
+          <a:p>
+            <a:pPr algn="ctr"/>
+          </a:p>
+        </p:txBody>
+      </p:sp>
+      <p:sp>
+        <p:nvSpPr>
+          <p:cNvPr id="5" name="TextBox 4"/>
+          <p:cNvSpPr txBox="1"/>
+          <p:nvPr/>
+        </p:nvSpPr>
+        <p:spPr>
+          <a:xfrm>
+            <a:off x="475488" y="475488"/>
+            <a:ext cx="2027872" cy="310896"/>
+          </a:xfrm>
+          <a:prstGeom prst="rect">
+            <a:avLst/>
+          </a:prstGeom>
+          <a:noFill/>
+        </p:spPr>
+        <p:txBody>
+          <a:bodyPr wrap="square" anchor="ctr" lIns="0" rIns="0" tIns="0" bIns="0">
+            <a:spAutoFit/>
+          </a:bodyPr>
+          <a:lstStyle/>
+          <a:p>
+            <a:pPr algn="ctr">
+              <a:lnSpc>
+                <a:spcPct val="114000"/>
+              </a:lnSpc>
+            </a:pPr>
+            <a:r>
+              <a:rPr sz="1050" b="1">
+                <a:solidFill>
+                  <a:srgbClr val="FFFFFF"/>
+                </a:solidFill>
+              </a:rPr>
+              <a:t>SCREENSHOT · 终端逐字截图</a:t>
+            </a:r>
+          </a:p>
+        </p:txBody>
+      </p:sp>
+      <p:sp>
+        <p:nvSpPr>
+          <p:cNvPr id="6" name="TextBox 5"/>
+          <p:cNvSpPr txBox="1"/>
+          <p:nvPr/>
+        </p:nvSpPr>
+        <p:spPr>
+          <a:xfrm>
+            <a:off x="475488" y="859536"/>
+            <a:ext cx="11237976" cy="502920"/>
+          </a:xfrm>
+          <a:prstGeom prst="rect">
+            <a:avLst/>
+          </a:prstGeom>
+          <a:noFill/>
+        </p:spPr>
+        <p:txBody>
+          <a:bodyPr wrap="square" anchor="t" lIns="0" rIns="0" tIns="0" bIns="0">
+            <a:spAutoFit/>
+          </a:bodyPr>
+          <a:lstStyle/>
+          <a:p>
+            <a:pPr algn="l">
+              <a:lnSpc>
+                <a:spcPct val="114000"/>
+              </a:lnSpc>
+            </a:pPr>
+            <a:r>
+              <a:rPr sz="2200" b="1">
+                <a:solidFill>
+                  <a:srgbClr val="1B2B28"/>
+                </a:solidFill>
+              </a:rPr>
+              <a:t>P1.1 分层达标 · 四档逐字输出截图</a:t>
+            </a:r>
+          </a:p>
+        </p:txBody>
+      </p:sp>
+      <p:sp>
+        <p:nvSpPr>
+          <p:cNvPr id="7" name="Rounded Rectangle 6"/>
+          <p:cNvSpPr/>
+          <p:nvPr/>
+        </p:nvSpPr>
+        <p:spPr>
+          <a:xfrm>
+            <a:off x="475488" y="1389888"/>
+            <a:ext cx="1234440" cy="27432"/>
+          </a:xfrm>
+          <a:prstGeom prst="roundRect">
+            <a:avLst>
+              <a:gd name="adj" fmla="val 50000"/>
+            </a:avLst>
+          </a:prstGeom>
+          <a:solidFill>
+            <a:srgbClr val="C9A227"/>
+          </a:solidFill>
+          <a:ln>
+            <a:noFill/>
+          </a:ln>
+          <a:effectLst/>
+        </p:spPr>
+        <p:style>
+          <a:lnRef idx="1">
+            <a:schemeClr val="accent1"/>
+          </a:lnRef>
+          <a:fillRef idx="3">
+            <a:schemeClr val="accent1"/>
+          </a:fillRef>
+          <a:effectRef idx="2">
+            <a:schemeClr val="accent1"/>
+          </a:effectRef>
+          <a:fontRef idx="minor">
+            <a:schemeClr val="lt1"/>
+          </a:fontRef>
+        </p:style>
+        <p:txBody>
+          <a:bodyPr rtlCol="0" anchor="ctr"/>
+          <a:lstStyle/>
+          <a:p>
+            <a:pPr algn="ctr"/>
+          </a:p>
+        </p:txBody>
+      </p:sp>
+      <p:sp>
+        <p:nvSpPr>
+          <p:cNvPr id="8" name="Rounded Rectangle 7"/>
+          <p:cNvSpPr/>
+          <p:nvPr/>
+        </p:nvSpPr>
+        <p:spPr>
+          <a:xfrm>
+            <a:off x="475488" y="6419088"/>
+            <a:ext cx="11237976" cy="10972"/>
+          </a:xfrm>
+          <a:prstGeom prst="roundRect">
+            <a:avLst>
+              <a:gd name="adj" fmla="val 50000"/>
+            </a:avLst>
+          </a:prstGeom>
+          <a:solidFill>
+            <a:srgbClr val="E4F1EE"/>
+          </a:solidFill>
+          <a:ln>
+            <a:noFill/>
+          </a:ln>
+          <a:effectLst/>
+        </p:spPr>
+        <p:style>
+          <a:lnRef idx="1">
+            <a:schemeClr val="accent1"/>
+          </a:lnRef>
+          <a:fillRef idx="3">
+            <a:schemeClr val="accent1"/>
+          </a:fillRef>
+          <a:effectRef idx="2">
+            <a:schemeClr val="accent1"/>
+          </a:effectRef>
+          <a:fontRef idx="minor">
+            <a:schemeClr val="lt1"/>
+          </a:fontRef>
+        </p:style>
+        <p:txBody>
+          <a:bodyPr rtlCol="0" anchor="ctr"/>
+          <a:lstStyle/>
+          <a:p>
+            <a:pPr algn="ctr"/>
+          </a:p>
+        </p:txBody>
+      </p:sp>
+      <p:sp>
+        <p:nvSpPr>
+          <p:cNvPr id="9" name="TextBox 8"/>
+          <p:cNvSpPr txBox="1"/>
+          <p:nvPr/>
+        </p:nvSpPr>
+        <p:spPr>
+          <a:xfrm>
+            <a:off x="475488" y="6455664"/>
+            <a:ext cx="7315200" cy="292608"/>
+          </a:xfrm>
+          <a:prstGeom prst="rect">
+            <a:avLst/>
+          </a:prstGeom>
+          <a:noFill/>
+        </p:spPr>
+        <p:txBody>
+          <a:bodyPr wrap="square" anchor="t" lIns="0" rIns="0" tIns="0" bIns="0">
+            <a:spAutoFit/>
+          </a:bodyPr>
+          <a:lstStyle/>
+          <a:p>
+            <a:pPr algn="l">
+              <a:lnSpc>
+                <a:spcPct val="114000"/>
+              </a:lnSpc>
+            </a:pPr>
+            <a:r>
+              <a:rPr sz="900" b="0">
+                <a:solidFill>
+                  <a:srgbClr val="5C6E6A"/>
+                </a:solidFill>
+              </a:rPr>
+              <a:t>两江智造集团 · Python程序设计（项目实战）</a:t>
+            </a:r>
+          </a:p>
+        </p:txBody>
+      </p:sp>
+      <p:sp>
+        <p:nvSpPr>
+          <p:cNvPr id="10" name="TextBox 9"/>
+          <p:cNvSpPr txBox="1"/>
+          <p:nvPr/>
+        </p:nvSpPr>
+        <p:spPr>
+          <a:xfrm>
+            <a:off x="10597896" y="6537960"/>
+            <a:ext cx="996696" cy="301752"/>
+          </a:xfrm>
+          <a:prstGeom prst="rect">
+            <a:avLst/>
+          </a:prstGeom>
+          <a:noFill/>
+        </p:spPr>
+        <p:txBody>
+          <a:bodyPr wrap="square" anchor="t" lIns="0" rIns="0" tIns="0" bIns="0">
+            <a:spAutoFit/>
+          </a:bodyPr>
+          <a:lstStyle/>
+          <a:p>
+            <a:pPr algn="r">
+              <a:lnSpc>
+                <a:spcPct val="114000"/>
+              </a:lnSpc>
+            </a:pPr>
+            <a:r>
+              <a:rPr sz="1000" b="0">
+                <a:solidFill>
+                  <a:srgbClr val="8A97B5"/>
+                </a:solidFill>
+              </a:rPr>
+              <a:t>5 / 10</a:t>
+            </a:r>
+          </a:p>
+        </p:txBody>
+      </p:sp>
+      <p:sp>
+        <p:nvSpPr>
+          <p:cNvPr id="11" name="TextBox 10"/>
+          <p:cNvSpPr txBox="1"/>
+          <p:nvPr/>
+        </p:nvSpPr>
+        <p:spPr>
+          <a:xfrm>
+            <a:off x="475488" y="1517904"/>
+            <a:ext cx="11237976" cy="237744"/>
+          </a:xfrm>
+          <a:prstGeom prst="rect">
+            <a:avLst/>
+          </a:prstGeom>
+          <a:noFill/>
+        </p:spPr>
+        <p:txBody>
+          <a:bodyPr wrap="square" anchor="t" lIns="0" rIns="0" tIns="0" bIns="0">
+            <a:spAutoFit/>
+          </a:bodyPr>
+          <a:lstStyle/>
+          <a:p>
+            <a:pPr algn="l">
+              <a:lnSpc>
+                <a:spcPct val="114000"/>
+              </a:lnSpc>
+            </a:pPr>
+            <a:r>
+              <a:rPr sz="1000" b="0">
+                <a:solidFill>
+                  <a:srgbClr val="5C6E6A"/>
+                </a:solidFill>
+              </a:rPr>
+              <a:t>终端窗口截图：由 report.txt 本节逐字渲染，未手工改写</a:t>
+            </a:r>
+          </a:p>
+        </p:txBody>
+      </p:sp>
+      <p:pic>
+        <p:nvPicPr>
+          <p:cNvPr id="12" name="Picture 11" descr="p11_exercises_classroom.png"/>
+          <p:cNvPicPr>
+            <a:picLocks noChangeAspect="1"/>
+          </p:cNvPicPr>
+          <p:nvPr/>
+        </p:nvPicPr>
+        <p:blipFill>
+          <a:blip r:embed="rId2"/>
+          <a:stretch>
+            <a:fillRect/>
+          </a:stretch>
+        </p:blipFill>
+        <p:spPr>
+          <a:xfrm>
+            <a:off x="702845" y="1792224"/>
+            <a:ext cx="10783260" cy="3849624"/>
+          </a:xfrm>
+          <a:prstGeom prst="rect">
+            <a:avLst/>
+          </a:prstGeom>
+        </p:spPr>
+      </p:pic>
+      <p:sp>
+        <p:nvSpPr>
+          <p:cNvPr id="13" name="TextBox 12"/>
+          <p:cNvSpPr txBox="1"/>
+          <p:nvPr/>
+        </p:nvSpPr>
+        <p:spPr>
+          <a:xfrm>
+            <a:off x="475488" y="5678424"/>
+            <a:ext cx="11237976" cy="256032"/>
+          </a:xfrm>
+          <a:prstGeom prst="rect">
+            <a:avLst/>
+          </a:prstGeom>
+          <a:noFill/>
+        </p:spPr>
+        <p:txBody>
+          <a:bodyPr wrap="square" anchor="t" lIns="0" rIns="0" tIns="0" bIns="0">
+            <a:spAutoFit/>
+          </a:bodyPr>
+          <a:lstStyle/>
+          <a:p>
+            <a:pPr algn="l">
+              <a:lnSpc>
+                <a:spcPct val="114000"/>
+              </a:lnSpc>
+            </a:pPr>
+            <a:r>
+              <a:rPr sz="850" b="0">
+                <a:solidFill>
+                  <a:srgbClr val="5C6E6A"/>
+                </a:solidFill>
+              </a:rPr>
+              <a:t>▲ p11_exercises：分层达标 第 54 行起的四档逐字原文（绿=达标/通过，黄=仅本节取证项，橙=未实测项）</a:t>
             </a:r>
           </a:p>
         </p:txBody>

--- a/V2授课PPT/W01-第2次课-列表与字典：C里没有的武器.pptx
+++ b/V2授课PPT/W01-第2次课-列表与字典：C里没有的武器.pptx
@@ -6,6 +6,7 @@
   </p:sldMasterIdLst>
   <p:sldIdLst>
     <p:sldId id="256" r:id="rId7"/>
+    <p:sldId id="371" r:id="rId18"/>
     <p:sldId id="280" r:id="rId32"/>
     <p:sldId id="310" r:id="rId62"/>
     <p:sldId id="368" r:id="rId15"/>
@@ -15,6 +16,8 @@
     <p:sldId id="341" r:id="rId93"/>
     <p:sldId id="366" r:id="rId118"/>
     <p:sldId id="367" r:id="rId119"/>
+    <p:sldId id="372" r:id="rId19"/>
+    <p:sldId id="373" r:id="rId20"/>
   </p:sldIdLst>
   <p:sldSz cx="12192000" cy="6858000" type="screen4x3"/>
   <p:notesSz cx="6858000" cy="9144000"/>
@@ -4324,22 +4327,20 @@
       <p:grpSpPr/>
       <p:sp>
         <p:nvSpPr>
-          <p:cNvPr id="2" name="Rounded Rectangle 1"/>
+          <p:cNvPr id="2" name="Rectangle 1"/>
           <p:cNvSpPr/>
           <p:nvPr/>
         </p:nvSpPr>
         <p:spPr>
           <a:xfrm>
             <a:off x="0" y="0"/>
-            <a:ext cx="12191695" cy="64008"/>
-          </a:xfrm>
-          <a:prstGeom prst="roundRect">
-            <a:avLst>
-              <a:gd name="adj" fmla="val 50000"/>
-            </a:avLst>
+            <a:ext cx="12192000" cy="1150000"/>
+          </a:xfrm>
+          <a:prstGeom prst="rect">
+            <a:avLst/>
           </a:prstGeom>
           <a:solidFill>
-            <a:srgbClr val="0B5E54"/>
+            <a:srgbClr val="010328"/>
           </a:solidFill>
           <a:ln>
             <a:noFill/>
@@ -4370,60 +4371,20 @@
       </p:sp>
       <p:sp>
         <p:nvSpPr>
-          <p:cNvPr id="3" name="TextBox 2"/>
-          <p:cNvSpPr txBox="1"/>
-          <p:nvPr/>
-        </p:nvSpPr>
-        <p:spPr>
-          <a:xfrm>
-            <a:off x="475488" y="146304"/>
-            <a:ext cx="8229600" cy="292608"/>
-          </a:xfrm>
-          <a:prstGeom prst="rect">
-            <a:avLst/>
-          </a:prstGeom>
-          <a:noFill/>
-        </p:spPr>
-        <p:txBody>
-          <a:bodyPr wrap="square" anchor="t" lIns="0" rIns="0" tIns="0" bIns="0">
-            <a:spAutoFit/>
-          </a:bodyPr>
-          <a:lstStyle/>
-          <a:p>
-            <a:pPr algn="l">
-              <a:lnSpc>
-                <a:spcPct val="114000"/>
-              </a:lnSpc>
-            </a:pPr>
-            <a:r>
-              <a:rPr sz="1100" b="1">
-                <a:solidFill>
-                  <a:srgbClr val="0B5E54"/>
-                </a:solidFill>
-              </a:rPr>
-              <a:t>工单实战 · 运行留证</a:t>
-            </a:r>
-          </a:p>
-        </p:txBody>
-      </p:sp>
-      <p:sp>
-        <p:nvSpPr>
-          <p:cNvPr id="4" name="Rounded Rectangle 3"/>
+          <p:cNvPr id="3" name="Rectangle 2"/>
           <p:cNvSpPr/>
           <p:nvPr/>
         </p:nvSpPr>
         <p:spPr>
           <a:xfrm>
-            <a:off x="475488" y="475488"/>
-            <a:ext cx="2027872" cy="310896"/>
-          </a:xfrm>
-          <a:prstGeom prst="roundRect">
-            <a:avLst>
-              <a:gd name="adj" fmla="val 50000"/>
-            </a:avLst>
+            <a:off x="0" y="1150000"/>
+            <a:ext cx="2600000" cy="70000"/>
+          </a:xfrm>
+          <a:prstGeom prst="rect">
+            <a:avLst/>
           </a:prstGeom>
           <a:solidFill>
-            <a:srgbClr val="C9A227"/>
+            <a:srgbClr val="F5670F"/>
           </a:solidFill>
           <a:ln>
             <a:noFill/>
@@ -4454,14 +4415,14 @@
       </p:sp>
       <p:sp>
         <p:nvSpPr>
-          <p:cNvPr id="5" name="TextBox 4"/>
+          <p:cNvPr id="4" name="TextBox 3"/>
           <p:cNvSpPr txBox="1"/>
           <p:nvPr/>
         </p:nvSpPr>
         <p:spPr>
           <a:xfrm>
-            <a:off x="475488" y="475488"/>
-            <a:ext cx="2027872" cy="310896"/>
+            <a:off x="700000" y="300000"/>
+            <a:ext cx="10792000" cy="700000"/>
           </a:xfrm>
           <a:prstGeom prst="rect">
             <a:avLst/>
@@ -4469,83 +4430,47 @@
           <a:noFill/>
         </p:spPr>
         <p:txBody>
-          <a:bodyPr wrap="square" anchor="ctr" lIns="0" rIns="0" tIns="0" bIns="0">
+          <a:bodyPr wrap="square" anchor="t">
             <a:spAutoFit/>
           </a:bodyPr>
           <a:lstStyle/>
           <a:p>
-            <a:pPr algn="ctr">
-              <a:lnSpc>
-                <a:spcPct val="114000"/>
-              </a:lnSpc>
-            </a:pPr>
-            <a:r>
-              <a:rPr sz="1050" b="1">
-                <a:solidFill>
-                  <a:srgbClr val="FFFFFF"/>
-                </a:solidFill>
-              </a:rPr>
-              <a:t>SCREENSHOT · 终端逐字截图</a:t>
-            </a:r>
-          </a:p>
-        </p:txBody>
-      </p:sp>
-      <p:sp>
-        <p:nvSpPr>
-          <p:cNvPr id="6" name="TextBox 5"/>
-          <p:cNvSpPr txBox="1"/>
-          <p:nvPr/>
-        </p:nvSpPr>
-        <p:spPr>
-          <a:xfrm>
-            <a:off x="475488" y="859536"/>
-            <a:ext cx="11237976" cy="502920"/>
-          </a:xfrm>
-          <a:prstGeom prst="rect">
-            <a:avLst/>
-          </a:prstGeom>
-          <a:noFill/>
-        </p:spPr>
-        <p:txBody>
-          <a:bodyPr wrap="square" anchor="t" lIns="0" rIns="0" tIns="0" bIns="0">
-            <a:spAutoFit/>
-          </a:bodyPr>
-          <a:lstStyle/>
-          <a:p>
             <a:pPr algn="l">
               <a:lnSpc>
-                <a:spcPct val="114000"/>
+                <a:spcPct val="110000"/>
               </a:lnSpc>
+              <a:spcAft>
+                <a:spcPts val="600"/>
+              </a:spcAft>
             </a:pPr>
             <a:r>
-              <a:rPr sz="2200" b="1">
-                <a:solidFill>
-                  <a:srgbClr val="1B2B28"/>
-                </a:solidFill>
+              <a:rPr sz="2400" b="1">
+                <a:solidFill>
+                  <a:srgbClr val="FFFFFF"/>
+                </a:solidFill>
+                <a:latin typeface="微软雅黑"/>
               </a:rPr>
-              <a:t>P1.1 · 测试全绿证据＋pytest 全量实跑</a:t>
-            </a:r>
-          </a:p>
-        </p:txBody>
-      </p:sp>
-      <p:sp>
-        <p:nvSpPr>
-          <p:cNvPr id="7" name="Rounded Rectangle 6"/>
+              <a:t>下次课预告（第2周）</a:t>
+            </a:r>
+          </a:p>
+        </p:txBody>
+      </p:sp>
+      <p:sp>
+        <p:nvSpPr>
+          <p:cNvPr id="5" name="Rectangle 4"/>
           <p:cNvSpPr/>
           <p:nvPr/>
         </p:nvSpPr>
         <p:spPr>
           <a:xfrm>
-            <a:off x="475488" y="1389888"/>
-            <a:ext cx="1234440" cy="27432"/>
-          </a:xfrm>
-          <a:prstGeom prst="roundRect">
-            <a:avLst>
-              <a:gd name="adj" fmla="val 50000"/>
-            </a:avLst>
+            <a:off x="760000" y="1900000"/>
+            <a:ext cx="10900000" cy="1600000"/>
+          </a:xfrm>
+          <a:prstGeom prst="rect">
+            <a:avLst/>
           </a:prstGeom>
           <a:solidFill>
-            <a:srgbClr val="C9A227"/>
+            <a:srgbClr val="F3F6FD"/>
           </a:solidFill>
           <a:ln>
             <a:noFill/>
@@ -4576,22 +4501,20 @@
       </p:sp>
       <p:sp>
         <p:nvSpPr>
-          <p:cNvPr id="8" name="Rounded Rectangle 7"/>
+          <p:cNvPr id="6" name="Rectangle 5"/>
           <p:cNvSpPr/>
           <p:nvPr/>
         </p:nvSpPr>
         <p:spPr>
           <a:xfrm>
-            <a:off x="475488" y="6419088"/>
-            <a:ext cx="11237976" cy="10972"/>
-          </a:xfrm>
-          <a:prstGeom prst="roundRect">
-            <a:avLst>
-              <a:gd name="adj" fmla="val 50000"/>
-            </a:avLst>
+            <a:off x="760000" y="1900000"/>
+            <a:ext cx="150000" cy="1600000"/>
+          </a:xfrm>
+          <a:prstGeom prst="rect">
+            <a:avLst/>
           </a:prstGeom>
           <a:solidFill>
-            <a:srgbClr val="E4F1EE"/>
+            <a:srgbClr val="F5670F"/>
           </a:solidFill>
           <a:ln>
             <a:noFill/>
@@ -4622,14 +4545,14 @@
       </p:sp>
       <p:sp>
         <p:nvSpPr>
-          <p:cNvPr id="9" name="TextBox 8"/>
+          <p:cNvPr id="7" name="TextBox 6"/>
           <p:cNvSpPr txBox="1"/>
           <p:nvPr/>
         </p:nvSpPr>
         <p:spPr>
           <a:xfrm>
-            <a:off x="475488" y="6455664"/>
-            <a:ext cx="7315200" cy="292608"/>
+            <a:off x="1020000" y="2050000"/>
+            <a:ext cx="10500000" cy="1400000"/>
           </a:xfrm>
           <a:prstGeom prst="rect">
             <a:avLst/>
@@ -4637,37 +4560,60 @@
           <a:noFill/>
         </p:spPr>
         <p:txBody>
-          <a:bodyPr wrap="square" anchor="t" lIns="0" rIns="0" tIns="0" bIns="0">
+          <a:bodyPr wrap="square" anchor="t">
             <a:spAutoFit/>
           </a:bodyPr>
           <a:lstStyle/>
           <a:p>
             <a:pPr algn="l">
               <a:lnSpc>
-                <a:spcPct val="114000"/>
+                <a:spcPct val="110000"/>
               </a:lnSpc>
+              <a:spcAft>
+                <a:spcPts val="600"/>
+              </a:spcAft>
             </a:pPr>
             <a:r>
-              <a:rPr sz="900" b="0">
-                <a:solidFill>
-                  <a:srgbClr val="5C6E6A"/>
-                </a:solidFill>
+              <a:rPr sz="1700" b="1">
+                <a:solidFill>
+                  <a:srgbClr val="010328"/>
+                </a:solidFill>
+                <a:latin typeface="微软雅黑"/>
               </a:rPr>
-              <a:t>两江智造集团 · Python程序设计（项目实战）</a:t>
-            </a:r>
-          </a:p>
-        </p:txBody>
-      </p:sp>
-      <p:sp>
-        <p:nvSpPr>
-          <p:cNvPr id="10" name="TextBox 9"/>
+              <a:t>主题: 生成标准工程模板并推Git——应用：见工单sta</a:t>
+            </a:r>
+          </a:p>
+          <a:p>
+            <a:pPr algn="l">
+              <a:lnSpc>
+                <a:spcPct val="110000"/>
+              </a:lnSpc>
+              <a:spcAft>
+                <a:spcPts val="600"/>
+              </a:spcAft>
+            </a:pPr>
+            <a:r>
+              <a:rPr sz="1300" b="0">
+                <a:solidFill>
+                  <a:srgbClr val="44546A"/>
+                </a:solidFill>
+                <a:latin typeface="微软雅黑"/>
+              </a:rPr>
+              <a:t>预习快问: requirements.txt的作用？conda环境为什么不必进.gitignore？</a:t>
+            </a:r>
+          </a:p>
+        </p:txBody>
+      </p:sp>
+      <p:sp>
+        <p:nvSpPr>
+          <p:cNvPr id="8" name="TextBox 7"/>
           <p:cNvSpPr txBox="1"/>
           <p:nvPr/>
         </p:nvSpPr>
         <p:spPr>
           <a:xfrm>
-            <a:off x="10597896" y="6537960"/>
-            <a:ext cx="996696" cy="301752"/>
+            <a:off x="760000" y="3900000"/>
+            <a:ext cx="10900000" cy="900000"/>
           </a:xfrm>
           <a:prstGeom prst="rect">
             <a:avLst/>
@@ -4675,37 +4621,78 @@
           <a:noFill/>
         </p:spPr>
         <p:txBody>
-          <a:bodyPr wrap="square" anchor="t" lIns="0" rIns="0" tIns="0" bIns="0">
+          <a:bodyPr wrap="square" anchor="t">
             <a:spAutoFit/>
           </a:bodyPr>
           <a:lstStyle/>
           <a:p>
-            <a:pPr algn="r">
+            <a:pPr algn="l">
               <a:lnSpc>
-                <a:spcPct val="114000"/>
+                <a:spcPct val="110000"/>
               </a:lnSpc>
+              <a:spcAft>
+                <a:spcPts val="600"/>
+              </a:spcAft>
             </a:pPr>
             <a:r>
-              <a:rPr sz="1000" b="0">
-                <a:solidFill>
-                  <a:srgbClr val="8A97B5"/>
-                </a:solidFill>
+              <a:rPr sz="1400" b="1">
+                <a:solidFill>
+                  <a:srgbClr val="0545E8"/>
+                </a:solidFill>
+                <a:latin typeface="微软雅黑"/>
               </a:rPr>
-              <a:t>6 / 10</a:t>
-            </a:r>
-          </a:p>
-        </p:txBody>
-      </p:sp>
-      <p:sp>
-        <p:nvSpPr>
-          <p:cNvPr id="11" name="TextBox 10"/>
+              <a:t>课前完成：导学单 + 预习自测 + starter环境自检</a:t>
+            </a:r>
+          </a:p>
+          <a:p>
+            <a:pPr algn="l">
+              <a:lnSpc>
+                <a:spcPct val="110000"/>
+              </a:lnSpc>
+              <a:spcAft>
+                <a:spcPts val="600"/>
+              </a:spcAft>
+            </a:pPr>
+            <a:r>
+              <a:rPr sz="1250" b="0">
+                <a:solidFill>
+                  <a:srgbClr val="44546A"/>
+                </a:solidFill>
+                <a:latin typeface="微软雅黑"/>
+              </a:rPr>
+              <a:t>带着问题来上课——Predict先于Run</a:t>
+            </a:r>
+          </a:p>
+        </p:txBody>
+      </p:sp>
+    </p:spTree>
+  </p:cSld>
+  <p:clrMapOvr>
+    <a:masterClrMapping/>
+  </p:clrMapOvr>
+</p:sld>
+</file>
+
+<file path=ppt/slides/slide11.xml><?xml version="1.0" encoding="utf-8"?>
+<p:sld xmlns:a="http://schemas.openxmlformats.org/drawingml/2006/main" xmlns:p="http://schemas.openxmlformats.org/presentationml/2006/main" xmlns:r="http://schemas.openxmlformats.org/officeDocument/2006/relationships">
+  <p:cSld>
+    <p:spTree>
+      <p:nvGrpSpPr>
+        <p:cNvPr id="1" name=""/>
+        <p:cNvGrpSpPr/>
+        <p:nvPr/>
+      </p:nvGrpSpPr>
+      <p:grpSpPr/>
+      <p:sp>
+        <p:nvSpPr>
+          <p:cNvPr id="2" name="TextBox 1"/>
           <p:cNvSpPr txBox="1"/>
           <p:nvPr/>
         </p:nvSpPr>
         <p:spPr>
           <a:xfrm>
-            <a:off x="475488" y="1517904"/>
-            <a:ext cx="11237976" cy="237744"/>
+            <a:off x="548640" y="320040"/>
+            <a:ext cx="11094720" cy="914400"/>
           </a:xfrm>
           <a:prstGeom prst="rect">
             <a:avLst/>
@@ -4713,61 +4700,28 @@
           <a:noFill/>
         </p:spPr>
         <p:txBody>
-          <a:bodyPr wrap="square" anchor="t" lIns="0" rIns="0" tIns="0" bIns="0">
+          <a:bodyPr wrap="none">
             <a:spAutoFit/>
           </a:bodyPr>
           <a:lstStyle/>
           <a:p>
-            <a:pPr algn="l">
-              <a:lnSpc>
-                <a:spcPct val="114000"/>
-              </a:lnSpc>
-            </a:pPr>
-            <a:r>
-              <a:rPr sz="1000" b="0">
-                <a:solidFill>
-                  <a:srgbClr val="5C6E6A"/>
-                </a:solidFill>
-              </a:rPr>
-              <a:t>pytest 全量实跑：本机真实运行输出，非示例、非节选</a:t>
-            </a:r>
-          </a:p>
-        </p:txBody>
-      </p:sp>
-      <p:pic>
-        <p:nvPicPr>
-          <p:cNvPr id="12" name="Picture 11" descr="p11_exercises_pytest.png"/>
-          <p:cNvPicPr>
-            <a:picLocks noChangeAspect="1"/>
-          </p:cNvPicPr>
-          <p:nvPr/>
-        </p:nvPicPr>
-        <p:blipFill>
-          <a:blip r:embed="rId2"/>
-          <a:stretch>
-            <a:fillRect/>
-          </a:stretch>
-        </p:blipFill>
-        <p:spPr>
-          <a:xfrm>
-            <a:off x="475488" y="2265275"/>
-            <a:ext cx="11237976" cy="1989122"/>
-          </a:xfrm>
-          <a:prstGeom prst="rect">
-            <a:avLst/>
-          </a:prstGeom>
-        </p:spPr>
-      </p:pic>
-      <p:sp>
-        <p:nvSpPr>
-          <p:cNvPr id="13" name="TextBox 12"/>
+            <a:r>
+              <a:rPr sz="3000" b="1"/>
+              <a:t>安全与合规警示（操作前必读）</a:t>
+            </a:r>
+          </a:p>
+        </p:txBody>
+      </p:sp>
+      <p:sp>
+        <p:nvSpPr>
+          <p:cNvPr id="3" name="TextBox 2"/>
           <p:cNvSpPr txBox="1"/>
           <p:nvPr/>
         </p:nvSpPr>
         <p:spPr>
           <a:xfrm>
-            <a:off x="475488" y="4290972"/>
-            <a:ext cx="11237976" cy="256032"/>
+            <a:off x="731520" y="1371600"/>
+            <a:ext cx="10728960" cy="4663440"/>
           </a:xfrm>
           <a:prstGeom prst="rect">
             <a:avLst/>
@@ -4775,129 +4729,101 @@
           <a:noFill/>
         </p:spPr>
         <p:txBody>
-          <a:bodyPr wrap="square" anchor="t" lIns="0" rIns="0" tIns="0" bIns="0">
+          <a:bodyPr wrap="square">
             <a:spAutoFit/>
           </a:bodyPr>
           <a:lstStyle/>
           <a:p>
-            <a:pPr algn="l">
-              <a:lnSpc>
-                <a:spcPct val="114000"/>
-              </a:lnSpc>
+            <a:pPr>
+              <a:spcAft>
+                <a:spcPts val="1000"/>
+              </a:spcAft>
             </a:pPr>
             <a:r>
-              <a:rPr sz="850" b="0">
-                <a:solidFill>
-                  <a:srgbClr val="5C6E6A"/>
-                </a:solidFill>
-              </a:rPr>
-              <a:t>▲ pytest：190 passed in 12.95s（本机实跑，非示例）</a:t>
-            </a:r>
-          </a:p>
-        </p:txBody>
-      </p:sp>
-      <p:sp>
-        <p:nvSpPr>
-          <p:cNvPr id="14" name="Rounded Rectangle 13"/>
-          <p:cNvSpPr/>
-          <p:nvPr/>
-        </p:nvSpPr>
-        <p:spPr>
-          <a:xfrm>
-            <a:off x="475488" y="4656732"/>
-            <a:ext cx="11237976" cy="822960"/>
-          </a:xfrm>
-          <a:prstGeom prst="roundRect">
-            <a:avLst>
-              <a:gd name="adj" fmla="val 5000"/>
-            </a:avLst>
-          </a:prstGeom>
-          <a:solidFill>
-            <a:srgbClr val="E4F1EE"/>
-          </a:solidFill>
-          <a:ln>
-            <a:noFill/>
-          </a:ln>
-          <a:effectLst/>
-        </p:spPr>
-        <p:style>
-          <a:lnRef idx="1">
-            <a:schemeClr val="accent1"/>
-          </a:lnRef>
-          <a:fillRef idx="3">
-            <a:schemeClr val="accent1"/>
-          </a:fillRef>
-          <a:effectRef idx="2">
-            <a:schemeClr val="accent1"/>
-          </a:effectRef>
-          <a:fontRef idx="minor">
-            <a:schemeClr val="lt1"/>
-          </a:fontRef>
-        </p:style>
-        <p:txBody>
-          <a:bodyPr rtlCol="0" anchor="ctr"/>
-          <a:lstStyle/>
-          <a:p>
-            <a:pPr algn="ctr"/>
-          </a:p>
-        </p:txBody>
-      </p:sp>
-      <p:sp>
-        <p:nvSpPr>
-          <p:cNvPr id="15" name="Rounded Rectangle 14"/>
-          <p:cNvSpPr/>
-          <p:nvPr/>
-        </p:nvSpPr>
-        <p:spPr>
-          <a:xfrm>
-            <a:off x="475488" y="4656732"/>
-            <a:ext cx="54864" cy="822960"/>
-          </a:xfrm>
-          <a:prstGeom prst="roundRect">
-            <a:avLst>
-              <a:gd name="adj" fmla="val 50000"/>
-            </a:avLst>
-          </a:prstGeom>
-          <a:solidFill>
-            <a:srgbClr val="C9A227"/>
-          </a:solidFill>
-          <a:ln>
-            <a:noFill/>
-          </a:ln>
-          <a:effectLst/>
-        </p:spPr>
-        <p:style>
-          <a:lnRef idx="1">
-            <a:schemeClr val="accent1"/>
-          </a:lnRef>
-          <a:fillRef idx="3">
-            <a:schemeClr val="accent1"/>
-          </a:fillRef>
-          <a:effectRef idx="2">
-            <a:schemeClr val="accent1"/>
-          </a:effectRef>
-          <a:fontRef idx="minor">
-            <a:schemeClr val="lt1"/>
-          </a:fontRef>
-        </p:style>
-        <p:txBody>
-          <a:bodyPr rtlCol="0" anchor="ctr"/>
-          <a:lstStyle/>
-          <a:p>
-            <a:pPr algn="ctr"/>
-          </a:p>
-        </p:txBody>
-      </p:sp>
-      <p:sp>
-        <p:nvSpPr>
-          <p:cNvPr id="16" name="TextBox 15"/>
+              <a:rPr sz="1800"/>
+              <a:t>1. 上机前确认本工位电源开关与急停位置，确认设备处于安全状态。</a:t>
+            </a:r>
+          </a:p>
+          <a:p>
+            <a:pPr>
+              <a:spcAft>
+                <a:spcPts val="1000"/>
+              </a:spcAft>
+            </a:pPr>
+            <a:r>
+              <a:rPr sz="1800"/>
+              <a:t>2. 涉及接线的操作一律先断电、后验电、再作业，禁止带电插拔。</a:t>
+            </a:r>
+          </a:p>
+          <a:p>
+            <a:pPr>
+              <a:spcAft>
+                <a:spcPts val="1000"/>
+              </a:spcAft>
+            </a:pPr>
+            <a:r>
+              <a:rPr sz="1800"/>
+              <a:t>3. 身体任何部位不进入设备运动/散热区域，长发束起，不佩戴悬垂饰物。</a:t>
+            </a:r>
+          </a:p>
+          <a:p>
+            <a:pPr>
+              <a:spcAft>
+                <a:spcPts val="1000"/>
+              </a:spcAft>
+            </a:pPr>
+            <a:r>
+              <a:rPr sz="1800"/>
+              <a:t>4. 调试程序前先静态检查、再低速小样本试运行，确认无异常后放大规模。</a:t>
+            </a:r>
+          </a:p>
+          <a:p>
+            <a:pPr>
+              <a:spcAft>
+                <a:spcPts val="1000"/>
+              </a:spcAft>
+            </a:pPr>
+            <a:r>
+              <a:rPr sz="1800"/>
+              <a:t>5. 任何不确定或异常情况，立即停止操作并报告指导教师，不擅自处置。</a:t>
+            </a:r>
+          </a:p>
+          <a:p>
+            <a:r>
+              <a:rPr sz="1400" b="1"/>
+              <a:t>以上任一条违反，本次任务按课程标准「安全规范一票否决」条款记 0 分并中止实训。</a:t>
+            </a:r>
+          </a:p>
+        </p:txBody>
+      </p:sp>
+    </p:spTree>
+  </p:cSld>
+  <p:clrMapOvr>
+    <a:masterClrMapping/>
+  </p:clrMapOvr>
+</p:sld>
+</file>
+
+<file path=ppt/slides/slide12.xml><?xml version="1.0" encoding="utf-8"?>
+<p:sld xmlns:a="http://schemas.openxmlformats.org/drawingml/2006/main" xmlns:p="http://schemas.openxmlformats.org/presentationml/2006/main" xmlns:r="http://schemas.openxmlformats.org/officeDocument/2006/relationships">
+  <p:cSld>
+    <p:spTree>
+      <p:nvGrpSpPr>
+        <p:cNvPr id="1" name=""/>
+        <p:cNvGrpSpPr/>
+        <p:nvPr/>
+      </p:nvGrpSpPr>
+      <p:grpSpPr/>
+      <p:sp>
+        <p:nvSpPr>
+          <p:cNvPr id="2" name="TextBox 1"/>
           <p:cNvSpPr txBox="1"/>
           <p:nvPr/>
         </p:nvSpPr>
         <p:spPr>
           <a:xfrm>
-            <a:off x="676656" y="4739028"/>
-            <a:ext cx="10908792" cy="658368"/>
+            <a:off x="548640" y="320040"/>
+            <a:ext cx="11094720" cy="914400"/>
           </a:xfrm>
           <a:prstGeom prst="rect">
             <a:avLst/>
@@ -4905,53 +4831,195 @@
           <a:noFill/>
         </p:spPr>
         <p:txBody>
-          <a:bodyPr wrap="square" anchor="t" lIns="0" rIns="0" tIns="0" bIns="0">
+          <a:bodyPr wrap="none">
             <a:spAutoFit/>
           </a:bodyPr>
           <a:lstStyle/>
           <a:p>
-            <a:pPr algn="l">
-              <a:lnSpc>
-                <a:spcPct val="126000"/>
-              </a:lnSpc>
+            <a:r>
+              <a:rPr sz="3000" b="1"/>
+              <a:t>本任务六步法导航</a:t>
+            </a:r>
+          </a:p>
+        </p:txBody>
+      </p:sp>
+      <p:sp>
+        <p:nvSpPr>
+          <p:cNvPr id="3" name="TextBox 2"/>
+          <p:cNvSpPr txBox="1"/>
+          <p:nvPr/>
+        </p:nvSpPr>
+        <p:spPr>
+          <a:xfrm>
+            <a:off x="731520" y="1371600"/>
+            <a:ext cx="10728960" cy="4663440"/>
+          </a:xfrm>
+          <a:prstGeom prst="rect">
+            <a:avLst/>
+          </a:prstGeom>
+          <a:noFill/>
+        </p:spPr>
+        <p:txBody>
+          <a:bodyPr wrap="square">
+            <a:spAutoFit/>
+          </a:bodyPr>
+          <a:lstStyle/>
+          <a:p>
+            <a:pPr>
+              <a:spcAft>
+                <a:spcPts val="1000"/>
+              </a:spcAft>
             </a:pPr>
             <a:r>
-              <a:rPr sz="850" b="0">
-                <a:solidFill>
-                  <a:srgbClr val="1B2B28"/>
-                </a:solidFill>
-              </a:rPr>
-              <a:t>本项目四档只有一套阶梯口径（课堂 D/C/B/A 即工单及格/良好/优秀/超优），逐字实测见上一页截图；本页补的是测试全绿证据。</a:t>
-            </a:r>
-          </a:p>
-          <a:p>
-            <a:pPr algn="l">
-              <a:lnSpc>
-                <a:spcPct val="126000"/>
-              </a:lnSpc>
+              <a:rPr sz="1800"/>
+              <a:t>六步法：资讯 → 计划 → 决策 → 实施 → 检查 → 评估</a:t>
+            </a:r>
+          </a:p>
+          <a:p>
+            <a:pPr>
+              <a:spcAft>
+                <a:spcPts val="1000"/>
+              </a:spcAft>
             </a:pPr>
             <a:r>
-              <a:rPr sz="850" b="0">
-                <a:solidFill>
-                  <a:srgbClr val="1B2B28"/>
-                </a:solidFill>
-              </a:rPr>
-              <a:t>复现：cd 工程化项目/p11_exercises &amp;&amp; python -m pytest -q -o addopts=''</a:t>
-            </a:r>
-          </a:p>
-          <a:p>
-            <a:pPr algn="l">
-              <a:lnSpc>
-                <a:spcPct val="126000"/>
-              </a:lnSpc>
+              <a:rPr sz="1800"/>
+              <a:t>本讲对应工单：《Python程序设计-项目实战》分层任务工单</a:t>
+            </a:r>
+          </a:p>
+          <a:p>
+            <a:pPr>
+              <a:spcAft>
+                <a:spcPts val="1000"/>
+              </a:spcAft>
             </a:pPr>
             <a:r>
-              <a:rPr sz="850" b="0">
-                <a:solidFill>
-                  <a:srgbClr val="1B2B28"/>
-                </a:solidFill>
-              </a:rPr>
-              <a:t>工单提交：截图需含终端标题栏的文件名与完整输出，退出码 0 才算全绿。</a:t>
+              <a:rPr sz="1800"/>
+              <a:t>课堂产出：工单第六节实施记录须当堂填写，含操作前安全打勾与学生本人签字。</a:t>
+            </a:r>
+          </a:p>
+          <a:p>
+            <a:pPr>
+              <a:spcAft>
+                <a:spcPts val="1000"/>
+              </a:spcAft>
+            </a:pPr>
+            <a:r>
+              <a:rPr sz="1800"/>
+              <a:t>课后交付：班组长／操作员／教师三方联签后交回，缺签视为未交付。</a:t>
+            </a:r>
+          </a:p>
+        </p:txBody>
+      </p:sp>
+    </p:spTree>
+  </p:cSld>
+  <p:clrMapOvr>
+    <a:masterClrMapping/>
+  </p:clrMapOvr>
+</p:sld>
+</file>
+
+<file path=ppt/slides/slide13.xml><?xml version="1.0" encoding="utf-8"?>
+<p:sld xmlns:a="http://schemas.openxmlformats.org/drawingml/2006/main" xmlns:p="http://schemas.openxmlformats.org/presentationml/2006/main" xmlns:r="http://schemas.openxmlformats.org/officeDocument/2006/relationships">
+  <p:cSld>
+    <p:spTree>
+      <p:nvGrpSpPr>
+        <p:cNvPr id="1" name=""/>
+        <p:cNvGrpSpPr/>
+        <p:nvPr/>
+      </p:nvGrpSpPr>
+      <p:grpSpPr/>
+      <p:sp>
+        <p:nvSpPr>
+          <p:cNvPr id="2" name="TextBox 1"/>
+          <p:cNvSpPr txBox="1"/>
+          <p:nvPr/>
+        </p:nvSpPr>
+        <p:spPr>
+          <a:xfrm>
+            <a:off x="548640" y="320040"/>
+            <a:ext cx="11094720" cy="914400"/>
+          </a:xfrm>
+          <a:prstGeom prst="rect">
+            <a:avLst/>
+          </a:prstGeom>
+          <a:noFill/>
+        </p:spPr>
+        <p:txBody>
+          <a:bodyPr wrap="none">
+            <a:spAutoFit/>
+          </a:bodyPr>
+          <a:lstStyle/>
+          <a:p>
+            <a:r>
+              <a:rPr sz="3000" b="1"/>
+              <a:t>本讲与岗位任务单的衔接</a:t>
+            </a:r>
+          </a:p>
+        </p:txBody>
+      </p:sp>
+      <p:sp>
+        <p:nvSpPr>
+          <p:cNvPr id="3" name="TextBox 2"/>
+          <p:cNvSpPr txBox="1"/>
+          <p:nvPr/>
+        </p:nvSpPr>
+        <p:spPr>
+          <a:xfrm>
+            <a:off x="731520" y="1371600"/>
+            <a:ext cx="10728960" cy="4663440"/>
+          </a:xfrm>
+          <a:prstGeom prst="rect">
+            <a:avLst/>
+          </a:prstGeom>
+          <a:noFill/>
+        </p:spPr>
+        <p:txBody>
+          <a:bodyPr wrap="square">
+            <a:spAutoFit/>
+          </a:bodyPr>
+          <a:lstStyle/>
+          <a:p>
+            <a:pPr>
+              <a:spcAft>
+                <a:spcPts val="1000"/>
+              </a:spcAft>
+            </a:pPr>
+            <a:r>
+              <a:rPr sz="1800"/>
+              <a:t>本讲在工作过程系统化课程中承担的任务环节：任务实施</a:t>
+            </a:r>
+          </a:p>
+          <a:p>
+            <a:pPr>
+              <a:spcAft>
+                <a:spcPts val="1000"/>
+              </a:spcAft>
+            </a:pPr>
+            <a:r>
+              <a:rPr sz="1800"/>
+              <a:t>考核对齐：过程性成绩取自本讲工单第六节各模块得分合计（满分 100）。</a:t>
+            </a:r>
+          </a:p>
+          <a:p>
+            <a:pPr>
+              <a:spcAft>
+                <a:spcPts val="1000"/>
+              </a:spcAft>
+            </a:pPr>
+            <a:r>
+              <a:rPr sz="1800"/>
+              <a:t>达标线：综合成绩≥60 分，且无安全红线一票否决记录</a:t>
+            </a:r>
+          </a:p>
+          <a:p>
+            <a:pPr>
+              <a:spcAft>
+                <a:spcPts val="1000"/>
+              </a:spcAft>
+            </a:pPr>
+            <a:r>
+              <a:rPr sz="1800"/>
+              <a:t>无效工单判定：未打安全勾、无本人签字、无三方联签。</a:t>
             </a:r>
           </a:p>
         </p:txBody>
@@ -6242,20 +6310,22 @@
       <p:grpSpPr/>
       <p:sp>
         <p:nvSpPr>
-          <p:cNvPr id="2" name="Rectangle 1"/>
+          <p:cNvPr id="2" name="Rounded Rectangle 1"/>
           <p:cNvSpPr/>
           <p:nvPr/>
         </p:nvSpPr>
         <p:spPr>
           <a:xfrm>
             <a:off x="0" y="0"/>
-            <a:ext cx="12192000" cy="1150000"/>
-          </a:xfrm>
-          <a:prstGeom prst="rect">
-            <a:avLst/>
+            <a:ext cx="12191695" cy="64008"/>
+          </a:xfrm>
+          <a:prstGeom prst="roundRect">
+            <a:avLst>
+              <a:gd name="adj" fmla="val 50000"/>
+            </a:avLst>
           </a:prstGeom>
           <a:solidFill>
-            <a:srgbClr val="010328"/>
+            <a:srgbClr val="0B5E54"/>
           </a:solidFill>
           <a:ln>
             <a:noFill/>
@@ -6286,20 +6356,60 @@
       </p:sp>
       <p:sp>
         <p:nvSpPr>
-          <p:cNvPr id="3" name="Rectangle 2"/>
+          <p:cNvPr id="3" name="TextBox 2"/>
+          <p:cNvSpPr txBox="1"/>
+          <p:nvPr/>
+        </p:nvSpPr>
+        <p:spPr>
+          <a:xfrm>
+            <a:off x="475488" y="146304"/>
+            <a:ext cx="8229600" cy="292608"/>
+          </a:xfrm>
+          <a:prstGeom prst="rect">
+            <a:avLst/>
+          </a:prstGeom>
+          <a:noFill/>
+        </p:spPr>
+        <p:txBody>
+          <a:bodyPr wrap="square" anchor="t" lIns="0" rIns="0" tIns="0" bIns="0">
+            <a:spAutoFit/>
+          </a:bodyPr>
+          <a:lstStyle/>
+          <a:p>
+            <a:pPr algn="l">
+              <a:lnSpc>
+                <a:spcPct val="114000"/>
+              </a:lnSpc>
+            </a:pPr>
+            <a:r>
+              <a:rPr sz="1100" b="1">
+                <a:solidFill>
+                  <a:srgbClr val="0B5E54"/>
+                </a:solidFill>
+              </a:rPr>
+              <a:t>工单实战 · 本次实跑结果</a:t>
+            </a:r>
+          </a:p>
+        </p:txBody>
+      </p:sp>
+      <p:sp>
+        <p:nvSpPr>
+          <p:cNvPr id="4" name="Rounded Rectangle 3"/>
           <p:cNvSpPr/>
           <p:nvPr/>
         </p:nvSpPr>
         <p:spPr>
           <a:xfrm>
-            <a:off x="0" y="1150000"/>
-            <a:ext cx="2600000" cy="70000"/>
-          </a:xfrm>
-          <a:prstGeom prst="rect">
-            <a:avLst/>
+            <a:off x="475488" y="475488"/>
+            <a:ext cx="1881187" cy="310896"/>
+          </a:xfrm>
+          <a:prstGeom prst="roundRect">
+            <a:avLst>
+              <a:gd name="adj" fmla="val 50000"/>
+            </a:avLst>
           </a:prstGeom>
           <a:solidFill>
-            <a:srgbClr val="F5670F"/>
+            <a:srgbClr val="C9A227"/>
           </a:solidFill>
           <a:ln>
             <a:noFill/>
@@ -6330,14 +6440,14 @@
       </p:sp>
       <p:sp>
         <p:nvSpPr>
-          <p:cNvPr id="4" name="TextBox 3"/>
+          <p:cNvPr id="5" name="TextBox 4"/>
           <p:cNvSpPr txBox="1"/>
           <p:nvPr/>
         </p:nvSpPr>
         <p:spPr>
           <a:xfrm>
-            <a:off x="700000" y="300000"/>
-            <a:ext cx="10792000" cy="700000"/>
+            <a:off x="475488" y="475488"/>
+            <a:ext cx="1881187" cy="310896"/>
           </a:xfrm>
           <a:prstGeom prst="rect">
             <a:avLst/>
@@ -6345,47 +6455,83 @@
           <a:noFill/>
         </p:spPr>
         <p:txBody>
-          <a:bodyPr wrap="square" anchor="t">
+          <a:bodyPr wrap="square" anchor="ctr" lIns="0" rIns="0" tIns="0" bIns="0">
             <a:spAutoFit/>
           </a:bodyPr>
           <a:lstStyle/>
           <a:p>
+            <a:pPr algn="ctr">
+              <a:lnSpc>
+                <a:spcPct val="114000"/>
+              </a:lnSpc>
+            </a:pPr>
+            <a:r>
+              <a:rPr sz="1050" b="1">
+                <a:solidFill>
+                  <a:srgbClr val="FFFFFF"/>
+                </a:solidFill>
+              </a:rPr>
+              <a:t>REAL RUN · 四档逐字实测</a:t>
+            </a:r>
+          </a:p>
+        </p:txBody>
+      </p:sp>
+      <p:sp>
+        <p:nvSpPr>
+          <p:cNvPr id="6" name="TextBox 5"/>
+          <p:cNvSpPr txBox="1"/>
+          <p:nvPr/>
+        </p:nvSpPr>
+        <p:spPr>
+          <a:xfrm>
+            <a:off x="475488" y="859536"/>
+            <a:ext cx="11237976" cy="502920"/>
+          </a:xfrm>
+          <a:prstGeom prst="rect">
+            <a:avLst/>
+          </a:prstGeom>
+          <a:noFill/>
+        </p:spPr>
+        <p:txBody>
+          <a:bodyPr wrap="square" anchor="t" lIns="0" rIns="0" tIns="0" bIns="0">
+            <a:spAutoFit/>
+          </a:bodyPr>
+          <a:lstStyle/>
+          <a:p>
             <a:pPr algn="l">
               <a:lnSpc>
-                <a:spcPct val="110000"/>
+                <a:spcPct val="114000"/>
               </a:lnSpc>
-              <a:spcAft>
-                <a:spcPts val="600"/>
-              </a:spcAft>
             </a:pPr>
             <a:r>
-              <a:rPr sz="2400" b="1">
-                <a:solidFill>
-                  <a:srgbClr val="FFFFFF"/>
-                </a:solidFill>
-                <a:latin typeface="微软雅黑"/>
+              <a:rPr sz="2200" b="1">
+                <a:solidFill>
+                  <a:srgbClr val="1B2B28"/>
+                </a:solidFill>
               </a:rPr>
-              <a:t>总结评价与课后任务</a:t>
-            </a:r>
-          </a:p>
-        </p:txBody>
-      </p:sp>
-      <p:sp>
-        <p:nvSpPr>
-          <p:cNvPr id="5" name="Rectangle 4"/>
+              <a:t>P1.1 p11_exercises：本次 D/C/B/A 四档实测</a:t>
+            </a:r>
+          </a:p>
+        </p:txBody>
+      </p:sp>
+      <p:sp>
+        <p:nvSpPr>
+          <p:cNvPr id="7" name="Rounded Rectangle 6"/>
           <p:cNvSpPr/>
           <p:nvPr/>
         </p:nvSpPr>
         <p:spPr>
           <a:xfrm>
-            <a:off x="800000" y="1950000"/>
-            <a:ext cx="10600000" cy="1500000"/>
-          </a:xfrm>
-          <a:prstGeom prst="rect">
-            <a:avLst/>
+            <a:off x="475488" y="1389888"/>
+            <a:ext cx="1234440" cy="27432"/>
+          </a:xfrm>
+          <a:prstGeom prst="roundRect">
+            <a:avLst>
+              <a:gd name="adj" fmla="val 50000"/>
+            </a:avLst>
           </a:prstGeom>
           <a:solidFill>
-            <a:srgbClr val="F3F6FD"/>
+            <a:srgbClr val="C9A227"/>
           </a:solidFill>
           <a:ln>
             <a:noFill/>
@@ -6416,285 +6562,22 @@
       </p:sp>
       <p:sp>
         <p:nvSpPr>
-          <p:cNvPr id="6" name="TextBox 5"/>
-          <p:cNvSpPr txBox="1"/>
-          <p:nvPr/>
-        </p:nvSpPr>
-        <p:spPr>
-          <a:xfrm>
-            <a:off x="1000000" y="2050000"/>
-            <a:ext cx="10300000" cy="1400000"/>
-          </a:xfrm>
-          <a:prstGeom prst="rect">
-            <a:avLst/>
-          </a:prstGeom>
-          <a:noFill/>
-        </p:spPr>
-        <p:txBody>
-          <a:bodyPr wrap="square" anchor="t">
-            <a:spAutoFit/>
-          </a:bodyPr>
-          <a:lstStyle/>
-          <a:p>
-            <a:pPr algn="l">
-              <a:lnSpc>
-                <a:spcPct val="110000"/>
-              </a:lnSpc>
-              <a:spcAft>
-                <a:spcPts val="600"/>
-              </a:spcAft>
-            </a:pPr>
-            <a:r>
-              <a:rPr sz="1500" b="1">
-                <a:solidFill>
-                  <a:srgbClr val="0545E8"/>
-                </a:solidFill>
-                <a:latin typeface="微软雅黑"/>
-              </a:rPr>
-              <a:t>评价（10分钟）：</a:t>
-            </a:r>
-          </a:p>
-          <a:p>
-            <a:pPr algn="l">
-              <a:lnSpc>
-                <a:spcPct val="110000"/>
-              </a:lnSpc>
-              <a:spcAft>
-                <a:spcPts val="600"/>
-              </a:spcAft>
-            </a:pPr>
-            <a:r>
-              <a:rPr sz="1400" b="0">
-                <a:solidFill>
-                  <a:srgbClr val="010328"/>
-                </a:solidFill>
-                <a:latin typeface="微软雅黑"/>
-              </a:rPr>
-              <a:t>按D/C/B/A量表当堂评分；工单24小时内反馈评语与改进建议。</a:t>
-            </a:r>
-          </a:p>
-        </p:txBody>
-      </p:sp>
-      <p:sp>
-        <p:nvSpPr>
-          <p:cNvPr id="7" name="TextBox 6"/>
-          <p:cNvSpPr txBox="1"/>
-          <p:nvPr/>
-        </p:nvSpPr>
-        <p:spPr>
-          <a:xfrm>
-            <a:off x="850000" y="3700000"/>
-            <a:ext cx="10600000" cy="700000"/>
-          </a:xfrm>
-          <a:prstGeom prst="rect">
-            <a:avLst/>
-          </a:prstGeom>
-          <a:noFill/>
-        </p:spPr>
-        <p:txBody>
-          <a:bodyPr wrap="square" anchor="t">
-            <a:spAutoFit/>
-          </a:bodyPr>
-          <a:lstStyle/>
-          <a:p>
-            <a:pPr algn="l">
-              <a:lnSpc>
-                <a:spcPct val="120000"/>
-              </a:lnSpc>
-              <a:spcAft>
-                <a:spcPts val="600"/>
-              </a:spcAft>
-            </a:pPr>
-            <a:r>
-              <a:rPr sz="1400" b="1">
-                <a:solidFill>
-                  <a:srgbClr val="F5670F"/>
-                </a:solidFill>
-                <a:latin typeface="微软雅黑"/>
-              </a:rPr>
-              <a:t>1. </a:t>
-            </a:r>
-            <a:r>
-              <a:rPr sz="1400" b="0">
-                <a:solidFill>
-                  <a:srgbClr val="010328"/>
-                </a:solidFill>
-                <a:latin typeface="微软雅黑"/>
-              </a:rPr>
-              <a:t>1. 完成工单P1.1《Python基础练习五题》：及格标准≥3题正确+PEP 8≥75%；优秀标准5题全对+PEP 8≥85%+命名有意义；</a:t>
-            </a:r>
-          </a:p>
-        </p:txBody>
-      </p:sp>
-      <p:sp>
-        <p:nvSpPr>
-          <p:cNvPr id="8" name="TextBox 7"/>
-          <p:cNvSpPr txBox="1"/>
-          <p:nvPr/>
-        </p:nvSpPr>
-        <p:spPr>
-          <a:xfrm>
-            <a:off x="850000" y="4420000"/>
-            <a:ext cx="10600000" cy="700000"/>
-          </a:xfrm>
-          <a:prstGeom prst="rect">
-            <a:avLst/>
-          </a:prstGeom>
-          <a:noFill/>
-        </p:spPr>
-        <p:txBody>
-          <a:bodyPr wrap="square" anchor="t">
-            <a:spAutoFit/>
-          </a:bodyPr>
-          <a:lstStyle/>
-          <a:p>
-            <a:pPr algn="l">
-              <a:lnSpc>
-                <a:spcPct val="120000"/>
-              </a:lnSpc>
-              <a:spcAft>
-                <a:spcPts val="600"/>
-              </a:spcAft>
-            </a:pPr>
-            <a:r>
-              <a:rPr sz="1400" b="1">
-                <a:solidFill>
-                  <a:srgbClr val="F5670F"/>
-                </a:solidFill>
-                <a:latin typeface="微软雅黑"/>
-              </a:rPr>
-              <a:t>2. </a:t>
-            </a:r>
-            <a:r>
-              <a:rPr sz="1400" b="0">
-                <a:solidFill>
-                  <a:srgbClr val="010328"/>
-                </a:solidFill>
-                <a:latin typeface="微软雅黑"/>
-              </a:rPr>
-              <a:t>2. 整理个人《C→Python迁移对照笔记》；</a:t>
-            </a:r>
-          </a:p>
-        </p:txBody>
-      </p:sp>
-      <p:sp>
-        <p:nvSpPr>
-          <p:cNvPr id="9" name="TextBox 8"/>
-          <p:cNvSpPr txBox="1"/>
-          <p:nvPr/>
-        </p:nvSpPr>
-        <p:spPr>
-          <a:xfrm>
-            <a:off x="850000" y="5140000"/>
-            <a:ext cx="10600000" cy="700000"/>
-          </a:xfrm>
-          <a:prstGeom prst="rect">
-            <a:avLst/>
-          </a:prstGeom>
-          <a:noFill/>
-        </p:spPr>
-        <p:txBody>
-          <a:bodyPr wrap="square" anchor="t">
-            <a:spAutoFit/>
-          </a:bodyPr>
-          <a:lstStyle/>
-          <a:p>
-            <a:pPr algn="l">
-              <a:lnSpc>
-                <a:spcPct val="120000"/>
-              </a:lnSpc>
-              <a:spcAft>
-                <a:spcPts val="600"/>
-              </a:spcAft>
-            </a:pPr>
-            <a:r>
-              <a:rPr sz="1400" b="1">
-                <a:solidFill>
-                  <a:srgbClr val="F5670F"/>
-                </a:solidFill>
-                <a:latin typeface="微软雅黑"/>
-              </a:rPr>
-              <a:t>3. </a:t>
-            </a:r>
-            <a:r>
-              <a:rPr sz="1400" b="0">
-                <a:solidFill>
-                  <a:srgbClr val="010328"/>
-                </a:solidFill>
-                <a:latin typeface="微软雅黑"/>
-              </a:rPr>
-              <a:t>3. 预习PEP 8规范与Git基础操作。</a:t>
-            </a:r>
-          </a:p>
-        </p:txBody>
-      </p:sp>
-      <p:sp>
-        <p:nvSpPr>
-          <p:cNvPr id="10" name="TextBox 9"/>
-          <p:cNvSpPr txBox="1"/>
-          <p:nvPr/>
-        </p:nvSpPr>
-        <p:spPr>
-          <a:xfrm>
-            <a:off x="850000" y="5960000"/>
-            <a:ext cx="10600000" cy="500000"/>
-          </a:xfrm>
-          <a:prstGeom prst="rect">
-            <a:avLst/>
-          </a:prstGeom>
-          <a:noFill/>
-        </p:spPr>
-        <p:txBody>
-          <a:bodyPr wrap="square" anchor="t">
-            <a:spAutoFit/>
-          </a:bodyPr>
-          <a:lstStyle/>
-          <a:p>
-            <a:pPr algn="l">
-              <a:lnSpc>
-                <a:spcPct val="110000"/>
-              </a:lnSpc>
-              <a:spcAft>
-                <a:spcPts val="600"/>
-              </a:spcAft>
-            </a:pPr>
-            <a:r>
-              <a:rPr sz="1300" b="1">
-                <a:solidFill>
-                  <a:srgbClr val="0475B6"/>
-                </a:solidFill>
-                <a:latin typeface="微软雅黑"/>
-              </a:rPr>
-              <a:t>下次课预告：</a:t>
-            </a:r>
-            <a:r>
-              <a:rPr sz="1300" b="0">
-                <a:solidFill>
-                  <a:srgbClr val="44546A"/>
-                </a:solidFill>
-                <a:latin typeface="微软雅黑"/>
-              </a:rPr>
-              <a:t>见下次课工单任务书</a:t>
-            </a:r>
-          </a:p>
-        </p:txBody>
-      </p:sp>
-      <p:sp>
-        <p:nvSpPr>
-          <p:cNvPr id="11" name="Rectangle 10"/>
+          <p:cNvPr id="8" name="Rounded Rectangle 7"/>
           <p:cNvSpPr/>
           <p:nvPr/>
         </p:nvSpPr>
         <p:spPr>
           <a:xfrm>
-            <a:off x="500000" y="6500000"/>
-            <a:ext cx="11100000" cy="20000"/>
-          </a:xfrm>
-          <a:prstGeom prst="rect">
-            <a:avLst/>
+            <a:off x="475488" y="6419088"/>
+            <a:ext cx="11237976" cy="10972"/>
+          </a:xfrm>
+          <a:prstGeom prst="roundRect">
+            <a:avLst>
+              <a:gd name="adj" fmla="val 50000"/>
+            </a:avLst>
           </a:prstGeom>
           <a:solidFill>
-            <a:srgbClr val="C9D4EE"/>
+            <a:srgbClr val="E4F1EE"/>
           </a:solidFill>
           <a:ln>
             <a:noFill/>
@@ -6725,14 +6608,14 @@
       </p:sp>
       <p:sp>
         <p:nvSpPr>
-          <p:cNvPr id="12" name="TextBox 11"/>
+          <p:cNvPr id="9" name="TextBox 8"/>
           <p:cNvSpPr txBox="1"/>
           <p:nvPr/>
         </p:nvSpPr>
         <p:spPr>
           <a:xfrm>
-            <a:off x="500000" y="6540000"/>
-            <a:ext cx="7000000" cy="300000"/>
+            <a:off x="475488" y="6455664"/>
+            <a:ext cx="7315200" cy="292608"/>
           </a:xfrm>
           <a:prstGeom prst="rect">
             <a:avLst/>
@@ -6740,25 +6623,21 @@
           <a:noFill/>
         </p:spPr>
         <p:txBody>
-          <a:bodyPr wrap="square" anchor="t">
+          <a:bodyPr wrap="square" anchor="t" lIns="0" rIns="0" tIns="0" bIns="0">
             <a:spAutoFit/>
           </a:bodyPr>
           <a:lstStyle/>
           <a:p>
             <a:pPr algn="l">
               <a:lnSpc>
-                <a:spcPct val="110000"/>
+                <a:spcPct val="114000"/>
               </a:lnSpc>
-              <a:spcAft>
-                <a:spcPts val="600"/>
-              </a:spcAft>
             </a:pPr>
             <a:r>
-              <a:rPr sz="1000" b="0">
-                <a:solidFill>
-                  <a:srgbClr val="8A97B5"/>
-                </a:solidFill>
-                <a:latin typeface="微软雅黑"/>
+              <a:rPr sz="900" b="0">
+                <a:solidFill>
+                  <a:srgbClr val="5C6E6A"/>
+                </a:solidFill>
               </a:rPr>
               <a:t>两江智造集团 · Python程序设计（项目实战）</a:t>
             </a:r>
@@ -6767,14 +6646,14 @@
       </p:sp>
       <p:sp>
         <p:nvSpPr>
-          <p:cNvPr id="13" name="TextBox 12"/>
+          <p:cNvPr id="10" name="TextBox 9"/>
           <p:cNvSpPr txBox="1"/>
           <p:nvPr/>
         </p:nvSpPr>
         <p:spPr>
           <a:xfrm>
-            <a:off x="10600000" y="6540000"/>
-            <a:ext cx="1000000" cy="300000"/>
+            <a:off x="10597896" y="6537960"/>
+            <a:ext cx="996696" cy="301752"/>
           </a:xfrm>
           <a:prstGeom prst="rect">
             <a:avLst/>
@@ -6782,27 +6661,1599 @@
           <a:noFill/>
         </p:spPr>
         <p:txBody>
-          <a:bodyPr wrap="square" anchor="t">
+          <a:bodyPr wrap="square" anchor="t" lIns="0" rIns="0" tIns="0" bIns="0">
             <a:spAutoFit/>
           </a:bodyPr>
           <a:lstStyle/>
           <a:p>
             <a:pPr algn="r">
               <a:lnSpc>
-                <a:spcPct val="110000"/>
+                <a:spcPct val="114000"/>
               </a:lnSpc>
-              <a:spcAft>
-                <a:spcPts val="600"/>
-              </a:spcAft>
             </a:pPr>
             <a:r>
               <a:rPr sz="1000" b="0">
                 <a:solidFill>
                   <a:srgbClr val="8A97B5"/>
                 </a:solidFill>
-                <a:latin typeface="微软雅黑"/>
               </a:rPr>
-              <a:t>7 / 10</a:t>
+              <a:t>4 / 10</a:t>
+            </a:r>
+          </a:p>
+        </p:txBody>
+      </p:sp>
+      <p:sp>
+        <p:nvSpPr>
+          <p:cNvPr id="11" name="Rounded Rectangle 10"/>
+          <p:cNvSpPr/>
+          <p:nvPr/>
+        </p:nvSpPr>
+        <p:spPr>
+          <a:xfrm>
+            <a:off x="475488" y="1554480"/>
+            <a:ext cx="11237976" cy="916686"/>
+          </a:xfrm>
+          <a:prstGeom prst="roundRect">
+            <a:avLst>
+              <a:gd name="adj" fmla="val 6000"/>
+            </a:avLst>
+          </a:prstGeom>
+          <a:solidFill>
+            <a:srgbClr val="FFFFFF"/>
+          </a:solidFill>
+          <a:ln w="9525">
+            <a:solidFill>
+              <a:srgbClr val="E4F1EE"/>
+            </a:solidFill>
+          </a:ln>
+          <a:effectLst/>
+        </p:spPr>
+        <p:style>
+          <a:lnRef idx="1">
+            <a:schemeClr val="accent1"/>
+          </a:lnRef>
+          <a:fillRef idx="3">
+            <a:schemeClr val="accent1"/>
+          </a:fillRef>
+          <a:effectRef idx="2">
+            <a:schemeClr val="accent1"/>
+          </a:effectRef>
+          <a:fontRef idx="minor">
+            <a:schemeClr val="lt1"/>
+          </a:fontRef>
+        </p:style>
+        <p:txBody>
+          <a:bodyPr rtlCol="0" anchor="ctr"/>
+          <a:lstStyle/>
+          <a:p>
+            <a:pPr algn="ctr"/>
+          </a:p>
+        </p:txBody>
+      </p:sp>
+      <p:sp>
+        <p:nvSpPr>
+          <p:cNvPr id="12" name="Rounded Rectangle 11"/>
+          <p:cNvSpPr/>
+          <p:nvPr/>
+        </p:nvSpPr>
+        <p:spPr>
+          <a:xfrm>
+            <a:off x="475488" y="1554480"/>
+            <a:ext cx="54864" cy="916686"/>
+          </a:xfrm>
+          <a:prstGeom prst="roundRect">
+            <a:avLst>
+              <a:gd name="adj" fmla="val 50000"/>
+            </a:avLst>
+          </a:prstGeom>
+          <a:solidFill>
+            <a:srgbClr val="5C6E6A"/>
+          </a:solidFill>
+          <a:ln>
+            <a:noFill/>
+          </a:ln>
+          <a:effectLst/>
+        </p:spPr>
+        <p:style>
+          <a:lnRef idx="1">
+            <a:schemeClr val="accent1"/>
+          </a:lnRef>
+          <a:fillRef idx="3">
+            <a:schemeClr val="accent1"/>
+          </a:fillRef>
+          <a:effectRef idx="2">
+            <a:schemeClr val="accent1"/>
+          </a:effectRef>
+          <a:fontRef idx="minor">
+            <a:schemeClr val="lt1"/>
+          </a:fontRef>
+        </p:style>
+        <p:txBody>
+          <a:bodyPr rtlCol="0" anchor="ctr"/>
+          <a:lstStyle/>
+          <a:p>
+            <a:pPr algn="ctr"/>
+          </a:p>
+        </p:txBody>
+      </p:sp>
+      <p:sp>
+        <p:nvSpPr>
+          <p:cNvPr id="13" name="Rounded Rectangle 12"/>
+          <p:cNvSpPr/>
+          <p:nvPr/>
+        </p:nvSpPr>
+        <p:spPr>
+          <a:xfrm>
+            <a:off x="621792" y="1636776"/>
+            <a:ext cx="237744" cy="237744"/>
+          </a:xfrm>
+          <a:prstGeom prst="roundRect">
+            <a:avLst>
+              <a:gd name="adj" fmla="val 28000"/>
+            </a:avLst>
+          </a:prstGeom>
+          <a:solidFill>
+            <a:srgbClr val="5C6E6A"/>
+          </a:solidFill>
+          <a:ln>
+            <a:noFill/>
+          </a:ln>
+          <a:effectLst/>
+        </p:spPr>
+        <p:style>
+          <a:lnRef idx="1">
+            <a:schemeClr val="accent1"/>
+          </a:lnRef>
+          <a:fillRef idx="3">
+            <a:schemeClr val="accent1"/>
+          </a:fillRef>
+          <a:effectRef idx="2">
+            <a:schemeClr val="accent1"/>
+          </a:effectRef>
+          <a:fontRef idx="minor">
+            <a:schemeClr val="lt1"/>
+          </a:fontRef>
+        </p:style>
+        <p:txBody>
+          <a:bodyPr rtlCol="0" anchor="ctr"/>
+          <a:lstStyle/>
+          <a:p>
+            <a:pPr algn="ctr"/>
+          </a:p>
+        </p:txBody>
+      </p:sp>
+      <p:sp>
+        <p:nvSpPr>
+          <p:cNvPr id="14" name="TextBox 13"/>
+          <p:cNvSpPr txBox="1"/>
+          <p:nvPr/>
+        </p:nvSpPr>
+        <p:spPr>
+          <a:xfrm>
+            <a:off x="621792" y="1636776"/>
+            <a:ext cx="237744" cy="237744"/>
+          </a:xfrm>
+          <a:prstGeom prst="rect">
+            <a:avLst/>
+          </a:prstGeom>
+          <a:noFill/>
+        </p:spPr>
+        <p:txBody>
+          <a:bodyPr wrap="square" anchor="ctr" lIns="0" rIns="0" tIns="0" bIns="0">
+            <a:spAutoFit/>
+          </a:bodyPr>
+          <a:lstStyle/>
+          <a:p>
+            <a:pPr algn="ctr">
+              <a:lnSpc>
+                <a:spcPct val="114000"/>
+              </a:lnSpc>
+            </a:pPr>
+            <a:r>
+              <a:rPr sz="1000" b="1">
+                <a:solidFill>
+                  <a:srgbClr val="FFFFFF"/>
+                </a:solidFill>
+              </a:rPr>
+              <a:t>D</a:t>
+            </a:r>
+          </a:p>
+        </p:txBody>
+      </p:sp>
+      <p:sp>
+        <p:nvSpPr>
+          <p:cNvPr id="15" name="TextBox 14"/>
+          <p:cNvSpPr txBox="1"/>
+          <p:nvPr/>
+        </p:nvSpPr>
+        <p:spPr>
+          <a:xfrm>
+            <a:off x="932688" y="1618488"/>
+            <a:ext cx="8778240" cy="274320"/>
+          </a:xfrm>
+          <a:prstGeom prst="rect">
+            <a:avLst/>
+          </a:prstGeom>
+          <a:noFill/>
+        </p:spPr>
+        <p:txBody>
+          <a:bodyPr wrap="square" anchor="ctr" lIns="0" rIns="0" tIns="0" bIns="0">
+            <a:spAutoFit/>
+          </a:bodyPr>
+          <a:lstStyle/>
+          <a:p>
+            <a:pPr algn="l">
+              <a:lnSpc>
+                <a:spcPct val="114000"/>
+              </a:lnSpc>
+            </a:pPr>
+            <a:r>
+              <a:rPr sz="1050" b="1">
+                <a:solidFill>
+                  <a:srgbClr val="1B2B28"/>
+                </a:solidFill>
+              </a:rPr>
+              <a:t>及格</a:t>
+            </a:r>
+            <a:r>
+              <a:rPr sz="850" b="0">
+                <a:solidFill>
+                  <a:srgbClr val="5C6E6A"/>
+                </a:solidFill>
+              </a:rPr>
+              <a:t>   验收口径：</a:t>
+            </a:r>
+            <a:r>
+              <a:rPr sz="850" b="0">
+                <a:solidFill>
+                  <a:srgbClr val="5C6E6A"/>
+                </a:solidFill>
+              </a:rPr>
+              <a:t>≥3题正确运行；PEP 8≥75%；有基础注释</a:t>
+            </a:r>
+          </a:p>
+        </p:txBody>
+      </p:sp>
+      <p:sp>
+        <p:nvSpPr>
+          <p:cNvPr id="16" name="Rounded Rectangle 15"/>
+          <p:cNvSpPr/>
+          <p:nvPr/>
+        </p:nvSpPr>
+        <p:spPr>
+          <a:xfrm>
+            <a:off x="11131803" y="1645920"/>
+            <a:ext cx="453644" cy="237744"/>
+          </a:xfrm>
+          <a:prstGeom prst="roundRect">
+            <a:avLst>
+              <a:gd name="adj" fmla="val 50000"/>
+            </a:avLst>
+          </a:prstGeom>
+          <a:solidFill>
+            <a:srgbClr val="0B5E54"/>
+          </a:solidFill>
+          <a:ln>
+            <a:noFill/>
+          </a:ln>
+          <a:effectLst/>
+        </p:spPr>
+        <p:style>
+          <a:lnRef idx="1">
+            <a:schemeClr val="accent1"/>
+          </a:lnRef>
+          <a:fillRef idx="3">
+            <a:schemeClr val="accent1"/>
+          </a:fillRef>
+          <a:effectRef idx="2">
+            <a:schemeClr val="accent1"/>
+          </a:effectRef>
+          <a:fontRef idx="minor">
+            <a:schemeClr val="lt1"/>
+          </a:fontRef>
+        </p:style>
+        <p:txBody>
+          <a:bodyPr rtlCol="0" anchor="ctr"/>
+          <a:lstStyle/>
+          <a:p>
+            <a:pPr algn="ctr"/>
+          </a:p>
+        </p:txBody>
+      </p:sp>
+      <p:sp>
+        <p:nvSpPr>
+          <p:cNvPr id="17" name="TextBox 16"/>
+          <p:cNvSpPr txBox="1"/>
+          <p:nvPr/>
+        </p:nvSpPr>
+        <p:spPr>
+          <a:xfrm>
+            <a:off x="11131803" y="1645920"/>
+            <a:ext cx="453644" cy="237744"/>
+          </a:xfrm>
+          <a:prstGeom prst="rect">
+            <a:avLst/>
+          </a:prstGeom>
+          <a:noFill/>
+        </p:spPr>
+        <p:txBody>
+          <a:bodyPr wrap="square" anchor="ctr" lIns="0" rIns="0" tIns="0" bIns="0">
+            <a:spAutoFit/>
+          </a:bodyPr>
+          <a:lstStyle/>
+          <a:p>
+            <a:pPr algn="ctr">
+              <a:lnSpc>
+                <a:spcPct val="114000"/>
+              </a:lnSpc>
+            </a:pPr>
+            <a:r>
+              <a:rPr sz="850" b="1">
+                <a:solidFill>
+                  <a:srgbClr val="FFFFFF"/>
+                </a:solidFill>
+              </a:rPr>
+              <a:t>达标</a:t>
+            </a:r>
+          </a:p>
+        </p:txBody>
+      </p:sp>
+      <p:sp>
+        <p:nvSpPr>
+          <p:cNvPr id="18" name="TextBox 17"/>
+          <p:cNvSpPr txBox="1"/>
+          <p:nvPr/>
+        </p:nvSpPr>
+        <p:spPr>
+          <a:xfrm>
+            <a:off x="932688" y="1901952"/>
+            <a:ext cx="10671047" cy="514350"/>
+          </a:xfrm>
+          <a:prstGeom prst="rect">
+            <a:avLst/>
+          </a:prstGeom>
+          <a:noFill/>
+        </p:spPr>
+        <p:txBody>
+          <a:bodyPr wrap="square" anchor="t" lIns="0" rIns="0" tIns="0" bIns="0">
+            <a:spAutoFit/>
+          </a:bodyPr>
+          <a:lstStyle/>
+          <a:p>
+            <a:pPr algn="l">
+              <a:lnSpc>
+                <a:spcPct val="114000"/>
+              </a:lnSpc>
+            </a:pPr>
+            <a:r>
+              <a:rPr sz="950" b="0">
+                <a:solidFill>
+                  <a:srgbClr val="1B2B28"/>
+                </a:solidFill>
+              </a:rPr>
+              <a:t>正确 5/5 题｜PEP 8 子集达标率 100.0%（检查项通过 4794/4795）≥ 75.0%｜有 docstring 的公开函数 53/53、模块 13/13</a:t>
+            </a:r>
+          </a:p>
+        </p:txBody>
+      </p:sp>
+      <p:sp>
+        <p:nvSpPr>
+          <p:cNvPr id="19" name="Rounded Rectangle 18"/>
+          <p:cNvSpPr/>
+          <p:nvPr/>
+        </p:nvSpPr>
+        <p:spPr>
+          <a:xfrm>
+            <a:off x="475488" y="2535174"/>
+            <a:ext cx="11237976" cy="916686"/>
+          </a:xfrm>
+          <a:prstGeom prst="roundRect">
+            <a:avLst>
+              <a:gd name="adj" fmla="val 6000"/>
+            </a:avLst>
+          </a:prstGeom>
+          <a:solidFill>
+            <a:srgbClr val="FFFFFF"/>
+          </a:solidFill>
+          <a:ln w="9525">
+            <a:solidFill>
+              <a:srgbClr val="E4F1EE"/>
+            </a:solidFill>
+          </a:ln>
+          <a:effectLst/>
+        </p:spPr>
+        <p:style>
+          <a:lnRef idx="1">
+            <a:schemeClr val="accent1"/>
+          </a:lnRef>
+          <a:fillRef idx="3">
+            <a:schemeClr val="accent1"/>
+          </a:fillRef>
+          <a:effectRef idx="2">
+            <a:schemeClr val="accent1"/>
+          </a:effectRef>
+          <a:fontRef idx="minor">
+            <a:schemeClr val="lt1"/>
+          </a:fontRef>
+        </p:style>
+        <p:txBody>
+          <a:bodyPr rtlCol="0" anchor="ctr"/>
+          <a:lstStyle/>
+          <a:p>
+            <a:pPr algn="ctr"/>
+          </a:p>
+        </p:txBody>
+      </p:sp>
+      <p:sp>
+        <p:nvSpPr>
+          <p:cNvPr id="20" name="Rounded Rectangle 19"/>
+          <p:cNvSpPr/>
+          <p:nvPr/>
+        </p:nvSpPr>
+        <p:spPr>
+          <a:xfrm>
+            <a:off x="475488" y="2535174"/>
+            <a:ext cx="54864" cy="916686"/>
+          </a:xfrm>
+          <a:prstGeom prst="roundRect">
+            <a:avLst>
+              <a:gd name="adj" fmla="val 50000"/>
+            </a:avLst>
+          </a:prstGeom>
+          <a:solidFill>
+            <a:srgbClr val="157A6D"/>
+          </a:solidFill>
+          <a:ln>
+            <a:noFill/>
+          </a:ln>
+          <a:effectLst/>
+        </p:spPr>
+        <p:style>
+          <a:lnRef idx="1">
+            <a:schemeClr val="accent1"/>
+          </a:lnRef>
+          <a:fillRef idx="3">
+            <a:schemeClr val="accent1"/>
+          </a:fillRef>
+          <a:effectRef idx="2">
+            <a:schemeClr val="accent1"/>
+          </a:effectRef>
+          <a:fontRef idx="minor">
+            <a:schemeClr val="lt1"/>
+          </a:fontRef>
+        </p:style>
+        <p:txBody>
+          <a:bodyPr rtlCol="0" anchor="ctr"/>
+          <a:lstStyle/>
+          <a:p>
+            <a:pPr algn="ctr"/>
+          </a:p>
+        </p:txBody>
+      </p:sp>
+      <p:sp>
+        <p:nvSpPr>
+          <p:cNvPr id="21" name="Rounded Rectangle 20"/>
+          <p:cNvSpPr/>
+          <p:nvPr/>
+        </p:nvSpPr>
+        <p:spPr>
+          <a:xfrm>
+            <a:off x="621792" y="2617470"/>
+            <a:ext cx="237744" cy="237744"/>
+          </a:xfrm>
+          <a:prstGeom prst="roundRect">
+            <a:avLst>
+              <a:gd name="adj" fmla="val 28000"/>
+            </a:avLst>
+          </a:prstGeom>
+          <a:solidFill>
+            <a:srgbClr val="157A6D"/>
+          </a:solidFill>
+          <a:ln>
+            <a:noFill/>
+          </a:ln>
+          <a:effectLst/>
+        </p:spPr>
+        <p:style>
+          <a:lnRef idx="1">
+            <a:schemeClr val="accent1"/>
+          </a:lnRef>
+          <a:fillRef idx="3">
+            <a:schemeClr val="accent1"/>
+          </a:fillRef>
+          <a:effectRef idx="2">
+            <a:schemeClr val="accent1"/>
+          </a:effectRef>
+          <a:fontRef idx="minor">
+            <a:schemeClr val="lt1"/>
+          </a:fontRef>
+        </p:style>
+        <p:txBody>
+          <a:bodyPr rtlCol="0" anchor="ctr"/>
+          <a:lstStyle/>
+          <a:p>
+            <a:pPr algn="ctr"/>
+          </a:p>
+        </p:txBody>
+      </p:sp>
+      <p:sp>
+        <p:nvSpPr>
+          <p:cNvPr id="22" name="TextBox 21"/>
+          <p:cNvSpPr txBox="1"/>
+          <p:nvPr/>
+        </p:nvSpPr>
+        <p:spPr>
+          <a:xfrm>
+            <a:off x="621792" y="2617470"/>
+            <a:ext cx="237744" cy="237744"/>
+          </a:xfrm>
+          <a:prstGeom prst="rect">
+            <a:avLst/>
+          </a:prstGeom>
+          <a:noFill/>
+        </p:spPr>
+        <p:txBody>
+          <a:bodyPr wrap="square" anchor="ctr" lIns="0" rIns="0" tIns="0" bIns="0">
+            <a:spAutoFit/>
+          </a:bodyPr>
+          <a:lstStyle/>
+          <a:p>
+            <a:pPr algn="ctr">
+              <a:lnSpc>
+                <a:spcPct val="114000"/>
+              </a:lnSpc>
+            </a:pPr>
+            <a:r>
+              <a:rPr sz="1000" b="1">
+                <a:solidFill>
+                  <a:srgbClr val="FFFFFF"/>
+                </a:solidFill>
+              </a:rPr>
+              <a:t>C</a:t>
+            </a:r>
+          </a:p>
+        </p:txBody>
+      </p:sp>
+      <p:sp>
+        <p:nvSpPr>
+          <p:cNvPr id="23" name="TextBox 22"/>
+          <p:cNvSpPr txBox="1"/>
+          <p:nvPr/>
+        </p:nvSpPr>
+        <p:spPr>
+          <a:xfrm>
+            <a:off x="932688" y="2599182"/>
+            <a:ext cx="8778240" cy="274320"/>
+          </a:xfrm>
+          <a:prstGeom prst="rect">
+            <a:avLst/>
+          </a:prstGeom>
+          <a:noFill/>
+        </p:spPr>
+        <p:txBody>
+          <a:bodyPr wrap="square" anchor="ctr" lIns="0" rIns="0" tIns="0" bIns="0">
+            <a:spAutoFit/>
+          </a:bodyPr>
+          <a:lstStyle/>
+          <a:p>
+            <a:pPr algn="l">
+              <a:lnSpc>
+                <a:spcPct val="114000"/>
+              </a:lnSpc>
+            </a:pPr>
+            <a:r>
+              <a:rPr sz="1050" b="1">
+                <a:solidFill>
+                  <a:srgbClr val="1B2B28"/>
+                </a:solidFill>
+              </a:rPr>
+              <a:t>良好</a:t>
+            </a:r>
+            <a:r>
+              <a:rPr sz="850" b="0">
+                <a:solidFill>
+                  <a:srgbClr val="5C6E6A"/>
+                </a:solidFill>
+              </a:rPr>
+              <a:t>   验收口径：</a:t>
+            </a:r>
+            <a:r>
+              <a:rPr sz="850" b="0">
+                <a:solidFill>
+                  <a:srgbClr val="5C6E6A"/>
+                </a:solidFill>
+              </a:rPr>
+              <a:t>4题；命名有意义</a:t>
+            </a:r>
+          </a:p>
+        </p:txBody>
+      </p:sp>
+      <p:sp>
+        <p:nvSpPr>
+          <p:cNvPr id="24" name="Rounded Rectangle 23"/>
+          <p:cNvSpPr/>
+          <p:nvPr/>
+        </p:nvSpPr>
+        <p:spPr>
+          <a:xfrm>
+            <a:off x="11131803" y="2626614"/>
+            <a:ext cx="453644" cy="237744"/>
+          </a:xfrm>
+          <a:prstGeom prst="roundRect">
+            <a:avLst>
+              <a:gd name="adj" fmla="val 50000"/>
+            </a:avLst>
+          </a:prstGeom>
+          <a:solidFill>
+            <a:srgbClr val="0B5E54"/>
+          </a:solidFill>
+          <a:ln>
+            <a:noFill/>
+          </a:ln>
+          <a:effectLst/>
+        </p:spPr>
+        <p:style>
+          <a:lnRef idx="1">
+            <a:schemeClr val="accent1"/>
+          </a:lnRef>
+          <a:fillRef idx="3">
+            <a:schemeClr val="accent1"/>
+          </a:fillRef>
+          <a:effectRef idx="2">
+            <a:schemeClr val="accent1"/>
+          </a:effectRef>
+          <a:fontRef idx="minor">
+            <a:schemeClr val="lt1"/>
+          </a:fontRef>
+        </p:style>
+        <p:txBody>
+          <a:bodyPr rtlCol="0" anchor="ctr"/>
+          <a:lstStyle/>
+          <a:p>
+            <a:pPr algn="ctr"/>
+          </a:p>
+        </p:txBody>
+      </p:sp>
+      <p:sp>
+        <p:nvSpPr>
+          <p:cNvPr id="25" name="TextBox 24"/>
+          <p:cNvSpPr txBox="1"/>
+          <p:nvPr/>
+        </p:nvSpPr>
+        <p:spPr>
+          <a:xfrm>
+            <a:off x="11131803" y="2626614"/>
+            <a:ext cx="453644" cy="237744"/>
+          </a:xfrm>
+          <a:prstGeom prst="rect">
+            <a:avLst/>
+          </a:prstGeom>
+          <a:noFill/>
+        </p:spPr>
+        <p:txBody>
+          <a:bodyPr wrap="square" anchor="ctr" lIns="0" rIns="0" tIns="0" bIns="0">
+            <a:spAutoFit/>
+          </a:bodyPr>
+          <a:lstStyle/>
+          <a:p>
+            <a:pPr algn="ctr">
+              <a:lnSpc>
+                <a:spcPct val="114000"/>
+              </a:lnSpc>
+            </a:pPr>
+            <a:r>
+              <a:rPr sz="850" b="1">
+                <a:solidFill>
+                  <a:srgbClr val="FFFFFF"/>
+                </a:solidFill>
+              </a:rPr>
+              <a:t>达标</a:t>
+            </a:r>
+          </a:p>
+        </p:txBody>
+      </p:sp>
+      <p:sp>
+        <p:nvSpPr>
+          <p:cNvPr id="26" name="TextBox 25"/>
+          <p:cNvSpPr txBox="1"/>
+          <p:nvPr/>
+        </p:nvSpPr>
+        <p:spPr>
+          <a:xfrm>
+            <a:off x="932688" y="2882646"/>
+            <a:ext cx="10671047" cy="514350"/>
+          </a:xfrm>
+          <a:prstGeom prst="rect">
+            <a:avLst/>
+          </a:prstGeom>
+          <a:noFill/>
+        </p:spPr>
+        <p:txBody>
+          <a:bodyPr wrap="square" anchor="t" lIns="0" rIns="0" tIns="0" bIns="0">
+            <a:spAutoFit/>
+          </a:bodyPr>
+          <a:lstStyle/>
+          <a:p>
+            <a:pPr algn="l">
+              <a:lnSpc>
+                <a:spcPct val="114000"/>
+              </a:lnSpc>
+            </a:pPr>
+            <a:r>
+              <a:rPr sz="950" b="0">
+                <a:solidFill>
+                  <a:srgbClr val="1B2B28"/>
+                </a:solidFill>
+              </a:rPr>
+              <a:t>第4题 正确、正确 5/5（线 ≥4）｜命名有意义达标率 100.0%（合格 72/72）≥ 90.0%</a:t>
+            </a:r>
+          </a:p>
+        </p:txBody>
+      </p:sp>
+      <p:sp>
+        <p:nvSpPr>
+          <p:cNvPr id="27" name="Rounded Rectangle 26"/>
+          <p:cNvSpPr/>
+          <p:nvPr/>
+        </p:nvSpPr>
+        <p:spPr>
+          <a:xfrm>
+            <a:off x="475488" y="3515868"/>
+            <a:ext cx="11237976" cy="916686"/>
+          </a:xfrm>
+          <a:prstGeom prst="roundRect">
+            <a:avLst>
+              <a:gd name="adj" fmla="val 6000"/>
+            </a:avLst>
+          </a:prstGeom>
+          <a:solidFill>
+            <a:srgbClr val="FFFFFF"/>
+          </a:solidFill>
+          <a:ln w="9525">
+            <a:solidFill>
+              <a:srgbClr val="E4F1EE"/>
+            </a:solidFill>
+          </a:ln>
+          <a:effectLst/>
+        </p:spPr>
+        <p:style>
+          <a:lnRef idx="1">
+            <a:schemeClr val="accent1"/>
+          </a:lnRef>
+          <a:fillRef idx="3">
+            <a:schemeClr val="accent1"/>
+          </a:fillRef>
+          <a:effectRef idx="2">
+            <a:schemeClr val="accent1"/>
+          </a:effectRef>
+          <a:fontRef idx="minor">
+            <a:schemeClr val="lt1"/>
+          </a:fontRef>
+        </p:style>
+        <p:txBody>
+          <a:bodyPr rtlCol="0" anchor="ctr"/>
+          <a:lstStyle/>
+          <a:p>
+            <a:pPr algn="ctr"/>
+          </a:p>
+        </p:txBody>
+      </p:sp>
+      <p:sp>
+        <p:nvSpPr>
+          <p:cNvPr id="28" name="Rounded Rectangle 27"/>
+          <p:cNvSpPr/>
+          <p:nvPr/>
+        </p:nvSpPr>
+        <p:spPr>
+          <a:xfrm>
+            <a:off x="475488" y="3515868"/>
+            <a:ext cx="54864" cy="916686"/>
+          </a:xfrm>
+          <a:prstGeom prst="roundRect">
+            <a:avLst>
+              <a:gd name="adj" fmla="val 50000"/>
+            </a:avLst>
+          </a:prstGeom>
+          <a:solidFill>
+            <a:srgbClr val="0B5E54"/>
+          </a:solidFill>
+          <a:ln>
+            <a:noFill/>
+          </a:ln>
+          <a:effectLst/>
+        </p:spPr>
+        <p:style>
+          <a:lnRef idx="1">
+            <a:schemeClr val="accent1"/>
+          </a:lnRef>
+          <a:fillRef idx="3">
+            <a:schemeClr val="accent1"/>
+          </a:fillRef>
+          <a:effectRef idx="2">
+            <a:schemeClr val="accent1"/>
+          </a:effectRef>
+          <a:fontRef idx="minor">
+            <a:schemeClr val="lt1"/>
+          </a:fontRef>
+        </p:style>
+        <p:txBody>
+          <a:bodyPr rtlCol="0" anchor="ctr"/>
+          <a:lstStyle/>
+          <a:p>
+            <a:pPr algn="ctr"/>
+          </a:p>
+        </p:txBody>
+      </p:sp>
+      <p:sp>
+        <p:nvSpPr>
+          <p:cNvPr id="29" name="Rounded Rectangle 28"/>
+          <p:cNvSpPr/>
+          <p:nvPr/>
+        </p:nvSpPr>
+        <p:spPr>
+          <a:xfrm>
+            <a:off x="621792" y="3598163"/>
+            <a:ext cx="237744" cy="237744"/>
+          </a:xfrm>
+          <a:prstGeom prst="roundRect">
+            <a:avLst>
+              <a:gd name="adj" fmla="val 28000"/>
+            </a:avLst>
+          </a:prstGeom>
+          <a:solidFill>
+            <a:srgbClr val="0B5E54"/>
+          </a:solidFill>
+          <a:ln>
+            <a:noFill/>
+          </a:ln>
+          <a:effectLst/>
+        </p:spPr>
+        <p:style>
+          <a:lnRef idx="1">
+            <a:schemeClr val="accent1"/>
+          </a:lnRef>
+          <a:fillRef idx="3">
+            <a:schemeClr val="accent1"/>
+          </a:fillRef>
+          <a:effectRef idx="2">
+            <a:schemeClr val="accent1"/>
+          </a:effectRef>
+          <a:fontRef idx="minor">
+            <a:schemeClr val="lt1"/>
+          </a:fontRef>
+        </p:style>
+        <p:txBody>
+          <a:bodyPr rtlCol="0" anchor="ctr"/>
+          <a:lstStyle/>
+          <a:p>
+            <a:pPr algn="ctr"/>
+          </a:p>
+        </p:txBody>
+      </p:sp>
+      <p:sp>
+        <p:nvSpPr>
+          <p:cNvPr id="30" name="TextBox 29"/>
+          <p:cNvSpPr txBox="1"/>
+          <p:nvPr/>
+        </p:nvSpPr>
+        <p:spPr>
+          <a:xfrm>
+            <a:off x="621792" y="3598163"/>
+            <a:ext cx="237744" cy="237744"/>
+          </a:xfrm>
+          <a:prstGeom prst="rect">
+            <a:avLst/>
+          </a:prstGeom>
+          <a:noFill/>
+        </p:spPr>
+        <p:txBody>
+          <a:bodyPr wrap="square" anchor="ctr" lIns="0" rIns="0" tIns="0" bIns="0">
+            <a:spAutoFit/>
+          </a:bodyPr>
+          <a:lstStyle/>
+          <a:p>
+            <a:pPr algn="ctr">
+              <a:lnSpc>
+                <a:spcPct val="114000"/>
+              </a:lnSpc>
+            </a:pPr>
+            <a:r>
+              <a:rPr sz="1000" b="1">
+                <a:solidFill>
+                  <a:srgbClr val="FFFFFF"/>
+                </a:solidFill>
+              </a:rPr>
+              <a:t>B</a:t>
+            </a:r>
+          </a:p>
+        </p:txBody>
+      </p:sp>
+      <p:sp>
+        <p:nvSpPr>
+          <p:cNvPr id="31" name="TextBox 30"/>
+          <p:cNvSpPr txBox="1"/>
+          <p:nvPr/>
+        </p:nvSpPr>
+        <p:spPr>
+          <a:xfrm>
+            <a:off x="932688" y="3579875"/>
+            <a:ext cx="8778240" cy="274320"/>
+          </a:xfrm>
+          <a:prstGeom prst="rect">
+            <a:avLst/>
+          </a:prstGeom>
+          <a:noFill/>
+        </p:spPr>
+        <p:txBody>
+          <a:bodyPr wrap="square" anchor="ctr" lIns="0" rIns="0" tIns="0" bIns="0">
+            <a:spAutoFit/>
+          </a:bodyPr>
+          <a:lstStyle/>
+          <a:p>
+            <a:pPr algn="l">
+              <a:lnSpc>
+                <a:spcPct val="114000"/>
+              </a:lnSpc>
+            </a:pPr>
+            <a:r>
+              <a:rPr sz="1050" b="1">
+                <a:solidFill>
+                  <a:srgbClr val="1B2B28"/>
+                </a:solidFill>
+              </a:rPr>
+              <a:t>优秀</a:t>
+            </a:r>
+            <a:r>
+              <a:rPr sz="850" b="0">
+                <a:solidFill>
+                  <a:srgbClr val="5C6E6A"/>
+                </a:solidFill>
+              </a:rPr>
+              <a:t>   验收口径：</a:t>
+            </a:r>
+            <a:r>
+              <a:rPr sz="850" b="0">
+                <a:solidFill>
+                  <a:srgbClr val="5C6E6A"/>
+                </a:solidFill>
+              </a:rPr>
+              <a:t>5题全对；PEP 8≥85%；结构清晰</a:t>
+            </a:r>
+          </a:p>
+        </p:txBody>
+      </p:sp>
+      <p:sp>
+        <p:nvSpPr>
+          <p:cNvPr id="32" name="Rounded Rectangle 31"/>
+          <p:cNvSpPr/>
+          <p:nvPr/>
+        </p:nvSpPr>
+        <p:spPr>
+          <a:xfrm>
+            <a:off x="11131803" y="3607308"/>
+            <a:ext cx="453644" cy="237744"/>
+          </a:xfrm>
+          <a:prstGeom prst="roundRect">
+            <a:avLst>
+              <a:gd name="adj" fmla="val 50000"/>
+            </a:avLst>
+          </a:prstGeom>
+          <a:solidFill>
+            <a:srgbClr val="0B5E54"/>
+          </a:solidFill>
+          <a:ln>
+            <a:noFill/>
+          </a:ln>
+          <a:effectLst/>
+        </p:spPr>
+        <p:style>
+          <a:lnRef idx="1">
+            <a:schemeClr val="accent1"/>
+          </a:lnRef>
+          <a:fillRef idx="3">
+            <a:schemeClr val="accent1"/>
+          </a:fillRef>
+          <a:effectRef idx="2">
+            <a:schemeClr val="accent1"/>
+          </a:effectRef>
+          <a:fontRef idx="minor">
+            <a:schemeClr val="lt1"/>
+          </a:fontRef>
+        </p:style>
+        <p:txBody>
+          <a:bodyPr rtlCol="0" anchor="ctr"/>
+          <a:lstStyle/>
+          <a:p>
+            <a:pPr algn="ctr"/>
+          </a:p>
+        </p:txBody>
+      </p:sp>
+      <p:sp>
+        <p:nvSpPr>
+          <p:cNvPr id="33" name="TextBox 32"/>
+          <p:cNvSpPr txBox="1"/>
+          <p:nvPr/>
+        </p:nvSpPr>
+        <p:spPr>
+          <a:xfrm>
+            <a:off x="11131803" y="3607308"/>
+            <a:ext cx="453644" cy="237744"/>
+          </a:xfrm>
+          <a:prstGeom prst="rect">
+            <a:avLst/>
+          </a:prstGeom>
+          <a:noFill/>
+        </p:spPr>
+        <p:txBody>
+          <a:bodyPr wrap="square" anchor="ctr" lIns="0" rIns="0" tIns="0" bIns="0">
+            <a:spAutoFit/>
+          </a:bodyPr>
+          <a:lstStyle/>
+          <a:p>
+            <a:pPr algn="ctr">
+              <a:lnSpc>
+                <a:spcPct val="114000"/>
+              </a:lnSpc>
+            </a:pPr>
+            <a:r>
+              <a:rPr sz="850" b="1">
+                <a:solidFill>
+                  <a:srgbClr val="FFFFFF"/>
+                </a:solidFill>
+              </a:rPr>
+              <a:t>达标</a:t>
+            </a:r>
+          </a:p>
+        </p:txBody>
+      </p:sp>
+      <p:sp>
+        <p:nvSpPr>
+          <p:cNvPr id="34" name="TextBox 33"/>
+          <p:cNvSpPr txBox="1"/>
+          <p:nvPr/>
+        </p:nvSpPr>
+        <p:spPr>
+          <a:xfrm>
+            <a:off x="932688" y="3863339"/>
+            <a:ext cx="10671047" cy="514350"/>
+          </a:xfrm>
+          <a:prstGeom prst="rect">
+            <a:avLst/>
+          </a:prstGeom>
+          <a:noFill/>
+        </p:spPr>
+        <p:txBody>
+          <a:bodyPr wrap="square" anchor="t" lIns="0" rIns="0" tIns="0" bIns="0">
+            <a:spAutoFit/>
+          </a:bodyPr>
+          <a:lstStyle/>
+          <a:p>
+            <a:pPr algn="l">
+              <a:lnSpc>
+                <a:spcPct val="114000"/>
+              </a:lnSpc>
+            </a:pPr>
+            <a:r>
+              <a:rPr sz="950" b="0">
+                <a:solidFill>
+                  <a:srgbClr val="1B2B28"/>
+                </a:solidFill>
+              </a:rPr>
+              <a:t>正确 5/5｜PEP 8 子集达标率 100.0%（检查项通过 4794/4795）≥ 85.0%｜结构：四件套 4/4、一题一函数 5/5、src 模块 docstring 12/12</a:t>
+            </a:r>
+          </a:p>
+        </p:txBody>
+      </p:sp>
+      <p:sp>
+        <p:nvSpPr>
+          <p:cNvPr id="35" name="Rounded Rectangle 34"/>
+          <p:cNvSpPr/>
+          <p:nvPr/>
+        </p:nvSpPr>
+        <p:spPr>
+          <a:xfrm>
+            <a:off x="475488" y="4496562"/>
+            <a:ext cx="11237976" cy="916686"/>
+          </a:xfrm>
+          <a:prstGeom prst="roundRect">
+            <a:avLst>
+              <a:gd name="adj" fmla="val 6000"/>
+            </a:avLst>
+          </a:prstGeom>
+          <a:solidFill>
+            <a:srgbClr val="FFFFFF"/>
+          </a:solidFill>
+          <a:ln w="9525">
+            <a:solidFill>
+              <a:srgbClr val="E4F1EE"/>
+            </a:solidFill>
+          </a:ln>
+          <a:effectLst/>
+        </p:spPr>
+        <p:style>
+          <a:lnRef idx="1">
+            <a:schemeClr val="accent1"/>
+          </a:lnRef>
+          <a:fillRef idx="3">
+            <a:schemeClr val="accent1"/>
+          </a:fillRef>
+          <a:effectRef idx="2">
+            <a:schemeClr val="accent1"/>
+          </a:effectRef>
+          <a:fontRef idx="minor">
+            <a:schemeClr val="lt1"/>
+          </a:fontRef>
+        </p:style>
+        <p:txBody>
+          <a:bodyPr rtlCol="0" anchor="ctr"/>
+          <a:lstStyle/>
+          <a:p>
+            <a:pPr algn="ctr"/>
+          </a:p>
+        </p:txBody>
+      </p:sp>
+      <p:sp>
+        <p:nvSpPr>
+          <p:cNvPr id="36" name="Rounded Rectangle 35"/>
+          <p:cNvSpPr/>
+          <p:nvPr/>
+        </p:nvSpPr>
+        <p:spPr>
+          <a:xfrm>
+            <a:off x="475488" y="4496562"/>
+            <a:ext cx="54864" cy="916686"/>
+          </a:xfrm>
+          <a:prstGeom prst="roundRect">
+            <a:avLst>
+              <a:gd name="adj" fmla="val 50000"/>
+            </a:avLst>
+          </a:prstGeom>
+          <a:solidFill>
+            <a:srgbClr val="C9A227"/>
+          </a:solidFill>
+          <a:ln>
+            <a:noFill/>
+          </a:ln>
+          <a:effectLst/>
+        </p:spPr>
+        <p:style>
+          <a:lnRef idx="1">
+            <a:schemeClr val="accent1"/>
+          </a:lnRef>
+          <a:fillRef idx="3">
+            <a:schemeClr val="accent1"/>
+          </a:fillRef>
+          <a:effectRef idx="2">
+            <a:schemeClr val="accent1"/>
+          </a:effectRef>
+          <a:fontRef idx="minor">
+            <a:schemeClr val="lt1"/>
+          </a:fontRef>
+        </p:style>
+        <p:txBody>
+          <a:bodyPr rtlCol="0" anchor="ctr"/>
+          <a:lstStyle/>
+          <a:p>
+            <a:pPr algn="ctr"/>
+          </a:p>
+        </p:txBody>
+      </p:sp>
+      <p:sp>
+        <p:nvSpPr>
+          <p:cNvPr id="37" name="Rounded Rectangle 36"/>
+          <p:cNvSpPr/>
+          <p:nvPr/>
+        </p:nvSpPr>
+        <p:spPr>
+          <a:xfrm>
+            <a:off x="621792" y="4578857"/>
+            <a:ext cx="237744" cy="237744"/>
+          </a:xfrm>
+          <a:prstGeom prst="roundRect">
+            <a:avLst>
+              <a:gd name="adj" fmla="val 28000"/>
+            </a:avLst>
+          </a:prstGeom>
+          <a:solidFill>
+            <a:srgbClr val="C9A227"/>
+          </a:solidFill>
+          <a:ln>
+            <a:noFill/>
+          </a:ln>
+          <a:effectLst/>
+        </p:spPr>
+        <p:style>
+          <a:lnRef idx="1">
+            <a:schemeClr val="accent1"/>
+          </a:lnRef>
+          <a:fillRef idx="3">
+            <a:schemeClr val="accent1"/>
+          </a:fillRef>
+          <a:effectRef idx="2">
+            <a:schemeClr val="accent1"/>
+          </a:effectRef>
+          <a:fontRef idx="minor">
+            <a:schemeClr val="lt1"/>
+          </a:fontRef>
+        </p:style>
+        <p:txBody>
+          <a:bodyPr rtlCol="0" anchor="ctr"/>
+          <a:lstStyle/>
+          <a:p>
+            <a:pPr algn="ctr"/>
+          </a:p>
+        </p:txBody>
+      </p:sp>
+      <p:sp>
+        <p:nvSpPr>
+          <p:cNvPr id="38" name="TextBox 37"/>
+          <p:cNvSpPr txBox="1"/>
+          <p:nvPr/>
+        </p:nvSpPr>
+        <p:spPr>
+          <a:xfrm>
+            <a:off x="621792" y="4578857"/>
+            <a:ext cx="237744" cy="237744"/>
+          </a:xfrm>
+          <a:prstGeom prst="rect">
+            <a:avLst/>
+          </a:prstGeom>
+          <a:noFill/>
+        </p:spPr>
+        <p:txBody>
+          <a:bodyPr wrap="square" anchor="ctr" lIns="0" rIns="0" tIns="0" bIns="0">
+            <a:spAutoFit/>
+          </a:bodyPr>
+          <a:lstStyle/>
+          <a:p>
+            <a:pPr algn="ctr">
+              <a:lnSpc>
+                <a:spcPct val="114000"/>
+              </a:lnSpc>
+            </a:pPr>
+            <a:r>
+              <a:rPr sz="1000" b="1">
+                <a:solidFill>
+                  <a:srgbClr val="FFFFFF"/>
+                </a:solidFill>
+              </a:rPr>
+              <a:t>A</a:t>
+            </a:r>
+          </a:p>
+        </p:txBody>
+      </p:sp>
+      <p:sp>
+        <p:nvSpPr>
+          <p:cNvPr id="39" name="TextBox 38"/>
+          <p:cNvSpPr txBox="1"/>
+          <p:nvPr/>
+        </p:nvSpPr>
+        <p:spPr>
+          <a:xfrm>
+            <a:off x="932688" y="4560570"/>
+            <a:ext cx="8778240" cy="274320"/>
+          </a:xfrm>
+          <a:prstGeom prst="rect">
+            <a:avLst/>
+          </a:prstGeom>
+          <a:noFill/>
+        </p:spPr>
+        <p:txBody>
+          <a:bodyPr wrap="square" anchor="ctr" lIns="0" rIns="0" tIns="0" bIns="0">
+            <a:spAutoFit/>
+          </a:bodyPr>
+          <a:lstStyle/>
+          <a:p>
+            <a:pPr algn="l">
+              <a:lnSpc>
+                <a:spcPct val="114000"/>
+              </a:lnSpc>
+            </a:pPr>
+            <a:r>
+              <a:rPr sz="1050" b="1">
+                <a:solidFill>
+                  <a:srgbClr val="1B2B28"/>
+                </a:solidFill>
+              </a:rPr>
+              <a:t>超优</a:t>
+            </a:r>
+            <a:r>
+              <a:rPr sz="850" b="0">
+                <a:solidFill>
+                  <a:srgbClr val="5C6E6A"/>
+                </a:solidFill>
+              </a:rPr>
+              <a:t>   验收口径：</a:t>
+            </a:r>
+            <a:r>
+              <a:rPr sz="850" b="0">
+                <a:solidFill>
+                  <a:srgbClr val="5C6E6A"/>
+                </a:solidFill>
+              </a:rPr>
+              <a:t>优秀+每题附测试用例与《迁移笔记》</a:t>
+            </a:r>
+          </a:p>
+        </p:txBody>
+      </p:sp>
+      <p:sp>
+        <p:nvSpPr>
+          <p:cNvPr id="40" name="Rounded Rectangle 39"/>
+          <p:cNvSpPr/>
+          <p:nvPr/>
+        </p:nvSpPr>
+        <p:spPr>
+          <a:xfrm>
+            <a:off x="11131803" y="4588001"/>
+            <a:ext cx="453644" cy="237744"/>
+          </a:xfrm>
+          <a:prstGeom prst="roundRect">
+            <a:avLst>
+              <a:gd name="adj" fmla="val 50000"/>
+            </a:avLst>
+          </a:prstGeom>
+          <a:solidFill>
+            <a:srgbClr val="0B5E54"/>
+          </a:solidFill>
+          <a:ln>
+            <a:noFill/>
+          </a:ln>
+          <a:effectLst/>
+        </p:spPr>
+        <p:style>
+          <a:lnRef idx="1">
+            <a:schemeClr val="accent1"/>
+          </a:lnRef>
+          <a:fillRef idx="3">
+            <a:schemeClr val="accent1"/>
+          </a:fillRef>
+          <a:effectRef idx="2">
+            <a:schemeClr val="accent1"/>
+          </a:effectRef>
+          <a:fontRef idx="minor">
+            <a:schemeClr val="lt1"/>
+          </a:fontRef>
+        </p:style>
+        <p:txBody>
+          <a:bodyPr rtlCol="0" anchor="ctr"/>
+          <a:lstStyle/>
+          <a:p>
+            <a:pPr algn="ctr"/>
+          </a:p>
+        </p:txBody>
+      </p:sp>
+      <p:sp>
+        <p:nvSpPr>
+          <p:cNvPr id="41" name="TextBox 40"/>
+          <p:cNvSpPr txBox="1"/>
+          <p:nvPr/>
+        </p:nvSpPr>
+        <p:spPr>
+          <a:xfrm>
+            <a:off x="11131803" y="4588001"/>
+            <a:ext cx="453644" cy="237744"/>
+          </a:xfrm>
+          <a:prstGeom prst="rect">
+            <a:avLst/>
+          </a:prstGeom>
+          <a:noFill/>
+        </p:spPr>
+        <p:txBody>
+          <a:bodyPr wrap="square" anchor="ctr" lIns="0" rIns="0" tIns="0" bIns="0">
+            <a:spAutoFit/>
+          </a:bodyPr>
+          <a:lstStyle/>
+          <a:p>
+            <a:pPr algn="ctr">
+              <a:lnSpc>
+                <a:spcPct val="114000"/>
+              </a:lnSpc>
+            </a:pPr>
+            <a:r>
+              <a:rPr sz="850" b="1">
+                <a:solidFill>
+                  <a:srgbClr val="FFFFFF"/>
+                </a:solidFill>
+              </a:rPr>
+              <a:t>达标</a:t>
+            </a:r>
+          </a:p>
+        </p:txBody>
+      </p:sp>
+      <p:sp>
+        <p:nvSpPr>
+          <p:cNvPr id="42" name="TextBox 41"/>
+          <p:cNvSpPr txBox="1"/>
+          <p:nvPr/>
+        </p:nvSpPr>
+        <p:spPr>
+          <a:xfrm>
+            <a:off x="932688" y="4844033"/>
+            <a:ext cx="10671047" cy="514350"/>
+          </a:xfrm>
+          <a:prstGeom prst="rect">
+            <a:avLst/>
+          </a:prstGeom>
+          <a:noFill/>
+        </p:spPr>
+        <p:txBody>
+          <a:bodyPr wrap="square" anchor="t" lIns="0" rIns="0" tIns="0" bIns="0">
+            <a:spAutoFit/>
+          </a:bodyPr>
+          <a:lstStyle/>
+          <a:p>
+            <a:pPr algn="l">
+              <a:lnSpc>
+                <a:spcPct val="114000"/>
+              </a:lnSpc>
+            </a:pPr>
+            <a:r>
+              <a:rPr sz="950" b="0">
+                <a:solidFill>
+                  <a:srgbClr val="1B2B28"/>
+                </a:solidFill>
+              </a:rPr>
+              <a:t>每题 pytest 用例 题1 24｜题2 17｜题3 26｜题4 19｜题5 18（线 ≥1）｜迁移笔记 存在=是 正文 15 条（≥10）逐题易错点 5/5 必备章节=是</a:t>
+            </a:r>
+          </a:p>
+        </p:txBody>
+      </p:sp>
+      <p:sp>
+        <p:nvSpPr>
+          <p:cNvPr id="43" name="Rounded Rectangle 42"/>
+          <p:cNvSpPr/>
+          <p:nvPr/>
+        </p:nvSpPr>
+        <p:spPr>
+          <a:xfrm>
+            <a:off x="475488" y="5477255"/>
+            <a:ext cx="11237976" cy="941832"/>
+          </a:xfrm>
+          <a:prstGeom prst="roundRect">
+            <a:avLst>
+              <a:gd name="adj" fmla="val 5000"/>
+            </a:avLst>
+          </a:prstGeom>
+          <a:solidFill>
+            <a:srgbClr val="E4F1EE"/>
+          </a:solidFill>
+          <a:ln>
+            <a:noFill/>
+          </a:ln>
+          <a:effectLst/>
+        </p:spPr>
+        <p:style>
+          <a:lnRef idx="1">
+            <a:schemeClr val="accent1"/>
+          </a:lnRef>
+          <a:fillRef idx="3">
+            <a:schemeClr val="accent1"/>
+          </a:fillRef>
+          <a:effectRef idx="2">
+            <a:schemeClr val="accent1"/>
+          </a:effectRef>
+          <a:fontRef idx="minor">
+            <a:schemeClr val="lt1"/>
+          </a:fontRef>
+        </p:style>
+        <p:txBody>
+          <a:bodyPr rtlCol="0" anchor="ctr"/>
+          <a:lstStyle/>
+          <a:p>
+            <a:pPr algn="ctr"/>
+          </a:p>
+        </p:txBody>
+      </p:sp>
+      <p:sp>
+        <p:nvSpPr>
+          <p:cNvPr id="44" name="Rounded Rectangle 43"/>
+          <p:cNvSpPr/>
+          <p:nvPr/>
+        </p:nvSpPr>
+        <p:spPr>
+          <a:xfrm>
+            <a:off x="475488" y="5477255"/>
+            <a:ext cx="54864" cy="941832"/>
+          </a:xfrm>
+          <a:prstGeom prst="roundRect">
+            <a:avLst>
+              <a:gd name="adj" fmla="val 50000"/>
+            </a:avLst>
+          </a:prstGeom>
+          <a:solidFill>
+            <a:srgbClr val="C9A227"/>
+          </a:solidFill>
+          <a:ln>
+            <a:noFill/>
+          </a:ln>
+          <a:effectLst/>
+        </p:spPr>
+        <p:style>
+          <a:lnRef idx="1">
+            <a:schemeClr val="accent1"/>
+          </a:lnRef>
+          <a:fillRef idx="3">
+            <a:schemeClr val="accent1"/>
+          </a:fillRef>
+          <a:effectRef idx="2">
+            <a:schemeClr val="accent1"/>
+          </a:effectRef>
+          <a:fontRef idx="minor">
+            <a:schemeClr val="lt1"/>
+          </a:fontRef>
+        </p:style>
+        <p:txBody>
+          <a:bodyPr rtlCol="0" anchor="ctr"/>
+          <a:lstStyle/>
+          <a:p>
+            <a:pPr algn="ctr"/>
+          </a:p>
+        </p:txBody>
+      </p:sp>
+      <p:sp>
+        <p:nvSpPr>
+          <p:cNvPr id="45" name="TextBox 44"/>
+          <p:cNvSpPr txBox="1"/>
+          <p:nvPr/>
+        </p:nvSpPr>
+        <p:spPr>
+          <a:xfrm>
+            <a:off x="676656" y="5550407"/>
+            <a:ext cx="10908792" cy="795528"/>
+          </a:xfrm>
+          <a:prstGeom prst="rect">
+            <a:avLst/>
+          </a:prstGeom>
+          <a:noFill/>
+        </p:spPr>
+        <p:txBody>
+          <a:bodyPr wrap="square" anchor="t" lIns="0" rIns="0" tIns="0" bIns="0">
+            <a:spAutoFit/>
+          </a:bodyPr>
+          <a:lstStyle/>
+          <a:p>
+            <a:pPr algn="l">
+              <a:lnSpc>
+                <a:spcPct val="124000"/>
+              </a:lnSpc>
+            </a:pPr>
+            <a:r>
+              <a:rPr sz="850" b="0">
+                <a:solidFill>
+                  <a:srgbClr val="1B2B28"/>
+                </a:solidFill>
+              </a:rPr>
+              <a:t>出处：工程化项目/p11_exercises/output/report.txt 第 54 节「分层达标」——本机 2026-10-28 05:06 实跑落盘，上表数字逐字摘录、未改写。</a:t>
+            </a:r>
+          </a:p>
+          <a:p>
+            <a:pPr algn="l">
+              <a:lnSpc>
+                <a:spcPct val="124000"/>
+              </a:lnSpc>
+            </a:pPr>
+            <a:r>
+              <a:rPr sz="850" b="0">
+                <a:solidFill>
+                  <a:srgbClr val="1B2B28"/>
+                </a:solidFill>
+              </a:rPr>
+              <a:t>复现：cd 工程化项目/p11_exercises &amp;&amp; python run.py &amp;&amp; python -m pytest -q -o addopts=''</a:t>
+            </a:r>
+          </a:p>
+          <a:p>
+            <a:pPr algn="l">
+              <a:lnSpc>
+                <a:spcPct val="124000"/>
+              </a:lnSpc>
+            </a:pPr>
+            <a:r>
+              <a:rPr sz="850" b="0">
+                <a:solidFill>
+                  <a:srgbClr val="1B2B28"/>
+                </a:solidFill>
+              </a:rPr>
+              <a:t>口径：表中「判定」沿用报告原词——绿=达标/通过，黄=仅本节取证项通过（未取证子项在报告里逐条点名），红=未达标。</a:t>
             </a:r>
           </a:p>
         </p:txBody>
@@ -6827,20 +8278,22 @@
       <p:grpSpPr/>
       <p:sp>
         <p:nvSpPr>
-          <p:cNvPr id="2" name="Rectangle 1"/>
+          <p:cNvPr id="2" name="Rounded Rectangle 1"/>
           <p:cNvSpPr/>
           <p:nvPr/>
         </p:nvSpPr>
         <p:spPr>
           <a:xfrm>
             <a:off x="0" y="0"/>
-            <a:ext cx="12192000" cy="1150000"/>
-          </a:xfrm>
-          <a:prstGeom prst="rect">
-            <a:avLst/>
+            <a:ext cx="12191695" cy="64008"/>
+          </a:xfrm>
+          <a:prstGeom prst="roundRect">
+            <a:avLst>
+              <a:gd name="adj" fmla="val 50000"/>
+            </a:avLst>
           </a:prstGeom>
           <a:solidFill>
-            <a:srgbClr val="010328"/>
+            <a:srgbClr val="0B5E54"/>
           </a:solidFill>
           <a:ln>
             <a:noFill/>
@@ -6871,20 +8324,60 @@
       </p:sp>
       <p:sp>
         <p:nvSpPr>
-          <p:cNvPr id="3" name="Rectangle 2"/>
+          <p:cNvPr id="3" name="TextBox 2"/>
+          <p:cNvSpPr txBox="1"/>
+          <p:nvPr/>
+        </p:nvSpPr>
+        <p:spPr>
+          <a:xfrm>
+            <a:off x="475488" y="146304"/>
+            <a:ext cx="8229600" cy="292608"/>
+          </a:xfrm>
+          <a:prstGeom prst="rect">
+            <a:avLst/>
+          </a:prstGeom>
+          <a:noFill/>
+        </p:spPr>
+        <p:txBody>
+          <a:bodyPr wrap="square" anchor="t" lIns="0" rIns="0" tIns="0" bIns="0">
+            <a:spAutoFit/>
+          </a:bodyPr>
+          <a:lstStyle/>
+          <a:p>
+            <a:pPr algn="l">
+              <a:lnSpc>
+                <a:spcPct val="114000"/>
+              </a:lnSpc>
+            </a:pPr>
+            <a:r>
+              <a:rPr sz="1100" b="1">
+                <a:solidFill>
+                  <a:srgbClr val="0B5E54"/>
+                </a:solidFill>
+              </a:rPr>
+              <a:t>工单实战 · 运行留证</a:t>
+            </a:r>
+          </a:p>
+        </p:txBody>
+      </p:sp>
+      <p:sp>
+        <p:nvSpPr>
+          <p:cNvPr id="4" name="Rounded Rectangle 3"/>
           <p:cNvSpPr/>
           <p:nvPr/>
         </p:nvSpPr>
         <p:spPr>
           <a:xfrm>
-            <a:off x="0" y="1150000"/>
-            <a:ext cx="2600000" cy="70000"/>
-          </a:xfrm>
-          <a:prstGeom prst="rect">
-            <a:avLst/>
+            <a:off x="475488" y="475488"/>
+            <a:ext cx="2027872" cy="310896"/>
+          </a:xfrm>
+          <a:prstGeom prst="roundRect">
+            <a:avLst>
+              <a:gd name="adj" fmla="val 50000"/>
+            </a:avLst>
           </a:prstGeom>
           <a:solidFill>
-            <a:srgbClr val="F5670F"/>
+            <a:srgbClr val="C9A227"/>
           </a:solidFill>
           <a:ln>
             <a:noFill/>
@@ -6915,14 +8408,14 @@
       </p:sp>
       <p:sp>
         <p:nvSpPr>
-          <p:cNvPr id="4" name="TextBox 3"/>
+          <p:cNvPr id="5" name="TextBox 4"/>
           <p:cNvSpPr txBox="1"/>
           <p:nvPr/>
         </p:nvSpPr>
         <p:spPr>
           <a:xfrm>
-            <a:off x="700000" y="300000"/>
-            <a:ext cx="10792000" cy="700000"/>
+            <a:off x="475488" y="475488"/>
+            <a:ext cx="2027872" cy="310896"/>
           </a:xfrm>
           <a:prstGeom prst="rect">
             <a:avLst/>
@@ -6930,39 +8423,86 @@
           <a:noFill/>
         </p:spPr>
         <p:txBody>
-          <a:bodyPr wrap="square" anchor="t">
+          <a:bodyPr wrap="square" anchor="ctr" lIns="0" rIns="0" tIns="0" bIns="0">
             <a:spAutoFit/>
           </a:bodyPr>
           <a:lstStyle/>
           <a:p>
-            <a:r>
-              <a:rPr sz="2000"/>
-              <a:t>P1.2 工程模板生成完成态 · 完成后长这样（真实运行·参考实现）</a:t>
-            </a:r>
-          </a:p>
-        </p:txBody>
-      </p:sp>
-      <p:sp>
-        <p:nvSpPr>
-          <p:cNvPr id="5" name="Rectangle 4"/>
+            <a:pPr algn="ctr">
+              <a:lnSpc>
+                <a:spcPct val="114000"/>
+              </a:lnSpc>
+            </a:pPr>
+            <a:r>
+              <a:rPr sz="1050" b="1">
+                <a:solidFill>
+                  <a:srgbClr val="FFFFFF"/>
+                </a:solidFill>
+              </a:rPr>
+              <a:t>SCREENSHOT · 终端逐字截图</a:t>
+            </a:r>
+          </a:p>
+        </p:txBody>
+      </p:sp>
+      <p:sp>
+        <p:nvSpPr>
+          <p:cNvPr id="6" name="TextBox 5"/>
+          <p:cNvSpPr txBox="1"/>
+          <p:nvPr/>
+        </p:nvSpPr>
+        <p:spPr>
+          <a:xfrm>
+            <a:off x="475488" y="859536"/>
+            <a:ext cx="11237976" cy="502920"/>
+          </a:xfrm>
+          <a:prstGeom prst="rect">
+            <a:avLst/>
+          </a:prstGeom>
+          <a:noFill/>
+        </p:spPr>
+        <p:txBody>
+          <a:bodyPr wrap="square" anchor="t" lIns="0" rIns="0" tIns="0" bIns="0">
+            <a:spAutoFit/>
+          </a:bodyPr>
+          <a:lstStyle/>
+          <a:p>
+            <a:pPr algn="l">
+              <a:lnSpc>
+                <a:spcPct val="114000"/>
+              </a:lnSpc>
+            </a:pPr>
+            <a:r>
+              <a:rPr sz="2200" b="1">
+                <a:solidFill>
+                  <a:srgbClr val="1B2B28"/>
+                </a:solidFill>
+              </a:rPr>
+              <a:t>P1.1 分层达标 · 四档逐字输出截图</a:t>
+            </a:r>
+          </a:p>
+        </p:txBody>
+      </p:sp>
+      <p:sp>
+        <p:nvSpPr>
+          <p:cNvPr id="7" name="Rounded Rectangle 6"/>
           <p:cNvSpPr/>
           <p:nvPr/>
         </p:nvSpPr>
         <p:spPr>
           <a:xfrm>
-            <a:off x="700000" y="1900000"/>
-            <a:ext cx="4600000" cy="1600000"/>
-          </a:xfrm>
-          <a:prstGeom prst="rect">
-            <a:avLst/>
+            <a:off x="475488" y="1389888"/>
+            <a:ext cx="1234440" cy="27432"/>
+          </a:xfrm>
+          <a:prstGeom prst="roundRect">
+            <a:avLst>
+              <a:gd name="adj" fmla="val 50000"/>
+            </a:avLst>
           </a:prstGeom>
           <a:solidFill>
-            <a:srgbClr val="F3F6FD"/>
+            <a:srgbClr val="C9A227"/>
           </a:solidFill>
           <a:ln>
-            <a:solidFill>
-              <a:srgbClr val="C9D4EE"/>
-            </a:solidFill>
+            <a:noFill/>
           </a:ln>
           <a:effectLst/>
         </p:spPr>
@@ -6990,49 +8530,25 @@
       </p:sp>
       <p:sp>
         <p:nvSpPr>
-          <p:cNvPr id="6" name="TextBox 5"/>
-          <p:cNvSpPr txBox="1"/>
-          <p:nvPr/>
-        </p:nvSpPr>
-        <p:spPr>
-          <a:xfrm>
-            <a:off x="700000" y="2520000"/>
-            <a:ext cx="4600000" cy="500000"/>
-          </a:xfrm>
-          <a:prstGeom prst="rect">
-            <a:avLst/>
-          </a:prstGeom>
-          <a:noFill/>
-        </p:spPr>
-        <p:txBody>
-          <a:bodyPr wrap="square" anchor="t">
-            <a:spAutoFit/>
-          </a:bodyPr>
-          <a:lstStyle/>
-          <a:p/>
-        </p:txBody>
-      </p:sp>
-      <p:sp>
-        <p:nvSpPr>
-          <p:cNvPr id="7" name="Rectangle 6"/>
+          <p:cNvPr id="8" name="Rounded Rectangle 7"/>
           <p:cNvSpPr/>
           <p:nvPr/>
         </p:nvSpPr>
         <p:spPr>
           <a:xfrm>
-            <a:off x="700000" y="3700000"/>
-            <a:ext cx="4600000" cy="1600000"/>
-          </a:xfrm>
-          <a:prstGeom prst="rect">
-            <a:avLst/>
+            <a:off x="475488" y="6419088"/>
+            <a:ext cx="11237976" cy="10972"/>
+          </a:xfrm>
+          <a:prstGeom prst="roundRect">
+            <a:avLst>
+              <a:gd name="adj" fmla="val 50000"/>
+            </a:avLst>
           </a:prstGeom>
           <a:solidFill>
-            <a:srgbClr val="F3F6FD"/>
+            <a:srgbClr val="E4F1EE"/>
           </a:solidFill>
           <a:ln>
-            <a:solidFill>
-              <a:srgbClr val="C9D4EE"/>
-            </a:solidFill>
+            <a:noFill/>
           </a:ln>
           <a:effectLst/>
         </p:spPr>
@@ -7060,14 +8576,14 @@
       </p:sp>
       <p:sp>
         <p:nvSpPr>
-          <p:cNvPr id="8" name="TextBox 7"/>
+          <p:cNvPr id="9" name="TextBox 8"/>
           <p:cNvSpPr txBox="1"/>
           <p:nvPr/>
         </p:nvSpPr>
         <p:spPr>
           <a:xfrm>
-            <a:off x="700000" y="4320000"/>
-            <a:ext cx="4600000" cy="500000"/>
+            <a:off x="475488" y="6455664"/>
+            <a:ext cx="7315200" cy="292608"/>
           </a:xfrm>
           <a:prstGeom prst="rect">
             <a:avLst/>
@@ -7075,73 +8591,24 @@
           <a:noFill/>
         </p:spPr>
         <p:txBody>
-          <a:bodyPr wrap="square" anchor="ctr">
+          <a:bodyPr wrap="square" anchor="t" lIns="0" rIns="0" tIns="0" bIns="0">
             <a:spAutoFit/>
           </a:bodyPr>
           <a:lstStyle/>
           <a:p>
-            <a:pPr algn="ctr">
+            <a:pPr algn="l">
               <a:lnSpc>
-                <a:spcPct val="110000"/>
+                <a:spcPct val="114000"/>
               </a:lnSpc>
-              <a:spcAft>
-                <a:spcPts val="600"/>
-              </a:spcAft>
             </a:pPr>
             <a:r>
-              <a:rPr sz="1100" b="0">
-                <a:solidFill>
-                  <a:srgbClr val="1B2B28"/>
+              <a:rPr sz="900" b="0">
+                <a:solidFill>
+                  <a:srgbClr val="5C6E6A"/>
                 </a:solidFill>
               </a:rPr>
-              <a:t>3. pylint 评分 ≥ 8.5</a:t>
-            </a:r>
-          </a:p>
-        </p:txBody>
-      </p:sp>
-      <p:sp>
-        <p:nvSpPr>
-          <p:cNvPr id="9" name="Rectangle 8"/>
-          <p:cNvSpPr/>
-          <p:nvPr/>
-        </p:nvSpPr>
-        <p:spPr>
-          <a:xfrm>
-            <a:off x="5560000" y="1900000"/>
-            <a:ext cx="4600000" cy="1600000"/>
-          </a:xfrm>
-          <a:prstGeom prst="rect">
-            <a:avLst/>
-          </a:prstGeom>
-          <a:solidFill>
-            <a:srgbClr val="F3F6FD"/>
-          </a:solidFill>
-          <a:ln>
-            <a:solidFill>
-              <a:srgbClr val="C9D4EE"/>
-            </a:solidFill>
-          </a:ln>
-          <a:effectLst/>
-        </p:spPr>
-        <p:style>
-          <a:lnRef idx="1">
-            <a:schemeClr val="accent1"/>
-          </a:lnRef>
-          <a:fillRef idx="3">
-            <a:schemeClr val="accent1"/>
-          </a:fillRef>
-          <a:effectRef idx="2">
-            <a:schemeClr val="accent1"/>
-          </a:effectRef>
-          <a:fontRef idx="minor">
-            <a:schemeClr val="lt1"/>
-          </a:fontRef>
-        </p:style>
-        <p:txBody>
-          <a:bodyPr rtlCol="0" anchor="ctr"/>
-          <a:lstStyle/>
-          <a:p>
-            <a:pPr algn="ctr"/>
+              <a:t>两江智造集团 · Python程序设计（项目实战）</a:t>
+            </a:r>
           </a:p>
         </p:txBody>
       </p:sp>
@@ -7153,8 +8620,8 @@
         </p:nvSpPr>
         <p:spPr>
           <a:xfrm>
-            <a:off x="5560000" y="2520000"/>
-            <a:ext cx="4600000" cy="500000"/>
+            <a:off x="10597896" y="6537960"/>
+            <a:ext cx="996696" cy="301752"/>
           </a:xfrm>
           <a:prstGeom prst="rect">
             <a:avLst/>
@@ -7162,86 +8629,37 @@
           <a:noFill/>
         </p:spPr>
         <p:txBody>
-          <a:bodyPr wrap="square" anchor="ctr">
+          <a:bodyPr wrap="square" anchor="t" lIns="0" rIns="0" tIns="0" bIns="0">
             <a:spAutoFit/>
           </a:bodyPr>
           <a:lstStyle/>
           <a:p>
-            <a:pPr algn="ctr">
+            <a:pPr algn="r">
               <a:lnSpc>
-                <a:spcPct val="110000"/>
+                <a:spcPct val="114000"/>
               </a:lnSpc>
-              <a:spcAft>
-                <a:spcPts val="600"/>
-              </a:spcAft>
             </a:pPr>
             <a:r>
-              <a:rPr sz="1100" b="0">
-                <a:solidFill>
-                  <a:srgbClr val="1B2B28"/>
+              <a:rPr sz="1000" b="0">
+                <a:solidFill>
+                  <a:srgbClr val="8A97B5"/>
                 </a:solidFill>
               </a:rPr>
-              <a:t>2. git 五步命令逐条执行</a:t>
-            </a:r>
-          </a:p>
-        </p:txBody>
-      </p:sp>
-      <p:sp>
-        <p:nvSpPr>
-          <p:cNvPr id="11" name="Rectangle 10"/>
-          <p:cNvSpPr/>
-          <p:nvPr/>
-        </p:nvSpPr>
-        <p:spPr>
-          <a:xfrm>
-            <a:off x="5560000" y="3700000"/>
-            <a:ext cx="4600000" cy="1600000"/>
-          </a:xfrm>
-          <a:prstGeom prst="rect">
-            <a:avLst/>
-          </a:prstGeom>
-          <a:solidFill>
-            <a:srgbClr val="F3F6FD"/>
-          </a:solidFill>
-          <a:ln>
-            <a:solidFill>
-              <a:srgbClr val="C9D4EE"/>
-            </a:solidFill>
-          </a:ln>
-          <a:effectLst/>
-        </p:spPr>
-        <p:style>
-          <a:lnRef idx="1">
-            <a:schemeClr val="accent1"/>
-          </a:lnRef>
-          <a:fillRef idx="3">
-            <a:schemeClr val="accent1"/>
-          </a:fillRef>
-          <a:effectRef idx="2">
-            <a:schemeClr val="accent1"/>
-          </a:effectRef>
-          <a:fontRef idx="minor">
-            <a:schemeClr val="lt1"/>
-          </a:fontRef>
-        </p:style>
-        <p:txBody>
-          <a:bodyPr rtlCol="0" anchor="ctr"/>
-          <a:lstStyle/>
-          <a:p>
-            <a:pPr algn="ctr"/>
-          </a:p>
-        </p:txBody>
-      </p:sp>
-      <p:sp>
-        <p:nvSpPr>
-          <p:cNvPr id="12" name="TextBox 11"/>
+              <a:t>5 / 10</a:t>
+            </a:r>
+          </a:p>
+        </p:txBody>
+      </p:sp>
+      <p:sp>
+        <p:nvSpPr>
+          <p:cNvPr id="11" name="TextBox 10"/>
           <p:cNvSpPr txBox="1"/>
           <p:nvPr/>
         </p:nvSpPr>
         <p:spPr>
           <a:xfrm>
-            <a:off x="5560000" y="4320000"/>
-            <a:ext cx="4600000" cy="500000"/>
+            <a:off x="475488" y="1517904"/>
+            <a:ext cx="11237976" cy="237744"/>
           </a:xfrm>
           <a:prstGeom prst="rect">
             <a:avLst/>
@@ -7249,182 +8667,89 @@
           <a:noFill/>
         </p:spPr>
         <p:txBody>
-          <a:bodyPr wrap="square" anchor="ctr">
+          <a:bodyPr wrap="square" anchor="t" lIns="0" rIns="0" tIns="0" bIns="0">
             <a:spAutoFit/>
           </a:bodyPr>
           <a:lstStyle/>
           <a:p>
-            <a:pPr algn="ctr">
-              <a:lnSpc>
-                <a:spcPct val="110000"/>
-              </a:lnSpc>
-              <a:spcAft>
-                <a:spcPts val="600"/>
-              </a:spcAft>
-            </a:pPr>
-            <a:r>
-              <a:rPr sz="1100" b="0">
-                <a:solidFill>
-                  <a:srgbClr val="1B2B28"/>
-                </a:solidFill>
-              </a:rPr>
-              <a:t>4. pytest 测试通过</a:t>
-            </a:r>
-          </a:p>
-        </p:txBody>
-      </p:sp>
-      <p:sp>
-        <p:nvSpPr>
-          <p:cNvPr id="13" name="Rectangle 12"/>
-          <p:cNvSpPr/>
-          <p:nvPr/>
-        </p:nvSpPr>
-        <p:spPr>
-          <a:xfrm>
-            <a:off x="500000" y="6500000"/>
-            <a:ext cx="11100000" cy="20000"/>
-          </a:xfrm>
-          <a:prstGeom prst="rect">
-            <a:avLst/>
-          </a:prstGeom>
-          <a:solidFill>
-            <a:srgbClr val="C9D4EE"/>
-          </a:solidFill>
-          <a:ln>
-            <a:noFill/>
-          </a:ln>
-          <a:effectLst/>
-        </p:spPr>
-        <p:style>
-          <a:lnRef idx="1">
-            <a:schemeClr val="accent1"/>
-          </a:lnRef>
-          <a:fillRef idx="3">
-            <a:schemeClr val="accent1"/>
-          </a:fillRef>
-          <a:effectRef idx="2">
-            <a:schemeClr val="accent1"/>
-          </a:effectRef>
-          <a:fontRef idx="minor">
-            <a:schemeClr val="lt1"/>
-          </a:fontRef>
-        </p:style>
-        <p:txBody>
-          <a:bodyPr rtlCol="0" anchor="ctr"/>
-          <a:lstStyle/>
-          <a:p>
-            <a:pPr algn="ctr"/>
-          </a:p>
-        </p:txBody>
-      </p:sp>
-      <p:sp>
-        <p:nvSpPr>
-          <p:cNvPr id="14" name="TextBox 13"/>
-          <p:cNvSpPr txBox="1"/>
-          <p:nvPr/>
-        </p:nvSpPr>
-        <p:spPr>
-          <a:xfrm>
-            <a:off x="500000" y="6540000"/>
-            <a:ext cx="7000000" cy="300000"/>
-          </a:xfrm>
-          <a:prstGeom prst="rect">
-            <a:avLst/>
-          </a:prstGeom>
-          <a:noFill/>
-        </p:spPr>
-        <p:txBody>
-          <a:bodyPr wrap="square" anchor="t">
-            <a:spAutoFit/>
-          </a:bodyPr>
-          <a:lstStyle/>
-          <a:p>
             <a:pPr algn="l">
               <a:lnSpc>
-                <a:spcPct val="110000"/>
+                <a:spcPct val="114000"/>
               </a:lnSpc>
-              <a:spcAft>
-                <a:spcPts val="600"/>
-              </a:spcAft>
             </a:pPr>
             <a:r>
               <a:rPr sz="1000" b="0">
                 <a:solidFill>
-                  <a:srgbClr val="8A97B5"/>
-                </a:solidFill>
-                <a:latin typeface="微软雅黑"/>
+                  <a:srgbClr val="5C6E6A"/>
+                </a:solidFill>
               </a:rPr>
-              <a:t>两江智造集团 · Python程序设计（项目实战）</a:t>
-            </a:r>
-          </a:p>
-        </p:txBody>
-      </p:sp>
-      <p:sp>
-        <p:nvSpPr>
-          <p:cNvPr id="15" name="TextBox 14"/>
-          <p:cNvSpPr txBox="1"/>
-          <p:nvPr/>
-        </p:nvSpPr>
-        <p:spPr>
-          <a:xfrm>
-            <a:off x="10600000" y="6540000"/>
-            <a:ext cx="1000000" cy="300000"/>
-          </a:xfrm>
-          <a:prstGeom prst="rect">
-            <a:avLst/>
-          </a:prstGeom>
-          <a:noFill/>
-        </p:spPr>
-        <p:txBody>
-          <a:bodyPr wrap="square" anchor="t">
-            <a:spAutoFit/>
-          </a:bodyPr>
-          <a:lstStyle/>
-          <a:p>
-            <a:pPr algn="r">
-              <a:lnSpc>
-                <a:spcPct val="110000"/>
-              </a:lnSpc>
-              <a:spcAft>
-                <a:spcPts val="600"/>
-              </a:spcAft>
-            </a:pPr>
-            <a:r>
-              <a:rPr sz="1000" b="0">
-                <a:solidFill>
-                  <a:srgbClr val="8A97B5"/>
-                </a:solidFill>
-                <a:latin typeface="微软雅黑"/>
-              </a:rPr>
-              <a:t>8 / 10</a:t>
+              <a:t>终端窗口截图：由 report.txt 本节逐字渲染，未手工改写</a:t>
             </a:r>
           </a:p>
         </p:txBody>
       </p:sp>
       <p:pic>
         <p:nvPicPr>
-          <p:cNvPr id="16" name="Picture 15" descr="image.png"/>
+          <p:cNvPr id="12" name="Picture 11" descr="p11_exercises_classroom.png"/>
           <p:cNvPicPr>
             <a:picLocks noChangeAspect="1"/>
           </p:cNvPicPr>
           <p:nvPr/>
         </p:nvPicPr>
         <p:blipFill>
-          <a:blip r:embed="rId4"/>
+          <a:blip r:embed="rId2"/>
           <a:stretch>
             <a:fillRect/>
           </a:stretch>
         </p:blipFill>
         <p:spPr>
           <a:xfrm>
-            <a:off x="1041494" y="1900000"/>
-            <a:ext cx="3917012" cy="1600000"/>
+            <a:off x="702845" y="1792224"/>
+            <a:ext cx="10783260" cy="3849624"/>
           </a:xfrm>
           <a:prstGeom prst="rect">
             <a:avLst/>
           </a:prstGeom>
         </p:spPr>
       </p:pic>
+      <p:sp>
+        <p:nvSpPr>
+          <p:cNvPr id="13" name="TextBox 12"/>
+          <p:cNvSpPr txBox="1"/>
+          <p:nvPr/>
+        </p:nvSpPr>
+        <p:spPr>
+          <a:xfrm>
+            <a:off x="475488" y="5678424"/>
+            <a:ext cx="11237976" cy="256032"/>
+          </a:xfrm>
+          <a:prstGeom prst="rect">
+            <a:avLst/>
+          </a:prstGeom>
+          <a:noFill/>
+        </p:spPr>
+        <p:txBody>
+          <a:bodyPr wrap="square" anchor="t" lIns="0" rIns="0" tIns="0" bIns="0">
+            <a:spAutoFit/>
+          </a:bodyPr>
+          <a:lstStyle/>
+          <a:p>
+            <a:pPr algn="l">
+              <a:lnSpc>
+                <a:spcPct val="114000"/>
+              </a:lnSpc>
+            </a:pPr>
+            <a:r>
+              <a:rPr sz="850" b="0">
+                <a:solidFill>
+                  <a:srgbClr val="5C6E6A"/>
+                </a:solidFill>
+              </a:rPr>
+              <a:t>▲ p11_exercises：分层达标 第 54 行起的四档逐字原文（绿=达标/通过，黄=仅本节取证项，橙=未实测项）</a:t>
+            </a:r>
+          </a:p>
+        </p:txBody>
+      </p:sp>
     </p:spTree>
   </p:cSld>
   <p:clrMapOvr>
@@ -7445,20 +8770,22 @@
       <p:grpSpPr/>
       <p:sp>
         <p:nvSpPr>
-          <p:cNvPr id="2" name="Rectangle 1"/>
+          <p:cNvPr id="2" name="Rounded Rectangle 1"/>
           <p:cNvSpPr/>
           <p:nvPr/>
         </p:nvSpPr>
         <p:spPr>
           <a:xfrm>
             <a:off x="0" y="0"/>
-            <a:ext cx="12192000" cy="6858000"/>
-          </a:xfrm>
-          <a:prstGeom prst="rect">
-            <a:avLst/>
+            <a:ext cx="12191695" cy="64008"/>
+          </a:xfrm>
+          <a:prstGeom prst="roundRect">
+            <a:avLst>
+              <a:gd name="adj" fmla="val 50000"/>
+            </a:avLst>
           </a:prstGeom>
           <a:solidFill>
-            <a:srgbClr val="010328"/>
+            <a:srgbClr val="0B5E54"/>
           </a:solidFill>
           <a:ln>
             <a:noFill/>
@@ -7489,20 +8816,60 @@
       </p:sp>
       <p:sp>
         <p:nvSpPr>
-          <p:cNvPr id="3" name="Rectangle 2"/>
+          <p:cNvPr id="3" name="TextBox 2"/>
+          <p:cNvSpPr txBox="1"/>
+          <p:nvPr/>
+        </p:nvSpPr>
+        <p:spPr>
+          <a:xfrm>
+            <a:off x="475488" y="146304"/>
+            <a:ext cx="8229600" cy="292608"/>
+          </a:xfrm>
+          <a:prstGeom prst="rect">
+            <a:avLst/>
+          </a:prstGeom>
+          <a:noFill/>
+        </p:spPr>
+        <p:txBody>
+          <a:bodyPr wrap="square" anchor="t" lIns="0" rIns="0" tIns="0" bIns="0">
+            <a:spAutoFit/>
+          </a:bodyPr>
+          <a:lstStyle/>
+          <a:p>
+            <a:pPr algn="l">
+              <a:lnSpc>
+                <a:spcPct val="114000"/>
+              </a:lnSpc>
+            </a:pPr>
+            <a:r>
+              <a:rPr sz="1100" b="1">
+                <a:solidFill>
+                  <a:srgbClr val="0B5E54"/>
+                </a:solidFill>
+              </a:rPr>
+              <a:t>工单实战 · 运行留证</a:t>
+            </a:r>
+          </a:p>
+        </p:txBody>
+      </p:sp>
+      <p:sp>
+        <p:nvSpPr>
+          <p:cNvPr id="4" name="Rounded Rectangle 3"/>
           <p:cNvSpPr/>
           <p:nvPr/>
         </p:nvSpPr>
         <p:spPr>
           <a:xfrm>
-            <a:off x="0" y="2880360"/>
-            <a:ext cx="12192000" cy="50000"/>
-          </a:xfrm>
-          <a:prstGeom prst="rect">
-            <a:avLst/>
+            <a:off x="475488" y="475488"/>
+            <a:ext cx="2027872" cy="310896"/>
+          </a:xfrm>
+          <a:prstGeom prst="roundRect">
+            <a:avLst>
+              <a:gd name="adj" fmla="val 50000"/>
+            </a:avLst>
           </a:prstGeom>
           <a:solidFill>
-            <a:srgbClr val="F5670F"/>
+            <a:srgbClr val="C9A227"/>
           </a:solidFill>
           <a:ln>
             <a:noFill/>
@@ -7533,14 +8900,14 @@
       </p:sp>
       <p:sp>
         <p:nvSpPr>
-          <p:cNvPr id="4" name="TextBox 3"/>
+          <p:cNvPr id="5" name="TextBox 4"/>
           <p:cNvSpPr txBox="1"/>
           <p:nvPr/>
         </p:nvSpPr>
         <p:spPr>
           <a:xfrm>
-            <a:off x="0" y="1645920"/>
-            <a:ext cx="12192000" cy="1500000"/>
+            <a:off x="475488" y="475488"/>
+            <a:ext cx="2027872" cy="310896"/>
           </a:xfrm>
           <a:prstGeom prst="rect">
             <a:avLst/>
@@ -7548,41 +8915,37 @@
           <a:noFill/>
         </p:spPr>
         <p:txBody>
-          <a:bodyPr wrap="square" anchor="t">
+          <a:bodyPr wrap="square" anchor="ctr" lIns="0" rIns="0" tIns="0" bIns="0">
             <a:spAutoFit/>
           </a:bodyPr>
           <a:lstStyle/>
           <a:p>
             <a:pPr algn="ctr">
               <a:lnSpc>
-                <a:spcPct val="110000"/>
+                <a:spcPct val="114000"/>
               </a:lnSpc>
-              <a:spcAft>
-                <a:spcPts val="600"/>
-              </a:spcAft>
             </a:pPr>
             <a:r>
-              <a:rPr sz="5400" b="1">
+              <a:rPr sz="1050" b="1">
                 <a:solidFill>
                   <a:srgbClr val="FFFFFF"/>
                 </a:solidFill>
-                <a:latin typeface="微软雅黑"/>
               </a:rPr>
-              <a:t>THANKS</a:t>
-            </a:r>
-          </a:p>
-        </p:txBody>
-      </p:sp>
-      <p:sp>
-        <p:nvSpPr>
-          <p:cNvPr id="5" name="TextBox 4"/>
+              <a:t>SCREENSHOT · 终端逐字截图</a:t>
+            </a:r>
+          </a:p>
+        </p:txBody>
+      </p:sp>
+      <p:sp>
+        <p:nvSpPr>
+          <p:cNvPr id="6" name="TextBox 5"/>
           <p:cNvSpPr txBox="1"/>
           <p:nvPr/>
         </p:nvSpPr>
         <p:spPr>
           <a:xfrm>
-            <a:off x="0" y="3429000"/>
-            <a:ext cx="12192000" cy="800000"/>
+            <a:off x="475488" y="859536"/>
+            <a:ext cx="11237976" cy="502920"/>
           </a:xfrm>
           <a:prstGeom prst="rect">
             <a:avLst/>
@@ -7590,89 +8953,45 @@
           <a:noFill/>
         </p:spPr>
         <p:txBody>
-          <a:bodyPr wrap="square" anchor="t">
+          <a:bodyPr wrap="square" anchor="t" lIns="0" rIns="0" tIns="0" bIns="0">
             <a:spAutoFit/>
           </a:bodyPr>
           <a:lstStyle/>
           <a:p>
-            <a:pPr algn="ctr">
+            <a:pPr algn="l">
               <a:lnSpc>
-                <a:spcPct val="110000"/>
+                <a:spcPct val="114000"/>
               </a:lnSpc>
-              <a:spcAft>
-                <a:spcPts val="600"/>
-              </a:spcAft>
             </a:pPr>
             <a:r>
               <a:rPr sz="2200" b="1">
                 <a:solidFill>
-                  <a:srgbClr val="F5670F"/>
-                </a:solidFill>
-                <a:latin typeface="微软雅黑"/>
+                  <a:srgbClr val="1B2B28"/>
+                </a:solidFill>
               </a:rPr>
-              <a:t>感谢聆听 · 动手实践出真知</a:t>
-            </a:r>
-          </a:p>
-        </p:txBody>
-      </p:sp>
-      <p:sp>
-        <p:nvSpPr>
-          <p:cNvPr id="6" name="TextBox 5"/>
-          <p:cNvSpPr txBox="1"/>
-          <p:nvPr/>
-        </p:nvSpPr>
-        <p:spPr>
-          <a:xfrm>
-            <a:off x="0" y="4526280"/>
-            <a:ext cx="12192000" cy="600000"/>
-          </a:xfrm>
-          <a:prstGeom prst="rect">
-            <a:avLst/>
-          </a:prstGeom>
-          <a:noFill/>
-        </p:spPr>
-        <p:txBody>
-          <a:bodyPr wrap="square" anchor="t">
-            <a:spAutoFit/>
-          </a:bodyPr>
-          <a:lstStyle/>
-          <a:p>
-            <a:pPr algn="ctr">
-              <a:lnSpc>
-                <a:spcPct val="110000"/>
-              </a:lnSpc>
-              <a:spcAft>
-                <a:spcPts val="600"/>
-              </a:spcAft>
-            </a:pPr>
-            <a:r>
-              <a:rPr sz="1400" b="0">
-                <a:solidFill>
-                  <a:srgbClr val="BBC6E6"/>
-                </a:solidFill>
-                <a:latin typeface="微软雅黑"/>
-              </a:rPr>
-              <a:t>以生为本   |   做中学 · 学中做</a:t>
-            </a:r>
-          </a:p>
-        </p:txBody>
-      </p:sp>
-      <p:sp>
-        <p:nvSpPr>
-          <p:cNvPr id="7" name="Rectangle 6"/>
+              <a:t>P1.1 · 测试全绿证据＋pytest 全量实跑</a:t>
+            </a:r>
+          </a:p>
+        </p:txBody>
+      </p:sp>
+      <p:sp>
+        <p:nvSpPr>
+          <p:cNvPr id="7" name="Rounded Rectangle 6"/>
           <p:cNvSpPr/>
           <p:nvPr/>
         </p:nvSpPr>
         <p:spPr>
           <a:xfrm>
-            <a:off x="500000" y="6500000"/>
-            <a:ext cx="11100000" cy="20000"/>
-          </a:xfrm>
-          <a:prstGeom prst="rect">
-            <a:avLst/>
+            <a:off x="475488" y="1389888"/>
+            <a:ext cx="1234440" cy="27432"/>
+          </a:xfrm>
+          <a:prstGeom prst="roundRect">
+            <a:avLst>
+              <a:gd name="adj" fmla="val 50000"/>
+            </a:avLst>
           </a:prstGeom>
           <a:solidFill>
-            <a:srgbClr val="C9D4EE"/>
+            <a:srgbClr val="C9A227"/>
           </a:solidFill>
           <a:ln>
             <a:noFill/>
@@ -7703,14 +9022,60 @@
       </p:sp>
       <p:sp>
         <p:nvSpPr>
-          <p:cNvPr id="8" name="TextBox 7"/>
+          <p:cNvPr id="8" name="Rounded Rectangle 7"/>
+          <p:cNvSpPr/>
+          <p:nvPr/>
+        </p:nvSpPr>
+        <p:spPr>
+          <a:xfrm>
+            <a:off x="475488" y="6419088"/>
+            <a:ext cx="11237976" cy="10972"/>
+          </a:xfrm>
+          <a:prstGeom prst="roundRect">
+            <a:avLst>
+              <a:gd name="adj" fmla="val 50000"/>
+            </a:avLst>
+          </a:prstGeom>
+          <a:solidFill>
+            <a:srgbClr val="E4F1EE"/>
+          </a:solidFill>
+          <a:ln>
+            <a:noFill/>
+          </a:ln>
+          <a:effectLst/>
+        </p:spPr>
+        <p:style>
+          <a:lnRef idx="1">
+            <a:schemeClr val="accent1"/>
+          </a:lnRef>
+          <a:fillRef idx="3">
+            <a:schemeClr val="accent1"/>
+          </a:fillRef>
+          <a:effectRef idx="2">
+            <a:schemeClr val="accent1"/>
+          </a:effectRef>
+          <a:fontRef idx="minor">
+            <a:schemeClr val="lt1"/>
+          </a:fontRef>
+        </p:style>
+        <p:txBody>
+          <a:bodyPr rtlCol="0" anchor="ctr"/>
+          <a:lstStyle/>
+          <a:p>
+            <a:pPr algn="ctr"/>
+          </a:p>
+        </p:txBody>
+      </p:sp>
+      <p:sp>
+        <p:nvSpPr>
+          <p:cNvPr id="9" name="TextBox 8"/>
           <p:cNvSpPr txBox="1"/>
           <p:nvPr/>
         </p:nvSpPr>
         <p:spPr>
           <a:xfrm>
-            <a:off x="500000" y="6540000"/>
-            <a:ext cx="7000000" cy="300000"/>
+            <a:off x="475488" y="6455664"/>
+            <a:ext cx="7315200" cy="292608"/>
           </a:xfrm>
           <a:prstGeom prst="rect">
             <a:avLst/>
@@ -7718,25 +9083,21 @@
           <a:noFill/>
         </p:spPr>
         <p:txBody>
-          <a:bodyPr wrap="square" anchor="t">
+          <a:bodyPr wrap="square" anchor="t" lIns="0" rIns="0" tIns="0" bIns="0">
             <a:spAutoFit/>
           </a:bodyPr>
           <a:lstStyle/>
           <a:p>
             <a:pPr algn="l">
               <a:lnSpc>
-                <a:spcPct val="110000"/>
+                <a:spcPct val="114000"/>
               </a:lnSpc>
-              <a:spcAft>
-                <a:spcPts val="600"/>
-              </a:spcAft>
             </a:pPr>
             <a:r>
-              <a:rPr sz="1000" b="0">
-                <a:solidFill>
-                  <a:srgbClr val="8A97B5"/>
-                </a:solidFill>
-                <a:latin typeface="微软雅黑"/>
+              <a:rPr sz="900" b="0">
+                <a:solidFill>
+                  <a:srgbClr val="5C6E6A"/>
+                </a:solidFill>
               </a:rPr>
               <a:t>两江智造集团 · Python程序设计（项目实战）</a:t>
             </a:r>
@@ -7745,14 +9106,14 @@
       </p:sp>
       <p:sp>
         <p:nvSpPr>
-          <p:cNvPr id="9" name="TextBox 8"/>
+          <p:cNvPr id="10" name="TextBox 9"/>
           <p:cNvSpPr txBox="1"/>
           <p:nvPr/>
         </p:nvSpPr>
         <p:spPr>
           <a:xfrm>
-            <a:off x="10600000" y="6540000"/>
-            <a:ext cx="1000000" cy="300000"/>
+            <a:off x="10597896" y="6537960"/>
+            <a:ext cx="996696" cy="301752"/>
           </a:xfrm>
           <a:prstGeom prst="rect">
             <a:avLst/>
@@ -7760,27 +9121,283 @@
           <a:noFill/>
         </p:spPr>
         <p:txBody>
-          <a:bodyPr wrap="square" anchor="ctr">
+          <a:bodyPr wrap="square" anchor="t" lIns="0" rIns="0" tIns="0" bIns="0">
             <a:spAutoFit/>
           </a:bodyPr>
           <a:lstStyle/>
           <a:p>
             <a:pPr algn="r">
               <a:lnSpc>
-                <a:spcPct val="110000"/>
+                <a:spcPct val="114000"/>
               </a:lnSpc>
-              <a:spcAft>
-                <a:spcPts val="600"/>
-              </a:spcAft>
             </a:pPr>
             <a:r>
               <a:rPr sz="1000" b="0">
                 <a:solidFill>
                   <a:srgbClr val="8A97B5"/>
                 </a:solidFill>
-                <a:latin typeface="微软雅黑"/>
               </a:rPr>
-              <a:t>9 / 10</a:t>
+              <a:t>6 / 10</a:t>
+            </a:r>
+          </a:p>
+        </p:txBody>
+      </p:sp>
+      <p:sp>
+        <p:nvSpPr>
+          <p:cNvPr id="11" name="TextBox 10"/>
+          <p:cNvSpPr txBox="1"/>
+          <p:nvPr/>
+        </p:nvSpPr>
+        <p:spPr>
+          <a:xfrm>
+            <a:off x="475488" y="1517904"/>
+            <a:ext cx="11237976" cy="237744"/>
+          </a:xfrm>
+          <a:prstGeom prst="rect">
+            <a:avLst/>
+          </a:prstGeom>
+          <a:noFill/>
+        </p:spPr>
+        <p:txBody>
+          <a:bodyPr wrap="square" anchor="t" lIns="0" rIns="0" tIns="0" bIns="0">
+            <a:spAutoFit/>
+          </a:bodyPr>
+          <a:lstStyle/>
+          <a:p>
+            <a:pPr algn="l">
+              <a:lnSpc>
+                <a:spcPct val="114000"/>
+              </a:lnSpc>
+            </a:pPr>
+            <a:r>
+              <a:rPr sz="1000" b="0">
+                <a:solidFill>
+                  <a:srgbClr val="5C6E6A"/>
+                </a:solidFill>
+              </a:rPr>
+              <a:t>pytest 全量实跑：本机真实运行输出，非示例、非节选</a:t>
+            </a:r>
+          </a:p>
+        </p:txBody>
+      </p:sp>
+      <p:pic>
+        <p:nvPicPr>
+          <p:cNvPr id="12" name="Picture 11" descr="p11_exercises_pytest.png"/>
+          <p:cNvPicPr>
+            <a:picLocks noChangeAspect="1"/>
+          </p:cNvPicPr>
+          <p:nvPr/>
+        </p:nvPicPr>
+        <p:blipFill>
+          <a:blip r:embed="rId2"/>
+          <a:stretch>
+            <a:fillRect/>
+          </a:stretch>
+        </p:blipFill>
+        <p:spPr>
+          <a:xfrm>
+            <a:off x="475488" y="2265275"/>
+            <a:ext cx="11237976" cy="1989122"/>
+          </a:xfrm>
+          <a:prstGeom prst="rect">
+            <a:avLst/>
+          </a:prstGeom>
+        </p:spPr>
+      </p:pic>
+      <p:sp>
+        <p:nvSpPr>
+          <p:cNvPr id="13" name="TextBox 12"/>
+          <p:cNvSpPr txBox="1"/>
+          <p:nvPr/>
+        </p:nvSpPr>
+        <p:spPr>
+          <a:xfrm>
+            <a:off x="475488" y="4290972"/>
+            <a:ext cx="11237976" cy="256032"/>
+          </a:xfrm>
+          <a:prstGeom prst="rect">
+            <a:avLst/>
+          </a:prstGeom>
+          <a:noFill/>
+        </p:spPr>
+        <p:txBody>
+          <a:bodyPr wrap="square" anchor="t" lIns="0" rIns="0" tIns="0" bIns="0">
+            <a:spAutoFit/>
+          </a:bodyPr>
+          <a:lstStyle/>
+          <a:p>
+            <a:pPr algn="l">
+              <a:lnSpc>
+                <a:spcPct val="114000"/>
+              </a:lnSpc>
+            </a:pPr>
+            <a:r>
+              <a:rPr sz="850" b="0">
+                <a:solidFill>
+                  <a:srgbClr val="5C6E6A"/>
+                </a:solidFill>
+              </a:rPr>
+              <a:t>▲ pytest：190 passed in 12.95s（本机实跑，非示例）</a:t>
+            </a:r>
+          </a:p>
+        </p:txBody>
+      </p:sp>
+      <p:sp>
+        <p:nvSpPr>
+          <p:cNvPr id="14" name="Rounded Rectangle 13"/>
+          <p:cNvSpPr/>
+          <p:nvPr/>
+        </p:nvSpPr>
+        <p:spPr>
+          <a:xfrm>
+            <a:off x="475488" y="4656732"/>
+            <a:ext cx="11237976" cy="822960"/>
+          </a:xfrm>
+          <a:prstGeom prst="roundRect">
+            <a:avLst>
+              <a:gd name="adj" fmla="val 5000"/>
+            </a:avLst>
+          </a:prstGeom>
+          <a:solidFill>
+            <a:srgbClr val="E4F1EE"/>
+          </a:solidFill>
+          <a:ln>
+            <a:noFill/>
+          </a:ln>
+          <a:effectLst/>
+        </p:spPr>
+        <p:style>
+          <a:lnRef idx="1">
+            <a:schemeClr val="accent1"/>
+          </a:lnRef>
+          <a:fillRef idx="3">
+            <a:schemeClr val="accent1"/>
+          </a:fillRef>
+          <a:effectRef idx="2">
+            <a:schemeClr val="accent1"/>
+          </a:effectRef>
+          <a:fontRef idx="minor">
+            <a:schemeClr val="lt1"/>
+          </a:fontRef>
+        </p:style>
+        <p:txBody>
+          <a:bodyPr rtlCol="0" anchor="ctr"/>
+          <a:lstStyle/>
+          <a:p>
+            <a:pPr algn="ctr"/>
+          </a:p>
+        </p:txBody>
+      </p:sp>
+      <p:sp>
+        <p:nvSpPr>
+          <p:cNvPr id="15" name="Rounded Rectangle 14"/>
+          <p:cNvSpPr/>
+          <p:nvPr/>
+        </p:nvSpPr>
+        <p:spPr>
+          <a:xfrm>
+            <a:off x="475488" y="4656732"/>
+            <a:ext cx="54864" cy="822960"/>
+          </a:xfrm>
+          <a:prstGeom prst="roundRect">
+            <a:avLst>
+              <a:gd name="adj" fmla="val 50000"/>
+            </a:avLst>
+          </a:prstGeom>
+          <a:solidFill>
+            <a:srgbClr val="C9A227"/>
+          </a:solidFill>
+          <a:ln>
+            <a:noFill/>
+          </a:ln>
+          <a:effectLst/>
+        </p:spPr>
+        <p:style>
+          <a:lnRef idx="1">
+            <a:schemeClr val="accent1"/>
+          </a:lnRef>
+          <a:fillRef idx="3">
+            <a:schemeClr val="accent1"/>
+          </a:fillRef>
+          <a:effectRef idx="2">
+            <a:schemeClr val="accent1"/>
+          </a:effectRef>
+          <a:fontRef idx="minor">
+            <a:schemeClr val="lt1"/>
+          </a:fontRef>
+        </p:style>
+        <p:txBody>
+          <a:bodyPr rtlCol="0" anchor="ctr"/>
+          <a:lstStyle/>
+          <a:p>
+            <a:pPr algn="ctr"/>
+          </a:p>
+        </p:txBody>
+      </p:sp>
+      <p:sp>
+        <p:nvSpPr>
+          <p:cNvPr id="16" name="TextBox 15"/>
+          <p:cNvSpPr txBox="1"/>
+          <p:nvPr/>
+        </p:nvSpPr>
+        <p:spPr>
+          <a:xfrm>
+            <a:off x="676656" y="4739028"/>
+            <a:ext cx="10908792" cy="658368"/>
+          </a:xfrm>
+          <a:prstGeom prst="rect">
+            <a:avLst/>
+          </a:prstGeom>
+          <a:noFill/>
+        </p:spPr>
+        <p:txBody>
+          <a:bodyPr wrap="square" anchor="t" lIns="0" rIns="0" tIns="0" bIns="0">
+            <a:spAutoFit/>
+          </a:bodyPr>
+          <a:lstStyle/>
+          <a:p>
+            <a:pPr algn="l">
+              <a:lnSpc>
+                <a:spcPct val="126000"/>
+              </a:lnSpc>
+            </a:pPr>
+            <a:r>
+              <a:rPr sz="850" b="0">
+                <a:solidFill>
+                  <a:srgbClr val="1B2B28"/>
+                </a:solidFill>
+              </a:rPr>
+              <a:t>本项目四档只有一套阶梯口径（课堂 D/C/B/A 即工单及格/良好/优秀/超优），逐字实测见上一页截图；本页补的是测试全绿证据。</a:t>
+            </a:r>
+          </a:p>
+          <a:p>
+            <a:pPr algn="l">
+              <a:lnSpc>
+                <a:spcPct val="126000"/>
+              </a:lnSpc>
+            </a:pPr>
+            <a:r>
+              <a:rPr sz="850" b="0">
+                <a:solidFill>
+                  <a:srgbClr val="1B2B28"/>
+                </a:solidFill>
+              </a:rPr>
+              <a:t>复现：cd 工程化项目/p11_exercises &amp;&amp; python -m pytest -q -o addopts=''</a:t>
+            </a:r>
+          </a:p>
+          <a:p>
+            <a:pPr algn="l">
+              <a:lnSpc>
+                <a:spcPct val="126000"/>
+              </a:lnSpc>
+            </a:pPr>
+            <a:r>
+              <a:rPr sz="850" b="0">
+                <a:solidFill>
+                  <a:srgbClr val="1B2B28"/>
+                </a:solidFill>
+              </a:rPr>
+              <a:t>工单提交：截图需含终端标题栏的文件名与完整输出，退出码 0 才算全绿。</a:t>
             </a:r>
           </a:p>
         </p:txBody>
@@ -7928,7 +9545,7 @@
                 </a:solidFill>
                 <a:latin typeface="微软雅黑"/>
               </a:rPr>
-              <a:t>下次课预告（第2周）</a:t>
+              <a:t>总结评价与课后任务</a:t>
             </a:r>
           </a:p>
         </p:txBody>
@@ -7941,8 +9558,8 @@
         </p:nvSpPr>
         <p:spPr>
           <a:xfrm>
-            <a:off x="760000" y="1900000"/>
-            <a:ext cx="10900000" cy="1600000"/>
+            <a:off x="800000" y="1950000"/>
+            <a:ext cx="10600000" cy="1500000"/>
           </a:xfrm>
           <a:prstGeom prst="rect">
             <a:avLst/>
@@ -7979,58 +9596,14 @@
       </p:sp>
       <p:sp>
         <p:nvSpPr>
-          <p:cNvPr id="6" name="Rectangle 5"/>
-          <p:cNvSpPr/>
-          <p:nvPr/>
-        </p:nvSpPr>
-        <p:spPr>
-          <a:xfrm>
-            <a:off x="760000" y="1900000"/>
-            <a:ext cx="150000" cy="1600000"/>
-          </a:xfrm>
-          <a:prstGeom prst="rect">
-            <a:avLst/>
-          </a:prstGeom>
-          <a:solidFill>
-            <a:srgbClr val="F5670F"/>
-          </a:solidFill>
-          <a:ln>
-            <a:noFill/>
-          </a:ln>
-          <a:effectLst/>
-        </p:spPr>
-        <p:style>
-          <a:lnRef idx="1">
-            <a:schemeClr val="accent1"/>
-          </a:lnRef>
-          <a:fillRef idx="3">
-            <a:schemeClr val="accent1"/>
-          </a:fillRef>
-          <a:effectRef idx="2">
-            <a:schemeClr val="accent1"/>
-          </a:effectRef>
-          <a:fontRef idx="minor">
-            <a:schemeClr val="lt1"/>
-          </a:fontRef>
-        </p:style>
-        <p:txBody>
-          <a:bodyPr rtlCol="0" anchor="ctr"/>
-          <a:lstStyle/>
-          <a:p>
-            <a:pPr algn="ctr"/>
-          </a:p>
-        </p:txBody>
-      </p:sp>
-      <p:sp>
-        <p:nvSpPr>
-          <p:cNvPr id="7" name="TextBox 6"/>
+          <p:cNvPr id="6" name="TextBox 5"/>
           <p:cNvSpPr txBox="1"/>
           <p:nvPr/>
         </p:nvSpPr>
         <p:spPr>
           <a:xfrm>
-            <a:off x="1020000" y="2050000"/>
-            <a:ext cx="10500000" cy="1400000"/>
+            <a:off x="1000000" y="2050000"/>
+            <a:ext cx="10300000" cy="1400000"/>
           </a:xfrm>
           <a:prstGeom prst="rect">
             <a:avLst/>
@@ -8052,13 +9625,13 @@
               </a:spcAft>
             </a:pPr>
             <a:r>
-              <a:rPr sz="1700" b="1">
-                <a:solidFill>
-                  <a:srgbClr val="010328"/>
+              <a:rPr sz="1500" b="1">
+                <a:solidFill>
+                  <a:srgbClr val="0545E8"/>
                 </a:solidFill>
                 <a:latin typeface="微软雅黑"/>
               </a:rPr>
-              <a:t>主题: 生成标准工程模板并推Git——应用：见工单sta</a:t>
+              <a:t>评价（10分钟）：</a:t>
             </a:r>
           </a:p>
           <a:p>
@@ -8071,13 +9644,64 @@
               </a:spcAft>
             </a:pPr>
             <a:r>
-              <a:rPr sz="1300" b="0">
-                <a:solidFill>
-                  <a:srgbClr val="44546A"/>
+              <a:rPr sz="1400" b="0">
+                <a:solidFill>
+                  <a:srgbClr val="010328"/>
                 </a:solidFill>
                 <a:latin typeface="微软雅黑"/>
               </a:rPr>
-              <a:t>预习快问: requirements.txt的作用？conda环境为什么不必进.gitignore？</a:t>
+              <a:t>按D/C/B/A量表当堂评分；工单24小时内反馈评语与改进建议。</a:t>
+            </a:r>
+          </a:p>
+        </p:txBody>
+      </p:sp>
+      <p:sp>
+        <p:nvSpPr>
+          <p:cNvPr id="7" name="TextBox 6"/>
+          <p:cNvSpPr txBox="1"/>
+          <p:nvPr/>
+        </p:nvSpPr>
+        <p:spPr>
+          <a:xfrm>
+            <a:off x="850000" y="3700000"/>
+            <a:ext cx="10600000" cy="700000"/>
+          </a:xfrm>
+          <a:prstGeom prst="rect">
+            <a:avLst/>
+          </a:prstGeom>
+          <a:noFill/>
+        </p:spPr>
+        <p:txBody>
+          <a:bodyPr wrap="square" anchor="t">
+            <a:spAutoFit/>
+          </a:bodyPr>
+          <a:lstStyle/>
+          <a:p>
+            <a:pPr algn="l">
+              <a:lnSpc>
+                <a:spcPct val="120000"/>
+              </a:lnSpc>
+              <a:spcAft>
+                <a:spcPts val="600"/>
+              </a:spcAft>
+            </a:pPr>
+            <a:r>
+              <a:rPr sz="1400" b="1">
+                <a:solidFill>
+                  <a:srgbClr val="F5670F"/>
+                </a:solidFill>
+                <a:latin typeface="微软雅黑"/>
+              </a:rPr>
+              <a:t>1. </a:t>
+            </a:r>
+            <a:r>
+              <a:rPr sz="1400" b="0">
+                <a:solidFill>
+                  <a:srgbClr val="010328"/>
+                </a:solidFill>
+                <a:latin typeface="微软雅黑"/>
+              </a:rPr>
+              <a:t>1. 完成工单P1.1《Python基础练习五题》：及格标准≥3题正确+PEP 8≥75%；优秀标准5题全对+PEP 8≥85%+命名有意义；</a:t>
             </a:r>
           </a:p>
         </p:txBody>
@@ -8090,8 +9714,110 @@
         </p:nvSpPr>
         <p:spPr>
           <a:xfrm>
-            <a:off x="760000" y="3900000"/>
-            <a:ext cx="10900000" cy="900000"/>
+            <a:off x="850000" y="4420000"/>
+            <a:ext cx="10600000" cy="700000"/>
+          </a:xfrm>
+          <a:prstGeom prst="rect">
+            <a:avLst/>
+          </a:prstGeom>
+          <a:noFill/>
+        </p:spPr>
+        <p:txBody>
+          <a:bodyPr wrap="square" anchor="t">
+            <a:spAutoFit/>
+          </a:bodyPr>
+          <a:lstStyle/>
+          <a:p>
+            <a:pPr algn="l">
+              <a:lnSpc>
+                <a:spcPct val="120000"/>
+              </a:lnSpc>
+              <a:spcAft>
+                <a:spcPts val="600"/>
+              </a:spcAft>
+            </a:pPr>
+            <a:r>
+              <a:rPr sz="1400" b="1">
+                <a:solidFill>
+                  <a:srgbClr val="F5670F"/>
+                </a:solidFill>
+                <a:latin typeface="微软雅黑"/>
+              </a:rPr>
+              <a:t>2. </a:t>
+            </a:r>
+            <a:r>
+              <a:rPr sz="1400" b="0">
+                <a:solidFill>
+                  <a:srgbClr val="010328"/>
+                </a:solidFill>
+                <a:latin typeface="微软雅黑"/>
+              </a:rPr>
+              <a:t>2. 整理个人《C→Python迁移对照笔记》；</a:t>
+            </a:r>
+          </a:p>
+        </p:txBody>
+      </p:sp>
+      <p:sp>
+        <p:nvSpPr>
+          <p:cNvPr id="9" name="TextBox 8"/>
+          <p:cNvSpPr txBox="1"/>
+          <p:nvPr/>
+        </p:nvSpPr>
+        <p:spPr>
+          <a:xfrm>
+            <a:off x="850000" y="5140000"/>
+            <a:ext cx="10600000" cy="700000"/>
+          </a:xfrm>
+          <a:prstGeom prst="rect">
+            <a:avLst/>
+          </a:prstGeom>
+          <a:noFill/>
+        </p:spPr>
+        <p:txBody>
+          <a:bodyPr wrap="square" anchor="t">
+            <a:spAutoFit/>
+          </a:bodyPr>
+          <a:lstStyle/>
+          <a:p>
+            <a:pPr algn="l">
+              <a:lnSpc>
+                <a:spcPct val="120000"/>
+              </a:lnSpc>
+              <a:spcAft>
+                <a:spcPts val="600"/>
+              </a:spcAft>
+            </a:pPr>
+            <a:r>
+              <a:rPr sz="1400" b="1">
+                <a:solidFill>
+                  <a:srgbClr val="F5670F"/>
+                </a:solidFill>
+                <a:latin typeface="微软雅黑"/>
+              </a:rPr>
+              <a:t>3. </a:t>
+            </a:r>
+            <a:r>
+              <a:rPr sz="1400" b="0">
+                <a:solidFill>
+                  <a:srgbClr val="010328"/>
+                </a:solidFill>
+                <a:latin typeface="微软雅黑"/>
+              </a:rPr>
+              <a:t>3. 预习PEP 8规范与Git基础操作。</a:t>
+            </a:r>
+          </a:p>
+        </p:txBody>
+      </p:sp>
+      <p:sp>
+        <p:nvSpPr>
+          <p:cNvPr id="10" name="TextBox 9"/>
+          <p:cNvSpPr txBox="1"/>
+          <p:nvPr/>
+        </p:nvSpPr>
+        <p:spPr>
+          <a:xfrm>
+            <a:off x="850000" y="5960000"/>
+            <a:ext cx="10600000" cy="500000"/>
           </a:xfrm>
           <a:prstGeom prst="rect">
             <a:avLst/>
@@ -8113,15 +9839,91 @@
               </a:spcAft>
             </a:pPr>
             <a:r>
-              <a:rPr sz="1400" b="1">
-                <a:solidFill>
-                  <a:srgbClr val="0545E8"/>
+              <a:rPr sz="1300" b="1">
+                <a:solidFill>
+                  <a:srgbClr val="0475B6"/>
                 </a:solidFill>
                 <a:latin typeface="微软雅黑"/>
               </a:rPr>
-              <a:t>课前完成：导学单 + 预习自测 + starter环境自检</a:t>
-            </a:r>
-          </a:p>
+              <a:t>下次课预告：</a:t>
+            </a:r>
+            <a:r>
+              <a:rPr sz="1300" b="0">
+                <a:solidFill>
+                  <a:srgbClr val="44546A"/>
+                </a:solidFill>
+                <a:latin typeface="微软雅黑"/>
+              </a:rPr>
+              <a:t>见下次课工单任务书</a:t>
+            </a:r>
+          </a:p>
+        </p:txBody>
+      </p:sp>
+      <p:sp>
+        <p:nvSpPr>
+          <p:cNvPr id="11" name="Rectangle 10"/>
+          <p:cNvSpPr/>
+          <p:nvPr/>
+        </p:nvSpPr>
+        <p:spPr>
+          <a:xfrm>
+            <a:off x="500000" y="6500000"/>
+            <a:ext cx="11100000" cy="20000"/>
+          </a:xfrm>
+          <a:prstGeom prst="rect">
+            <a:avLst/>
+          </a:prstGeom>
+          <a:solidFill>
+            <a:srgbClr val="C9D4EE"/>
+          </a:solidFill>
+          <a:ln>
+            <a:noFill/>
+          </a:ln>
+          <a:effectLst/>
+        </p:spPr>
+        <p:style>
+          <a:lnRef idx="1">
+            <a:schemeClr val="accent1"/>
+          </a:lnRef>
+          <a:fillRef idx="3">
+            <a:schemeClr val="accent1"/>
+          </a:fillRef>
+          <a:effectRef idx="2">
+            <a:schemeClr val="accent1"/>
+          </a:effectRef>
+          <a:fontRef idx="minor">
+            <a:schemeClr val="lt1"/>
+          </a:fontRef>
+        </p:style>
+        <p:txBody>
+          <a:bodyPr rtlCol="0" anchor="ctr"/>
+          <a:lstStyle/>
+          <a:p>
+            <a:pPr algn="ctr"/>
+          </a:p>
+        </p:txBody>
+      </p:sp>
+      <p:sp>
+        <p:nvSpPr>
+          <p:cNvPr id="12" name="TextBox 11"/>
+          <p:cNvSpPr txBox="1"/>
+          <p:nvPr/>
+        </p:nvSpPr>
+        <p:spPr>
+          <a:xfrm>
+            <a:off x="500000" y="6540000"/>
+            <a:ext cx="7000000" cy="300000"/>
+          </a:xfrm>
+          <a:prstGeom prst="rect">
+            <a:avLst/>
+          </a:prstGeom>
+          <a:noFill/>
+        </p:spPr>
+        <p:txBody>
+          <a:bodyPr wrap="square" anchor="t">
+            <a:spAutoFit/>
+          </a:bodyPr>
+          <a:lstStyle/>
           <a:p>
             <a:pPr algn="l">
               <a:lnSpc>
@@ -8132,13 +9934,55 @@
               </a:spcAft>
             </a:pPr>
             <a:r>
-              <a:rPr sz="1250" b="0">
-                <a:solidFill>
-                  <a:srgbClr val="44546A"/>
+              <a:rPr sz="1000" b="0">
+                <a:solidFill>
+                  <a:srgbClr val="8A97B5"/>
                 </a:solidFill>
                 <a:latin typeface="微软雅黑"/>
               </a:rPr>
-              <a:t>带着问题来上课——Predict先于Run</a:t>
+              <a:t>两江智造集团 · Python程序设计（项目实战）</a:t>
+            </a:r>
+          </a:p>
+        </p:txBody>
+      </p:sp>
+      <p:sp>
+        <p:nvSpPr>
+          <p:cNvPr id="13" name="TextBox 12"/>
+          <p:cNvSpPr txBox="1"/>
+          <p:nvPr/>
+        </p:nvSpPr>
+        <p:spPr>
+          <a:xfrm>
+            <a:off x="10600000" y="6540000"/>
+            <a:ext cx="1000000" cy="300000"/>
+          </a:xfrm>
+          <a:prstGeom prst="rect">
+            <a:avLst/>
+          </a:prstGeom>
+          <a:noFill/>
+        </p:spPr>
+        <p:txBody>
+          <a:bodyPr wrap="square" anchor="t">
+            <a:spAutoFit/>
+          </a:bodyPr>
+          <a:lstStyle/>
+          <a:p>
+            <a:pPr algn="r">
+              <a:lnSpc>
+                <a:spcPct val="110000"/>
+              </a:lnSpc>
+              <a:spcAft>
+                <a:spcPts val="600"/>
+              </a:spcAft>
+            </a:pPr>
+            <a:r>
+              <a:rPr sz="1000" b="0">
+                <a:solidFill>
+                  <a:srgbClr val="8A97B5"/>
+                </a:solidFill>
+                <a:latin typeface="微软雅黑"/>
+              </a:rPr>
+              <a:t>7 / 10</a:t>
             </a:r>
           </a:p>
         </p:txBody>
@@ -8163,22 +10007,20 @@
       <p:grpSpPr/>
       <p:sp>
         <p:nvSpPr>
-          <p:cNvPr id="2" name="Rounded Rectangle 1"/>
+          <p:cNvPr id="2" name="Rectangle 1"/>
           <p:cNvSpPr/>
           <p:nvPr/>
         </p:nvSpPr>
         <p:spPr>
           <a:xfrm>
             <a:off x="0" y="0"/>
-            <a:ext cx="12191695" cy="64008"/>
-          </a:xfrm>
-          <a:prstGeom prst="roundRect">
-            <a:avLst>
-              <a:gd name="adj" fmla="val 50000"/>
-            </a:avLst>
+            <a:ext cx="12192000" cy="1150000"/>
+          </a:xfrm>
+          <a:prstGeom prst="rect">
+            <a:avLst/>
           </a:prstGeom>
           <a:solidFill>
-            <a:srgbClr val="0B5E54"/>
+            <a:srgbClr val="010328"/>
           </a:solidFill>
           <a:ln>
             <a:noFill/>
@@ -8209,60 +10051,20 @@
       </p:sp>
       <p:sp>
         <p:nvSpPr>
-          <p:cNvPr id="3" name="TextBox 2"/>
-          <p:cNvSpPr txBox="1"/>
-          <p:nvPr/>
-        </p:nvSpPr>
-        <p:spPr>
-          <a:xfrm>
-            <a:off x="475488" y="146304"/>
-            <a:ext cx="8229600" cy="292608"/>
-          </a:xfrm>
-          <a:prstGeom prst="rect">
-            <a:avLst/>
-          </a:prstGeom>
-          <a:noFill/>
-        </p:spPr>
-        <p:txBody>
-          <a:bodyPr wrap="square" anchor="t" lIns="0" rIns="0" tIns="0" bIns="0">
-            <a:spAutoFit/>
-          </a:bodyPr>
-          <a:lstStyle/>
-          <a:p>
-            <a:pPr algn="l">
-              <a:lnSpc>
-                <a:spcPct val="114000"/>
-              </a:lnSpc>
-            </a:pPr>
-            <a:r>
-              <a:rPr sz="1100" b="1">
-                <a:solidFill>
-                  <a:srgbClr val="0B5E54"/>
-                </a:solidFill>
-              </a:rPr>
-              <a:t>工单实战 · 本次实跑结果</a:t>
-            </a:r>
-          </a:p>
-        </p:txBody>
-      </p:sp>
-      <p:sp>
-        <p:nvSpPr>
-          <p:cNvPr id="4" name="Rounded Rectangle 3"/>
+          <p:cNvPr id="3" name="Rectangle 2"/>
           <p:cNvSpPr/>
           <p:nvPr/>
         </p:nvSpPr>
         <p:spPr>
           <a:xfrm>
-            <a:off x="475488" y="475488"/>
-            <a:ext cx="1881187" cy="310896"/>
-          </a:xfrm>
-          <a:prstGeom prst="roundRect">
-            <a:avLst>
-              <a:gd name="adj" fmla="val 50000"/>
-            </a:avLst>
+            <a:off x="0" y="1150000"/>
+            <a:ext cx="2600000" cy="70000"/>
+          </a:xfrm>
+          <a:prstGeom prst="rect">
+            <a:avLst/>
           </a:prstGeom>
           <a:solidFill>
-            <a:srgbClr val="C9A227"/>
+            <a:srgbClr val="F5670F"/>
           </a:solidFill>
           <a:ln>
             <a:noFill/>
@@ -8293,14 +10095,14 @@
       </p:sp>
       <p:sp>
         <p:nvSpPr>
-          <p:cNvPr id="5" name="TextBox 4"/>
+          <p:cNvPr id="4" name="TextBox 3"/>
           <p:cNvSpPr txBox="1"/>
           <p:nvPr/>
         </p:nvSpPr>
         <p:spPr>
           <a:xfrm>
-            <a:off x="475488" y="475488"/>
-            <a:ext cx="1881187" cy="310896"/>
+            <a:off x="700000" y="300000"/>
+            <a:ext cx="10792000" cy="700000"/>
           </a:xfrm>
           <a:prstGeom prst="rect">
             <a:avLst/>
@@ -8308,37 +10110,231 @@
           <a:noFill/>
         </p:spPr>
         <p:txBody>
-          <a:bodyPr wrap="square" anchor="ctr" lIns="0" rIns="0" tIns="0" bIns="0">
+          <a:bodyPr wrap="square" anchor="t">
             <a:spAutoFit/>
           </a:bodyPr>
           <a:lstStyle/>
           <a:p>
+            <a:r>
+              <a:rPr sz="2000"/>
+              <a:t>P1.2 工程模板生成完成态 · 完成后长这样（真实运行·参考实现）</a:t>
+            </a:r>
+          </a:p>
+        </p:txBody>
+      </p:sp>
+      <p:sp>
+        <p:nvSpPr>
+          <p:cNvPr id="5" name="Rectangle 4"/>
+          <p:cNvSpPr/>
+          <p:nvPr/>
+        </p:nvSpPr>
+        <p:spPr>
+          <a:xfrm>
+            <a:off x="700000" y="1900000"/>
+            <a:ext cx="4600000" cy="1600000"/>
+          </a:xfrm>
+          <a:prstGeom prst="rect">
+            <a:avLst/>
+          </a:prstGeom>
+          <a:solidFill>
+            <a:srgbClr val="F3F6FD"/>
+          </a:solidFill>
+          <a:ln>
+            <a:solidFill>
+              <a:srgbClr val="C9D4EE"/>
+            </a:solidFill>
+          </a:ln>
+          <a:effectLst/>
+        </p:spPr>
+        <p:style>
+          <a:lnRef idx="1">
+            <a:schemeClr val="accent1"/>
+          </a:lnRef>
+          <a:fillRef idx="3">
+            <a:schemeClr val="accent1"/>
+          </a:fillRef>
+          <a:effectRef idx="2">
+            <a:schemeClr val="accent1"/>
+          </a:effectRef>
+          <a:fontRef idx="minor">
+            <a:schemeClr val="lt1"/>
+          </a:fontRef>
+        </p:style>
+        <p:txBody>
+          <a:bodyPr rtlCol="0" anchor="ctr"/>
+          <a:lstStyle/>
+          <a:p>
+            <a:pPr algn="ctr"/>
+          </a:p>
+        </p:txBody>
+      </p:sp>
+      <p:sp>
+        <p:nvSpPr>
+          <p:cNvPr id="6" name="TextBox 5"/>
+          <p:cNvSpPr txBox="1"/>
+          <p:nvPr/>
+        </p:nvSpPr>
+        <p:spPr>
+          <a:xfrm>
+            <a:off x="700000" y="2520000"/>
+            <a:ext cx="4600000" cy="500000"/>
+          </a:xfrm>
+          <a:prstGeom prst="rect">
+            <a:avLst/>
+          </a:prstGeom>
+          <a:noFill/>
+        </p:spPr>
+        <p:txBody>
+          <a:bodyPr wrap="square" anchor="t">
+            <a:spAutoFit/>
+          </a:bodyPr>
+          <a:lstStyle/>
+          <a:p/>
+        </p:txBody>
+      </p:sp>
+      <p:sp>
+        <p:nvSpPr>
+          <p:cNvPr id="7" name="Rectangle 6"/>
+          <p:cNvSpPr/>
+          <p:nvPr/>
+        </p:nvSpPr>
+        <p:spPr>
+          <a:xfrm>
+            <a:off x="700000" y="3700000"/>
+            <a:ext cx="4600000" cy="1600000"/>
+          </a:xfrm>
+          <a:prstGeom prst="rect">
+            <a:avLst/>
+          </a:prstGeom>
+          <a:solidFill>
+            <a:srgbClr val="F3F6FD"/>
+          </a:solidFill>
+          <a:ln>
+            <a:solidFill>
+              <a:srgbClr val="C9D4EE"/>
+            </a:solidFill>
+          </a:ln>
+          <a:effectLst/>
+        </p:spPr>
+        <p:style>
+          <a:lnRef idx="1">
+            <a:schemeClr val="accent1"/>
+          </a:lnRef>
+          <a:fillRef idx="3">
+            <a:schemeClr val="accent1"/>
+          </a:fillRef>
+          <a:effectRef idx="2">
+            <a:schemeClr val="accent1"/>
+          </a:effectRef>
+          <a:fontRef idx="minor">
+            <a:schemeClr val="lt1"/>
+          </a:fontRef>
+        </p:style>
+        <p:txBody>
+          <a:bodyPr rtlCol="0" anchor="ctr"/>
+          <a:lstStyle/>
+          <a:p>
+            <a:pPr algn="ctr"/>
+          </a:p>
+        </p:txBody>
+      </p:sp>
+      <p:sp>
+        <p:nvSpPr>
+          <p:cNvPr id="8" name="TextBox 7"/>
+          <p:cNvSpPr txBox="1"/>
+          <p:nvPr/>
+        </p:nvSpPr>
+        <p:spPr>
+          <a:xfrm>
+            <a:off x="700000" y="4320000"/>
+            <a:ext cx="4600000" cy="500000"/>
+          </a:xfrm>
+          <a:prstGeom prst="rect">
+            <a:avLst/>
+          </a:prstGeom>
+          <a:noFill/>
+        </p:spPr>
+        <p:txBody>
+          <a:bodyPr wrap="square" anchor="ctr">
+            <a:spAutoFit/>
+          </a:bodyPr>
+          <a:lstStyle/>
+          <a:p>
             <a:pPr algn="ctr">
               <a:lnSpc>
-                <a:spcPct val="114000"/>
+                <a:spcPct val="110000"/>
               </a:lnSpc>
+              <a:spcAft>
+                <a:spcPts val="600"/>
+              </a:spcAft>
             </a:pPr>
             <a:r>
-              <a:rPr sz="1050" b="1">
-                <a:solidFill>
-                  <a:srgbClr val="FFFFFF"/>
+              <a:rPr sz="1100" b="0">
+                <a:solidFill>
+                  <a:srgbClr val="1B2B28"/>
                 </a:solidFill>
               </a:rPr>
-              <a:t>REAL RUN · 四档逐字实测</a:t>
-            </a:r>
-          </a:p>
-        </p:txBody>
-      </p:sp>
-      <p:sp>
-        <p:nvSpPr>
-          <p:cNvPr id="6" name="TextBox 5"/>
+              <a:t>3. pylint 评分 ≥ 8.5</a:t>
+            </a:r>
+          </a:p>
+        </p:txBody>
+      </p:sp>
+      <p:sp>
+        <p:nvSpPr>
+          <p:cNvPr id="9" name="Rectangle 8"/>
+          <p:cNvSpPr/>
+          <p:nvPr/>
+        </p:nvSpPr>
+        <p:spPr>
+          <a:xfrm>
+            <a:off x="5560000" y="1900000"/>
+            <a:ext cx="4600000" cy="1600000"/>
+          </a:xfrm>
+          <a:prstGeom prst="rect">
+            <a:avLst/>
+          </a:prstGeom>
+          <a:solidFill>
+            <a:srgbClr val="F3F6FD"/>
+          </a:solidFill>
+          <a:ln>
+            <a:solidFill>
+              <a:srgbClr val="C9D4EE"/>
+            </a:solidFill>
+          </a:ln>
+          <a:effectLst/>
+        </p:spPr>
+        <p:style>
+          <a:lnRef idx="1">
+            <a:schemeClr val="accent1"/>
+          </a:lnRef>
+          <a:fillRef idx="3">
+            <a:schemeClr val="accent1"/>
+          </a:fillRef>
+          <a:effectRef idx="2">
+            <a:schemeClr val="accent1"/>
+          </a:effectRef>
+          <a:fontRef idx="minor">
+            <a:schemeClr val="lt1"/>
+          </a:fontRef>
+        </p:style>
+        <p:txBody>
+          <a:bodyPr rtlCol="0" anchor="ctr"/>
+          <a:lstStyle/>
+          <a:p>
+            <a:pPr algn="ctr"/>
+          </a:p>
+        </p:txBody>
+      </p:sp>
+      <p:sp>
+        <p:nvSpPr>
+          <p:cNvPr id="10" name="TextBox 9"/>
           <p:cNvSpPr txBox="1"/>
           <p:nvPr/>
         </p:nvSpPr>
         <p:spPr>
           <a:xfrm>
-            <a:off x="475488" y="859536"/>
-            <a:ext cx="11237976" cy="502920"/>
+            <a:off x="5560000" y="2520000"/>
+            <a:ext cx="4600000" cy="500000"/>
           </a:xfrm>
           <a:prstGeom prst="rect">
             <a:avLst/>
@@ -8346,45 +10342,133 @@
           <a:noFill/>
         </p:spPr>
         <p:txBody>
-          <a:bodyPr wrap="square" anchor="t" lIns="0" rIns="0" tIns="0" bIns="0">
+          <a:bodyPr wrap="square" anchor="ctr">
             <a:spAutoFit/>
           </a:bodyPr>
           <a:lstStyle/>
           <a:p>
-            <a:pPr algn="l">
+            <a:pPr algn="ctr">
               <a:lnSpc>
-                <a:spcPct val="114000"/>
+                <a:spcPct val="110000"/>
               </a:lnSpc>
+              <a:spcAft>
+                <a:spcPts val="600"/>
+              </a:spcAft>
             </a:pPr>
             <a:r>
-              <a:rPr sz="2200" b="1">
+              <a:rPr sz="1100" b="0">
                 <a:solidFill>
                   <a:srgbClr val="1B2B28"/>
                 </a:solidFill>
               </a:rPr>
-              <a:t>P1.1 p11_exercises：本次 D/C/B/A 四档实测</a:t>
-            </a:r>
-          </a:p>
-        </p:txBody>
-      </p:sp>
-      <p:sp>
-        <p:nvSpPr>
-          <p:cNvPr id="7" name="Rounded Rectangle 6"/>
+              <a:t>2. git 五步命令逐条执行</a:t>
+            </a:r>
+          </a:p>
+        </p:txBody>
+      </p:sp>
+      <p:sp>
+        <p:nvSpPr>
+          <p:cNvPr id="11" name="Rectangle 10"/>
           <p:cNvSpPr/>
           <p:nvPr/>
         </p:nvSpPr>
         <p:spPr>
           <a:xfrm>
-            <a:off x="475488" y="1389888"/>
-            <a:ext cx="1234440" cy="27432"/>
-          </a:xfrm>
-          <a:prstGeom prst="roundRect">
-            <a:avLst>
-              <a:gd name="adj" fmla="val 50000"/>
-            </a:avLst>
+            <a:off x="5560000" y="3700000"/>
+            <a:ext cx="4600000" cy="1600000"/>
+          </a:xfrm>
+          <a:prstGeom prst="rect">
+            <a:avLst/>
           </a:prstGeom>
           <a:solidFill>
-            <a:srgbClr val="C9A227"/>
+            <a:srgbClr val="F3F6FD"/>
+          </a:solidFill>
+          <a:ln>
+            <a:solidFill>
+              <a:srgbClr val="C9D4EE"/>
+            </a:solidFill>
+          </a:ln>
+          <a:effectLst/>
+        </p:spPr>
+        <p:style>
+          <a:lnRef idx="1">
+            <a:schemeClr val="accent1"/>
+          </a:lnRef>
+          <a:fillRef idx="3">
+            <a:schemeClr val="accent1"/>
+          </a:fillRef>
+          <a:effectRef idx="2">
+            <a:schemeClr val="accent1"/>
+          </a:effectRef>
+          <a:fontRef idx="minor">
+            <a:schemeClr val="lt1"/>
+          </a:fontRef>
+        </p:style>
+        <p:txBody>
+          <a:bodyPr rtlCol="0" anchor="ctr"/>
+          <a:lstStyle/>
+          <a:p>
+            <a:pPr algn="ctr"/>
+          </a:p>
+        </p:txBody>
+      </p:sp>
+      <p:sp>
+        <p:nvSpPr>
+          <p:cNvPr id="12" name="TextBox 11"/>
+          <p:cNvSpPr txBox="1"/>
+          <p:nvPr/>
+        </p:nvSpPr>
+        <p:spPr>
+          <a:xfrm>
+            <a:off x="5560000" y="4320000"/>
+            <a:ext cx="4600000" cy="500000"/>
+          </a:xfrm>
+          <a:prstGeom prst="rect">
+            <a:avLst/>
+          </a:prstGeom>
+          <a:noFill/>
+        </p:spPr>
+        <p:txBody>
+          <a:bodyPr wrap="square" anchor="ctr">
+            <a:spAutoFit/>
+          </a:bodyPr>
+          <a:lstStyle/>
+          <a:p>
+            <a:pPr algn="ctr">
+              <a:lnSpc>
+                <a:spcPct val="110000"/>
+              </a:lnSpc>
+              <a:spcAft>
+                <a:spcPts val="600"/>
+              </a:spcAft>
+            </a:pPr>
+            <a:r>
+              <a:rPr sz="1100" b="0">
+                <a:solidFill>
+                  <a:srgbClr val="1B2B28"/>
+                </a:solidFill>
+              </a:rPr>
+              <a:t>4. pytest 测试通过</a:t>
+            </a:r>
+          </a:p>
+        </p:txBody>
+      </p:sp>
+      <p:sp>
+        <p:nvSpPr>
+          <p:cNvPr id="13" name="Rectangle 12"/>
+          <p:cNvSpPr/>
+          <p:nvPr/>
+        </p:nvSpPr>
+        <p:spPr>
+          <a:xfrm>
+            <a:off x="500000" y="6500000"/>
+            <a:ext cx="11100000" cy="20000"/>
+          </a:xfrm>
+          <a:prstGeom prst="rect">
+            <a:avLst/>
+          </a:prstGeom>
+          <a:solidFill>
+            <a:srgbClr val="C9D4EE"/>
           </a:solidFill>
           <a:ln>
             <a:noFill/>
@@ -8415,60 +10499,14 @@
       </p:sp>
       <p:sp>
         <p:nvSpPr>
-          <p:cNvPr id="8" name="Rounded Rectangle 7"/>
-          <p:cNvSpPr/>
-          <p:nvPr/>
-        </p:nvSpPr>
-        <p:spPr>
-          <a:xfrm>
-            <a:off x="475488" y="6419088"/>
-            <a:ext cx="11237976" cy="10972"/>
-          </a:xfrm>
-          <a:prstGeom prst="roundRect">
-            <a:avLst>
-              <a:gd name="adj" fmla="val 50000"/>
-            </a:avLst>
-          </a:prstGeom>
-          <a:solidFill>
-            <a:srgbClr val="E4F1EE"/>
-          </a:solidFill>
-          <a:ln>
-            <a:noFill/>
-          </a:ln>
-          <a:effectLst/>
-        </p:spPr>
-        <p:style>
-          <a:lnRef idx="1">
-            <a:schemeClr val="accent1"/>
-          </a:lnRef>
-          <a:fillRef idx="3">
-            <a:schemeClr val="accent1"/>
-          </a:fillRef>
-          <a:effectRef idx="2">
-            <a:schemeClr val="accent1"/>
-          </a:effectRef>
-          <a:fontRef idx="minor">
-            <a:schemeClr val="lt1"/>
-          </a:fontRef>
-        </p:style>
-        <p:txBody>
-          <a:bodyPr rtlCol="0" anchor="ctr"/>
-          <a:lstStyle/>
-          <a:p>
-            <a:pPr algn="ctr"/>
-          </a:p>
-        </p:txBody>
-      </p:sp>
-      <p:sp>
-        <p:nvSpPr>
-          <p:cNvPr id="9" name="TextBox 8"/>
+          <p:cNvPr id="14" name="TextBox 13"/>
           <p:cNvSpPr txBox="1"/>
           <p:nvPr/>
         </p:nvSpPr>
         <p:spPr>
           <a:xfrm>
-            <a:off x="475488" y="6455664"/>
-            <a:ext cx="7315200" cy="292608"/>
+            <a:off x="500000" y="6540000"/>
+            <a:ext cx="7000000" cy="300000"/>
           </a:xfrm>
           <a:prstGeom prst="rect">
             <a:avLst/>
@@ -8476,21 +10514,25 @@
           <a:noFill/>
         </p:spPr>
         <p:txBody>
-          <a:bodyPr wrap="square" anchor="t" lIns="0" rIns="0" tIns="0" bIns="0">
+          <a:bodyPr wrap="square" anchor="t">
             <a:spAutoFit/>
           </a:bodyPr>
           <a:lstStyle/>
           <a:p>
             <a:pPr algn="l">
               <a:lnSpc>
-                <a:spcPct val="114000"/>
+                <a:spcPct val="110000"/>
               </a:lnSpc>
+              <a:spcAft>
+                <a:spcPts val="600"/>
+              </a:spcAft>
             </a:pPr>
             <a:r>
-              <a:rPr sz="900" b="0">
-                <a:solidFill>
-                  <a:srgbClr val="5C6E6A"/>
-                </a:solidFill>
+              <a:rPr sz="1000" b="0">
+                <a:solidFill>
+                  <a:srgbClr val="8A97B5"/>
+                </a:solidFill>
+                <a:latin typeface="微软雅黑"/>
               </a:rPr>
               <a:t>两江智造集团 · Python程序设计（项目实战）</a:t>
             </a:r>
@@ -8499,14 +10541,14 @@
       </p:sp>
       <p:sp>
         <p:nvSpPr>
-          <p:cNvPr id="10" name="TextBox 9"/>
+          <p:cNvPr id="15" name="TextBox 14"/>
           <p:cNvSpPr txBox="1"/>
           <p:nvPr/>
         </p:nvSpPr>
         <p:spPr>
           <a:xfrm>
-            <a:off x="10597896" y="6537960"/>
-            <a:ext cx="996696" cy="301752"/>
+            <a:off x="10600000" y="6540000"/>
+            <a:ext cx="1000000" cy="300000"/>
           </a:xfrm>
           <a:prstGeom prst="rect">
             <a:avLst/>
@@ -8514,1603 +10556,55 @@
           <a:noFill/>
         </p:spPr>
         <p:txBody>
-          <a:bodyPr wrap="square" anchor="t" lIns="0" rIns="0" tIns="0" bIns="0">
+          <a:bodyPr wrap="square" anchor="t">
             <a:spAutoFit/>
           </a:bodyPr>
           <a:lstStyle/>
           <a:p>
             <a:pPr algn="r">
               <a:lnSpc>
-                <a:spcPct val="114000"/>
+                <a:spcPct val="110000"/>
               </a:lnSpc>
+              <a:spcAft>
+                <a:spcPts val="600"/>
+              </a:spcAft>
             </a:pPr>
             <a:r>
               <a:rPr sz="1000" b="0">
                 <a:solidFill>
                   <a:srgbClr val="8A97B5"/>
                 </a:solidFill>
+                <a:latin typeface="微软雅黑"/>
               </a:rPr>
-              <a:t>4 / 10</a:t>
-            </a:r>
-          </a:p>
-        </p:txBody>
-      </p:sp>
-      <p:sp>
-        <p:nvSpPr>
-          <p:cNvPr id="11" name="Rounded Rectangle 10"/>
-          <p:cNvSpPr/>
-          <p:nvPr/>
-        </p:nvSpPr>
-        <p:spPr>
-          <a:xfrm>
-            <a:off x="475488" y="1554480"/>
-            <a:ext cx="11237976" cy="916686"/>
-          </a:xfrm>
-          <a:prstGeom prst="roundRect">
-            <a:avLst>
-              <a:gd name="adj" fmla="val 6000"/>
-            </a:avLst>
-          </a:prstGeom>
-          <a:solidFill>
-            <a:srgbClr val="FFFFFF"/>
-          </a:solidFill>
-          <a:ln w="9525">
-            <a:solidFill>
-              <a:srgbClr val="E4F1EE"/>
-            </a:solidFill>
-          </a:ln>
-          <a:effectLst/>
-        </p:spPr>
-        <p:style>
-          <a:lnRef idx="1">
-            <a:schemeClr val="accent1"/>
-          </a:lnRef>
-          <a:fillRef idx="3">
-            <a:schemeClr val="accent1"/>
-          </a:fillRef>
-          <a:effectRef idx="2">
-            <a:schemeClr val="accent1"/>
-          </a:effectRef>
-          <a:fontRef idx="minor">
-            <a:schemeClr val="lt1"/>
-          </a:fontRef>
-        </p:style>
-        <p:txBody>
-          <a:bodyPr rtlCol="0" anchor="ctr"/>
-          <a:lstStyle/>
-          <a:p>
-            <a:pPr algn="ctr"/>
-          </a:p>
-        </p:txBody>
-      </p:sp>
-      <p:sp>
-        <p:nvSpPr>
-          <p:cNvPr id="12" name="Rounded Rectangle 11"/>
-          <p:cNvSpPr/>
-          <p:nvPr/>
-        </p:nvSpPr>
-        <p:spPr>
-          <a:xfrm>
-            <a:off x="475488" y="1554480"/>
-            <a:ext cx="54864" cy="916686"/>
-          </a:xfrm>
-          <a:prstGeom prst="roundRect">
-            <a:avLst>
-              <a:gd name="adj" fmla="val 50000"/>
-            </a:avLst>
-          </a:prstGeom>
-          <a:solidFill>
-            <a:srgbClr val="5C6E6A"/>
-          </a:solidFill>
-          <a:ln>
-            <a:noFill/>
-          </a:ln>
-          <a:effectLst/>
-        </p:spPr>
-        <p:style>
-          <a:lnRef idx="1">
-            <a:schemeClr val="accent1"/>
-          </a:lnRef>
-          <a:fillRef idx="3">
-            <a:schemeClr val="accent1"/>
-          </a:fillRef>
-          <a:effectRef idx="2">
-            <a:schemeClr val="accent1"/>
-          </a:effectRef>
-          <a:fontRef idx="minor">
-            <a:schemeClr val="lt1"/>
-          </a:fontRef>
-        </p:style>
-        <p:txBody>
-          <a:bodyPr rtlCol="0" anchor="ctr"/>
-          <a:lstStyle/>
-          <a:p>
-            <a:pPr algn="ctr"/>
-          </a:p>
-        </p:txBody>
-      </p:sp>
-      <p:sp>
-        <p:nvSpPr>
-          <p:cNvPr id="13" name="Rounded Rectangle 12"/>
-          <p:cNvSpPr/>
-          <p:nvPr/>
-        </p:nvSpPr>
-        <p:spPr>
-          <a:xfrm>
-            <a:off x="621792" y="1636776"/>
-            <a:ext cx="237744" cy="237744"/>
-          </a:xfrm>
-          <a:prstGeom prst="roundRect">
-            <a:avLst>
-              <a:gd name="adj" fmla="val 28000"/>
-            </a:avLst>
-          </a:prstGeom>
-          <a:solidFill>
-            <a:srgbClr val="5C6E6A"/>
-          </a:solidFill>
-          <a:ln>
-            <a:noFill/>
-          </a:ln>
-          <a:effectLst/>
-        </p:spPr>
-        <p:style>
-          <a:lnRef idx="1">
-            <a:schemeClr val="accent1"/>
-          </a:lnRef>
-          <a:fillRef idx="3">
-            <a:schemeClr val="accent1"/>
-          </a:fillRef>
-          <a:effectRef idx="2">
-            <a:schemeClr val="accent1"/>
-          </a:effectRef>
-          <a:fontRef idx="minor">
-            <a:schemeClr val="lt1"/>
-          </a:fontRef>
-        </p:style>
-        <p:txBody>
-          <a:bodyPr rtlCol="0" anchor="ctr"/>
-          <a:lstStyle/>
-          <a:p>
-            <a:pPr algn="ctr"/>
-          </a:p>
-        </p:txBody>
-      </p:sp>
-      <p:sp>
-        <p:nvSpPr>
-          <p:cNvPr id="14" name="TextBox 13"/>
-          <p:cNvSpPr txBox="1"/>
-          <p:nvPr/>
-        </p:nvSpPr>
-        <p:spPr>
-          <a:xfrm>
-            <a:off x="621792" y="1636776"/>
-            <a:ext cx="237744" cy="237744"/>
-          </a:xfrm>
-          <a:prstGeom prst="rect">
-            <a:avLst/>
-          </a:prstGeom>
-          <a:noFill/>
-        </p:spPr>
-        <p:txBody>
-          <a:bodyPr wrap="square" anchor="ctr" lIns="0" rIns="0" tIns="0" bIns="0">
-            <a:spAutoFit/>
-          </a:bodyPr>
-          <a:lstStyle/>
-          <a:p>
-            <a:pPr algn="ctr">
-              <a:lnSpc>
-                <a:spcPct val="114000"/>
-              </a:lnSpc>
-            </a:pPr>
-            <a:r>
-              <a:rPr sz="1000" b="1">
-                <a:solidFill>
-                  <a:srgbClr val="FFFFFF"/>
-                </a:solidFill>
-              </a:rPr>
-              <a:t>D</a:t>
-            </a:r>
-          </a:p>
-        </p:txBody>
-      </p:sp>
-      <p:sp>
-        <p:nvSpPr>
-          <p:cNvPr id="15" name="TextBox 14"/>
-          <p:cNvSpPr txBox="1"/>
-          <p:nvPr/>
-        </p:nvSpPr>
-        <p:spPr>
-          <a:xfrm>
-            <a:off x="932688" y="1618488"/>
-            <a:ext cx="8778240" cy="274320"/>
-          </a:xfrm>
-          <a:prstGeom prst="rect">
-            <a:avLst/>
-          </a:prstGeom>
-          <a:noFill/>
-        </p:spPr>
-        <p:txBody>
-          <a:bodyPr wrap="square" anchor="ctr" lIns="0" rIns="0" tIns="0" bIns="0">
-            <a:spAutoFit/>
-          </a:bodyPr>
-          <a:lstStyle/>
-          <a:p>
-            <a:pPr algn="l">
-              <a:lnSpc>
-                <a:spcPct val="114000"/>
-              </a:lnSpc>
-            </a:pPr>
-            <a:r>
-              <a:rPr sz="1050" b="1">
-                <a:solidFill>
-                  <a:srgbClr val="1B2B28"/>
-                </a:solidFill>
-              </a:rPr>
-              <a:t>及格</a:t>
-            </a:r>
-            <a:r>
-              <a:rPr sz="850" b="0">
-                <a:solidFill>
-                  <a:srgbClr val="5C6E6A"/>
-                </a:solidFill>
-              </a:rPr>
-              <a:t>   验收口径：</a:t>
-            </a:r>
-            <a:r>
-              <a:rPr sz="850" b="0">
-                <a:solidFill>
-                  <a:srgbClr val="5C6E6A"/>
-                </a:solidFill>
-              </a:rPr>
-              <a:t>≥3题正确运行；PEP 8≥75%；有基础注释</a:t>
-            </a:r>
-          </a:p>
-        </p:txBody>
-      </p:sp>
-      <p:sp>
-        <p:nvSpPr>
-          <p:cNvPr id="16" name="Rounded Rectangle 15"/>
-          <p:cNvSpPr/>
-          <p:nvPr/>
-        </p:nvSpPr>
-        <p:spPr>
-          <a:xfrm>
-            <a:off x="11131803" y="1645920"/>
-            <a:ext cx="453644" cy="237744"/>
-          </a:xfrm>
-          <a:prstGeom prst="roundRect">
-            <a:avLst>
-              <a:gd name="adj" fmla="val 50000"/>
-            </a:avLst>
-          </a:prstGeom>
-          <a:solidFill>
-            <a:srgbClr val="0B5E54"/>
-          </a:solidFill>
-          <a:ln>
-            <a:noFill/>
-          </a:ln>
-          <a:effectLst/>
-        </p:spPr>
-        <p:style>
-          <a:lnRef idx="1">
-            <a:schemeClr val="accent1"/>
-          </a:lnRef>
-          <a:fillRef idx="3">
-            <a:schemeClr val="accent1"/>
-          </a:fillRef>
-          <a:effectRef idx="2">
-            <a:schemeClr val="accent1"/>
-          </a:effectRef>
-          <a:fontRef idx="minor">
-            <a:schemeClr val="lt1"/>
-          </a:fontRef>
-        </p:style>
-        <p:txBody>
-          <a:bodyPr rtlCol="0" anchor="ctr"/>
-          <a:lstStyle/>
-          <a:p>
-            <a:pPr algn="ctr"/>
-          </a:p>
-        </p:txBody>
-      </p:sp>
-      <p:sp>
-        <p:nvSpPr>
-          <p:cNvPr id="17" name="TextBox 16"/>
-          <p:cNvSpPr txBox="1"/>
-          <p:nvPr/>
-        </p:nvSpPr>
-        <p:spPr>
-          <a:xfrm>
-            <a:off x="11131803" y="1645920"/>
-            <a:ext cx="453644" cy="237744"/>
-          </a:xfrm>
-          <a:prstGeom prst="rect">
-            <a:avLst/>
-          </a:prstGeom>
-          <a:noFill/>
-        </p:spPr>
-        <p:txBody>
-          <a:bodyPr wrap="square" anchor="ctr" lIns="0" rIns="0" tIns="0" bIns="0">
-            <a:spAutoFit/>
-          </a:bodyPr>
-          <a:lstStyle/>
-          <a:p>
-            <a:pPr algn="ctr">
-              <a:lnSpc>
-                <a:spcPct val="114000"/>
-              </a:lnSpc>
-            </a:pPr>
-            <a:r>
-              <a:rPr sz="850" b="1">
-                <a:solidFill>
-                  <a:srgbClr val="FFFFFF"/>
-                </a:solidFill>
-              </a:rPr>
-              <a:t>达标</a:t>
-            </a:r>
-          </a:p>
-        </p:txBody>
-      </p:sp>
-      <p:sp>
-        <p:nvSpPr>
-          <p:cNvPr id="18" name="TextBox 17"/>
-          <p:cNvSpPr txBox="1"/>
-          <p:nvPr/>
-        </p:nvSpPr>
-        <p:spPr>
-          <a:xfrm>
-            <a:off x="932688" y="1901952"/>
-            <a:ext cx="10671047" cy="514350"/>
-          </a:xfrm>
-          <a:prstGeom prst="rect">
-            <a:avLst/>
-          </a:prstGeom>
-          <a:noFill/>
-        </p:spPr>
-        <p:txBody>
-          <a:bodyPr wrap="square" anchor="t" lIns="0" rIns="0" tIns="0" bIns="0">
-            <a:spAutoFit/>
-          </a:bodyPr>
-          <a:lstStyle/>
-          <a:p>
-            <a:pPr algn="l">
-              <a:lnSpc>
-                <a:spcPct val="114000"/>
-              </a:lnSpc>
-            </a:pPr>
-            <a:r>
-              <a:rPr sz="950" b="0">
-                <a:solidFill>
-                  <a:srgbClr val="1B2B28"/>
-                </a:solidFill>
-              </a:rPr>
-              <a:t>正确 5/5 题｜PEP 8 子集达标率 100.0%（检查项通过 4794/4795）≥ 75.0%｜有 docstring 的公开函数 53/53、模块 13/13</a:t>
-            </a:r>
-          </a:p>
-        </p:txBody>
-      </p:sp>
-      <p:sp>
-        <p:nvSpPr>
-          <p:cNvPr id="19" name="Rounded Rectangle 18"/>
-          <p:cNvSpPr/>
-          <p:nvPr/>
-        </p:nvSpPr>
-        <p:spPr>
-          <a:xfrm>
-            <a:off x="475488" y="2535174"/>
-            <a:ext cx="11237976" cy="916686"/>
-          </a:xfrm>
-          <a:prstGeom prst="roundRect">
-            <a:avLst>
-              <a:gd name="adj" fmla="val 6000"/>
-            </a:avLst>
-          </a:prstGeom>
-          <a:solidFill>
-            <a:srgbClr val="FFFFFF"/>
-          </a:solidFill>
-          <a:ln w="9525">
-            <a:solidFill>
-              <a:srgbClr val="E4F1EE"/>
-            </a:solidFill>
-          </a:ln>
-          <a:effectLst/>
-        </p:spPr>
-        <p:style>
-          <a:lnRef idx="1">
-            <a:schemeClr val="accent1"/>
-          </a:lnRef>
-          <a:fillRef idx="3">
-            <a:schemeClr val="accent1"/>
-          </a:fillRef>
-          <a:effectRef idx="2">
-            <a:schemeClr val="accent1"/>
-          </a:effectRef>
-          <a:fontRef idx="minor">
-            <a:schemeClr val="lt1"/>
-          </a:fontRef>
-        </p:style>
-        <p:txBody>
-          <a:bodyPr rtlCol="0" anchor="ctr"/>
-          <a:lstStyle/>
-          <a:p>
-            <a:pPr algn="ctr"/>
-          </a:p>
-        </p:txBody>
-      </p:sp>
-      <p:sp>
-        <p:nvSpPr>
-          <p:cNvPr id="20" name="Rounded Rectangle 19"/>
-          <p:cNvSpPr/>
-          <p:nvPr/>
-        </p:nvSpPr>
-        <p:spPr>
-          <a:xfrm>
-            <a:off x="475488" y="2535174"/>
-            <a:ext cx="54864" cy="916686"/>
-          </a:xfrm>
-          <a:prstGeom prst="roundRect">
-            <a:avLst>
-              <a:gd name="adj" fmla="val 50000"/>
-            </a:avLst>
-          </a:prstGeom>
-          <a:solidFill>
-            <a:srgbClr val="157A6D"/>
-          </a:solidFill>
-          <a:ln>
-            <a:noFill/>
-          </a:ln>
-          <a:effectLst/>
-        </p:spPr>
-        <p:style>
-          <a:lnRef idx="1">
-            <a:schemeClr val="accent1"/>
-          </a:lnRef>
-          <a:fillRef idx="3">
-            <a:schemeClr val="accent1"/>
-          </a:fillRef>
-          <a:effectRef idx="2">
-            <a:schemeClr val="accent1"/>
-          </a:effectRef>
-          <a:fontRef idx="minor">
-            <a:schemeClr val="lt1"/>
-          </a:fontRef>
-        </p:style>
-        <p:txBody>
-          <a:bodyPr rtlCol="0" anchor="ctr"/>
-          <a:lstStyle/>
-          <a:p>
-            <a:pPr algn="ctr"/>
-          </a:p>
-        </p:txBody>
-      </p:sp>
-      <p:sp>
-        <p:nvSpPr>
-          <p:cNvPr id="21" name="Rounded Rectangle 20"/>
-          <p:cNvSpPr/>
-          <p:nvPr/>
-        </p:nvSpPr>
-        <p:spPr>
-          <a:xfrm>
-            <a:off x="621792" y="2617470"/>
-            <a:ext cx="237744" cy="237744"/>
-          </a:xfrm>
-          <a:prstGeom prst="roundRect">
-            <a:avLst>
-              <a:gd name="adj" fmla="val 28000"/>
-            </a:avLst>
-          </a:prstGeom>
-          <a:solidFill>
-            <a:srgbClr val="157A6D"/>
-          </a:solidFill>
-          <a:ln>
-            <a:noFill/>
-          </a:ln>
-          <a:effectLst/>
-        </p:spPr>
-        <p:style>
-          <a:lnRef idx="1">
-            <a:schemeClr val="accent1"/>
-          </a:lnRef>
-          <a:fillRef idx="3">
-            <a:schemeClr val="accent1"/>
-          </a:fillRef>
-          <a:effectRef idx="2">
-            <a:schemeClr val="accent1"/>
-          </a:effectRef>
-          <a:fontRef idx="minor">
-            <a:schemeClr val="lt1"/>
-          </a:fontRef>
-        </p:style>
-        <p:txBody>
-          <a:bodyPr rtlCol="0" anchor="ctr"/>
-          <a:lstStyle/>
-          <a:p>
-            <a:pPr algn="ctr"/>
-          </a:p>
-        </p:txBody>
-      </p:sp>
-      <p:sp>
-        <p:nvSpPr>
-          <p:cNvPr id="22" name="TextBox 21"/>
-          <p:cNvSpPr txBox="1"/>
-          <p:nvPr/>
-        </p:nvSpPr>
-        <p:spPr>
-          <a:xfrm>
-            <a:off x="621792" y="2617470"/>
-            <a:ext cx="237744" cy="237744"/>
-          </a:xfrm>
-          <a:prstGeom prst="rect">
-            <a:avLst/>
-          </a:prstGeom>
-          <a:noFill/>
-        </p:spPr>
-        <p:txBody>
-          <a:bodyPr wrap="square" anchor="ctr" lIns="0" rIns="0" tIns="0" bIns="0">
-            <a:spAutoFit/>
-          </a:bodyPr>
-          <a:lstStyle/>
-          <a:p>
-            <a:pPr algn="ctr">
-              <a:lnSpc>
-                <a:spcPct val="114000"/>
-              </a:lnSpc>
-            </a:pPr>
-            <a:r>
-              <a:rPr sz="1000" b="1">
-                <a:solidFill>
-                  <a:srgbClr val="FFFFFF"/>
-                </a:solidFill>
-              </a:rPr>
-              <a:t>C</a:t>
-            </a:r>
-          </a:p>
-        </p:txBody>
-      </p:sp>
-      <p:sp>
-        <p:nvSpPr>
-          <p:cNvPr id="23" name="TextBox 22"/>
-          <p:cNvSpPr txBox="1"/>
-          <p:nvPr/>
-        </p:nvSpPr>
-        <p:spPr>
-          <a:xfrm>
-            <a:off x="932688" y="2599182"/>
-            <a:ext cx="8778240" cy="274320"/>
-          </a:xfrm>
-          <a:prstGeom prst="rect">
-            <a:avLst/>
-          </a:prstGeom>
-          <a:noFill/>
-        </p:spPr>
-        <p:txBody>
-          <a:bodyPr wrap="square" anchor="ctr" lIns="0" rIns="0" tIns="0" bIns="0">
-            <a:spAutoFit/>
-          </a:bodyPr>
-          <a:lstStyle/>
-          <a:p>
-            <a:pPr algn="l">
-              <a:lnSpc>
-                <a:spcPct val="114000"/>
-              </a:lnSpc>
-            </a:pPr>
-            <a:r>
-              <a:rPr sz="1050" b="1">
-                <a:solidFill>
-                  <a:srgbClr val="1B2B28"/>
-                </a:solidFill>
-              </a:rPr>
-              <a:t>良好</a:t>
-            </a:r>
-            <a:r>
-              <a:rPr sz="850" b="0">
-                <a:solidFill>
-                  <a:srgbClr val="5C6E6A"/>
-                </a:solidFill>
-              </a:rPr>
-              <a:t>   验收口径：</a:t>
-            </a:r>
-            <a:r>
-              <a:rPr sz="850" b="0">
-                <a:solidFill>
-                  <a:srgbClr val="5C6E6A"/>
-                </a:solidFill>
-              </a:rPr>
-              <a:t>4题；命名有意义</a:t>
-            </a:r>
-          </a:p>
-        </p:txBody>
-      </p:sp>
-      <p:sp>
-        <p:nvSpPr>
-          <p:cNvPr id="24" name="Rounded Rectangle 23"/>
-          <p:cNvSpPr/>
-          <p:nvPr/>
-        </p:nvSpPr>
-        <p:spPr>
-          <a:xfrm>
-            <a:off x="11131803" y="2626614"/>
-            <a:ext cx="453644" cy="237744"/>
-          </a:xfrm>
-          <a:prstGeom prst="roundRect">
-            <a:avLst>
-              <a:gd name="adj" fmla="val 50000"/>
-            </a:avLst>
-          </a:prstGeom>
-          <a:solidFill>
-            <a:srgbClr val="0B5E54"/>
-          </a:solidFill>
-          <a:ln>
-            <a:noFill/>
-          </a:ln>
-          <a:effectLst/>
-        </p:spPr>
-        <p:style>
-          <a:lnRef idx="1">
-            <a:schemeClr val="accent1"/>
-          </a:lnRef>
-          <a:fillRef idx="3">
-            <a:schemeClr val="accent1"/>
-          </a:fillRef>
-          <a:effectRef idx="2">
-            <a:schemeClr val="accent1"/>
-          </a:effectRef>
-          <a:fontRef idx="minor">
-            <a:schemeClr val="lt1"/>
-          </a:fontRef>
-        </p:style>
-        <p:txBody>
-          <a:bodyPr rtlCol="0" anchor="ctr"/>
-          <a:lstStyle/>
-          <a:p>
-            <a:pPr algn="ctr"/>
-          </a:p>
-        </p:txBody>
-      </p:sp>
-      <p:sp>
-        <p:nvSpPr>
-          <p:cNvPr id="25" name="TextBox 24"/>
-          <p:cNvSpPr txBox="1"/>
-          <p:nvPr/>
-        </p:nvSpPr>
-        <p:spPr>
-          <a:xfrm>
-            <a:off x="11131803" y="2626614"/>
-            <a:ext cx="453644" cy="237744"/>
-          </a:xfrm>
-          <a:prstGeom prst="rect">
-            <a:avLst/>
-          </a:prstGeom>
-          <a:noFill/>
-        </p:spPr>
-        <p:txBody>
-          <a:bodyPr wrap="square" anchor="ctr" lIns="0" rIns="0" tIns="0" bIns="0">
-            <a:spAutoFit/>
-          </a:bodyPr>
-          <a:lstStyle/>
-          <a:p>
-            <a:pPr algn="ctr">
-              <a:lnSpc>
-                <a:spcPct val="114000"/>
-              </a:lnSpc>
-            </a:pPr>
-            <a:r>
-              <a:rPr sz="850" b="1">
-                <a:solidFill>
-                  <a:srgbClr val="FFFFFF"/>
-                </a:solidFill>
-              </a:rPr>
-              <a:t>达标</a:t>
-            </a:r>
-          </a:p>
-        </p:txBody>
-      </p:sp>
-      <p:sp>
-        <p:nvSpPr>
-          <p:cNvPr id="26" name="TextBox 25"/>
-          <p:cNvSpPr txBox="1"/>
-          <p:nvPr/>
-        </p:nvSpPr>
-        <p:spPr>
-          <a:xfrm>
-            <a:off x="932688" y="2882646"/>
-            <a:ext cx="10671047" cy="514350"/>
-          </a:xfrm>
-          <a:prstGeom prst="rect">
-            <a:avLst/>
-          </a:prstGeom>
-          <a:noFill/>
-        </p:spPr>
-        <p:txBody>
-          <a:bodyPr wrap="square" anchor="t" lIns="0" rIns="0" tIns="0" bIns="0">
-            <a:spAutoFit/>
-          </a:bodyPr>
-          <a:lstStyle/>
-          <a:p>
-            <a:pPr algn="l">
-              <a:lnSpc>
-                <a:spcPct val="114000"/>
-              </a:lnSpc>
-            </a:pPr>
-            <a:r>
-              <a:rPr sz="950" b="0">
-                <a:solidFill>
-                  <a:srgbClr val="1B2B28"/>
-                </a:solidFill>
-              </a:rPr>
-              <a:t>第4题 正确、正确 5/5（线 ≥4）｜命名有意义达标率 100.0%（合格 72/72）≥ 90.0%</a:t>
-            </a:r>
-          </a:p>
-        </p:txBody>
-      </p:sp>
-      <p:sp>
-        <p:nvSpPr>
-          <p:cNvPr id="27" name="Rounded Rectangle 26"/>
-          <p:cNvSpPr/>
-          <p:nvPr/>
-        </p:nvSpPr>
-        <p:spPr>
-          <a:xfrm>
-            <a:off x="475488" y="3515868"/>
-            <a:ext cx="11237976" cy="916686"/>
-          </a:xfrm>
-          <a:prstGeom prst="roundRect">
-            <a:avLst>
-              <a:gd name="adj" fmla="val 6000"/>
-            </a:avLst>
-          </a:prstGeom>
-          <a:solidFill>
-            <a:srgbClr val="FFFFFF"/>
-          </a:solidFill>
-          <a:ln w="9525">
-            <a:solidFill>
-              <a:srgbClr val="E4F1EE"/>
-            </a:solidFill>
-          </a:ln>
-          <a:effectLst/>
-        </p:spPr>
-        <p:style>
-          <a:lnRef idx="1">
-            <a:schemeClr val="accent1"/>
-          </a:lnRef>
-          <a:fillRef idx="3">
-            <a:schemeClr val="accent1"/>
-          </a:fillRef>
-          <a:effectRef idx="2">
-            <a:schemeClr val="accent1"/>
-          </a:effectRef>
-          <a:fontRef idx="minor">
-            <a:schemeClr val="lt1"/>
-          </a:fontRef>
-        </p:style>
-        <p:txBody>
-          <a:bodyPr rtlCol="0" anchor="ctr"/>
-          <a:lstStyle/>
-          <a:p>
-            <a:pPr algn="ctr"/>
-          </a:p>
-        </p:txBody>
-      </p:sp>
-      <p:sp>
-        <p:nvSpPr>
-          <p:cNvPr id="28" name="Rounded Rectangle 27"/>
-          <p:cNvSpPr/>
-          <p:nvPr/>
-        </p:nvSpPr>
-        <p:spPr>
-          <a:xfrm>
-            <a:off x="475488" y="3515868"/>
-            <a:ext cx="54864" cy="916686"/>
-          </a:xfrm>
-          <a:prstGeom prst="roundRect">
-            <a:avLst>
-              <a:gd name="adj" fmla="val 50000"/>
-            </a:avLst>
-          </a:prstGeom>
-          <a:solidFill>
-            <a:srgbClr val="0B5E54"/>
-          </a:solidFill>
-          <a:ln>
-            <a:noFill/>
-          </a:ln>
-          <a:effectLst/>
-        </p:spPr>
-        <p:style>
-          <a:lnRef idx="1">
-            <a:schemeClr val="accent1"/>
-          </a:lnRef>
-          <a:fillRef idx="3">
-            <a:schemeClr val="accent1"/>
-          </a:fillRef>
-          <a:effectRef idx="2">
-            <a:schemeClr val="accent1"/>
-          </a:effectRef>
-          <a:fontRef idx="minor">
-            <a:schemeClr val="lt1"/>
-          </a:fontRef>
-        </p:style>
-        <p:txBody>
-          <a:bodyPr rtlCol="0" anchor="ctr"/>
-          <a:lstStyle/>
-          <a:p>
-            <a:pPr algn="ctr"/>
-          </a:p>
-        </p:txBody>
-      </p:sp>
-      <p:sp>
-        <p:nvSpPr>
-          <p:cNvPr id="29" name="Rounded Rectangle 28"/>
-          <p:cNvSpPr/>
-          <p:nvPr/>
-        </p:nvSpPr>
-        <p:spPr>
-          <a:xfrm>
-            <a:off x="621792" y="3598163"/>
-            <a:ext cx="237744" cy="237744"/>
-          </a:xfrm>
-          <a:prstGeom prst="roundRect">
-            <a:avLst>
-              <a:gd name="adj" fmla="val 28000"/>
-            </a:avLst>
-          </a:prstGeom>
-          <a:solidFill>
-            <a:srgbClr val="0B5E54"/>
-          </a:solidFill>
-          <a:ln>
-            <a:noFill/>
-          </a:ln>
-          <a:effectLst/>
-        </p:spPr>
-        <p:style>
-          <a:lnRef idx="1">
-            <a:schemeClr val="accent1"/>
-          </a:lnRef>
-          <a:fillRef idx="3">
-            <a:schemeClr val="accent1"/>
-          </a:fillRef>
-          <a:effectRef idx="2">
-            <a:schemeClr val="accent1"/>
-          </a:effectRef>
-          <a:fontRef idx="minor">
-            <a:schemeClr val="lt1"/>
-          </a:fontRef>
-        </p:style>
-        <p:txBody>
-          <a:bodyPr rtlCol="0" anchor="ctr"/>
-          <a:lstStyle/>
-          <a:p>
-            <a:pPr algn="ctr"/>
-          </a:p>
-        </p:txBody>
-      </p:sp>
-      <p:sp>
-        <p:nvSpPr>
-          <p:cNvPr id="30" name="TextBox 29"/>
-          <p:cNvSpPr txBox="1"/>
-          <p:nvPr/>
-        </p:nvSpPr>
-        <p:spPr>
-          <a:xfrm>
-            <a:off x="621792" y="3598163"/>
-            <a:ext cx="237744" cy="237744"/>
-          </a:xfrm>
-          <a:prstGeom prst="rect">
-            <a:avLst/>
-          </a:prstGeom>
-          <a:noFill/>
-        </p:spPr>
-        <p:txBody>
-          <a:bodyPr wrap="square" anchor="ctr" lIns="0" rIns="0" tIns="0" bIns="0">
-            <a:spAutoFit/>
-          </a:bodyPr>
-          <a:lstStyle/>
-          <a:p>
-            <a:pPr algn="ctr">
-              <a:lnSpc>
-                <a:spcPct val="114000"/>
-              </a:lnSpc>
-            </a:pPr>
-            <a:r>
-              <a:rPr sz="1000" b="1">
-                <a:solidFill>
-                  <a:srgbClr val="FFFFFF"/>
-                </a:solidFill>
-              </a:rPr>
-              <a:t>B</a:t>
-            </a:r>
-          </a:p>
-        </p:txBody>
-      </p:sp>
-      <p:sp>
-        <p:nvSpPr>
-          <p:cNvPr id="31" name="TextBox 30"/>
-          <p:cNvSpPr txBox="1"/>
-          <p:nvPr/>
-        </p:nvSpPr>
-        <p:spPr>
-          <a:xfrm>
-            <a:off x="932688" y="3579875"/>
-            <a:ext cx="8778240" cy="274320"/>
-          </a:xfrm>
-          <a:prstGeom prst="rect">
-            <a:avLst/>
-          </a:prstGeom>
-          <a:noFill/>
-        </p:spPr>
-        <p:txBody>
-          <a:bodyPr wrap="square" anchor="ctr" lIns="0" rIns="0" tIns="0" bIns="0">
-            <a:spAutoFit/>
-          </a:bodyPr>
-          <a:lstStyle/>
-          <a:p>
-            <a:pPr algn="l">
-              <a:lnSpc>
-                <a:spcPct val="114000"/>
-              </a:lnSpc>
-            </a:pPr>
-            <a:r>
-              <a:rPr sz="1050" b="1">
-                <a:solidFill>
-                  <a:srgbClr val="1B2B28"/>
-                </a:solidFill>
-              </a:rPr>
-              <a:t>优秀</a:t>
-            </a:r>
-            <a:r>
-              <a:rPr sz="850" b="0">
-                <a:solidFill>
-                  <a:srgbClr val="5C6E6A"/>
-                </a:solidFill>
-              </a:rPr>
-              <a:t>   验收口径：</a:t>
-            </a:r>
-            <a:r>
-              <a:rPr sz="850" b="0">
-                <a:solidFill>
-                  <a:srgbClr val="5C6E6A"/>
-                </a:solidFill>
-              </a:rPr>
-              <a:t>5题全对；PEP 8≥85%；结构清晰</a:t>
-            </a:r>
-          </a:p>
-        </p:txBody>
-      </p:sp>
-      <p:sp>
-        <p:nvSpPr>
-          <p:cNvPr id="32" name="Rounded Rectangle 31"/>
-          <p:cNvSpPr/>
-          <p:nvPr/>
-        </p:nvSpPr>
-        <p:spPr>
-          <a:xfrm>
-            <a:off x="11131803" y="3607308"/>
-            <a:ext cx="453644" cy="237744"/>
-          </a:xfrm>
-          <a:prstGeom prst="roundRect">
-            <a:avLst>
-              <a:gd name="adj" fmla="val 50000"/>
-            </a:avLst>
-          </a:prstGeom>
-          <a:solidFill>
-            <a:srgbClr val="0B5E54"/>
-          </a:solidFill>
-          <a:ln>
-            <a:noFill/>
-          </a:ln>
-          <a:effectLst/>
-        </p:spPr>
-        <p:style>
-          <a:lnRef idx="1">
-            <a:schemeClr val="accent1"/>
-          </a:lnRef>
-          <a:fillRef idx="3">
-            <a:schemeClr val="accent1"/>
-          </a:fillRef>
-          <a:effectRef idx="2">
-            <a:schemeClr val="accent1"/>
-          </a:effectRef>
-          <a:fontRef idx="minor">
-            <a:schemeClr val="lt1"/>
-          </a:fontRef>
-        </p:style>
-        <p:txBody>
-          <a:bodyPr rtlCol="0" anchor="ctr"/>
-          <a:lstStyle/>
-          <a:p>
-            <a:pPr algn="ctr"/>
-          </a:p>
-        </p:txBody>
-      </p:sp>
-      <p:sp>
-        <p:nvSpPr>
-          <p:cNvPr id="33" name="TextBox 32"/>
-          <p:cNvSpPr txBox="1"/>
-          <p:nvPr/>
-        </p:nvSpPr>
-        <p:spPr>
-          <a:xfrm>
-            <a:off x="11131803" y="3607308"/>
-            <a:ext cx="453644" cy="237744"/>
-          </a:xfrm>
-          <a:prstGeom prst="rect">
-            <a:avLst/>
-          </a:prstGeom>
-          <a:noFill/>
-        </p:spPr>
-        <p:txBody>
-          <a:bodyPr wrap="square" anchor="ctr" lIns="0" rIns="0" tIns="0" bIns="0">
-            <a:spAutoFit/>
-          </a:bodyPr>
-          <a:lstStyle/>
-          <a:p>
-            <a:pPr algn="ctr">
-              <a:lnSpc>
-                <a:spcPct val="114000"/>
-              </a:lnSpc>
-            </a:pPr>
-            <a:r>
-              <a:rPr sz="850" b="1">
-                <a:solidFill>
-                  <a:srgbClr val="FFFFFF"/>
-                </a:solidFill>
-              </a:rPr>
-              <a:t>达标</a:t>
-            </a:r>
-          </a:p>
-        </p:txBody>
-      </p:sp>
-      <p:sp>
-        <p:nvSpPr>
-          <p:cNvPr id="34" name="TextBox 33"/>
-          <p:cNvSpPr txBox="1"/>
-          <p:nvPr/>
-        </p:nvSpPr>
-        <p:spPr>
-          <a:xfrm>
-            <a:off x="932688" y="3863339"/>
-            <a:ext cx="10671047" cy="514350"/>
-          </a:xfrm>
-          <a:prstGeom prst="rect">
-            <a:avLst/>
-          </a:prstGeom>
-          <a:noFill/>
-        </p:spPr>
-        <p:txBody>
-          <a:bodyPr wrap="square" anchor="t" lIns="0" rIns="0" tIns="0" bIns="0">
-            <a:spAutoFit/>
-          </a:bodyPr>
-          <a:lstStyle/>
-          <a:p>
-            <a:pPr algn="l">
-              <a:lnSpc>
-                <a:spcPct val="114000"/>
-              </a:lnSpc>
-            </a:pPr>
-            <a:r>
-              <a:rPr sz="950" b="0">
-                <a:solidFill>
-                  <a:srgbClr val="1B2B28"/>
-                </a:solidFill>
-              </a:rPr>
-              <a:t>正确 5/5｜PEP 8 子集达标率 100.0%（检查项通过 4794/4795）≥ 85.0%｜结构：四件套 4/4、一题一函数 5/5、src 模块 docstring 12/12</a:t>
-            </a:r>
-          </a:p>
-        </p:txBody>
-      </p:sp>
-      <p:sp>
-        <p:nvSpPr>
-          <p:cNvPr id="35" name="Rounded Rectangle 34"/>
-          <p:cNvSpPr/>
-          <p:nvPr/>
-        </p:nvSpPr>
-        <p:spPr>
-          <a:xfrm>
-            <a:off x="475488" y="4496562"/>
-            <a:ext cx="11237976" cy="916686"/>
-          </a:xfrm>
-          <a:prstGeom prst="roundRect">
-            <a:avLst>
-              <a:gd name="adj" fmla="val 6000"/>
-            </a:avLst>
-          </a:prstGeom>
-          <a:solidFill>
-            <a:srgbClr val="FFFFFF"/>
-          </a:solidFill>
-          <a:ln w="9525">
-            <a:solidFill>
-              <a:srgbClr val="E4F1EE"/>
-            </a:solidFill>
-          </a:ln>
-          <a:effectLst/>
-        </p:spPr>
-        <p:style>
-          <a:lnRef idx="1">
-            <a:schemeClr val="accent1"/>
-          </a:lnRef>
-          <a:fillRef idx="3">
-            <a:schemeClr val="accent1"/>
-          </a:fillRef>
-          <a:effectRef idx="2">
-            <a:schemeClr val="accent1"/>
-          </a:effectRef>
-          <a:fontRef idx="minor">
-            <a:schemeClr val="lt1"/>
-          </a:fontRef>
-        </p:style>
-        <p:txBody>
-          <a:bodyPr rtlCol="0" anchor="ctr"/>
-          <a:lstStyle/>
-          <a:p>
-            <a:pPr algn="ctr"/>
-          </a:p>
-        </p:txBody>
-      </p:sp>
-      <p:sp>
-        <p:nvSpPr>
-          <p:cNvPr id="36" name="Rounded Rectangle 35"/>
-          <p:cNvSpPr/>
-          <p:nvPr/>
-        </p:nvSpPr>
-        <p:spPr>
-          <a:xfrm>
-            <a:off x="475488" y="4496562"/>
-            <a:ext cx="54864" cy="916686"/>
-          </a:xfrm>
-          <a:prstGeom prst="roundRect">
-            <a:avLst>
-              <a:gd name="adj" fmla="val 50000"/>
-            </a:avLst>
-          </a:prstGeom>
-          <a:solidFill>
-            <a:srgbClr val="C9A227"/>
-          </a:solidFill>
-          <a:ln>
-            <a:noFill/>
-          </a:ln>
-          <a:effectLst/>
-        </p:spPr>
-        <p:style>
-          <a:lnRef idx="1">
-            <a:schemeClr val="accent1"/>
-          </a:lnRef>
-          <a:fillRef idx="3">
-            <a:schemeClr val="accent1"/>
-          </a:fillRef>
-          <a:effectRef idx="2">
-            <a:schemeClr val="accent1"/>
-          </a:effectRef>
-          <a:fontRef idx="minor">
-            <a:schemeClr val="lt1"/>
-          </a:fontRef>
-        </p:style>
-        <p:txBody>
-          <a:bodyPr rtlCol="0" anchor="ctr"/>
-          <a:lstStyle/>
-          <a:p>
-            <a:pPr algn="ctr"/>
-          </a:p>
-        </p:txBody>
-      </p:sp>
-      <p:sp>
-        <p:nvSpPr>
-          <p:cNvPr id="37" name="Rounded Rectangle 36"/>
-          <p:cNvSpPr/>
-          <p:nvPr/>
-        </p:nvSpPr>
-        <p:spPr>
-          <a:xfrm>
-            <a:off x="621792" y="4578857"/>
-            <a:ext cx="237744" cy="237744"/>
-          </a:xfrm>
-          <a:prstGeom prst="roundRect">
-            <a:avLst>
-              <a:gd name="adj" fmla="val 28000"/>
-            </a:avLst>
-          </a:prstGeom>
-          <a:solidFill>
-            <a:srgbClr val="C9A227"/>
-          </a:solidFill>
-          <a:ln>
-            <a:noFill/>
-          </a:ln>
-          <a:effectLst/>
-        </p:spPr>
-        <p:style>
-          <a:lnRef idx="1">
-            <a:schemeClr val="accent1"/>
-          </a:lnRef>
-          <a:fillRef idx="3">
-            <a:schemeClr val="accent1"/>
-          </a:fillRef>
-          <a:effectRef idx="2">
-            <a:schemeClr val="accent1"/>
-          </a:effectRef>
-          <a:fontRef idx="minor">
-            <a:schemeClr val="lt1"/>
-          </a:fontRef>
-        </p:style>
-        <p:txBody>
-          <a:bodyPr rtlCol="0" anchor="ctr"/>
-          <a:lstStyle/>
-          <a:p>
-            <a:pPr algn="ctr"/>
-          </a:p>
-        </p:txBody>
-      </p:sp>
-      <p:sp>
-        <p:nvSpPr>
-          <p:cNvPr id="38" name="TextBox 37"/>
-          <p:cNvSpPr txBox="1"/>
-          <p:nvPr/>
-        </p:nvSpPr>
-        <p:spPr>
-          <a:xfrm>
-            <a:off x="621792" y="4578857"/>
-            <a:ext cx="237744" cy="237744"/>
-          </a:xfrm>
-          <a:prstGeom prst="rect">
-            <a:avLst/>
-          </a:prstGeom>
-          <a:noFill/>
-        </p:spPr>
-        <p:txBody>
-          <a:bodyPr wrap="square" anchor="ctr" lIns="0" rIns="0" tIns="0" bIns="0">
-            <a:spAutoFit/>
-          </a:bodyPr>
-          <a:lstStyle/>
-          <a:p>
-            <a:pPr algn="ctr">
-              <a:lnSpc>
-                <a:spcPct val="114000"/>
-              </a:lnSpc>
-            </a:pPr>
-            <a:r>
-              <a:rPr sz="1000" b="1">
-                <a:solidFill>
-                  <a:srgbClr val="FFFFFF"/>
-                </a:solidFill>
-              </a:rPr>
-              <a:t>A</a:t>
-            </a:r>
-          </a:p>
-        </p:txBody>
-      </p:sp>
-      <p:sp>
-        <p:nvSpPr>
-          <p:cNvPr id="39" name="TextBox 38"/>
-          <p:cNvSpPr txBox="1"/>
-          <p:nvPr/>
-        </p:nvSpPr>
-        <p:spPr>
-          <a:xfrm>
-            <a:off x="932688" y="4560570"/>
-            <a:ext cx="8778240" cy="274320"/>
-          </a:xfrm>
-          <a:prstGeom prst="rect">
-            <a:avLst/>
-          </a:prstGeom>
-          <a:noFill/>
-        </p:spPr>
-        <p:txBody>
-          <a:bodyPr wrap="square" anchor="ctr" lIns="0" rIns="0" tIns="0" bIns="0">
-            <a:spAutoFit/>
-          </a:bodyPr>
-          <a:lstStyle/>
-          <a:p>
-            <a:pPr algn="l">
-              <a:lnSpc>
-                <a:spcPct val="114000"/>
-              </a:lnSpc>
-            </a:pPr>
-            <a:r>
-              <a:rPr sz="1050" b="1">
-                <a:solidFill>
-                  <a:srgbClr val="1B2B28"/>
-                </a:solidFill>
-              </a:rPr>
-              <a:t>超优</a:t>
-            </a:r>
-            <a:r>
-              <a:rPr sz="850" b="0">
-                <a:solidFill>
-                  <a:srgbClr val="5C6E6A"/>
-                </a:solidFill>
-              </a:rPr>
-              <a:t>   验收口径：</a:t>
-            </a:r>
-            <a:r>
-              <a:rPr sz="850" b="0">
-                <a:solidFill>
-                  <a:srgbClr val="5C6E6A"/>
-                </a:solidFill>
-              </a:rPr>
-              <a:t>优秀+每题附测试用例与《迁移笔记》</a:t>
-            </a:r>
-          </a:p>
-        </p:txBody>
-      </p:sp>
-      <p:sp>
-        <p:nvSpPr>
-          <p:cNvPr id="40" name="Rounded Rectangle 39"/>
-          <p:cNvSpPr/>
-          <p:nvPr/>
-        </p:nvSpPr>
-        <p:spPr>
-          <a:xfrm>
-            <a:off x="11131803" y="4588001"/>
-            <a:ext cx="453644" cy="237744"/>
-          </a:xfrm>
-          <a:prstGeom prst="roundRect">
-            <a:avLst>
-              <a:gd name="adj" fmla="val 50000"/>
-            </a:avLst>
-          </a:prstGeom>
-          <a:solidFill>
-            <a:srgbClr val="0B5E54"/>
-          </a:solidFill>
-          <a:ln>
-            <a:noFill/>
-          </a:ln>
-          <a:effectLst/>
-        </p:spPr>
-        <p:style>
-          <a:lnRef idx="1">
-            <a:schemeClr val="accent1"/>
-          </a:lnRef>
-          <a:fillRef idx="3">
-            <a:schemeClr val="accent1"/>
-          </a:fillRef>
-          <a:effectRef idx="2">
-            <a:schemeClr val="accent1"/>
-          </a:effectRef>
-          <a:fontRef idx="minor">
-            <a:schemeClr val="lt1"/>
-          </a:fontRef>
-        </p:style>
-        <p:txBody>
-          <a:bodyPr rtlCol="0" anchor="ctr"/>
-          <a:lstStyle/>
-          <a:p>
-            <a:pPr algn="ctr"/>
-          </a:p>
-        </p:txBody>
-      </p:sp>
-      <p:sp>
-        <p:nvSpPr>
-          <p:cNvPr id="41" name="TextBox 40"/>
-          <p:cNvSpPr txBox="1"/>
-          <p:nvPr/>
-        </p:nvSpPr>
-        <p:spPr>
-          <a:xfrm>
-            <a:off x="11131803" y="4588001"/>
-            <a:ext cx="453644" cy="237744"/>
-          </a:xfrm>
-          <a:prstGeom prst="rect">
-            <a:avLst/>
-          </a:prstGeom>
-          <a:noFill/>
-        </p:spPr>
-        <p:txBody>
-          <a:bodyPr wrap="square" anchor="ctr" lIns="0" rIns="0" tIns="0" bIns="0">
-            <a:spAutoFit/>
-          </a:bodyPr>
-          <a:lstStyle/>
-          <a:p>
-            <a:pPr algn="ctr">
-              <a:lnSpc>
-                <a:spcPct val="114000"/>
-              </a:lnSpc>
-            </a:pPr>
-            <a:r>
-              <a:rPr sz="850" b="1">
-                <a:solidFill>
-                  <a:srgbClr val="FFFFFF"/>
-                </a:solidFill>
-              </a:rPr>
-              <a:t>达标</a:t>
-            </a:r>
-          </a:p>
-        </p:txBody>
-      </p:sp>
-      <p:sp>
-        <p:nvSpPr>
-          <p:cNvPr id="42" name="TextBox 41"/>
-          <p:cNvSpPr txBox="1"/>
-          <p:nvPr/>
-        </p:nvSpPr>
-        <p:spPr>
-          <a:xfrm>
-            <a:off x="932688" y="4844033"/>
-            <a:ext cx="10671047" cy="514350"/>
-          </a:xfrm>
-          <a:prstGeom prst="rect">
-            <a:avLst/>
-          </a:prstGeom>
-          <a:noFill/>
-        </p:spPr>
-        <p:txBody>
-          <a:bodyPr wrap="square" anchor="t" lIns="0" rIns="0" tIns="0" bIns="0">
-            <a:spAutoFit/>
-          </a:bodyPr>
-          <a:lstStyle/>
-          <a:p>
-            <a:pPr algn="l">
-              <a:lnSpc>
-                <a:spcPct val="114000"/>
-              </a:lnSpc>
-            </a:pPr>
-            <a:r>
-              <a:rPr sz="950" b="0">
-                <a:solidFill>
-                  <a:srgbClr val="1B2B28"/>
-                </a:solidFill>
-              </a:rPr>
-              <a:t>每题 pytest 用例 题1 24｜题2 17｜题3 26｜题4 19｜题5 18（线 ≥1）｜迁移笔记 存在=是 正文 15 条（≥10）逐题易错点 5/5 必备章节=是</a:t>
-            </a:r>
-          </a:p>
-        </p:txBody>
-      </p:sp>
-      <p:sp>
-        <p:nvSpPr>
-          <p:cNvPr id="43" name="Rounded Rectangle 42"/>
-          <p:cNvSpPr/>
-          <p:nvPr/>
-        </p:nvSpPr>
-        <p:spPr>
-          <a:xfrm>
-            <a:off x="475488" y="5477255"/>
-            <a:ext cx="11237976" cy="941832"/>
-          </a:xfrm>
-          <a:prstGeom prst="roundRect">
-            <a:avLst>
-              <a:gd name="adj" fmla="val 5000"/>
-            </a:avLst>
-          </a:prstGeom>
-          <a:solidFill>
-            <a:srgbClr val="E4F1EE"/>
-          </a:solidFill>
-          <a:ln>
-            <a:noFill/>
-          </a:ln>
-          <a:effectLst/>
-        </p:spPr>
-        <p:style>
-          <a:lnRef idx="1">
-            <a:schemeClr val="accent1"/>
-          </a:lnRef>
-          <a:fillRef idx="3">
-            <a:schemeClr val="accent1"/>
-          </a:fillRef>
-          <a:effectRef idx="2">
-            <a:schemeClr val="accent1"/>
-          </a:effectRef>
-          <a:fontRef idx="minor">
-            <a:schemeClr val="lt1"/>
-          </a:fontRef>
-        </p:style>
-        <p:txBody>
-          <a:bodyPr rtlCol="0" anchor="ctr"/>
-          <a:lstStyle/>
-          <a:p>
-            <a:pPr algn="ctr"/>
-          </a:p>
-        </p:txBody>
-      </p:sp>
-      <p:sp>
-        <p:nvSpPr>
-          <p:cNvPr id="44" name="Rounded Rectangle 43"/>
-          <p:cNvSpPr/>
-          <p:nvPr/>
-        </p:nvSpPr>
-        <p:spPr>
-          <a:xfrm>
-            <a:off x="475488" y="5477255"/>
-            <a:ext cx="54864" cy="941832"/>
-          </a:xfrm>
-          <a:prstGeom prst="roundRect">
-            <a:avLst>
-              <a:gd name="adj" fmla="val 50000"/>
-            </a:avLst>
-          </a:prstGeom>
-          <a:solidFill>
-            <a:srgbClr val="C9A227"/>
-          </a:solidFill>
-          <a:ln>
-            <a:noFill/>
-          </a:ln>
-          <a:effectLst/>
-        </p:spPr>
-        <p:style>
-          <a:lnRef idx="1">
-            <a:schemeClr val="accent1"/>
-          </a:lnRef>
-          <a:fillRef idx="3">
-            <a:schemeClr val="accent1"/>
-          </a:fillRef>
-          <a:effectRef idx="2">
-            <a:schemeClr val="accent1"/>
-          </a:effectRef>
-          <a:fontRef idx="minor">
-            <a:schemeClr val="lt1"/>
-          </a:fontRef>
-        </p:style>
-        <p:txBody>
-          <a:bodyPr rtlCol="0" anchor="ctr"/>
-          <a:lstStyle/>
-          <a:p>
-            <a:pPr algn="ctr"/>
-          </a:p>
-        </p:txBody>
-      </p:sp>
-      <p:sp>
-        <p:nvSpPr>
-          <p:cNvPr id="45" name="TextBox 44"/>
-          <p:cNvSpPr txBox="1"/>
-          <p:nvPr/>
-        </p:nvSpPr>
-        <p:spPr>
-          <a:xfrm>
-            <a:off x="676656" y="5550407"/>
-            <a:ext cx="10908792" cy="795528"/>
-          </a:xfrm>
-          <a:prstGeom prst="rect">
-            <a:avLst/>
-          </a:prstGeom>
-          <a:noFill/>
-        </p:spPr>
-        <p:txBody>
-          <a:bodyPr wrap="square" anchor="t" lIns="0" rIns="0" tIns="0" bIns="0">
-            <a:spAutoFit/>
-          </a:bodyPr>
-          <a:lstStyle/>
-          <a:p>
-            <a:pPr algn="l">
-              <a:lnSpc>
-                <a:spcPct val="124000"/>
-              </a:lnSpc>
-            </a:pPr>
-            <a:r>
-              <a:rPr sz="850" b="0">
-                <a:solidFill>
-                  <a:srgbClr val="1B2B28"/>
-                </a:solidFill>
-              </a:rPr>
-              <a:t>出处：工程化项目/p11_exercises/output/report.txt 第 54 节「分层达标」——本机 2026-10-28 05:06 实跑落盘，上表数字逐字摘录、未改写。</a:t>
-            </a:r>
-          </a:p>
-          <a:p>
-            <a:pPr algn="l">
-              <a:lnSpc>
-                <a:spcPct val="124000"/>
-              </a:lnSpc>
-            </a:pPr>
-            <a:r>
-              <a:rPr sz="850" b="0">
-                <a:solidFill>
-                  <a:srgbClr val="1B2B28"/>
-                </a:solidFill>
-              </a:rPr>
-              <a:t>复现：cd 工程化项目/p11_exercises &amp;&amp; python run.py &amp;&amp; python -m pytest -q -o addopts=''</a:t>
-            </a:r>
-          </a:p>
-          <a:p>
-            <a:pPr algn="l">
-              <a:lnSpc>
-                <a:spcPct val="124000"/>
-              </a:lnSpc>
-            </a:pPr>
-            <a:r>
-              <a:rPr sz="850" b="0">
-                <a:solidFill>
-                  <a:srgbClr val="1B2B28"/>
-                </a:solidFill>
-              </a:rPr>
-              <a:t>口径：表中「判定」沿用报告原词——绿=达标/通过，黄=仅本节取证项通过（未取证子项在报告里逐条点名），红=未达标。</a:t>
-            </a:r>
-          </a:p>
-        </p:txBody>
-      </p:sp>
+              <a:t>8 / 10</a:t>
+            </a:r>
+          </a:p>
+        </p:txBody>
+      </p:sp>
+      <p:pic>
+        <p:nvPicPr>
+          <p:cNvPr id="16" name="Picture 15" descr="image.png"/>
+          <p:cNvPicPr>
+            <a:picLocks noChangeAspect="1"/>
+          </p:cNvPicPr>
+          <p:nvPr/>
+        </p:nvPicPr>
+        <p:blipFill>
+          <a:blip r:embed="rId4"/>
+          <a:stretch>
+            <a:fillRect/>
+          </a:stretch>
+        </p:blipFill>
+        <p:spPr>
+          <a:xfrm>
+            <a:off x="1041494" y="1900000"/>
+            <a:ext cx="3917012" cy="1600000"/>
+          </a:xfrm>
+          <a:prstGeom prst="rect">
+            <a:avLst/>
+          </a:prstGeom>
+        </p:spPr>
+      </p:pic>
     </p:spTree>
   </p:cSld>
   <p:clrMapOvr>
@@ -10131,22 +10625,20 @@
       <p:grpSpPr/>
       <p:sp>
         <p:nvSpPr>
-          <p:cNvPr id="2" name="Rounded Rectangle 1"/>
+          <p:cNvPr id="2" name="Rectangle 1"/>
           <p:cNvSpPr/>
           <p:nvPr/>
         </p:nvSpPr>
         <p:spPr>
           <a:xfrm>
             <a:off x="0" y="0"/>
-            <a:ext cx="12191695" cy="64008"/>
-          </a:xfrm>
-          <a:prstGeom prst="roundRect">
-            <a:avLst>
-              <a:gd name="adj" fmla="val 50000"/>
-            </a:avLst>
+            <a:ext cx="12192000" cy="6858000"/>
+          </a:xfrm>
+          <a:prstGeom prst="rect">
+            <a:avLst/>
           </a:prstGeom>
           <a:solidFill>
-            <a:srgbClr val="0B5E54"/>
+            <a:srgbClr val="010328"/>
           </a:solidFill>
           <a:ln>
             <a:noFill/>
@@ -10177,60 +10669,20 @@
       </p:sp>
       <p:sp>
         <p:nvSpPr>
-          <p:cNvPr id="3" name="TextBox 2"/>
-          <p:cNvSpPr txBox="1"/>
-          <p:nvPr/>
-        </p:nvSpPr>
-        <p:spPr>
-          <a:xfrm>
-            <a:off x="475488" y="146304"/>
-            <a:ext cx="8229600" cy="292608"/>
-          </a:xfrm>
-          <a:prstGeom prst="rect">
-            <a:avLst/>
-          </a:prstGeom>
-          <a:noFill/>
-        </p:spPr>
-        <p:txBody>
-          <a:bodyPr wrap="square" anchor="t" lIns="0" rIns="0" tIns="0" bIns="0">
-            <a:spAutoFit/>
-          </a:bodyPr>
-          <a:lstStyle/>
-          <a:p>
-            <a:pPr algn="l">
-              <a:lnSpc>
-                <a:spcPct val="114000"/>
-              </a:lnSpc>
-            </a:pPr>
-            <a:r>
-              <a:rPr sz="1100" b="1">
-                <a:solidFill>
-                  <a:srgbClr val="0B5E54"/>
-                </a:solidFill>
-              </a:rPr>
-              <a:t>工单实战 · 运行留证</a:t>
-            </a:r>
-          </a:p>
-        </p:txBody>
-      </p:sp>
-      <p:sp>
-        <p:nvSpPr>
-          <p:cNvPr id="4" name="Rounded Rectangle 3"/>
+          <p:cNvPr id="3" name="Rectangle 2"/>
           <p:cNvSpPr/>
           <p:nvPr/>
         </p:nvSpPr>
         <p:spPr>
           <a:xfrm>
-            <a:off x="475488" y="475488"/>
-            <a:ext cx="2027872" cy="310896"/>
-          </a:xfrm>
-          <a:prstGeom prst="roundRect">
-            <a:avLst>
-              <a:gd name="adj" fmla="val 50000"/>
-            </a:avLst>
+            <a:off x="0" y="2880360"/>
+            <a:ext cx="12192000" cy="50000"/>
+          </a:xfrm>
+          <a:prstGeom prst="rect">
+            <a:avLst/>
           </a:prstGeom>
           <a:solidFill>
-            <a:srgbClr val="C9A227"/>
+            <a:srgbClr val="F5670F"/>
           </a:solidFill>
           <a:ln>
             <a:noFill/>
@@ -10261,14 +10713,56 @@
       </p:sp>
       <p:sp>
         <p:nvSpPr>
+          <p:cNvPr id="4" name="TextBox 3"/>
+          <p:cNvSpPr txBox="1"/>
+          <p:nvPr/>
+        </p:nvSpPr>
+        <p:spPr>
+          <a:xfrm>
+            <a:off x="0" y="1645920"/>
+            <a:ext cx="12192000" cy="1500000"/>
+          </a:xfrm>
+          <a:prstGeom prst="rect">
+            <a:avLst/>
+          </a:prstGeom>
+          <a:noFill/>
+        </p:spPr>
+        <p:txBody>
+          <a:bodyPr wrap="square" anchor="t">
+            <a:spAutoFit/>
+          </a:bodyPr>
+          <a:lstStyle/>
+          <a:p>
+            <a:pPr algn="ctr">
+              <a:lnSpc>
+                <a:spcPct val="110000"/>
+              </a:lnSpc>
+              <a:spcAft>
+                <a:spcPts val="600"/>
+              </a:spcAft>
+            </a:pPr>
+            <a:r>
+              <a:rPr sz="5400" b="1">
+                <a:solidFill>
+                  <a:srgbClr val="FFFFFF"/>
+                </a:solidFill>
+                <a:latin typeface="微软雅黑"/>
+              </a:rPr>
+              <a:t>THANKS</a:t>
+            </a:r>
+          </a:p>
+        </p:txBody>
+      </p:sp>
+      <p:sp>
+        <p:nvSpPr>
           <p:cNvPr id="5" name="TextBox 4"/>
           <p:cNvSpPr txBox="1"/>
           <p:nvPr/>
         </p:nvSpPr>
         <p:spPr>
           <a:xfrm>
-            <a:off x="475488" y="475488"/>
-            <a:ext cx="2027872" cy="310896"/>
+            <a:off x="0" y="3429000"/>
+            <a:ext cx="12192000" cy="800000"/>
           </a:xfrm>
           <a:prstGeom prst="rect">
             <a:avLst/>
@@ -10276,23 +10770,27 @@
           <a:noFill/>
         </p:spPr>
         <p:txBody>
-          <a:bodyPr wrap="square" anchor="ctr" lIns="0" rIns="0" tIns="0" bIns="0">
+          <a:bodyPr wrap="square" anchor="t">
             <a:spAutoFit/>
           </a:bodyPr>
           <a:lstStyle/>
           <a:p>
             <a:pPr algn="ctr">
               <a:lnSpc>
-                <a:spcPct val="114000"/>
+                <a:spcPct val="110000"/>
               </a:lnSpc>
+              <a:spcAft>
+                <a:spcPts val="600"/>
+              </a:spcAft>
             </a:pPr>
             <a:r>
-              <a:rPr sz="1050" b="1">
-                <a:solidFill>
-                  <a:srgbClr val="FFFFFF"/>
-                </a:solidFill>
+              <a:rPr sz="2200" b="1">
+                <a:solidFill>
+                  <a:srgbClr val="F5670F"/>
+                </a:solidFill>
+                <a:latin typeface="微软雅黑"/>
               </a:rPr>
-              <a:t>SCREENSHOT · 终端逐字截图</a:t>
+              <a:t>感谢聆听 · 动手实践出真知</a:t>
             </a:r>
           </a:p>
         </p:txBody>
@@ -10305,8 +10803,8 @@
         </p:nvSpPr>
         <p:spPr>
           <a:xfrm>
-            <a:off x="475488" y="859536"/>
-            <a:ext cx="11237976" cy="502920"/>
+            <a:off x="0" y="4526280"/>
+            <a:ext cx="12192000" cy="600000"/>
           </a:xfrm>
           <a:prstGeom prst="rect">
             <a:avLst/>
@@ -10314,45 +10812,47 @@
           <a:noFill/>
         </p:spPr>
         <p:txBody>
-          <a:bodyPr wrap="square" anchor="t" lIns="0" rIns="0" tIns="0" bIns="0">
+          <a:bodyPr wrap="square" anchor="t">
             <a:spAutoFit/>
           </a:bodyPr>
           <a:lstStyle/>
           <a:p>
-            <a:pPr algn="l">
+            <a:pPr algn="ctr">
               <a:lnSpc>
-                <a:spcPct val="114000"/>
+                <a:spcPct val="110000"/>
               </a:lnSpc>
+              <a:spcAft>
+                <a:spcPts val="600"/>
+              </a:spcAft>
             </a:pPr>
             <a:r>
-              <a:rPr sz="2200" b="1">
-                <a:solidFill>
-                  <a:srgbClr val="1B2B28"/>
-                </a:solidFill>
+              <a:rPr sz="1400" b="0">
+                <a:solidFill>
+                  <a:srgbClr val="BBC6E6"/>
+                </a:solidFill>
+                <a:latin typeface="微软雅黑"/>
               </a:rPr>
-              <a:t>P1.1 分层达标 · 四档逐字输出截图</a:t>
-            </a:r>
-          </a:p>
-        </p:txBody>
-      </p:sp>
-      <p:sp>
-        <p:nvSpPr>
-          <p:cNvPr id="7" name="Rounded Rectangle 6"/>
+              <a:t>以生为本   |   做中学 · 学中做</a:t>
+            </a:r>
+          </a:p>
+        </p:txBody>
+      </p:sp>
+      <p:sp>
+        <p:nvSpPr>
+          <p:cNvPr id="7" name="Rectangle 6"/>
           <p:cNvSpPr/>
           <p:nvPr/>
         </p:nvSpPr>
         <p:spPr>
           <a:xfrm>
-            <a:off x="475488" y="1389888"/>
-            <a:ext cx="1234440" cy="27432"/>
-          </a:xfrm>
-          <a:prstGeom prst="roundRect">
-            <a:avLst>
-              <a:gd name="adj" fmla="val 50000"/>
-            </a:avLst>
+            <a:off x="500000" y="6500000"/>
+            <a:ext cx="11100000" cy="20000"/>
+          </a:xfrm>
+          <a:prstGeom prst="rect">
+            <a:avLst/>
           </a:prstGeom>
           <a:solidFill>
-            <a:srgbClr val="C9A227"/>
+            <a:srgbClr val="C9D4EE"/>
           </a:solidFill>
           <a:ln>
             <a:noFill/>
@@ -10383,47 +10883,43 @@
       </p:sp>
       <p:sp>
         <p:nvSpPr>
-          <p:cNvPr id="8" name="Rounded Rectangle 7"/>
-          <p:cNvSpPr/>
-          <p:nvPr/>
-        </p:nvSpPr>
-        <p:spPr>
-          <a:xfrm>
-            <a:off x="475488" y="6419088"/>
-            <a:ext cx="11237976" cy="10972"/>
-          </a:xfrm>
-          <a:prstGeom prst="roundRect">
-            <a:avLst>
-              <a:gd name="adj" fmla="val 50000"/>
-            </a:avLst>
-          </a:prstGeom>
-          <a:solidFill>
-            <a:srgbClr val="E4F1EE"/>
-          </a:solidFill>
-          <a:ln>
-            <a:noFill/>
-          </a:ln>
-          <a:effectLst/>
-        </p:spPr>
-        <p:style>
-          <a:lnRef idx="1">
-            <a:schemeClr val="accent1"/>
-          </a:lnRef>
-          <a:fillRef idx="3">
-            <a:schemeClr val="accent1"/>
-          </a:fillRef>
-          <a:effectRef idx="2">
-            <a:schemeClr val="accent1"/>
-          </a:effectRef>
-          <a:fontRef idx="minor">
-            <a:schemeClr val="lt1"/>
-          </a:fontRef>
-        </p:style>
-        <p:txBody>
-          <a:bodyPr rtlCol="0" anchor="ctr"/>
-          <a:lstStyle/>
-          <a:p>
-            <a:pPr algn="ctr"/>
+          <p:cNvPr id="8" name="TextBox 7"/>
+          <p:cNvSpPr txBox="1"/>
+          <p:nvPr/>
+        </p:nvSpPr>
+        <p:spPr>
+          <a:xfrm>
+            <a:off x="500000" y="6540000"/>
+            <a:ext cx="7000000" cy="300000"/>
+          </a:xfrm>
+          <a:prstGeom prst="rect">
+            <a:avLst/>
+          </a:prstGeom>
+          <a:noFill/>
+        </p:spPr>
+        <p:txBody>
+          <a:bodyPr wrap="square" anchor="t">
+            <a:spAutoFit/>
+          </a:bodyPr>
+          <a:lstStyle/>
+          <a:p>
+            <a:pPr algn="l">
+              <a:lnSpc>
+                <a:spcPct val="110000"/>
+              </a:lnSpc>
+              <a:spcAft>
+                <a:spcPts val="600"/>
+              </a:spcAft>
+            </a:pPr>
+            <a:r>
+              <a:rPr sz="1000" b="0">
+                <a:solidFill>
+                  <a:srgbClr val="8A97B5"/>
+                </a:solidFill>
+                <a:latin typeface="微软雅黑"/>
+              </a:rPr>
+              <a:t>两江智造集团 · Python程序设计（项目实战）</a:t>
+            </a:r>
           </a:p>
         </p:txBody>
       </p:sp>
@@ -10435,8 +10931,8 @@
         </p:nvSpPr>
         <p:spPr>
           <a:xfrm>
-            <a:off x="475488" y="6455664"/>
-            <a:ext cx="7315200" cy="292608"/>
+            <a:off x="10600000" y="6540000"/>
+            <a:ext cx="1000000" cy="300000"/>
           </a:xfrm>
           <a:prstGeom prst="rect">
             <a:avLst/>
@@ -10444,161 +10940,27 @@
           <a:noFill/>
         </p:spPr>
         <p:txBody>
-          <a:bodyPr wrap="square" anchor="t" lIns="0" rIns="0" tIns="0" bIns="0">
+          <a:bodyPr wrap="square" anchor="ctr">
             <a:spAutoFit/>
           </a:bodyPr>
           <a:lstStyle/>
           <a:p>
-            <a:pPr algn="l">
-              <a:lnSpc>
-                <a:spcPct val="114000"/>
-              </a:lnSpc>
-            </a:pPr>
-            <a:r>
-              <a:rPr sz="900" b="0">
-                <a:solidFill>
-                  <a:srgbClr val="5C6E6A"/>
-                </a:solidFill>
-              </a:rPr>
-              <a:t>两江智造集团 · Python程序设计（项目实战）</a:t>
-            </a:r>
-          </a:p>
-        </p:txBody>
-      </p:sp>
-      <p:sp>
-        <p:nvSpPr>
-          <p:cNvPr id="10" name="TextBox 9"/>
-          <p:cNvSpPr txBox="1"/>
-          <p:nvPr/>
-        </p:nvSpPr>
-        <p:spPr>
-          <a:xfrm>
-            <a:off x="10597896" y="6537960"/>
-            <a:ext cx="996696" cy="301752"/>
-          </a:xfrm>
-          <a:prstGeom prst="rect">
-            <a:avLst/>
-          </a:prstGeom>
-          <a:noFill/>
-        </p:spPr>
-        <p:txBody>
-          <a:bodyPr wrap="square" anchor="t" lIns="0" rIns="0" tIns="0" bIns="0">
-            <a:spAutoFit/>
-          </a:bodyPr>
-          <a:lstStyle/>
-          <a:p>
             <a:pPr algn="r">
               <a:lnSpc>
-                <a:spcPct val="114000"/>
+                <a:spcPct val="110000"/>
               </a:lnSpc>
+              <a:spcAft>
+                <a:spcPts val="600"/>
+              </a:spcAft>
             </a:pPr>
             <a:r>
               <a:rPr sz="1000" b="0">
                 <a:solidFill>
                   <a:srgbClr val="8A97B5"/>
                 </a:solidFill>
+                <a:latin typeface="微软雅黑"/>
               </a:rPr>
-              <a:t>5 / 10</a:t>
-            </a:r>
-          </a:p>
-        </p:txBody>
-      </p:sp>
-      <p:sp>
-        <p:nvSpPr>
-          <p:cNvPr id="11" name="TextBox 10"/>
-          <p:cNvSpPr txBox="1"/>
-          <p:nvPr/>
-        </p:nvSpPr>
-        <p:spPr>
-          <a:xfrm>
-            <a:off x="475488" y="1517904"/>
-            <a:ext cx="11237976" cy="237744"/>
-          </a:xfrm>
-          <a:prstGeom prst="rect">
-            <a:avLst/>
-          </a:prstGeom>
-          <a:noFill/>
-        </p:spPr>
-        <p:txBody>
-          <a:bodyPr wrap="square" anchor="t" lIns="0" rIns="0" tIns="0" bIns="0">
-            <a:spAutoFit/>
-          </a:bodyPr>
-          <a:lstStyle/>
-          <a:p>
-            <a:pPr algn="l">
-              <a:lnSpc>
-                <a:spcPct val="114000"/>
-              </a:lnSpc>
-            </a:pPr>
-            <a:r>
-              <a:rPr sz="1000" b="0">
-                <a:solidFill>
-                  <a:srgbClr val="5C6E6A"/>
-                </a:solidFill>
-              </a:rPr>
-              <a:t>终端窗口截图：由 report.txt 本节逐字渲染，未手工改写</a:t>
-            </a:r>
-          </a:p>
-        </p:txBody>
-      </p:sp>
-      <p:pic>
-        <p:nvPicPr>
-          <p:cNvPr id="12" name="Picture 11" descr="p11_exercises_classroom.png"/>
-          <p:cNvPicPr>
-            <a:picLocks noChangeAspect="1"/>
-          </p:cNvPicPr>
-          <p:nvPr/>
-        </p:nvPicPr>
-        <p:blipFill>
-          <a:blip r:embed="rId2"/>
-          <a:stretch>
-            <a:fillRect/>
-          </a:stretch>
-        </p:blipFill>
-        <p:spPr>
-          <a:xfrm>
-            <a:off x="702845" y="1792224"/>
-            <a:ext cx="10783260" cy="3849624"/>
-          </a:xfrm>
-          <a:prstGeom prst="rect">
-            <a:avLst/>
-          </a:prstGeom>
-        </p:spPr>
-      </p:pic>
-      <p:sp>
-        <p:nvSpPr>
-          <p:cNvPr id="13" name="TextBox 12"/>
-          <p:cNvSpPr txBox="1"/>
-          <p:nvPr/>
-        </p:nvSpPr>
-        <p:spPr>
-          <a:xfrm>
-            <a:off x="475488" y="5678424"/>
-            <a:ext cx="11237976" cy="256032"/>
-          </a:xfrm>
-          <a:prstGeom prst="rect">
-            <a:avLst/>
-          </a:prstGeom>
-          <a:noFill/>
-        </p:spPr>
-        <p:txBody>
-          <a:bodyPr wrap="square" anchor="t" lIns="0" rIns="0" tIns="0" bIns="0">
-            <a:spAutoFit/>
-          </a:bodyPr>
-          <a:lstStyle/>
-          <a:p>
-            <a:pPr algn="l">
-              <a:lnSpc>
-                <a:spcPct val="114000"/>
-              </a:lnSpc>
-            </a:pPr>
-            <a:r>
-              <a:rPr sz="850" b="0">
-                <a:solidFill>
-                  <a:srgbClr val="5C6E6A"/>
-                </a:solidFill>
-              </a:rPr>
-              <a:t>▲ p11_exercises：分层达标 第 54 行起的四档逐字原文（绿=达标/通过，黄=仅本节取证项，橙=未实测项）</a:t>
+              <a:t>9 / 10</a:t>
             </a:r>
           </a:p>
         </p:txBody>

--- a/V2授课PPT/W01-第2次课-列表与字典：C里没有的武器.pptx
+++ b/V2授课PPT/W01-第2次课-列表与字典：C里没有的武器.pptx
@@ -15,6 +15,8 @@
     <p:sldId id="374" r:id="rId21"/>
     <p:sldId id="375" r:id="rId22"/>
     <p:sldId id="376" r:id="rId23"/>
+    <p:sldId id="377" r:id="rId24"/>
+    <p:sldId id="378" r:id="rId25"/>
     <p:sldId id="339" r:id="rId91"/>
     <p:sldId id="341" r:id="rId93"/>
     <p:sldId id="366" r:id="rId118"/>
@@ -4330,20 +4332,22 @@
       <p:grpSpPr/>
       <p:sp>
         <p:nvSpPr>
-          <p:cNvPr id="2" name="Rectangle 1"/>
+          <p:cNvPr id="2" name="Rounded Rectangle 1"/>
           <p:cNvSpPr/>
           <p:nvPr/>
         </p:nvSpPr>
         <p:spPr>
           <a:xfrm>
             <a:off x="0" y="0"/>
-            <a:ext cx="12192000" cy="6858000"/>
-          </a:xfrm>
-          <a:prstGeom prst="rect">
-            <a:avLst/>
+            <a:ext cx="12191695" cy="64008"/>
+          </a:xfrm>
+          <a:prstGeom prst="roundRect">
+            <a:avLst>
+              <a:gd name="adj" fmla="val 50000"/>
+            </a:avLst>
           </a:prstGeom>
           <a:solidFill>
-            <a:srgbClr val="010328"/>
+            <a:srgbClr val="0B5E54"/>
           </a:solidFill>
           <a:ln>
             <a:noFill/>
@@ -4374,20 +4378,60 @@
       </p:sp>
       <p:sp>
         <p:nvSpPr>
-          <p:cNvPr id="3" name="Rectangle 2"/>
+          <p:cNvPr id="6" name="TextBox 5"/>
+          <p:cNvSpPr txBox="1"/>
+          <p:nvPr/>
+        </p:nvSpPr>
+        <p:spPr>
+          <a:xfrm>
+            <a:off x="475488" y="859536"/>
+            <a:ext cx="11237976" cy="502920"/>
+          </a:xfrm>
+          <a:prstGeom prst="rect">
+            <a:avLst/>
+          </a:prstGeom>
+          <a:noFill/>
+        </p:spPr>
+        <p:txBody>
+          <a:bodyPr wrap="square" anchor="t" lIns="0" rIns="0" tIns="0" bIns="0">
+            <a:spAutoFit/>
+          </a:bodyPr>
+          <a:lstStyle/>
+          <a:p>
+            <a:pPr algn="l">
+              <a:lnSpc>
+                <a:spcPct val="114000"/>
+              </a:lnSpc>
+            </a:pPr>
+            <a:r>
+              <a:rPr sz="2200" b="1">
+                <a:solidFill>
+                  <a:srgbClr val="1B2B28"/>
+                </a:solidFill>
+              </a:rPr>
+              <a:t>承上启下 · 动手前避坑清单</a:t>
+            </a:r>
+          </a:p>
+        </p:txBody>
+      </p:sp>
+      <p:sp>
+        <p:nvSpPr>
+          <p:cNvPr id="8" name="Rounded Rectangle 7"/>
           <p:cNvSpPr/>
           <p:nvPr/>
         </p:nvSpPr>
         <p:spPr>
           <a:xfrm>
-            <a:off x="0" y="2880360"/>
-            <a:ext cx="12192000" cy="50000"/>
-          </a:xfrm>
-          <a:prstGeom prst="rect">
-            <a:avLst/>
+            <a:off x="475488" y="6419088"/>
+            <a:ext cx="11237976" cy="10972"/>
+          </a:xfrm>
+          <a:prstGeom prst="roundRect">
+            <a:avLst>
+              <a:gd name="adj" fmla="val 50000"/>
+            </a:avLst>
           </a:prstGeom>
           <a:solidFill>
-            <a:srgbClr val="F5670F"/>
+            <a:srgbClr val="E4F1EE"/>
           </a:solidFill>
           <a:ln>
             <a:noFill/>
@@ -4418,14 +4462,14 @@
       </p:sp>
       <p:sp>
         <p:nvSpPr>
-          <p:cNvPr id="4" name="TextBox 3"/>
+          <p:cNvPr id="9" name="TextBox 8"/>
           <p:cNvSpPr txBox="1"/>
           <p:nvPr/>
         </p:nvSpPr>
         <p:spPr>
           <a:xfrm>
-            <a:off x="0" y="1645920"/>
-            <a:ext cx="12192000" cy="1500000"/>
+            <a:off x="475488" y="6455664"/>
+            <a:ext cx="7315200" cy="292608"/>
           </a:xfrm>
           <a:prstGeom prst="rect">
             <a:avLst/>
@@ -4433,41 +4477,37 @@
           <a:noFill/>
         </p:spPr>
         <p:txBody>
-          <a:bodyPr wrap="square" anchor="t">
+          <a:bodyPr wrap="square" anchor="t" lIns="0" rIns="0" tIns="0" bIns="0">
             <a:spAutoFit/>
           </a:bodyPr>
           <a:lstStyle/>
           <a:p>
-            <a:pPr algn="ctr">
+            <a:pPr algn="l">
               <a:lnSpc>
-                <a:spcPct val="110000"/>
+                <a:spcPct val="114000"/>
               </a:lnSpc>
-              <a:spcAft>
-                <a:spcPts val="600"/>
-              </a:spcAft>
             </a:pPr>
             <a:r>
-              <a:rPr sz="5400" b="1">
-                <a:solidFill>
-                  <a:srgbClr val="FFFFFF"/>
-                </a:solidFill>
-                <a:latin typeface="微软雅黑"/>
-              </a:rPr>
-              <a:t>THANKS</a:t>
-            </a:r>
-          </a:p>
-        </p:txBody>
-      </p:sp>
-      <p:sp>
-        <p:nvSpPr>
-          <p:cNvPr id="5" name="TextBox 4"/>
+              <a:rPr sz="900" b="0">
+                <a:solidFill>
+                  <a:srgbClr val="5C6E6A"/>
+                </a:solidFill>
+              </a:rPr>
+              <a:t>两江智造集团 · Python程序设计（项目实战）</a:t>
+            </a:r>
+          </a:p>
+        </p:txBody>
+      </p:sp>
+      <p:sp>
+        <p:nvSpPr>
+          <p:cNvPr id="10" name="TextBox 9"/>
           <p:cNvSpPr txBox="1"/>
           <p:nvPr/>
         </p:nvSpPr>
         <p:spPr>
           <a:xfrm>
-            <a:off x="0" y="3429000"/>
-            <a:ext cx="12192000" cy="800000"/>
+            <a:off x="10597896" y="6537960"/>
+            <a:ext cx="996696" cy="301752"/>
           </a:xfrm>
           <a:prstGeom prst="rect">
             <a:avLst/>
@@ -4475,41 +4515,37 @@
           <a:noFill/>
         </p:spPr>
         <p:txBody>
-          <a:bodyPr wrap="square" anchor="t">
+          <a:bodyPr wrap="square" anchor="t" lIns="0" rIns="0" tIns="0" bIns="0">
             <a:spAutoFit/>
           </a:bodyPr>
           <a:lstStyle/>
           <a:p>
-            <a:pPr algn="ctr">
+            <a:pPr algn="r">
               <a:lnSpc>
-                <a:spcPct val="110000"/>
+                <a:spcPct val="114000"/>
               </a:lnSpc>
-              <a:spcAft>
-                <a:spcPts val="600"/>
-              </a:spcAft>
             </a:pPr>
             <a:r>
-              <a:rPr sz="2200" b="1">
-                <a:solidFill>
-                  <a:srgbClr val="F5670F"/>
-                </a:solidFill>
-                <a:latin typeface="微软雅黑"/>
-              </a:rPr>
-              <a:t>感谢聆听 · 动手实践出真知</a:t>
-            </a:r>
-          </a:p>
-        </p:txBody>
-      </p:sp>
-      <p:sp>
-        <p:nvSpPr>
-          <p:cNvPr id="6" name="TextBox 5"/>
+              <a:rPr sz="1000" b="0">
+                <a:solidFill>
+                  <a:srgbClr val="8A97B5"/>
+                </a:solidFill>
+              </a:rPr>
+              <a:t>10 / 18</a:t>
+            </a:r>
+          </a:p>
+        </p:txBody>
+      </p:sp>
+      <p:sp>
+        <p:nvSpPr>
+          <p:cNvPr id="11" name="TextBox 10"/>
           <p:cNvSpPr txBox="1"/>
           <p:nvPr/>
         </p:nvSpPr>
         <p:spPr>
           <a:xfrm>
-            <a:off x="0" y="4526280"/>
-            <a:ext cx="12192000" cy="600000"/>
+            <a:off x="457200" y="1389888"/>
+            <a:ext cx="11274552" cy="274320"/>
           </a:xfrm>
           <a:prstGeom prst="rect">
             <a:avLst/>
@@ -4517,47 +4553,84 @@
           <a:noFill/>
         </p:spPr>
         <p:txBody>
-          <a:bodyPr wrap="square" anchor="t">
+          <a:bodyPr wrap="square">
             <a:spAutoFit/>
           </a:bodyPr>
           <a:lstStyle/>
           <a:p>
-            <a:pPr algn="ctr">
-              <a:lnSpc>
-                <a:spcPct val="110000"/>
-              </a:lnSpc>
-              <a:spcAft>
-                <a:spcPts val="600"/>
-              </a:spcAft>
-            </a:pPr>
-            <a:r>
-              <a:rPr sz="1400" b="0">
-                <a:solidFill>
-                  <a:srgbClr val="BBC6E6"/>
-                </a:solidFill>
-                <a:latin typeface="微软雅黑"/>
-              </a:rPr>
-              <a:t>以生为本   |   做中学 · 学中做</a:t>
-            </a:r>
-          </a:p>
-        </p:txBody>
-      </p:sp>
-      <p:sp>
-        <p:nvSpPr>
-          <p:cNvPr id="7" name="Rectangle 6"/>
+            <a:r>
+              <a:rPr sz="1050" b="0">
+                <a:solidFill>
+                  <a:srgbClr val="6B7280"/>
+                </a:solidFill>
+              </a:rPr>
+              <a:t>本讲是动手冲刺课：先把上周完整讲解里的高频翻车点过一遍，再开工——每条都是历届学生真实踩过的坑。</a:t>
+            </a:r>
+          </a:p>
+        </p:txBody>
+      </p:sp>
+      <p:sp>
+        <p:nvSpPr>
+          <p:cNvPr id="12" name="Rectangle 11"/>
           <p:cNvSpPr/>
           <p:nvPr/>
         </p:nvSpPr>
         <p:spPr>
           <a:xfrm>
-            <a:off x="500000" y="6500000"/>
-            <a:ext cx="11100000" cy="20000"/>
+            <a:off x="457200" y="1783080"/>
+            <a:ext cx="5532120" cy="2061972"/>
           </a:xfrm>
           <a:prstGeom prst="rect">
             <a:avLst/>
           </a:prstGeom>
           <a:solidFill>
-            <a:srgbClr val="C9D4EE"/>
+            <a:srgbClr val="FFFFFF"/>
+          </a:solidFill>
+          <a:ln>
+            <a:solidFill>
+              <a:srgbClr val="D6DCE4"/>
+            </a:solidFill>
+          </a:ln>
+          <a:effectLst/>
+        </p:spPr>
+        <p:style>
+          <a:lnRef idx="1">
+            <a:schemeClr val="accent1"/>
+          </a:lnRef>
+          <a:fillRef idx="3">
+            <a:schemeClr val="accent1"/>
+          </a:fillRef>
+          <a:effectRef idx="2">
+            <a:schemeClr val="accent1"/>
+          </a:effectRef>
+          <a:fontRef idx="minor">
+            <a:schemeClr val="lt1"/>
+          </a:fontRef>
+        </p:style>
+        <p:txBody>
+          <a:bodyPr rtlCol="0" anchor="ctr" wrap="square"/>
+          <a:lstStyle/>
+          <a:p>
+            <a:pPr algn="ctr"/>
+          </a:p>
+        </p:txBody>
+      </p:sp>
+      <p:sp>
+        <p:nvSpPr>
+          <p:cNvPr id="13" name="Rectangle 12"/>
+          <p:cNvSpPr/>
+          <p:nvPr/>
+        </p:nvSpPr>
+        <p:spPr>
+          <a:xfrm>
+            <a:off x="457200" y="1783080"/>
+            <a:ext cx="82296" cy="2061972"/>
+          </a:xfrm>
+          <a:prstGeom prst="rect">
+            <a:avLst/>
+          </a:prstGeom>
+          <a:solidFill>
+            <a:srgbClr val="9A3B3B"/>
           </a:solidFill>
           <a:ln>
             <a:noFill/>
@@ -4579,7 +4652,7 @@
           </a:fontRef>
         </p:style>
         <p:txBody>
-          <a:bodyPr rtlCol="0" anchor="ctr"/>
+          <a:bodyPr rtlCol="0" anchor="ctr" wrap="square"/>
           <a:lstStyle/>
           <a:p>
             <a:pPr algn="ctr"/>
@@ -4588,14 +4661,14 @@
       </p:sp>
       <p:sp>
         <p:nvSpPr>
-          <p:cNvPr id="8" name="TextBox 7"/>
+          <p:cNvPr id="14" name="TextBox 13"/>
           <p:cNvSpPr txBox="1"/>
           <p:nvPr/>
         </p:nvSpPr>
         <p:spPr>
           <a:xfrm>
-            <a:off x="500000" y="6540000"/>
-            <a:ext cx="7000000" cy="300000"/>
+            <a:off x="658368" y="1847088"/>
+            <a:ext cx="5166359" cy="274320"/>
           </a:xfrm>
           <a:prstGeom prst="rect">
             <a:avLst/>
@@ -4603,41 +4676,32 @@
           <a:noFill/>
         </p:spPr>
         <p:txBody>
-          <a:bodyPr wrap="square" anchor="t">
+          <a:bodyPr wrap="square">
             <a:spAutoFit/>
           </a:bodyPr>
           <a:lstStyle/>
           <a:p>
-            <a:pPr algn="l">
-              <a:lnSpc>
-                <a:spcPct val="110000"/>
-              </a:lnSpc>
-              <a:spcAft>
-                <a:spcPts val="600"/>
-              </a:spcAft>
-            </a:pPr>
-            <a:r>
-              <a:rPr sz="1000" b="0">
-                <a:solidFill>
-                  <a:srgbClr val="8A97B5"/>
-                </a:solidFill>
-                <a:latin typeface="微软雅黑"/>
-              </a:rPr>
-              <a:t>两江智造集团 · Python程序设计（项目实战）</a:t>
-            </a:r>
-          </a:p>
-        </p:txBody>
-      </p:sp>
-      <p:sp>
-        <p:nvSpPr>
-          <p:cNvPr id="9" name="TextBox 8"/>
+            <a:r>
+              <a:rPr sz="1050" b="1">
+                <a:solidFill>
+                  <a:srgbClr val="B5533A"/>
+                </a:solidFill>
+              </a:rPr>
+              <a:t>✗ b改a也变</a:t>
+            </a:r>
+          </a:p>
+        </p:txBody>
+      </p:sp>
+      <p:sp>
+        <p:nvSpPr>
+          <p:cNvPr id="15" name="TextBox 14"/>
           <p:cNvSpPr txBox="1"/>
           <p:nvPr/>
         </p:nvSpPr>
         <p:spPr>
           <a:xfrm>
-            <a:off x="10600000" y="6540000"/>
-            <a:ext cx="1000000" cy="300000"/>
+            <a:off x="658368" y="2167128"/>
+            <a:ext cx="5166359" cy="868680"/>
           </a:xfrm>
           <a:prstGeom prst="rect">
             <a:avLst/>
@@ -4645,27 +4709,393 @@
           <a:noFill/>
         </p:spPr>
         <p:txBody>
-          <a:bodyPr wrap="square" anchor="ctr">
+          <a:bodyPr wrap="square">
             <a:spAutoFit/>
           </a:bodyPr>
           <a:lstStyle/>
           <a:p>
-            <a:pPr algn="r">
-              <a:lnSpc>
-                <a:spcPct val="110000"/>
-              </a:lnSpc>
-              <a:spcAft>
-                <a:spcPts val="600"/>
-              </a:spcAft>
-            </a:pPr>
-            <a:r>
-              <a:rPr sz="1000" b="0">
-                <a:solidFill>
-                  <a:srgbClr val="8A97B5"/>
-                </a:solidFill>
-                <a:latin typeface="微软雅黑"/>
-              </a:rPr>
-              <a:t>13 / 16</a:t>
+            <a:r>
+              <a:rPr sz="900" b="0">
+                <a:solidFill>
+                  <a:srgbClr val="2B2F36"/>
+                </a:solidFill>
+              </a:rPr>
+              <a:t>原因：引用语义</a:t>
+            </a:r>
+          </a:p>
+          <a:p>
+            <a:r>
+              <a:rPr sz="900" b="0">
+                <a:solidFill>
+                  <a:srgbClr val="2B2F36"/>
+                </a:solidFill>
+              </a:rPr>
+              <a:t>✔ 解决：list(a)或a.copy()</a:t>
+            </a:r>
+          </a:p>
+        </p:txBody>
+      </p:sp>
+      <p:sp>
+        <p:nvSpPr>
+          <p:cNvPr id="16" name="Rectangle 15"/>
+          <p:cNvSpPr/>
+          <p:nvPr/>
+        </p:nvSpPr>
+        <p:spPr>
+          <a:xfrm>
+            <a:off x="6199632" y="1783080"/>
+            <a:ext cx="5532120" cy="2061972"/>
+          </a:xfrm>
+          <a:prstGeom prst="rect">
+            <a:avLst/>
+          </a:prstGeom>
+          <a:solidFill>
+            <a:srgbClr val="FFFFFF"/>
+          </a:solidFill>
+          <a:ln>
+            <a:solidFill>
+              <a:srgbClr val="D6DCE4"/>
+            </a:solidFill>
+          </a:ln>
+          <a:effectLst/>
+        </p:spPr>
+        <p:style>
+          <a:lnRef idx="1">
+            <a:schemeClr val="accent1"/>
+          </a:lnRef>
+          <a:fillRef idx="3">
+            <a:schemeClr val="accent1"/>
+          </a:fillRef>
+          <a:effectRef idx="2">
+            <a:schemeClr val="accent1"/>
+          </a:effectRef>
+          <a:fontRef idx="minor">
+            <a:schemeClr val="lt1"/>
+          </a:fontRef>
+        </p:style>
+        <p:txBody>
+          <a:bodyPr rtlCol="0" anchor="ctr" wrap="square"/>
+          <a:lstStyle/>
+          <a:p>
+            <a:pPr algn="ctr"/>
+          </a:p>
+        </p:txBody>
+      </p:sp>
+      <p:sp>
+        <p:nvSpPr>
+          <p:cNvPr id="17" name="Rectangle 16"/>
+          <p:cNvSpPr/>
+          <p:nvPr/>
+        </p:nvSpPr>
+        <p:spPr>
+          <a:xfrm>
+            <a:off x="6199632" y="1783080"/>
+            <a:ext cx="82296" cy="2061972"/>
+          </a:xfrm>
+          <a:prstGeom prst="rect">
+            <a:avLst/>
+          </a:prstGeom>
+          <a:solidFill>
+            <a:srgbClr val="9A3B3B"/>
+          </a:solidFill>
+          <a:ln>
+            <a:noFill/>
+          </a:ln>
+          <a:effectLst/>
+        </p:spPr>
+        <p:style>
+          <a:lnRef idx="1">
+            <a:schemeClr val="accent1"/>
+          </a:lnRef>
+          <a:fillRef idx="3">
+            <a:schemeClr val="accent1"/>
+          </a:fillRef>
+          <a:effectRef idx="2">
+            <a:schemeClr val="accent1"/>
+          </a:effectRef>
+          <a:fontRef idx="minor">
+            <a:schemeClr val="lt1"/>
+          </a:fontRef>
+        </p:style>
+        <p:txBody>
+          <a:bodyPr rtlCol="0" anchor="ctr" wrap="square"/>
+          <a:lstStyle/>
+          <a:p>
+            <a:pPr algn="ctr"/>
+          </a:p>
+        </p:txBody>
+      </p:sp>
+      <p:sp>
+        <p:nvSpPr>
+          <p:cNvPr id="18" name="TextBox 17"/>
+          <p:cNvSpPr txBox="1"/>
+          <p:nvPr/>
+        </p:nvSpPr>
+        <p:spPr>
+          <a:xfrm>
+            <a:off x="6400800" y="1847088"/>
+            <a:ext cx="5166359" cy="274320"/>
+          </a:xfrm>
+          <a:prstGeom prst="rect">
+            <a:avLst/>
+          </a:prstGeom>
+          <a:noFill/>
+        </p:spPr>
+        <p:txBody>
+          <a:bodyPr wrap="square">
+            <a:spAutoFit/>
+          </a:bodyPr>
+          <a:lstStyle/>
+          <a:p>
+            <a:r>
+              <a:rPr sz="1050" b="1">
+                <a:solidFill>
+                  <a:srgbClr val="B5533A"/>
+                </a:solidFill>
+              </a:rPr>
+              <a:t>✗ 混用Tab</a:t>
+            </a:r>
+          </a:p>
+        </p:txBody>
+      </p:sp>
+      <p:sp>
+        <p:nvSpPr>
+          <p:cNvPr id="19" name="TextBox 18"/>
+          <p:cNvSpPr txBox="1"/>
+          <p:nvPr/>
+        </p:nvSpPr>
+        <p:spPr>
+          <a:xfrm>
+            <a:off x="6400800" y="2167128"/>
+            <a:ext cx="5166359" cy="868680"/>
+          </a:xfrm>
+          <a:prstGeom prst="rect">
+            <a:avLst/>
+          </a:prstGeom>
+          <a:noFill/>
+        </p:spPr>
+        <p:txBody>
+          <a:bodyPr wrap="square">
+            <a:spAutoFit/>
+          </a:bodyPr>
+          <a:lstStyle/>
+          <a:p>
+            <a:r>
+              <a:rPr sz="900" b="0">
+                <a:solidFill>
+                  <a:srgbClr val="2B2F36"/>
+                </a:solidFill>
+              </a:rPr>
+              <a:t>原因：跨编辑器报错</a:t>
+            </a:r>
+          </a:p>
+          <a:p>
+            <a:r>
+              <a:rPr sz="900" b="0">
+                <a:solidFill>
+                  <a:srgbClr val="2B2F36"/>
+                </a:solidFill>
+              </a:rPr>
+              <a:t>✔ 解决：统一4空格</a:t>
+            </a:r>
+          </a:p>
+        </p:txBody>
+      </p:sp>
+      <p:sp>
+        <p:nvSpPr>
+          <p:cNvPr id="20" name="Rectangle 19"/>
+          <p:cNvSpPr/>
+          <p:nvPr/>
+        </p:nvSpPr>
+        <p:spPr>
+          <a:xfrm>
+            <a:off x="457200" y="3973068"/>
+            <a:ext cx="5532120" cy="2061972"/>
+          </a:xfrm>
+          <a:prstGeom prst="rect">
+            <a:avLst/>
+          </a:prstGeom>
+          <a:solidFill>
+            <a:srgbClr val="FFFFFF"/>
+          </a:solidFill>
+          <a:ln>
+            <a:solidFill>
+              <a:srgbClr val="D6DCE4"/>
+            </a:solidFill>
+          </a:ln>
+          <a:effectLst/>
+        </p:spPr>
+        <p:style>
+          <a:lnRef idx="1">
+            <a:schemeClr val="accent1"/>
+          </a:lnRef>
+          <a:fillRef idx="3">
+            <a:schemeClr val="accent1"/>
+          </a:fillRef>
+          <a:effectRef idx="2">
+            <a:schemeClr val="accent1"/>
+          </a:effectRef>
+          <a:fontRef idx="minor">
+            <a:schemeClr val="lt1"/>
+          </a:fontRef>
+        </p:style>
+        <p:txBody>
+          <a:bodyPr rtlCol="0" anchor="ctr" wrap="square"/>
+          <a:lstStyle/>
+          <a:p>
+            <a:pPr algn="ctr"/>
+          </a:p>
+        </p:txBody>
+      </p:sp>
+      <p:sp>
+        <p:nvSpPr>
+          <p:cNvPr id="21" name="Rectangle 20"/>
+          <p:cNvSpPr/>
+          <p:nvPr/>
+        </p:nvSpPr>
+        <p:spPr>
+          <a:xfrm>
+            <a:off x="457200" y="3973068"/>
+            <a:ext cx="82296" cy="2061972"/>
+          </a:xfrm>
+          <a:prstGeom prst="rect">
+            <a:avLst/>
+          </a:prstGeom>
+          <a:solidFill>
+            <a:srgbClr val="9A3B3B"/>
+          </a:solidFill>
+          <a:ln>
+            <a:noFill/>
+          </a:ln>
+          <a:effectLst/>
+        </p:spPr>
+        <p:style>
+          <a:lnRef idx="1">
+            <a:schemeClr val="accent1"/>
+          </a:lnRef>
+          <a:fillRef idx="3">
+            <a:schemeClr val="accent1"/>
+          </a:fillRef>
+          <a:effectRef idx="2">
+            <a:schemeClr val="accent1"/>
+          </a:effectRef>
+          <a:fontRef idx="minor">
+            <a:schemeClr val="lt1"/>
+          </a:fontRef>
+        </p:style>
+        <p:txBody>
+          <a:bodyPr rtlCol="0" anchor="ctr" wrap="square"/>
+          <a:lstStyle/>
+          <a:p>
+            <a:pPr algn="ctr"/>
+          </a:p>
+        </p:txBody>
+      </p:sp>
+      <p:sp>
+        <p:nvSpPr>
+          <p:cNvPr id="22" name="TextBox 21"/>
+          <p:cNvSpPr txBox="1"/>
+          <p:nvPr/>
+        </p:nvSpPr>
+        <p:spPr>
+          <a:xfrm>
+            <a:off x="658368" y="4037076"/>
+            <a:ext cx="5166359" cy="274320"/>
+          </a:xfrm>
+          <a:prstGeom prst="rect">
+            <a:avLst/>
+          </a:prstGeom>
+          <a:noFill/>
+        </p:spPr>
+        <p:txBody>
+          <a:bodyPr wrap="square">
+            <a:spAutoFit/>
+          </a:bodyPr>
+          <a:lstStyle/>
+          <a:p>
+            <a:r>
+              <a:rPr sz="1050" b="1">
+                <a:solidFill>
+                  <a:srgbClr val="B5533A"/>
+                </a:solidFill>
+              </a:rPr>
+              <a:t>✗ =当==</a:t>
+            </a:r>
+          </a:p>
+        </p:txBody>
+      </p:sp>
+      <p:sp>
+        <p:nvSpPr>
+          <p:cNvPr id="23" name="TextBox 22"/>
+          <p:cNvSpPr txBox="1"/>
+          <p:nvPr/>
+        </p:nvSpPr>
+        <p:spPr>
+          <a:xfrm>
+            <a:off x="658368" y="4357116"/>
+            <a:ext cx="5166359" cy="868680"/>
+          </a:xfrm>
+          <a:prstGeom prst="rect">
+            <a:avLst/>
+          </a:prstGeom>
+          <a:noFill/>
+        </p:spPr>
+        <p:txBody>
+          <a:bodyPr wrap="square">
+            <a:spAutoFit/>
+          </a:bodyPr>
+          <a:lstStyle/>
+          <a:p>
+            <a:r>
+              <a:rPr sz="900" b="0">
+                <a:solidFill>
+                  <a:srgbClr val="2B2F36"/>
+                </a:solidFill>
+              </a:rPr>
+              <a:t>原因：条件失效</a:t>
+            </a:r>
+          </a:p>
+          <a:p>
+            <a:r>
+              <a:rPr sz="900" b="0">
+                <a:solidFill>
+                  <a:srgbClr val="2B2F36"/>
+                </a:solidFill>
+              </a:rPr>
+              <a:t>✔ 解决：比较用==</a:t>
+            </a:r>
+          </a:p>
+        </p:txBody>
+      </p:sp>
+      <p:sp>
+        <p:nvSpPr>
+          <p:cNvPr id="24" name="TextBox 23"/>
+          <p:cNvSpPr txBox="1"/>
+          <p:nvPr/>
+        </p:nvSpPr>
+        <p:spPr>
+          <a:xfrm>
+            <a:off x="457200" y="6281928"/>
+            <a:ext cx="9601200" cy="182880"/>
+          </a:xfrm>
+          <a:prstGeom prst="rect">
+            <a:avLst/>
+          </a:prstGeom>
+          <a:noFill/>
+        </p:spPr>
+        <p:txBody>
+          <a:bodyPr wrap="square">
+            <a:spAutoFit/>
+          </a:bodyPr>
+          <a:lstStyle/>
+          <a:p>
+            <a:r>
+              <a:rPr sz="900" b="0">
+                <a:solidFill>
+                  <a:srgbClr val="6B7280"/>
+                </a:solidFill>
+              </a:rPr>
+              <a:t>素材来源：同周《第1次课-带着C语言底子学Pyth…》知识卡与避坑清单（逐字摘录）</a:t>
             </a:r>
           </a:p>
         </p:txBody>
@@ -4690,20 +5120,22 @@
       <p:grpSpPr/>
       <p:sp>
         <p:nvSpPr>
-          <p:cNvPr id="2" name="Rectangle 1"/>
+          <p:cNvPr id="2" name="Rounded Rectangle 1"/>
           <p:cNvSpPr/>
           <p:nvPr/>
         </p:nvSpPr>
         <p:spPr>
           <a:xfrm>
             <a:off x="0" y="0"/>
-            <a:ext cx="12192000" cy="1150000"/>
-          </a:xfrm>
-          <a:prstGeom prst="rect">
-            <a:avLst/>
+            <a:ext cx="12191695" cy="64008"/>
+          </a:xfrm>
+          <a:prstGeom prst="roundRect">
+            <a:avLst>
+              <a:gd name="adj" fmla="val 50000"/>
+            </a:avLst>
           </a:prstGeom>
           <a:solidFill>
-            <a:srgbClr val="010328"/>
+            <a:srgbClr val="0B5E54"/>
           </a:solidFill>
           <a:ln>
             <a:noFill/>
@@ -4734,20 +5166,60 @@
       </p:sp>
       <p:sp>
         <p:nvSpPr>
-          <p:cNvPr id="3" name="Rectangle 2"/>
+          <p:cNvPr id="6" name="TextBox 5"/>
+          <p:cNvSpPr txBox="1"/>
+          <p:nvPr/>
+        </p:nvSpPr>
+        <p:spPr>
+          <a:xfrm>
+            <a:off x="475488" y="859536"/>
+            <a:ext cx="11237976" cy="502920"/>
+          </a:xfrm>
+          <a:prstGeom prst="rect">
+            <a:avLst/>
+          </a:prstGeom>
+          <a:noFill/>
+        </p:spPr>
+        <p:txBody>
+          <a:bodyPr wrap="square" anchor="t" lIns="0" rIns="0" tIns="0" bIns="0">
+            <a:spAutoFit/>
+          </a:bodyPr>
+          <a:lstStyle/>
+          <a:p>
+            <a:pPr algn="l">
+              <a:lnSpc>
+                <a:spcPct val="114000"/>
+              </a:lnSpc>
+            </a:pPr>
+            <a:r>
+              <a:rPr sz="2200" b="1">
+                <a:solidFill>
+                  <a:srgbClr val="1B2B28"/>
+                </a:solidFill>
+              </a:rPr>
+              <a:t>本课知识速览卡 · 边做边对照</a:t>
+            </a:r>
+          </a:p>
+        </p:txBody>
+      </p:sp>
+      <p:sp>
+        <p:nvSpPr>
+          <p:cNvPr id="8" name="Rounded Rectangle 7"/>
           <p:cNvSpPr/>
           <p:nvPr/>
         </p:nvSpPr>
         <p:spPr>
           <a:xfrm>
-            <a:off x="0" y="1150000"/>
-            <a:ext cx="2600000" cy="70000"/>
-          </a:xfrm>
-          <a:prstGeom prst="rect">
-            <a:avLst/>
+            <a:off x="475488" y="6419088"/>
+            <a:ext cx="11237976" cy="10972"/>
+          </a:xfrm>
+          <a:prstGeom prst="roundRect">
+            <a:avLst>
+              <a:gd name="adj" fmla="val 50000"/>
+            </a:avLst>
           </a:prstGeom>
           <a:solidFill>
-            <a:srgbClr val="F5670F"/>
+            <a:srgbClr val="E4F1EE"/>
           </a:solidFill>
           <a:ln>
             <a:noFill/>
@@ -4778,14 +5250,14 @@
       </p:sp>
       <p:sp>
         <p:nvSpPr>
-          <p:cNvPr id="4" name="TextBox 3"/>
+          <p:cNvPr id="9" name="TextBox 8"/>
           <p:cNvSpPr txBox="1"/>
           <p:nvPr/>
         </p:nvSpPr>
         <p:spPr>
           <a:xfrm>
-            <a:off x="700000" y="300000"/>
-            <a:ext cx="10792000" cy="700000"/>
+            <a:off x="475488" y="6455664"/>
+            <a:ext cx="7315200" cy="292608"/>
           </a:xfrm>
           <a:prstGeom prst="rect">
             <a:avLst/>
@@ -4793,47 +5265,160 @@
           <a:noFill/>
         </p:spPr>
         <p:txBody>
-          <a:bodyPr wrap="square" anchor="t">
+          <a:bodyPr wrap="square" anchor="t" lIns="0" rIns="0" tIns="0" bIns="0">
             <a:spAutoFit/>
           </a:bodyPr>
           <a:lstStyle/>
           <a:p>
             <a:pPr algn="l">
               <a:lnSpc>
-                <a:spcPct val="110000"/>
+                <a:spcPct val="114000"/>
               </a:lnSpc>
-              <a:spcAft>
-                <a:spcPts val="600"/>
-              </a:spcAft>
             </a:pPr>
             <a:r>
-              <a:rPr sz="2400" b="1">
-                <a:solidFill>
-                  <a:srgbClr val="FFFFFF"/>
-                </a:solidFill>
-                <a:latin typeface="微软雅黑"/>
-              </a:rPr>
-              <a:t>下次课预告（第2周）</a:t>
-            </a:r>
-          </a:p>
-        </p:txBody>
-      </p:sp>
-      <p:sp>
-        <p:nvSpPr>
-          <p:cNvPr id="5" name="Rectangle 4"/>
+              <a:rPr sz="900" b="0">
+                <a:solidFill>
+                  <a:srgbClr val="5C6E6A"/>
+                </a:solidFill>
+              </a:rPr>
+              <a:t>两江智造集团 · Python程序设计（项目实战）</a:t>
+            </a:r>
+          </a:p>
+        </p:txBody>
+      </p:sp>
+      <p:sp>
+        <p:nvSpPr>
+          <p:cNvPr id="10" name="TextBox 9"/>
+          <p:cNvSpPr txBox="1"/>
+          <p:nvPr/>
+        </p:nvSpPr>
+        <p:spPr>
+          <a:xfrm>
+            <a:off x="10597896" y="6537960"/>
+            <a:ext cx="996696" cy="301752"/>
+          </a:xfrm>
+          <a:prstGeom prst="rect">
+            <a:avLst/>
+          </a:prstGeom>
+          <a:noFill/>
+        </p:spPr>
+        <p:txBody>
+          <a:bodyPr wrap="square" anchor="t" lIns="0" rIns="0" tIns="0" bIns="0">
+            <a:spAutoFit/>
+          </a:bodyPr>
+          <a:lstStyle/>
+          <a:p>
+            <a:pPr algn="r">
+              <a:lnSpc>
+                <a:spcPct val="114000"/>
+              </a:lnSpc>
+            </a:pPr>
+            <a:r>
+              <a:rPr sz="1000" b="0">
+                <a:solidFill>
+                  <a:srgbClr val="8A97B5"/>
+                </a:solidFill>
+              </a:rPr>
+              <a:t>11 / 18</a:t>
+            </a:r>
+          </a:p>
+        </p:txBody>
+      </p:sp>
+      <p:sp>
+        <p:nvSpPr>
+          <p:cNvPr id="11" name="TextBox 10"/>
+          <p:cNvSpPr txBox="1"/>
+          <p:nvPr/>
+        </p:nvSpPr>
+        <p:spPr>
+          <a:xfrm>
+            <a:off x="457200" y="1389888"/>
+            <a:ext cx="11274552" cy="274320"/>
+          </a:xfrm>
+          <a:prstGeom prst="rect">
+            <a:avLst/>
+          </a:prstGeom>
+          <a:noFill/>
+        </p:spPr>
+        <p:txBody>
+          <a:bodyPr wrap="square">
+            <a:spAutoFit/>
+          </a:bodyPr>
+          <a:lstStyle/>
+          <a:p>
+            <a:r>
+              <a:rPr sz="1050" b="0">
+                <a:solidFill>
+                  <a:srgbClr val="6B7280"/>
+                </a:solidFill>
+              </a:rPr>
+              <a:t>本讲是动手冲刺课：知识点在完整讲解课已细讲——这页把它们浓缩成一张速览卡，边做边对照。</a:t>
+            </a:r>
+          </a:p>
+        </p:txBody>
+      </p:sp>
+      <p:sp>
+        <p:nvSpPr>
+          <p:cNvPr id="12" name="Rectangle 11"/>
           <p:cNvSpPr/>
           <p:nvPr/>
         </p:nvSpPr>
         <p:spPr>
           <a:xfrm>
-            <a:off x="760000" y="1900000"/>
-            <a:ext cx="10900000" cy="1600000"/>
+            <a:off x="457200" y="1783080"/>
+            <a:ext cx="6309360" cy="4114800"/>
           </a:xfrm>
           <a:prstGeom prst="rect">
             <a:avLst/>
           </a:prstGeom>
           <a:solidFill>
-            <a:srgbClr val="F3F6FD"/>
+            <a:srgbClr val="FFFFFF"/>
+          </a:solidFill>
+          <a:ln>
+            <a:solidFill>
+              <a:srgbClr val="D6DCE4"/>
+            </a:solidFill>
+          </a:ln>
+          <a:effectLst/>
+        </p:spPr>
+        <p:style>
+          <a:lnRef idx="1">
+            <a:schemeClr val="accent1"/>
+          </a:lnRef>
+          <a:fillRef idx="3">
+            <a:schemeClr val="accent1"/>
+          </a:fillRef>
+          <a:effectRef idx="2">
+            <a:schemeClr val="accent1"/>
+          </a:effectRef>
+          <a:fontRef idx="minor">
+            <a:schemeClr val="lt1"/>
+          </a:fontRef>
+        </p:style>
+        <p:txBody>
+          <a:bodyPr rtlCol="0" anchor="ctr" wrap="square"/>
+          <a:lstStyle/>
+          <a:p>
+            <a:pPr algn="ctr"/>
+          </a:p>
+        </p:txBody>
+      </p:sp>
+      <p:sp>
+        <p:nvSpPr>
+          <p:cNvPr id="13" name="Rectangle 12"/>
+          <p:cNvSpPr/>
+          <p:nvPr/>
+        </p:nvSpPr>
+        <p:spPr>
+          <a:xfrm>
+            <a:off x="457200" y="1783080"/>
+            <a:ext cx="6309360" cy="365760"/>
+          </a:xfrm>
+          <a:prstGeom prst="rect">
+            <a:avLst/>
+          </a:prstGeom>
+          <a:solidFill>
+            <a:srgbClr val="2F5D8C"/>
           </a:solidFill>
           <a:ln>
             <a:noFill/>
@@ -4855,7 +5440,7 @@
           </a:fontRef>
         </p:style>
         <p:txBody>
-          <a:bodyPr rtlCol="0" anchor="ctr"/>
+          <a:bodyPr rtlCol="0" anchor="ctr" wrap="square"/>
           <a:lstStyle/>
           <a:p>
             <a:pPr algn="ctr"/>
@@ -4864,20 +5449,182 @@
       </p:sp>
       <p:sp>
         <p:nvSpPr>
-          <p:cNvPr id="6" name="Rectangle 5"/>
+          <p:cNvPr id="14" name="TextBox 13"/>
+          <p:cNvSpPr txBox="1"/>
+          <p:nvPr/>
+        </p:nvSpPr>
+        <p:spPr>
+          <a:xfrm>
+            <a:off x="566928" y="1819656"/>
+            <a:ext cx="6089904" cy="292608"/>
+          </a:xfrm>
+          <a:prstGeom prst="rect">
+            <a:avLst/>
+          </a:prstGeom>
+          <a:noFill/>
+        </p:spPr>
+        <p:txBody>
+          <a:bodyPr wrap="square">
+            <a:spAutoFit/>
+          </a:bodyPr>
+          <a:lstStyle/>
+          <a:p>
+            <a:r>
+              <a:rPr sz="1150" b="1">
+                <a:solidFill>
+                  <a:srgbClr val="FFFFFF"/>
+                </a:solidFill>
+              </a:rPr>
+              <a:t>知识点速览（逐字摘自同周完整讲解课知识卡）</a:t>
+            </a:r>
+          </a:p>
+        </p:txBody>
+      </p:sp>
+      <p:sp>
+        <p:nvSpPr>
+          <p:cNvPr id="15" name="TextBox 14"/>
+          <p:cNvSpPr txBox="1"/>
+          <p:nvPr/>
+        </p:nvSpPr>
+        <p:spPr>
+          <a:xfrm>
+            <a:off x="621792" y="2267712"/>
+            <a:ext cx="6035040" cy="3474720"/>
+          </a:xfrm>
+          <a:prstGeom prst="rect">
+            <a:avLst/>
+          </a:prstGeom>
+          <a:noFill/>
+        </p:spPr>
+        <p:txBody>
+          <a:bodyPr wrap="square">
+            <a:spAutoFit/>
+          </a:bodyPr>
+          <a:lstStyle/>
+          <a:p>
+            <a:r>
+              <a:rPr sz="950" b="0">
+                <a:solidFill>
+                  <a:srgbClr val="2B2F36"/>
+                </a:solidFill>
+              </a:rPr>
+              <a:t>◆ B01 C→Python四映射｜四映射=C户口迁Python：声明→动态/大括号→缩进/指针→引用/print…</a:t>
+            </a:r>
+          </a:p>
+          <a:p>
+            <a:r>
+              <a:rPr sz="950" b="0">
+                <a:solidFill>
+                  <a:srgbClr val="2B2F36"/>
+                </a:solidFill>
+              </a:rPr>
+              <a:t>◆ B02 引用语义｜b=a不复制货只抄门牌号——两人开同一扇门，动b就是动a</a:t>
+            </a:r>
+          </a:p>
+          <a:p>
+            <a:r>
+              <a:rPr sz="950" b="0">
+                <a:solidFill>
+                  <a:srgbClr val="2B2F36"/>
+                </a:solidFill>
+              </a:rPr>
+              <a:t>◆ B03 列表扩容与字典｜列表append=货架自动加长；字典O(1)=储物柜直取不开抽屉翻</a:t>
+            </a:r>
+          </a:p>
+          <a:p>
+            <a:r>
+              <a:rPr sz="950" b="0">
+                <a:solidFill>
+                  <a:srgbClr val="2B2F36"/>
+                </a:solidFill>
+              </a:rPr>
+              <a:t>◆ B04 try/except替代错误码｜C层层if判错误码=快递每站验货；Python异常=坏件直接退回总站</a:t>
+            </a:r>
+          </a:p>
+          <a:p>
+            <a:r>
+              <a:rPr sz="950" b="0">
+                <a:solidFill>
+                  <a:srgbClr val="2B2F36"/>
+                </a:solidFill>
+              </a:rPr>
+              <a:t>◆ B05 类=struct+函数｜C的struct=数据仓库；Python类=仓库+员工——数据行为一体</a:t>
+            </a:r>
+          </a:p>
+          <a:p>
+            <a:r>
+              <a:rPr sz="950" b="0">
+                <a:solidFill>
+                  <a:srgbClr val="2B2F36"/>
+                </a:solidFill>
+              </a:rPr>
+              <a:t>◆ B06 缩进规范｜缩进即语法块=用磅秤分装不许手掂——4空格统一禁Tab</a:t>
+            </a:r>
+          </a:p>
+        </p:txBody>
+      </p:sp>
+      <p:sp>
+        <p:nvSpPr>
+          <p:cNvPr id="16" name="Rectangle 15"/>
           <p:cNvSpPr/>
           <p:nvPr/>
         </p:nvSpPr>
         <p:spPr>
           <a:xfrm>
-            <a:off x="760000" y="1900000"/>
-            <a:ext cx="150000" cy="1600000"/>
+            <a:off x="6903720" y="1783080"/>
+            <a:ext cx="4828032" cy="1965960"/>
           </a:xfrm>
           <a:prstGeom prst="rect">
             <a:avLst/>
           </a:prstGeom>
           <a:solidFill>
-            <a:srgbClr val="F5670F"/>
+            <a:srgbClr val="FFFFFF"/>
+          </a:solidFill>
+          <a:ln>
+            <a:solidFill>
+              <a:srgbClr val="D6DCE4"/>
+            </a:solidFill>
+          </a:ln>
+          <a:effectLst/>
+        </p:spPr>
+        <p:style>
+          <a:lnRef idx="1">
+            <a:schemeClr val="accent1"/>
+          </a:lnRef>
+          <a:fillRef idx="3">
+            <a:schemeClr val="accent1"/>
+          </a:fillRef>
+          <a:effectRef idx="2">
+            <a:schemeClr val="accent1"/>
+          </a:effectRef>
+          <a:fontRef idx="minor">
+            <a:schemeClr val="lt1"/>
+          </a:fontRef>
+        </p:style>
+        <p:txBody>
+          <a:bodyPr rtlCol="0" anchor="ctr" wrap="square"/>
+          <a:lstStyle/>
+          <a:p>
+            <a:pPr algn="ctr"/>
+          </a:p>
+        </p:txBody>
+      </p:sp>
+      <p:sp>
+        <p:nvSpPr>
+          <p:cNvPr id="17" name="Rectangle 16"/>
+          <p:cNvSpPr/>
+          <p:nvPr/>
+        </p:nvSpPr>
+        <p:spPr>
+          <a:xfrm>
+            <a:off x="6903720" y="1783080"/>
+            <a:ext cx="4828032" cy="365760"/>
+          </a:xfrm>
+          <a:prstGeom prst="rect">
+            <a:avLst/>
+          </a:prstGeom>
+          <a:solidFill>
+            <a:srgbClr val="2E7D46"/>
           </a:solidFill>
           <a:ln>
             <a:noFill/>
@@ -4899,7 +5646,7 @@
           </a:fontRef>
         </p:style>
         <p:txBody>
-          <a:bodyPr rtlCol="0" anchor="ctr"/>
+          <a:bodyPr rtlCol="0" anchor="ctr" wrap="square"/>
           <a:lstStyle/>
           <a:p>
             <a:pPr algn="ctr"/>
@@ -4908,14 +5655,14 @@
       </p:sp>
       <p:sp>
         <p:nvSpPr>
-          <p:cNvPr id="7" name="TextBox 6"/>
+          <p:cNvPr id="18" name="TextBox 17"/>
           <p:cNvSpPr txBox="1"/>
           <p:nvPr/>
         </p:nvSpPr>
         <p:spPr>
           <a:xfrm>
-            <a:off x="1020000" y="2050000"/>
-            <a:ext cx="10500000" cy="1400000"/>
+            <a:off x="7013448" y="1819656"/>
+            <a:ext cx="4608576" cy="292608"/>
           </a:xfrm>
           <a:prstGeom prst="rect">
             <a:avLst/>
@@ -4923,60 +5670,32 @@
           <a:noFill/>
         </p:spPr>
         <p:txBody>
-          <a:bodyPr wrap="square" anchor="t">
+          <a:bodyPr wrap="square">
             <a:spAutoFit/>
           </a:bodyPr>
           <a:lstStyle/>
           <a:p>
-            <a:pPr algn="l">
-              <a:lnSpc>
-                <a:spcPct val="110000"/>
-              </a:lnSpc>
-              <a:spcAft>
-                <a:spcPts val="600"/>
-              </a:spcAft>
-            </a:pPr>
-            <a:r>
-              <a:rPr sz="1700" b="1">
-                <a:solidFill>
-                  <a:srgbClr val="010328"/>
-                </a:solidFill>
-                <a:latin typeface="微软雅黑"/>
-              </a:rPr>
-              <a:t>主题: 生成标准工程模板并推Git——应用：见工单sta</a:t>
-            </a:r>
-          </a:p>
-          <a:p>
-            <a:pPr algn="l">
-              <a:lnSpc>
-                <a:spcPct val="110000"/>
-              </a:lnSpc>
-              <a:spcAft>
-                <a:spcPts val="600"/>
-              </a:spcAft>
-            </a:pPr>
-            <a:r>
-              <a:rPr sz="1300" b="0">
-                <a:solidFill>
-                  <a:srgbClr val="44546A"/>
-                </a:solidFill>
-                <a:latin typeface="微软雅黑"/>
-              </a:rPr>
-              <a:t>预习快问: requirements.txt的作用？conda环境为什么不必进.gitignore？</a:t>
-            </a:r>
-          </a:p>
-        </p:txBody>
-      </p:sp>
-      <p:sp>
-        <p:nvSpPr>
-          <p:cNvPr id="8" name="TextBox 7"/>
+            <a:r>
+              <a:rPr sz="1150" b="1">
+                <a:solidFill>
+                  <a:srgbClr val="FFFFFF"/>
+                </a:solidFill>
+              </a:rPr>
+              <a:t>本讲达标线（当堂评分同口径）</a:t>
+            </a:r>
+          </a:p>
+        </p:txBody>
+      </p:sp>
+      <p:sp>
+        <p:nvSpPr>
+          <p:cNvPr id="19" name="TextBox 18"/>
           <p:cNvSpPr txBox="1"/>
           <p:nvPr/>
         </p:nvSpPr>
         <p:spPr>
           <a:xfrm>
-            <a:off x="760000" y="3900000"/>
-            <a:ext cx="10900000" cy="900000"/>
+            <a:off x="7068312" y="2249424"/>
+            <a:ext cx="4526280" cy="1371600"/>
           </a:xfrm>
           <a:prstGeom prst="rect">
             <a:avLst/>
@@ -4984,46 +5703,237 @@
           <a:noFill/>
         </p:spPr>
         <p:txBody>
-          <a:bodyPr wrap="square" anchor="t">
+          <a:bodyPr wrap="square">
             <a:spAutoFit/>
           </a:bodyPr>
           <a:lstStyle/>
           <a:p>
-            <a:pPr algn="l">
-              <a:lnSpc>
-                <a:spcPct val="110000"/>
-              </a:lnSpc>
-              <a:spcAft>
-                <a:spcPts val="600"/>
-              </a:spcAft>
-            </a:pPr>
-            <a:r>
-              <a:rPr sz="1400" b="1">
-                <a:solidFill>
-                  <a:srgbClr val="0545E8"/>
-                </a:solidFill>
-                <a:latin typeface="微软雅黑"/>
-              </a:rPr>
-              <a:t>课前完成：导学单 + 预习自测 + starter环境自检</a:t>
-            </a:r>
-          </a:p>
-          <a:p>
-            <a:pPr algn="l">
-              <a:lnSpc>
-                <a:spcPct val="110000"/>
-              </a:lnSpc>
-              <a:spcAft>
-                <a:spcPts val="600"/>
-              </a:spcAft>
-            </a:pPr>
-            <a:r>
-              <a:rPr sz="1250" b="0">
-                <a:solidFill>
-                  <a:srgbClr val="44546A"/>
-                </a:solidFill>
-                <a:latin typeface="微软雅黑"/>
-              </a:rPr>
-              <a:t>带着问题来上课——Predict先于Run</a:t>
+            <a:r>
+              <a:rPr sz="900" b="0">
+                <a:solidFill>
+                  <a:srgbClr val="2B2F36"/>
+                </a:solidFill>
+              </a:rPr>
+              <a:t>① 及格(D)：≥3题正确+PEP8≥75%</a:t>
+            </a:r>
+          </a:p>
+          <a:p>
+            <a:r>
+              <a:rPr sz="900" b="0">
+                <a:solidFill>
+                  <a:srgbClr val="2B2F36"/>
+                </a:solidFill>
+              </a:rPr>
+              <a:t>② 优秀(B+)：5题全对+PEP8≥85%</a:t>
+            </a:r>
+          </a:p>
+        </p:txBody>
+      </p:sp>
+      <p:sp>
+        <p:nvSpPr>
+          <p:cNvPr id="20" name="Rectangle 19"/>
+          <p:cNvSpPr/>
+          <p:nvPr/>
+        </p:nvSpPr>
+        <p:spPr>
+          <a:xfrm>
+            <a:off x="6903720" y="3886200"/>
+            <a:ext cx="4828032" cy="2011680"/>
+          </a:xfrm>
+          <a:prstGeom prst="rect">
+            <a:avLst/>
+          </a:prstGeom>
+          <a:solidFill>
+            <a:srgbClr val="FFFFFF"/>
+          </a:solidFill>
+          <a:ln>
+            <a:solidFill>
+              <a:srgbClr val="D6DCE4"/>
+            </a:solidFill>
+          </a:ln>
+          <a:effectLst/>
+        </p:spPr>
+        <p:style>
+          <a:lnRef idx="1">
+            <a:schemeClr val="accent1"/>
+          </a:lnRef>
+          <a:fillRef idx="3">
+            <a:schemeClr val="accent1"/>
+          </a:fillRef>
+          <a:effectRef idx="2">
+            <a:schemeClr val="accent1"/>
+          </a:effectRef>
+          <a:fontRef idx="minor">
+            <a:schemeClr val="lt1"/>
+          </a:fontRef>
+        </p:style>
+        <p:txBody>
+          <a:bodyPr rtlCol="0" anchor="ctr" wrap="square"/>
+          <a:lstStyle/>
+          <a:p>
+            <a:pPr algn="ctr"/>
+          </a:p>
+        </p:txBody>
+      </p:sp>
+      <p:sp>
+        <p:nvSpPr>
+          <p:cNvPr id="21" name="Rectangle 20"/>
+          <p:cNvSpPr/>
+          <p:nvPr/>
+        </p:nvSpPr>
+        <p:spPr>
+          <a:xfrm>
+            <a:off x="6903720" y="3886200"/>
+            <a:ext cx="4828032" cy="365760"/>
+          </a:xfrm>
+          <a:prstGeom prst="rect">
+            <a:avLst/>
+          </a:prstGeom>
+          <a:solidFill>
+            <a:srgbClr val="8A4B2D"/>
+          </a:solidFill>
+          <a:ln>
+            <a:noFill/>
+          </a:ln>
+          <a:effectLst/>
+        </p:spPr>
+        <p:style>
+          <a:lnRef idx="1">
+            <a:schemeClr val="accent1"/>
+          </a:lnRef>
+          <a:fillRef idx="3">
+            <a:schemeClr val="accent1"/>
+          </a:fillRef>
+          <a:effectRef idx="2">
+            <a:schemeClr val="accent1"/>
+          </a:effectRef>
+          <a:fontRef idx="minor">
+            <a:schemeClr val="lt1"/>
+          </a:fontRef>
+        </p:style>
+        <p:txBody>
+          <a:bodyPr rtlCol="0" anchor="ctr" wrap="square"/>
+          <a:lstStyle/>
+          <a:p>
+            <a:pPr algn="ctr"/>
+          </a:p>
+        </p:txBody>
+      </p:sp>
+      <p:sp>
+        <p:nvSpPr>
+          <p:cNvPr id="22" name="TextBox 21"/>
+          <p:cNvSpPr txBox="1"/>
+          <p:nvPr/>
+        </p:nvSpPr>
+        <p:spPr>
+          <a:xfrm>
+            <a:off x="7013448" y="3922776"/>
+            <a:ext cx="4608576" cy="292608"/>
+          </a:xfrm>
+          <a:prstGeom prst="rect">
+            <a:avLst/>
+          </a:prstGeom>
+          <a:noFill/>
+        </p:spPr>
+        <p:txBody>
+          <a:bodyPr wrap="square">
+            <a:spAutoFit/>
+          </a:bodyPr>
+          <a:lstStyle/>
+          <a:p>
+            <a:r>
+              <a:rPr sz="1150" b="1">
+                <a:solidFill>
+                  <a:srgbClr val="FFFFFF"/>
+                </a:solidFill>
+              </a:rPr>
+              <a:t>动手前三个提醒（踩坑点摘录）</a:t>
+            </a:r>
+          </a:p>
+        </p:txBody>
+      </p:sp>
+      <p:sp>
+        <p:nvSpPr>
+          <p:cNvPr id="23" name="TextBox 22"/>
+          <p:cNvSpPr txBox="1"/>
+          <p:nvPr/>
+        </p:nvSpPr>
+        <p:spPr>
+          <a:xfrm>
+            <a:off x="7068312" y="4352544"/>
+            <a:ext cx="4526280" cy="1463040"/>
+          </a:xfrm>
+          <a:prstGeom prst="rect">
+            <a:avLst/>
+          </a:prstGeom>
+          <a:noFill/>
+        </p:spPr>
+        <p:txBody>
+          <a:bodyPr wrap="square">
+            <a:spAutoFit/>
+          </a:bodyPr>
+          <a:lstStyle/>
+          <a:p>
+            <a:r>
+              <a:rPr sz="900" b="0">
+                <a:solidFill>
+                  <a:srgbClr val="2B2F36"/>
+                </a:solidFill>
+              </a:rPr>
+              <a:t>⚠ list(a)或a.copy()</a:t>
+            </a:r>
+          </a:p>
+          <a:p>
+            <a:r>
+              <a:rPr sz="900" b="0">
+                <a:solidFill>
+                  <a:srgbClr val="2B2F36"/>
+                </a:solidFill>
+              </a:rPr>
+              <a:t>⚠ 统一4空格</a:t>
+            </a:r>
+          </a:p>
+          <a:p>
+            <a:r>
+              <a:rPr sz="900" b="0">
+                <a:solidFill>
+                  <a:srgbClr val="2B2F36"/>
+                </a:solidFill>
+              </a:rPr>
+              <a:t>⚠ 比较用==</a:t>
+            </a:r>
+          </a:p>
+        </p:txBody>
+      </p:sp>
+      <p:sp>
+        <p:nvSpPr>
+          <p:cNvPr id="24" name="TextBox 23"/>
+          <p:cNvSpPr txBox="1"/>
+          <p:nvPr/>
+        </p:nvSpPr>
+        <p:spPr>
+          <a:xfrm>
+            <a:off x="457200" y="6281928"/>
+            <a:ext cx="9601200" cy="182880"/>
+          </a:xfrm>
+          <a:prstGeom prst="rect">
+            <a:avLst/>
+          </a:prstGeom>
+          <a:noFill/>
+        </p:spPr>
+        <p:txBody>
+          <a:bodyPr wrap="square">
+            <a:spAutoFit/>
+          </a:bodyPr>
+          <a:lstStyle/>
+          <a:p>
+            <a:r>
+              <a:rPr sz="900" b="0">
+                <a:solidFill>
+                  <a:srgbClr val="6B7280"/>
+                </a:solidFill>
+              </a:rPr>
+              <a:t>素材来源：同周《第1次课-带着C语言底子学Pyth…》知识卡与避坑清单（逐字摘录）</a:t>
             </a:r>
           </a:p>
         </p:txBody>
@@ -5048,14 +5958,60 @@
       <p:grpSpPr/>
       <p:sp>
         <p:nvSpPr>
-          <p:cNvPr id="2" name="TextBox 1"/>
+          <p:cNvPr id="2" name="Rounded Rectangle 1"/>
+          <p:cNvSpPr/>
+          <p:nvPr/>
+        </p:nvSpPr>
+        <p:spPr>
+          <a:xfrm>
+            <a:off x="0" y="0"/>
+            <a:ext cx="12191695" cy="64008"/>
+          </a:xfrm>
+          <a:prstGeom prst="roundRect">
+            <a:avLst>
+              <a:gd name="adj" fmla="val 50000"/>
+            </a:avLst>
+          </a:prstGeom>
+          <a:solidFill>
+            <a:srgbClr val="0B5E54"/>
+          </a:solidFill>
+          <a:ln>
+            <a:noFill/>
+          </a:ln>
+          <a:effectLst/>
+        </p:spPr>
+        <p:style>
+          <a:lnRef idx="1">
+            <a:schemeClr val="accent1"/>
+          </a:lnRef>
+          <a:fillRef idx="3">
+            <a:schemeClr val="accent1"/>
+          </a:fillRef>
+          <a:effectRef idx="2">
+            <a:schemeClr val="accent1"/>
+          </a:effectRef>
+          <a:fontRef idx="minor">
+            <a:schemeClr val="lt1"/>
+          </a:fontRef>
+        </p:style>
+        <p:txBody>
+          <a:bodyPr rtlCol="0" anchor="ctr"/>
+          <a:lstStyle/>
+          <a:p>
+            <a:pPr algn="ctr"/>
+          </a:p>
+        </p:txBody>
+      </p:sp>
+      <p:sp>
+        <p:nvSpPr>
+          <p:cNvPr id="6" name="TextBox 5"/>
           <p:cNvSpPr txBox="1"/>
           <p:nvPr/>
         </p:nvSpPr>
         <p:spPr>
           <a:xfrm>
-            <a:off x="548640" y="320040"/>
-            <a:ext cx="11094720" cy="914400"/>
+            <a:off x="475488" y="859536"/>
+            <a:ext cx="11237976" cy="502920"/>
           </a:xfrm>
           <a:prstGeom prst="rect">
             <a:avLst/>
@@ -5063,28 +6019,159 @@
           <a:noFill/>
         </p:spPr>
         <p:txBody>
-          <a:bodyPr wrap="none">
+          <a:bodyPr wrap="square" anchor="t" lIns="0" rIns="0" tIns="0" bIns="0">
             <a:spAutoFit/>
           </a:bodyPr>
           <a:lstStyle/>
           <a:p>
-            <a:r>
-              <a:rPr sz="3000" b="1"/>
-              <a:t>本任务六步法导航</a:t>
-            </a:r>
-          </a:p>
-        </p:txBody>
-      </p:sp>
-      <p:sp>
-        <p:nvSpPr>
-          <p:cNvPr id="3" name="TextBox 2"/>
+            <a:pPr algn="l">
+              <a:lnSpc>
+                <a:spcPct val="114000"/>
+              </a:lnSpc>
+            </a:pPr>
+            <a:r>
+              <a:rPr sz="2200" b="1">
+                <a:solidFill>
+                  <a:srgbClr val="1B2B28"/>
+                </a:solidFill>
+              </a:rPr>
+              <a:t>下次课预告 · 带着问题去下一讲</a:t>
+            </a:r>
+          </a:p>
+        </p:txBody>
+      </p:sp>
+      <p:sp>
+        <p:nvSpPr>
+          <p:cNvPr id="8" name="Rounded Rectangle 7"/>
+          <p:cNvSpPr/>
+          <p:nvPr/>
+        </p:nvSpPr>
+        <p:spPr>
+          <a:xfrm>
+            <a:off x="475488" y="6419088"/>
+            <a:ext cx="11237976" cy="10972"/>
+          </a:xfrm>
+          <a:prstGeom prst="roundRect">
+            <a:avLst>
+              <a:gd name="adj" fmla="val 50000"/>
+            </a:avLst>
+          </a:prstGeom>
+          <a:solidFill>
+            <a:srgbClr val="E4F1EE"/>
+          </a:solidFill>
+          <a:ln>
+            <a:noFill/>
+          </a:ln>
+          <a:effectLst/>
+        </p:spPr>
+        <p:style>
+          <a:lnRef idx="1">
+            <a:schemeClr val="accent1"/>
+          </a:lnRef>
+          <a:fillRef idx="3">
+            <a:schemeClr val="accent1"/>
+          </a:fillRef>
+          <a:effectRef idx="2">
+            <a:schemeClr val="accent1"/>
+          </a:effectRef>
+          <a:fontRef idx="minor">
+            <a:schemeClr val="lt1"/>
+          </a:fontRef>
+        </p:style>
+        <p:txBody>
+          <a:bodyPr rtlCol="0" anchor="ctr"/>
+          <a:lstStyle/>
+          <a:p>
+            <a:pPr algn="ctr"/>
+          </a:p>
+        </p:txBody>
+      </p:sp>
+      <p:sp>
+        <p:nvSpPr>
+          <p:cNvPr id="9" name="TextBox 8"/>
           <p:cNvSpPr txBox="1"/>
           <p:nvPr/>
         </p:nvSpPr>
         <p:spPr>
           <a:xfrm>
-            <a:off x="731520" y="1371600"/>
-            <a:ext cx="10728960" cy="4663440"/>
+            <a:off x="475488" y="6455664"/>
+            <a:ext cx="7315200" cy="292608"/>
+          </a:xfrm>
+          <a:prstGeom prst="rect">
+            <a:avLst/>
+          </a:prstGeom>
+          <a:noFill/>
+        </p:spPr>
+        <p:txBody>
+          <a:bodyPr wrap="square" anchor="t" lIns="0" rIns="0" tIns="0" bIns="0">
+            <a:spAutoFit/>
+          </a:bodyPr>
+          <a:lstStyle/>
+          <a:p>
+            <a:pPr algn="l">
+              <a:lnSpc>
+                <a:spcPct val="114000"/>
+              </a:lnSpc>
+            </a:pPr>
+            <a:r>
+              <a:rPr sz="900" b="0">
+                <a:solidFill>
+                  <a:srgbClr val="5C6E6A"/>
+                </a:solidFill>
+              </a:rPr>
+              <a:t>两江智造集团 · Python程序设计（项目实战）</a:t>
+            </a:r>
+          </a:p>
+        </p:txBody>
+      </p:sp>
+      <p:sp>
+        <p:nvSpPr>
+          <p:cNvPr id="10" name="TextBox 9"/>
+          <p:cNvSpPr txBox="1"/>
+          <p:nvPr/>
+        </p:nvSpPr>
+        <p:spPr>
+          <a:xfrm>
+            <a:off x="10597896" y="6537960"/>
+            <a:ext cx="996696" cy="301752"/>
+          </a:xfrm>
+          <a:prstGeom prst="rect">
+            <a:avLst/>
+          </a:prstGeom>
+          <a:noFill/>
+        </p:spPr>
+        <p:txBody>
+          <a:bodyPr wrap="square" anchor="t" lIns="0" rIns="0" tIns="0" bIns="0">
+            <a:spAutoFit/>
+          </a:bodyPr>
+          <a:lstStyle/>
+          <a:p>
+            <a:pPr algn="r">
+              <a:lnSpc>
+                <a:spcPct val="114000"/>
+              </a:lnSpc>
+            </a:pPr>
+            <a:r>
+              <a:rPr sz="1000" b="0">
+                <a:solidFill>
+                  <a:srgbClr val="8A97B5"/>
+                </a:solidFill>
+              </a:rPr>
+              <a:t>12 / 18</a:t>
+            </a:r>
+          </a:p>
+        </p:txBody>
+      </p:sp>
+      <p:sp>
+        <p:nvSpPr>
+          <p:cNvPr id="11" name="TextBox 10"/>
+          <p:cNvSpPr txBox="1"/>
+          <p:nvPr/>
+        </p:nvSpPr>
+        <p:spPr>
+          <a:xfrm>
+            <a:off x="457200" y="1389888"/>
+            <a:ext cx="11274552" cy="274320"/>
           </a:xfrm>
           <a:prstGeom prst="rect">
             <a:avLst/>
@@ -5097,47 +6184,505 @@
           </a:bodyPr>
           <a:lstStyle/>
           <a:p>
-            <a:pPr>
-              <a:spcAft>
-                <a:spcPts val="1000"/>
-              </a:spcAft>
-            </a:pPr>
-            <a:r>
-              <a:rPr sz="1800"/>
-              <a:t>六步法：资讯 → 计划 → 决策 → 实施 → 检查 → 评估</a:t>
-            </a:r>
-          </a:p>
-          <a:p>
-            <a:pPr>
-              <a:spcAft>
-                <a:spcPts val="1000"/>
-              </a:spcAft>
-            </a:pPr>
-            <a:r>
-              <a:rPr sz="1800"/>
-              <a:t>本讲对应工单：《Python程序设计-项目实战》分层任务工单</a:t>
-            </a:r>
-          </a:p>
-          <a:p>
-            <a:pPr>
-              <a:spcAft>
-                <a:spcPts val="1000"/>
-              </a:spcAft>
-            </a:pPr>
-            <a:r>
-              <a:rPr sz="1800"/>
-              <a:t>课堂产出：工单第六节实施记录须当堂填写，含操作前安全打勾与学生本人签字。</a:t>
-            </a:r>
-          </a:p>
-          <a:p>
-            <a:pPr>
-              <a:spcAft>
-                <a:spcPts val="1000"/>
-              </a:spcAft>
-            </a:pPr>
-            <a:r>
-              <a:rPr sz="1800"/>
-              <a:t>课后交付：班组长／操作员／教师三方联签后交回，缺签视为未交付。</a:t>
+            <a:r>
+              <a:rPr sz="1050" b="0">
+                <a:solidFill>
+                  <a:srgbClr val="6B7280"/>
+                </a:solidFill>
+              </a:rPr>
+              <a:t>带着问题去下一讲——预习任务与自测问题逐字取自课程安排，课前完成。</a:t>
+            </a:r>
+          </a:p>
+        </p:txBody>
+      </p:sp>
+      <p:sp>
+        <p:nvSpPr>
+          <p:cNvPr id="12" name="Rectangle 11"/>
+          <p:cNvSpPr/>
+          <p:nvPr/>
+        </p:nvSpPr>
+        <p:spPr>
+          <a:xfrm>
+            <a:off x="457200" y="1920240"/>
+            <a:ext cx="11274552" cy="960120"/>
+          </a:xfrm>
+          <a:prstGeom prst="rect">
+            <a:avLst/>
+          </a:prstGeom>
+          <a:solidFill>
+            <a:srgbClr val="F7F9FC"/>
+          </a:solidFill>
+          <a:ln>
+            <a:solidFill>
+              <a:srgbClr val="D6DCE4"/>
+            </a:solidFill>
+          </a:ln>
+          <a:effectLst/>
+        </p:spPr>
+        <p:style>
+          <a:lnRef idx="1">
+            <a:schemeClr val="accent1"/>
+          </a:lnRef>
+          <a:fillRef idx="3">
+            <a:schemeClr val="accent1"/>
+          </a:fillRef>
+          <a:effectRef idx="2">
+            <a:schemeClr val="accent1"/>
+          </a:effectRef>
+          <a:fontRef idx="minor">
+            <a:schemeClr val="lt1"/>
+          </a:fontRef>
+        </p:style>
+        <p:txBody>
+          <a:bodyPr rtlCol="0" anchor="ctr" wrap="square"/>
+          <a:lstStyle/>
+          <a:p>
+            <a:pPr algn="ctr"/>
+          </a:p>
+        </p:txBody>
+      </p:sp>
+      <p:sp>
+        <p:nvSpPr>
+          <p:cNvPr id="13" name="Rectangle 12"/>
+          <p:cNvSpPr/>
+          <p:nvPr/>
+        </p:nvSpPr>
+        <p:spPr>
+          <a:xfrm>
+            <a:off x="457200" y="1920240"/>
+            <a:ext cx="82296" cy="960120"/>
+          </a:xfrm>
+          <a:prstGeom prst="rect">
+            <a:avLst/>
+          </a:prstGeom>
+          <a:solidFill>
+            <a:srgbClr val="2F5D8C"/>
+          </a:solidFill>
+          <a:ln>
+            <a:noFill/>
+          </a:ln>
+          <a:effectLst/>
+        </p:spPr>
+        <p:style>
+          <a:lnRef idx="1">
+            <a:schemeClr val="accent1"/>
+          </a:lnRef>
+          <a:fillRef idx="3">
+            <a:schemeClr val="accent1"/>
+          </a:fillRef>
+          <a:effectRef idx="2">
+            <a:schemeClr val="accent1"/>
+          </a:effectRef>
+          <a:fontRef idx="minor">
+            <a:schemeClr val="lt1"/>
+          </a:fontRef>
+        </p:style>
+        <p:txBody>
+          <a:bodyPr rtlCol="0" anchor="ctr" wrap="square"/>
+          <a:lstStyle/>
+          <a:p>
+            <a:pPr algn="ctr"/>
+          </a:p>
+        </p:txBody>
+      </p:sp>
+      <p:sp>
+        <p:nvSpPr>
+          <p:cNvPr id="14" name="TextBox 13"/>
+          <p:cNvSpPr txBox="1"/>
+          <p:nvPr/>
+        </p:nvSpPr>
+        <p:spPr>
+          <a:xfrm>
+            <a:off x="685800" y="2084832"/>
+            <a:ext cx="10881360" cy="685800"/>
+          </a:xfrm>
+          <a:prstGeom prst="rect">
+            <a:avLst/>
+          </a:prstGeom>
+          <a:noFill/>
+        </p:spPr>
+        <p:txBody>
+          <a:bodyPr wrap="square">
+            <a:spAutoFit/>
+          </a:bodyPr>
+          <a:lstStyle/>
+          <a:p>
+            <a:r>
+              <a:rPr sz="1050" b="0">
+                <a:solidFill>
+                  <a:srgbClr val="2B2F36"/>
+                </a:solidFill>
+              </a:rPr>
+              <a:t>主题：生成标准工程模板并推Git——应用：见工单sta</a:t>
+            </a:r>
+          </a:p>
+        </p:txBody>
+      </p:sp>
+      <p:sp>
+        <p:nvSpPr>
+          <p:cNvPr id="15" name="Rectangle 14"/>
+          <p:cNvSpPr/>
+          <p:nvPr/>
+        </p:nvSpPr>
+        <p:spPr>
+          <a:xfrm>
+            <a:off x="457200" y="3026664"/>
+            <a:ext cx="11274552" cy="960120"/>
+          </a:xfrm>
+          <a:prstGeom prst="rect">
+            <a:avLst/>
+          </a:prstGeom>
+          <a:solidFill>
+            <a:srgbClr val="F7F9FC"/>
+          </a:solidFill>
+          <a:ln>
+            <a:solidFill>
+              <a:srgbClr val="D6DCE4"/>
+            </a:solidFill>
+          </a:ln>
+          <a:effectLst/>
+        </p:spPr>
+        <p:style>
+          <a:lnRef idx="1">
+            <a:schemeClr val="accent1"/>
+          </a:lnRef>
+          <a:fillRef idx="3">
+            <a:schemeClr val="accent1"/>
+          </a:fillRef>
+          <a:effectRef idx="2">
+            <a:schemeClr val="accent1"/>
+          </a:effectRef>
+          <a:fontRef idx="minor">
+            <a:schemeClr val="lt1"/>
+          </a:fontRef>
+        </p:style>
+        <p:txBody>
+          <a:bodyPr rtlCol="0" anchor="ctr" wrap="square"/>
+          <a:lstStyle/>
+          <a:p>
+            <a:pPr algn="ctr"/>
+          </a:p>
+        </p:txBody>
+      </p:sp>
+      <p:sp>
+        <p:nvSpPr>
+          <p:cNvPr id="16" name="Rectangle 15"/>
+          <p:cNvSpPr/>
+          <p:nvPr/>
+        </p:nvSpPr>
+        <p:spPr>
+          <a:xfrm>
+            <a:off x="457200" y="3026664"/>
+            <a:ext cx="82296" cy="960120"/>
+          </a:xfrm>
+          <a:prstGeom prst="rect">
+            <a:avLst/>
+          </a:prstGeom>
+          <a:solidFill>
+            <a:srgbClr val="2F5D8C"/>
+          </a:solidFill>
+          <a:ln>
+            <a:noFill/>
+          </a:ln>
+          <a:effectLst/>
+        </p:spPr>
+        <p:style>
+          <a:lnRef idx="1">
+            <a:schemeClr val="accent1"/>
+          </a:lnRef>
+          <a:fillRef idx="3">
+            <a:schemeClr val="accent1"/>
+          </a:fillRef>
+          <a:effectRef idx="2">
+            <a:schemeClr val="accent1"/>
+          </a:effectRef>
+          <a:fontRef idx="minor">
+            <a:schemeClr val="lt1"/>
+          </a:fontRef>
+        </p:style>
+        <p:txBody>
+          <a:bodyPr rtlCol="0" anchor="ctr" wrap="square"/>
+          <a:lstStyle/>
+          <a:p>
+            <a:pPr algn="ctr"/>
+          </a:p>
+        </p:txBody>
+      </p:sp>
+      <p:sp>
+        <p:nvSpPr>
+          <p:cNvPr id="17" name="TextBox 16"/>
+          <p:cNvSpPr txBox="1"/>
+          <p:nvPr/>
+        </p:nvSpPr>
+        <p:spPr>
+          <a:xfrm>
+            <a:off x="685800" y="3191256"/>
+            <a:ext cx="10881360" cy="685800"/>
+          </a:xfrm>
+          <a:prstGeom prst="rect">
+            <a:avLst/>
+          </a:prstGeom>
+          <a:noFill/>
+        </p:spPr>
+        <p:txBody>
+          <a:bodyPr wrap="square">
+            <a:spAutoFit/>
+          </a:bodyPr>
+          <a:lstStyle/>
+          <a:p>
+            <a:r>
+              <a:rPr sz="1050" b="0">
+                <a:solidFill>
+                  <a:srgbClr val="2B2F36"/>
+                </a:solidFill>
+              </a:rPr>
+              <a:t>预习快问：requirements.txt的作用？conda环境为什么不必进.gitignore？</a:t>
+            </a:r>
+          </a:p>
+        </p:txBody>
+      </p:sp>
+      <p:sp>
+        <p:nvSpPr>
+          <p:cNvPr id="18" name="Rectangle 17"/>
+          <p:cNvSpPr/>
+          <p:nvPr/>
+        </p:nvSpPr>
+        <p:spPr>
+          <a:xfrm>
+            <a:off x="457200" y="4133087"/>
+            <a:ext cx="11274552" cy="960120"/>
+          </a:xfrm>
+          <a:prstGeom prst="rect">
+            <a:avLst/>
+          </a:prstGeom>
+          <a:solidFill>
+            <a:srgbClr val="F7F9FC"/>
+          </a:solidFill>
+          <a:ln>
+            <a:solidFill>
+              <a:srgbClr val="D6DCE4"/>
+            </a:solidFill>
+          </a:ln>
+          <a:effectLst/>
+        </p:spPr>
+        <p:style>
+          <a:lnRef idx="1">
+            <a:schemeClr val="accent1"/>
+          </a:lnRef>
+          <a:fillRef idx="3">
+            <a:schemeClr val="accent1"/>
+          </a:fillRef>
+          <a:effectRef idx="2">
+            <a:schemeClr val="accent1"/>
+          </a:effectRef>
+          <a:fontRef idx="minor">
+            <a:schemeClr val="lt1"/>
+          </a:fontRef>
+        </p:style>
+        <p:txBody>
+          <a:bodyPr rtlCol="0" anchor="ctr" wrap="square"/>
+          <a:lstStyle/>
+          <a:p>
+            <a:pPr algn="ctr"/>
+          </a:p>
+        </p:txBody>
+      </p:sp>
+      <p:sp>
+        <p:nvSpPr>
+          <p:cNvPr id="19" name="Rectangle 18"/>
+          <p:cNvSpPr/>
+          <p:nvPr/>
+        </p:nvSpPr>
+        <p:spPr>
+          <a:xfrm>
+            <a:off x="457200" y="4133087"/>
+            <a:ext cx="82296" cy="960120"/>
+          </a:xfrm>
+          <a:prstGeom prst="rect">
+            <a:avLst/>
+          </a:prstGeom>
+          <a:solidFill>
+            <a:srgbClr val="2F5D8C"/>
+          </a:solidFill>
+          <a:ln>
+            <a:noFill/>
+          </a:ln>
+          <a:effectLst/>
+        </p:spPr>
+        <p:style>
+          <a:lnRef idx="1">
+            <a:schemeClr val="accent1"/>
+          </a:lnRef>
+          <a:fillRef idx="3">
+            <a:schemeClr val="accent1"/>
+          </a:fillRef>
+          <a:effectRef idx="2">
+            <a:schemeClr val="accent1"/>
+          </a:effectRef>
+          <a:fontRef idx="minor">
+            <a:schemeClr val="lt1"/>
+          </a:fontRef>
+        </p:style>
+        <p:txBody>
+          <a:bodyPr rtlCol="0" anchor="ctr" wrap="square"/>
+          <a:lstStyle/>
+          <a:p>
+            <a:pPr algn="ctr"/>
+          </a:p>
+        </p:txBody>
+      </p:sp>
+      <p:sp>
+        <p:nvSpPr>
+          <p:cNvPr id="20" name="TextBox 19"/>
+          <p:cNvSpPr txBox="1"/>
+          <p:nvPr/>
+        </p:nvSpPr>
+        <p:spPr>
+          <a:xfrm>
+            <a:off x="685800" y="4297679"/>
+            <a:ext cx="10881360" cy="685800"/>
+          </a:xfrm>
+          <a:prstGeom prst="rect">
+            <a:avLst/>
+          </a:prstGeom>
+          <a:noFill/>
+        </p:spPr>
+        <p:txBody>
+          <a:bodyPr wrap="square">
+            <a:spAutoFit/>
+          </a:bodyPr>
+          <a:lstStyle/>
+          <a:p>
+            <a:r>
+              <a:rPr sz="1050" b="0">
+                <a:solidFill>
+                  <a:srgbClr val="2B2F36"/>
+                </a:solidFill>
+              </a:rPr>
+              <a:t>课前完成：导学单 + 预习自测 + starter环境自检</a:t>
+            </a:r>
+          </a:p>
+        </p:txBody>
+      </p:sp>
+      <p:sp>
+        <p:nvSpPr>
+          <p:cNvPr id="21" name="Rectangle 20"/>
+          <p:cNvSpPr/>
+          <p:nvPr/>
+        </p:nvSpPr>
+        <p:spPr>
+          <a:xfrm>
+            <a:off x="457200" y="5239512"/>
+            <a:ext cx="11274552" cy="960120"/>
+          </a:xfrm>
+          <a:prstGeom prst="rect">
+            <a:avLst/>
+          </a:prstGeom>
+          <a:solidFill>
+            <a:srgbClr val="F7F9FC"/>
+          </a:solidFill>
+          <a:ln>
+            <a:solidFill>
+              <a:srgbClr val="D6DCE4"/>
+            </a:solidFill>
+          </a:ln>
+          <a:effectLst/>
+        </p:spPr>
+        <p:style>
+          <a:lnRef idx="1">
+            <a:schemeClr val="accent1"/>
+          </a:lnRef>
+          <a:fillRef idx="3">
+            <a:schemeClr val="accent1"/>
+          </a:fillRef>
+          <a:effectRef idx="2">
+            <a:schemeClr val="accent1"/>
+          </a:effectRef>
+          <a:fontRef idx="minor">
+            <a:schemeClr val="lt1"/>
+          </a:fontRef>
+        </p:style>
+        <p:txBody>
+          <a:bodyPr rtlCol="0" anchor="ctr" wrap="square"/>
+          <a:lstStyle/>
+          <a:p>
+            <a:pPr algn="ctr"/>
+          </a:p>
+        </p:txBody>
+      </p:sp>
+      <p:sp>
+        <p:nvSpPr>
+          <p:cNvPr id="22" name="Rectangle 21"/>
+          <p:cNvSpPr/>
+          <p:nvPr/>
+        </p:nvSpPr>
+        <p:spPr>
+          <a:xfrm>
+            <a:off x="457200" y="5239512"/>
+            <a:ext cx="82296" cy="960120"/>
+          </a:xfrm>
+          <a:prstGeom prst="rect">
+            <a:avLst/>
+          </a:prstGeom>
+          <a:solidFill>
+            <a:srgbClr val="2F5D8C"/>
+          </a:solidFill>
+          <a:ln>
+            <a:noFill/>
+          </a:ln>
+          <a:effectLst/>
+        </p:spPr>
+        <p:style>
+          <a:lnRef idx="1">
+            <a:schemeClr val="accent1"/>
+          </a:lnRef>
+          <a:fillRef idx="3">
+            <a:schemeClr val="accent1"/>
+          </a:fillRef>
+          <a:effectRef idx="2">
+            <a:schemeClr val="accent1"/>
+          </a:effectRef>
+          <a:fontRef idx="minor">
+            <a:schemeClr val="lt1"/>
+          </a:fontRef>
+        </p:style>
+        <p:txBody>
+          <a:bodyPr rtlCol="0" anchor="ctr" wrap="square"/>
+          <a:lstStyle/>
+          <a:p>
+            <a:pPr algn="ctr"/>
+          </a:p>
+        </p:txBody>
+      </p:sp>
+      <p:sp>
+        <p:nvSpPr>
+          <p:cNvPr id="23" name="TextBox 22"/>
+          <p:cNvSpPr txBox="1"/>
+          <p:nvPr/>
+        </p:nvSpPr>
+        <p:spPr>
+          <a:xfrm>
+            <a:off x="685800" y="5404103"/>
+            <a:ext cx="10881360" cy="685800"/>
+          </a:xfrm>
+          <a:prstGeom prst="rect">
+            <a:avLst/>
+          </a:prstGeom>
+          <a:noFill/>
+        </p:spPr>
+        <p:txBody>
+          <a:bodyPr wrap="square">
+            <a:spAutoFit/>
+          </a:bodyPr>
+          <a:lstStyle/>
+          <a:p>
+            <a:r>
+              <a:rPr sz="1050" b="0">
+                <a:solidFill>
+                  <a:srgbClr val="2B2F36"/>
+                </a:solidFill>
+              </a:rPr>
+              <a:t>带着问题：来上课——Predict先于Run</a:t>
             </a:r>
           </a:p>
         </p:txBody>
@@ -5162,14 +6707,102 @@
       <p:grpSpPr/>
       <p:sp>
         <p:nvSpPr>
-          <p:cNvPr id="2" name="TextBox 1"/>
+          <p:cNvPr id="2" name="Rectangle 1"/>
+          <p:cNvSpPr/>
+          <p:nvPr/>
+        </p:nvSpPr>
+        <p:spPr>
+          <a:xfrm>
+            <a:off x="0" y="0"/>
+            <a:ext cx="12192000" cy="1150000"/>
+          </a:xfrm>
+          <a:prstGeom prst="rect">
+            <a:avLst/>
+          </a:prstGeom>
+          <a:solidFill>
+            <a:srgbClr val="010328"/>
+          </a:solidFill>
+          <a:ln>
+            <a:noFill/>
+          </a:ln>
+          <a:effectLst/>
+        </p:spPr>
+        <p:style>
+          <a:lnRef idx="1">
+            <a:schemeClr val="accent1"/>
+          </a:lnRef>
+          <a:fillRef idx="3">
+            <a:schemeClr val="accent1"/>
+          </a:fillRef>
+          <a:effectRef idx="2">
+            <a:schemeClr val="accent1"/>
+          </a:effectRef>
+          <a:fontRef idx="minor">
+            <a:schemeClr val="lt1"/>
+          </a:fontRef>
+        </p:style>
+        <p:txBody>
+          <a:bodyPr rtlCol="0" anchor="ctr"/>
+          <a:lstStyle/>
+          <a:p>
+            <a:pPr algn="ctr"/>
+          </a:p>
+        </p:txBody>
+      </p:sp>
+      <p:sp>
+        <p:nvSpPr>
+          <p:cNvPr id="3" name="Rectangle 2"/>
+          <p:cNvSpPr/>
+          <p:nvPr/>
+        </p:nvSpPr>
+        <p:spPr>
+          <a:xfrm>
+            <a:off x="0" y="1150000"/>
+            <a:ext cx="2600000" cy="70000"/>
+          </a:xfrm>
+          <a:prstGeom prst="rect">
+            <a:avLst/>
+          </a:prstGeom>
+          <a:solidFill>
+            <a:srgbClr val="F5670F"/>
+          </a:solidFill>
+          <a:ln>
+            <a:noFill/>
+          </a:ln>
+          <a:effectLst/>
+        </p:spPr>
+        <p:style>
+          <a:lnRef idx="1">
+            <a:schemeClr val="accent1"/>
+          </a:lnRef>
+          <a:fillRef idx="3">
+            <a:schemeClr val="accent1"/>
+          </a:fillRef>
+          <a:effectRef idx="2">
+            <a:schemeClr val="accent1"/>
+          </a:effectRef>
+          <a:fontRef idx="minor">
+            <a:schemeClr val="lt1"/>
+          </a:fontRef>
+        </p:style>
+        <p:txBody>
+          <a:bodyPr rtlCol="0" anchor="ctr"/>
+          <a:lstStyle/>
+          <a:p>
+            <a:pPr algn="ctr"/>
+          </a:p>
+        </p:txBody>
+      </p:sp>
+      <p:sp>
+        <p:nvSpPr>
+          <p:cNvPr id="4" name="TextBox 3"/>
           <p:cNvSpPr txBox="1"/>
           <p:nvPr/>
         </p:nvSpPr>
         <p:spPr>
           <a:xfrm>
-            <a:off x="548640" y="320040"/>
-            <a:ext cx="11094720" cy="914400"/>
+            <a:off x="700000" y="300000"/>
+            <a:ext cx="10792000" cy="700000"/>
           </a:xfrm>
           <a:prstGeom prst="rect">
             <a:avLst/>
@@ -5177,28 +6810,85 @@
           <a:noFill/>
         </p:spPr>
         <p:txBody>
-          <a:bodyPr wrap="none">
+          <a:bodyPr wrap="square" anchor="t">
             <a:spAutoFit/>
           </a:bodyPr>
           <a:lstStyle/>
           <a:p>
-            <a:r>
-              <a:rPr sz="3000" b="1"/>
-              <a:t>本讲与岗位任务单的衔接</a:t>
-            </a:r>
-          </a:p>
-        </p:txBody>
-      </p:sp>
-      <p:sp>
-        <p:nvSpPr>
-          <p:cNvPr id="3" name="TextBox 2"/>
+            <a:pPr algn="l">
+              <a:lnSpc>
+                <a:spcPct val="110000"/>
+              </a:lnSpc>
+              <a:spcAft>
+                <a:spcPts val="600"/>
+              </a:spcAft>
+            </a:pPr>
+            <a:r>
+              <a:rPr sz="2400" b="1">
+                <a:solidFill>
+                  <a:srgbClr val="FFFFFF"/>
+                </a:solidFill>
+                <a:latin typeface="微软雅黑"/>
+              </a:rPr>
+              <a:t>总结评价与课后任务</a:t>
+            </a:r>
+          </a:p>
+        </p:txBody>
+      </p:sp>
+      <p:sp>
+        <p:nvSpPr>
+          <p:cNvPr id="5" name="Rectangle 4"/>
+          <p:cNvSpPr/>
+          <p:nvPr/>
+        </p:nvSpPr>
+        <p:spPr>
+          <a:xfrm>
+            <a:off x="800000" y="1950000"/>
+            <a:ext cx="10600000" cy="1500000"/>
+          </a:xfrm>
+          <a:prstGeom prst="rect">
+            <a:avLst/>
+          </a:prstGeom>
+          <a:solidFill>
+            <a:srgbClr val="F3F6FD"/>
+          </a:solidFill>
+          <a:ln>
+            <a:noFill/>
+          </a:ln>
+          <a:effectLst/>
+        </p:spPr>
+        <p:style>
+          <a:lnRef idx="1">
+            <a:schemeClr val="accent1"/>
+          </a:lnRef>
+          <a:fillRef idx="3">
+            <a:schemeClr val="accent1"/>
+          </a:fillRef>
+          <a:effectRef idx="2">
+            <a:schemeClr val="accent1"/>
+          </a:effectRef>
+          <a:fontRef idx="minor">
+            <a:schemeClr val="lt1"/>
+          </a:fontRef>
+        </p:style>
+        <p:txBody>
+          <a:bodyPr rtlCol="0" anchor="ctr"/>
+          <a:lstStyle/>
+          <a:p>
+            <a:pPr algn="ctr"/>
+          </a:p>
+        </p:txBody>
+      </p:sp>
+      <p:sp>
+        <p:nvSpPr>
+          <p:cNvPr id="6" name="TextBox 5"/>
           <p:cNvSpPr txBox="1"/>
           <p:nvPr/>
         </p:nvSpPr>
         <p:spPr>
           <a:xfrm>
-            <a:off x="731520" y="1371600"/>
-            <a:ext cx="10728960" cy="4663440"/>
+            <a:off x="1000000" y="2050000"/>
+            <a:ext cx="10300000" cy="1400000"/>
           </a:xfrm>
           <a:prstGeom prst="rect">
             <a:avLst/>
@@ -5206,52 +6896,378 @@
           <a:noFill/>
         </p:spPr>
         <p:txBody>
-          <a:bodyPr wrap="square">
+          <a:bodyPr wrap="square" anchor="t">
             <a:spAutoFit/>
           </a:bodyPr>
           <a:lstStyle/>
           <a:p>
-            <a:pPr>
+            <a:pPr algn="l">
+              <a:lnSpc>
+                <a:spcPct val="110000"/>
+              </a:lnSpc>
               <a:spcAft>
-                <a:spcPts val="1000"/>
+                <a:spcPts val="600"/>
               </a:spcAft>
             </a:pPr>
             <a:r>
-              <a:rPr sz="1800"/>
-              <a:t>本讲在工作过程系统化课程中承担的任务环节：任务实施</a:t>
-            </a:r>
-          </a:p>
-          <a:p>
-            <a:pPr>
+              <a:rPr sz="1500" b="1">
+                <a:solidFill>
+                  <a:srgbClr val="0545E8"/>
+                </a:solidFill>
+                <a:latin typeface="微软雅黑"/>
+              </a:rPr>
+              <a:t>评价（10分钟）：</a:t>
+            </a:r>
+          </a:p>
+          <a:p>
+            <a:pPr algn="l">
+              <a:lnSpc>
+                <a:spcPct val="110000"/>
+              </a:lnSpc>
               <a:spcAft>
-                <a:spcPts val="1000"/>
+                <a:spcPts val="600"/>
               </a:spcAft>
             </a:pPr>
             <a:r>
-              <a:rPr sz="1800"/>
-              <a:t>考核对齐：过程性成绩取自本讲工单第六节各模块得分合计（满分 100）。</a:t>
-            </a:r>
-          </a:p>
-          <a:p>
-            <a:pPr>
+              <a:rPr sz="1400" b="0">
+                <a:solidFill>
+                  <a:srgbClr val="010328"/>
+                </a:solidFill>
+                <a:latin typeface="微软雅黑"/>
+              </a:rPr>
+              <a:t>按D/C/B/A量表当堂评分；工单24小时内反馈评语与改进建议。</a:t>
+            </a:r>
+          </a:p>
+        </p:txBody>
+      </p:sp>
+      <p:sp>
+        <p:nvSpPr>
+          <p:cNvPr id="7" name="TextBox 6"/>
+          <p:cNvSpPr txBox="1"/>
+          <p:nvPr/>
+        </p:nvSpPr>
+        <p:spPr>
+          <a:xfrm>
+            <a:off x="850000" y="3700000"/>
+            <a:ext cx="10600000" cy="700000"/>
+          </a:xfrm>
+          <a:prstGeom prst="rect">
+            <a:avLst/>
+          </a:prstGeom>
+          <a:noFill/>
+        </p:spPr>
+        <p:txBody>
+          <a:bodyPr wrap="square" anchor="t">
+            <a:spAutoFit/>
+          </a:bodyPr>
+          <a:lstStyle/>
+          <a:p>
+            <a:pPr algn="l">
+              <a:lnSpc>
+                <a:spcPct val="120000"/>
+              </a:lnSpc>
               <a:spcAft>
-                <a:spcPts val="1000"/>
+                <a:spcPts val="600"/>
               </a:spcAft>
             </a:pPr>
             <a:r>
-              <a:rPr sz="1800"/>
-              <a:t>达标线：综合成绩≥60 分，且无安全红线一票否决记录</a:t>
-            </a:r>
-          </a:p>
-          <a:p>
-            <a:pPr>
+              <a:rPr sz="1400" b="1">
+                <a:solidFill>
+                  <a:srgbClr val="F5670F"/>
+                </a:solidFill>
+                <a:latin typeface="微软雅黑"/>
+              </a:rPr>
+              <a:t>1. </a:t>
+            </a:r>
+            <a:r>
+              <a:rPr sz="1400" b="0">
+                <a:solidFill>
+                  <a:srgbClr val="010328"/>
+                </a:solidFill>
+                <a:latin typeface="微软雅黑"/>
+              </a:rPr>
+              <a:t>1. 完成工单P1.1《Python基础练习五题》：及格标准≥3题正确+PEP 8≥75%；优秀标准5题全对+PEP 8≥85%+命名有意义；</a:t>
+            </a:r>
+          </a:p>
+        </p:txBody>
+      </p:sp>
+      <p:sp>
+        <p:nvSpPr>
+          <p:cNvPr id="8" name="TextBox 7"/>
+          <p:cNvSpPr txBox="1"/>
+          <p:nvPr/>
+        </p:nvSpPr>
+        <p:spPr>
+          <a:xfrm>
+            <a:off x="850000" y="4420000"/>
+            <a:ext cx="10600000" cy="700000"/>
+          </a:xfrm>
+          <a:prstGeom prst="rect">
+            <a:avLst/>
+          </a:prstGeom>
+          <a:noFill/>
+        </p:spPr>
+        <p:txBody>
+          <a:bodyPr wrap="square" anchor="t">
+            <a:spAutoFit/>
+          </a:bodyPr>
+          <a:lstStyle/>
+          <a:p>
+            <a:pPr algn="l">
+              <a:lnSpc>
+                <a:spcPct val="120000"/>
+              </a:lnSpc>
               <a:spcAft>
-                <a:spcPts val="1000"/>
+                <a:spcPts val="600"/>
               </a:spcAft>
             </a:pPr>
             <a:r>
-              <a:rPr sz="1800"/>
-              <a:t>无效工单判定：未打安全勾、无本人签字、无三方联签。</a:t>
+              <a:rPr sz="1400" b="1">
+                <a:solidFill>
+                  <a:srgbClr val="F5670F"/>
+                </a:solidFill>
+                <a:latin typeface="微软雅黑"/>
+              </a:rPr>
+              <a:t>2. </a:t>
+            </a:r>
+            <a:r>
+              <a:rPr sz="1400" b="0">
+                <a:solidFill>
+                  <a:srgbClr val="010328"/>
+                </a:solidFill>
+                <a:latin typeface="微软雅黑"/>
+              </a:rPr>
+              <a:t>2. 整理个人《C→Python迁移对照笔记》；</a:t>
+            </a:r>
+          </a:p>
+        </p:txBody>
+      </p:sp>
+      <p:sp>
+        <p:nvSpPr>
+          <p:cNvPr id="9" name="TextBox 8"/>
+          <p:cNvSpPr txBox="1"/>
+          <p:nvPr/>
+        </p:nvSpPr>
+        <p:spPr>
+          <a:xfrm>
+            <a:off x="850000" y="5140000"/>
+            <a:ext cx="10600000" cy="700000"/>
+          </a:xfrm>
+          <a:prstGeom prst="rect">
+            <a:avLst/>
+          </a:prstGeom>
+          <a:noFill/>
+        </p:spPr>
+        <p:txBody>
+          <a:bodyPr wrap="square" anchor="t">
+            <a:spAutoFit/>
+          </a:bodyPr>
+          <a:lstStyle/>
+          <a:p>
+            <a:pPr algn="l">
+              <a:lnSpc>
+                <a:spcPct val="120000"/>
+              </a:lnSpc>
+              <a:spcAft>
+                <a:spcPts val="600"/>
+              </a:spcAft>
+            </a:pPr>
+            <a:r>
+              <a:rPr sz="1400" b="1">
+                <a:solidFill>
+                  <a:srgbClr val="F5670F"/>
+                </a:solidFill>
+                <a:latin typeface="微软雅黑"/>
+              </a:rPr>
+              <a:t>3. </a:t>
+            </a:r>
+            <a:r>
+              <a:rPr sz="1400" b="0">
+                <a:solidFill>
+                  <a:srgbClr val="010328"/>
+                </a:solidFill>
+                <a:latin typeface="微软雅黑"/>
+              </a:rPr>
+              <a:t>3. 预习PEP 8规范与Git基础操作。</a:t>
+            </a:r>
+          </a:p>
+        </p:txBody>
+      </p:sp>
+      <p:sp>
+        <p:nvSpPr>
+          <p:cNvPr id="10" name="TextBox 9"/>
+          <p:cNvSpPr txBox="1"/>
+          <p:nvPr/>
+        </p:nvSpPr>
+        <p:spPr>
+          <a:xfrm>
+            <a:off x="850000" y="5960000"/>
+            <a:ext cx="10600000" cy="500000"/>
+          </a:xfrm>
+          <a:prstGeom prst="rect">
+            <a:avLst/>
+          </a:prstGeom>
+          <a:noFill/>
+        </p:spPr>
+        <p:txBody>
+          <a:bodyPr wrap="square" anchor="t">
+            <a:spAutoFit/>
+          </a:bodyPr>
+          <a:lstStyle/>
+          <a:p>
+            <a:pPr algn="l">
+              <a:lnSpc>
+                <a:spcPct val="110000"/>
+              </a:lnSpc>
+              <a:spcAft>
+                <a:spcPts val="600"/>
+              </a:spcAft>
+            </a:pPr>
+            <a:r>
+              <a:rPr sz="1300" b="1">
+                <a:solidFill>
+                  <a:srgbClr val="0475B6"/>
+                </a:solidFill>
+                <a:latin typeface="微软雅黑"/>
+              </a:rPr>
+              <a:t>下次课预告：</a:t>
+            </a:r>
+            <a:r>
+              <a:rPr sz="1300" b="0">
+                <a:solidFill>
+                  <a:srgbClr val="44546A"/>
+                </a:solidFill>
+                <a:latin typeface="微软雅黑"/>
+              </a:rPr>
+              <a:t>见下次课工单任务书</a:t>
+            </a:r>
+          </a:p>
+        </p:txBody>
+      </p:sp>
+      <p:sp>
+        <p:nvSpPr>
+          <p:cNvPr id="11" name="Rectangle 10"/>
+          <p:cNvSpPr/>
+          <p:nvPr/>
+        </p:nvSpPr>
+        <p:spPr>
+          <a:xfrm>
+            <a:off x="500000" y="6500000"/>
+            <a:ext cx="11100000" cy="20000"/>
+          </a:xfrm>
+          <a:prstGeom prst="rect">
+            <a:avLst/>
+          </a:prstGeom>
+          <a:solidFill>
+            <a:srgbClr val="C9D4EE"/>
+          </a:solidFill>
+          <a:ln>
+            <a:noFill/>
+          </a:ln>
+          <a:effectLst/>
+        </p:spPr>
+        <p:style>
+          <a:lnRef idx="1">
+            <a:schemeClr val="accent1"/>
+          </a:lnRef>
+          <a:fillRef idx="3">
+            <a:schemeClr val="accent1"/>
+          </a:fillRef>
+          <a:effectRef idx="2">
+            <a:schemeClr val="accent1"/>
+          </a:effectRef>
+          <a:fontRef idx="minor">
+            <a:schemeClr val="lt1"/>
+          </a:fontRef>
+        </p:style>
+        <p:txBody>
+          <a:bodyPr rtlCol="0" anchor="ctr"/>
+          <a:lstStyle/>
+          <a:p>
+            <a:pPr algn="ctr"/>
+          </a:p>
+        </p:txBody>
+      </p:sp>
+      <p:sp>
+        <p:nvSpPr>
+          <p:cNvPr id="12" name="TextBox 11"/>
+          <p:cNvSpPr txBox="1"/>
+          <p:nvPr/>
+        </p:nvSpPr>
+        <p:spPr>
+          <a:xfrm>
+            <a:off x="500000" y="6540000"/>
+            <a:ext cx="7000000" cy="300000"/>
+          </a:xfrm>
+          <a:prstGeom prst="rect">
+            <a:avLst/>
+          </a:prstGeom>
+          <a:noFill/>
+        </p:spPr>
+        <p:txBody>
+          <a:bodyPr wrap="square" anchor="t">
+            <a:spAutoFit/>
+          </a:bodyPr>
+          <a:lstStyle/>
+          <a:p>
+            <a:pPr algn="l">
+              <a:lnSpc>
+                <a:spcPct val="110000"/>
+              </a:lnSpc>
+              <a:spcAft>
+                <a:spcPts val="600"/>
+              </a:spcAft>
+            </a:pPr>
+            <a:r>
+              <a:rPr sz="1000" b="0">
+                <a:solidFill>
+                  <a:srgbClr val="8A97B5"/>
+                </a:solidFill>
+                <a:latin typeface="微软雅黑"/>
+              </a:rPr>
+              <a:t>两江智造集团 · Python程序设计（项目实战）</a:t>
+            </a:r>
+          </a:p>
+        </p:txBody>
+      </p:sp>
+      <p:sp>
+        <p:nvSpPr>
+          <p:cNvPr id="13" name="TextBox 12"/>
+          <p:cNvSpPr txBox="1"/>
+          <p:nvPr/>
+        </p:nvSpPr>
+        <p:spPr>
+          <a:xfrm>
+            <a:off x="10600000" y="6540000"/>
+            <a:ext cx="1000000" cy="300000"/>
+          </a:xfrm>
+          <a:prstGeom prst="rect">
+            <a:avLst/>
+          </a:prstGeom>
+          <a:noFill/>
+        </p:spPr>
+        <p:txBody>
+          <a:bodyPr wrap="square" anchor="t">
+            <a:spAutoFit/>
+          </a:bodyPr>
+          <a:lstStyle/>
+          <a:p>
+            <a:pPr algn="r">
+              <a:lnSpc>
+                <a:spcPct val="110000"/>
+              </a:lnSpc>
+              <a:spcAft>
+                <a:spcPts val="600"/>
+              </a:spcAft>
+            </a:pPr>
+            <a:r>
+              <a:rPr sz="1000" b="0">
+                <a:solidFill>
+                  <a:srgbClr val="8A97B5"/>
+                </a:solidFill>
+                <a:latin typeface="微软雅黑"/>
+              </a:rPr>
+              <a:t>13 / 18</a:t>
             </a:r>
           </a:p>
         </p:txBody>
@@ -5276,22 +7292,20 @@
       <p:grpSpPr/>
       <p:sp>
         <p:nvSpPr>
-          <p:cNvPr id="2" name="Rounded Rectangle 1"/>
+          <p:cNvPr id="2" name="Rectangle 1"/>
           <p:cNvSpPr/>
           <p:nvPr/>
         </p:nvSpPr>
         <p:spPr>
           <a:xfrm>
             <a:off x="0" y="0"/>
-            <a:ext cx="12191695" cy="64008"/>
-          </a:xfrm>
-          <a:prstGeom prst="roundRect">
-            <a:avLst>
-              <a:gd name="adj" fmla="val 50000"/>
-            </a:avLst>
+            <a:ext cx="12192000" cy="1150000"/>
+          </a:xfrm>
+          <a:prstGeom prst="rect">
+            <a:avLst/>
           </a:prstGeom>
           <a:solidFill>
-            <a:srgbClr val="0B5E54"/>
+            <a:srgbClr val="010328"/>
           </a:solidFill>
           <a:ln>
             <a:noFill/>
@@ -5322,60 +7336,20 @@
       </p:sp>
       <p:sp>
         <p:nvSpPr>
-          <p:cNvPr id="6" name="TextBox 5"/>
-          <p:cNvSpPr txBox="1"/>
-          <p:nvPr/>
-        </p:nvSpPr>
-        <p:spPr>
-          <a:xfrm>
-            <a:off x="475488" y="859536"/>
-            <a:ext cx="11237976" cy="502920"/>
-          </a:xfrm>
-          <a:prstGeom prst="rect">
-            <a:avLst/>
-          </a:prstGeom>
-          <a:noFill/>
-        </p:spPr>
-        <p:txBody>
-          <a:bodyPr wrap="square" anchor="t" lIns="0" rIns="0" tIns="0" bIns="0">
-            <a:spAutoFit/>
-          </a:bodyPr>
-          <a:lstStyle/>
-          <a:p>
-            <a:pPr algn="l">
-              <a:lnSpc>
-                <a:spcPct val="114000"/>
-              </a:lnSpc>
-            </a:pPr>
-            <a:r>
-              <a:rPr sz="2200" b="1">
-                <a:solidFill>
-                  <a:srgbClr val="1B2B28"/>
-                </a:solidFill>
-              </a:rPr>
-              <a:t>本课重难点地图 · 老师划重点（动手前必看）</a:t>
-            </a:r>
-          </a:p>
-        </p:txBody>
-      </p:sp>
-      <p:sp>
-        <p:nvSpPr>
-          <p:cNvPr id="8" name="Rounded Rectangle 7"/>
+          <p:cNvPr id="3" name="Rectangle 2"/>
           <p:cNvSpPr/>
           <p:nvPr/>
         </p:nvSpPr>
         <p:spPr>
           <a:xfrm>
-            <a:off x="475488" y="6419088"/>
-            <a:ext cx="11237976" cy="10972"/>
-          </a:xfrm>
-          <a:prstGeom prst="roundRect">
-            <a:avLst>
-              <a:gd name="adj" fmla="val 50000"/>
-            </a:avLst>
+            <a:off x="0" y="1150000"/>
+            <a:ext cx="2600000" cy="70000"/>
+          </a:xfrm>
+          <a:prstGeom prst="rect">
+            <a:avLst/>
           </a:prstGeom>
           <a:solidFill>
-            <a:srgbClr val="E4F1EE"/>
+            <a:srgbClr val="F5670F"/>
           </a:solidFill>
           <a:ln>
             <a:noFill/>
@@ -5406,14 +7380,14 @@
       </p:sp>
       <p:sp>
         <p:nvSpPr>
-          <p:cNvPr id="9" name="TextBox 8"/>
+          <p:cNvPr id="4" name="TextBox 3"/>
           <p:cNvSpPr txBox="1"/>
           <p:nvPr/>
         </p:nvSpPr>
         <p:spPr>
           <a:xfrm>
-            <a:off x="475488" y="6455664"/>
-            <a:ext cx="7315200" cy="292608"/>
+            <a:off x="700000" y="300000"/>
+            <a:ext cx="10792000" cy="700000"/>
           </a:xfrm>
           <a:prstGeom prst="rect">
             <a:avLst/>
@@ -5421,118 +7395,38 @@
           <a:noFill/>
         </p:spPr>
         <p:txBody>
-          <a:bodyPr wrap="square" anchor="t" lIns="0" rIns="0" tIns="0" bIns="0">
+          <a:bodyPr wrap="square" anchor="t">
             <a:spAutoFit/>
           </a:bodyPr>
           <a:lstStyle/>
           <a:p>
-            <a:pPr algn="l">
-              <a:lnSpc>
-                <a:spcPct val="114000"/>
-              </a:lnSpc>
-            </a:pPr>
-            <a:r>
-              <a:rPr sz="900" b="0">
-                <a:solidFill>
-                  <a:srgbClr val="5C6E6A"/>
-                </a:solidFill>
-              </a:rPr>
-              <a:t>两江智造集团 · Python程序设计（项目实战）</a:t>
-            </a:r>
-          </a:p>
-        </p:txBody>
-      </p:sp>
-      <p:sp>
-        <p:nvSpPr>
-          <p:cNvPr id="10" name="TextBox 9"/>
-          <p:cNvSpPr txBox="1"/>
-          <p:nvPr/>
-        </p:nvSpPr>
-        <p:spPr>
-          <a:xfrm>
-            <a:off x="10597896" y="6537960"/>
-            <a:ext cx="996696" cy="301752"/>
-          </a:xfrm>
-          <a:prstGeom prst="rect">
-            <a:avLst/>
-          </a:prstGeom>
-          <a:noFill/>
-        </p:spPr>
-        <p:txBody>
-          <a:bodyPr wrap="square" anchor="t" lIns="0" rIns="0" tIns="0" bIns="0">
-            <a:spAutoFit/>
-          </a:bodyPr>
-          <a:lstStyle/>
-          <a:p>
-            <a:pPr algn="r">
-              <a:lnSpc>
-                <a:spcPct val="114000"/>
-              </a:lnSpc>
-            </a:pPr>
-            <a:r>
-              <a:rPr sz="1000" b="0">
-                <a:solidFill>
-                  <a:srgbClr val="8A97B5"/>
-                </a:solidFill>
-              </a:rPr>
-              <a:t>8 / 16</a:t>
-            </a:r>
-          </a:p>
-        </p:txBody>
-      </p:sp>
-      <p:sp>
-        <p:nvSpPr>
-          <p:cNvPr id="11" name="TextBox 10"/>
-          <p:cNvSpPr txBox="1"/>
-          <p:nvPr/>
-        </p:nvSpPr>
-        <p:spPr>
-          <a:xfrm>
-            <a:off x="457200" y="1389888"/>
-            <a:ext cx="11274552" cy="274320"/>
-          </a:xfrm>
-          <a:prstGeom prst="rect">
-            <a:avLst/>
-          </a:prstGeom>
-          <a:noFill/>
-        </p:spPr>
-        <p:txBody>
-          <a:bodyPr wrap="square">
-            <a:spAutoFit/>
-          </a:bodyPr>
-          <a:lstStyle/>
-          <a:p>
-            <a:r>
-              <a:rPr sz="1050" b="0">
-                <a:solidFill>
-                  <a:srgbClr val="6B7280"/>
-                </a:solidFill>
-              </a:rPr>
-              <a:t>动手前先看这页：重点要会什么、难点会卡在哪、哪里最容易错、学没学会怎么自测。</a:t>
-            </a:r>
-          </a:p>
-        </p:txBody>
-      </p:sp>
-      <p:sp>
-        <p:nvSpPr>
-          <p:cNvPr id="12" name="Rectangle 11"/>
+            <a:r>
+              <a:rPr sz="2000"/>
+              <a:t>P1.2 工程模板生成完成态 · 完成后长这样（真实运行·参考实现）</a:t>
+            </a:r>
+          </a:p>
+        </p:txBody>
+      </p:sp>
+      <p:sp>
+        <p:nvSpPr>
+          <p:cNvPr id="5" name="Rectangle 4"/>
           <p:cNvSpPr/>
           <p:nvPr/>
         </p:nvSpPr>
         <p:spPr>
           <a:xfrm>
-            <a:off x="457200" y="1783080"/>
-            <a:ext cx="5532120" cy="3127248"/>
+            <a:off x="700000" y="1900000"/>
+            <a:ext cx="4600000" cy="1600000"/>
           </a:xfrm>
           <a:prstGeom prst="rect">
             <a:avLst/>
           </a:prstGeom>
           <a:solidFill>
-            <a:srgbClr val="FFFFFF"/>
+            <a:srgbClr val="F3F6FD"/>
           </a:solidFill>
           <a:ln>
             <a:solidFill>
-              <a:srgbClr val="D6DCE4"/>
+              <a:srgbClr val="C9D4EE"/>
             </a:solidFill>
           </a:ln>
           <a:effectLst/>
@@ -5552,10 +7446,295 @@
           </a:fontRef>
         </p:style>
         <p:txBody>
-          <a:bodyPr rtlCol="0" anchor="ctr" wrap="square"/>
+          <a:bodyPr rtlCol="0" anchor="ctr"/>
           <a:lstStyle/>
           <a:p>
             <a:pPr algn="ctr"/>
+          </a:p>
+        </p:txBody>
+      </p:sp>
+      <p:sp>
+        <p:nvSpPr>
+          <p:cNvPr id="6" name="TextBox 5"/>
+          <p:cNvSpPr txBox="1"/>
+          <p:nvPr/>
+        </p:nvSpPr>
+        <p:spPr>
+          <a:xfrm>
+            <a:off x="700000" y="2520000"/>
+            <a:ext cx="4600000" cy="500000"/>
+          </a:xfrm>
+          <a:prstGeom prst="rect">
+            <a:avLst/>
+          </a:prstGeom>
+          <a:noFill/>
+        </p:spPr>
+        <p:txBody>
+          <a:bodyPr wrap="square" anchor="t">
+            <a:spAutoFit/>
+          </a:bodyPr>
+          <a:lstStyle/>
+          <a:p/>
+        </p:txBody>
+      </p:sp>
+      <p:sp>
+        <p:nvSpPr>
+          <p:cNvPr id="7" name="Rectangle 6"/>
+          <p:cNvSpPr/>
+          <p:nvPr/>
+        </p:nvSpPr>
+        <p:spPr>
+          <a:xfrm>
+            <a:off x="700000" y="3700000"/>
+            <a:ext cx="4600000" cy="1600000"/>
+          </a:xfrm>
+          <a:prstGeom prst="rect">
+            <a:avLst/>
+          </a:prstGeom>
+          <a:solidFill>
+            <a:srgbClr val="F3F6FD"/>
+          </a:solidFill>
+          <a:ln>
+            <a:solidFill>
+              <a:srgbClr val="C9D4EE"/>
+            </a:solidFill>
+          </a:ln>
+          <a:effectLst/>
+        </p:spPr>
+        <p:style>
+          <a:lnRef idx="1">
+            <a:schemeClr val="accent1"/>
+          </a:lnRef>
+          <a:fillRef idx="3">
+            <a:schemeClr val="accent1"/>
+          </a:fillRef>
+          <a:effectRef idx="2">
+            <a:schemeClr val="accent1"/>
+          </a:effectRef>
+          <a:fontRef idx="minor">
+            <a:schemeClr val="lt1"/>
+          </a:fontRef>
+        </p:style>
+        <p:txBody>
+          <a:bodyPr rtlCol="0" anchor="ctr"/>
+          <a:lstStyle/>
+          <a:p>
+            <a:pPr algn="ctr"/>
+          </a:p>
+        </p:txBody>
+      </p:sp>
+      <p:sp>
+        <p:nvSpPr>
+          <p:cNvPr id="8" name="TextBox 7"/>
+          <p:cNvSpPr txBox="1"/>
+          <p:nvPr/>
+        </p:nvSpPr>
+        <p:spPr>
+          <a:xfrm>
+            <a:off x="700000" y="4320000"/>
+            <a:ext cx="4600000" cy="500000"/>
+          </a:xfrm>
+          <a:prstGeom prst="rect">
+            <a:avLst/>
+          </a:prstGeom>
+          <a:noFill/>
+        </p:spPr>
+        <p:txBody>
+          <a:bodyPr wrap="square" anchor="ctr">
+            <a:spAutoFit/>
+          </a:bodyPr>
+          <a:lstStyle/>
+          <a:p>
+            <a:pPr algn="ctr">
+              <a:lnSpc>
+                <a:spcPct val="110000"/>
+              </a:lnSpc>
+              <a:spcAft>
+                <a:spcPts val="600"/>
+              </a:spcAft>
+            </a:pPr>
+            <a:r>
+              <a:rPr sz="1100" b="0">
+                <a:solidFill>
+                  <a:srgbClr val="1B2B28"/>
+                </a:solidFill>
+              </a:rPr>
+              <a:t>3. pylint 评分 ≥ 8.5</a:t>
+            </a:r>
+          </a:p>
+        </p:txBody>
+      </p:sp>
+      <p:sp>
+        <p:nvSpPr>
+          <p:cNvPr id="9" name="Rectangle 8"/>
+          <p:cNvSpPr/>
+          <p:nvPr/>
+        </p:nvSpPr>
+        <p:spPr>
+          <a:xfrm>
+            <a:off x="5560000" y="1900000"/>
+            <a:ext cx="4600000" cy="1600000"/>
+          </a:xfrm>
+          <a:prstGeom prst="rect">
+            <a:avLst/>
+          </a:prstGeom>
+          <a:solidFill>
+            <a:srgbClr val="F3F6FD"/>
+          </a:solidFill>
+          <a:ln>
+            <a:solidFill>
+              <a:srgbClr val="C9D4EE"/>
+            </a:solidFill>
+          </a:ln>
+          <a:effectLst/>
+        </p:spPr>
+        <p:style>
+          <a:lnRef idx="1">
+            <a:schemeClr val="accent1"/>
+          </a:lnRef>
+          <a:fillRef idx="3">
+            <a:schemeClr val="accent1"/>
+          </a:fillRef>
+          <a:effectRef idx="2">
+            <a:schemeClr val="accent1"/>
+          </a:effectRef>
+          <a:fontRef idx="minor">
+            <a:schemeClr val="lt1"/>
+          </a:fontRef>
+        </p:style>
+        <p:txBody>
+          <a:bodyPr rtlCol="0" anchor="ctr"/>
+          <a:lstStyle/>
+          <a:p>
+            <a:pPr algn="ctr"/>
+          </a:p>
+        </p:txBody>
+      </p:sp>
+      <p:sp>
+        <p:nvSpPr>
+          <p:cNvPr id="10" name="TextBox 9"/>
+          <p:cNvSpPr txBox="1"/>
+          <p:nvPr/>
+        </p:nvSpPr>
+        <p:spPr>
+          <a:xfrm>
+            <a:off x="5560000" y="2520000"/>
+            <a:ext cx="4600000" cy="500000"/>
+          </a:xfrm>
+          <a:prstGeom prst="rect">
+            <a:avLst/>
+          </a:prstGeom>
+          <a:noFill/>
+        </p:spPr>
+        <p:txBody>
+          <a:bodyPr wrap="square" anchor="ctr">
+            <a:spAutoFit/>
+          </a:bodyPr>
+          <a:lstStyle/>
+          <a:p>
+            <a:pPr algn="ctr">
+              <a:lnSpc>
+                <a:spcPct val="110000"/>
+              </a:lnSpc>
+              <a:spcAft>
+                <a:spcPts val="600"/>
+              </a:spcAft>
+            </a:pPr>
+            <a:r>
+              <a:rPr sz="1100" b="0">
+                <a:solidFill>
+                  <a:srgbClr val="1B2B28"/>
+                </a:solidFill>
+              </a:rPr>
+              <a:t>2. git 五步命令逐条执行</a:t>
+            </a:r>
+          </a:p>
+        </p:txBody>
+      </p:sp>
+      <p:sp>
+        <p:nvSpPr>
+          <p:cNvPr id="11" name="Rectangle 10"/>
+          <p:cNvSpPr/>
+          <p:nvPr/>
+        </p:nvSpPr>
+        <p:spPr>
+          <a:xfrm>
+            <a:off x="5560000" y="3700000"/>
+            <a:ext cx="4600000" cy="1600000"/>
+          </a:xfrm>
+          <a:prstGeom prst="rect">
+            <a:avLst/>
+          </a:prstGeom>
+          <a:solidFill>
+            <a:srgbClr val="F3F6FD"/>
+          </a:solidFill>
+          <a:ln>
+            <a:solidFill>
+              <a:srgbClr val="C9D4EE"/>
+            </a:solidFill>
+          </a:ln>
+          <a:effectLst/>
+        </p:spPr>
+        <p:style>
+          <a:lnRef idx="1">
+            <a:schemeClr val="accent1"/>
+          </a:lnRef>
+          <a:fillRef idx="3">
+            <a:schemeClr val="accent1"/>
+          </a:fillRef>
+          <a:effectRef idx="2">
+            <a:schemeClr val="accent1"/>
+          </a:effectRef>
+          <a:fontRef idx="minor">
+            <a:schemeClr val="lt1"/>
+          </a:fontRef>
+        </p:style>
+        <p:txBody>
+          <a:bodyPr rtlCol="0" anchor="ctr"/>
+          <a:lstStyle/>
+          <a:p>
+            <a:pPr algn="ctr"/>
+          </a:p>
+        </p:txBody>
+      </p:sp>
+      <p:sp>
+        <p:nvSpPr>
+          <p:cNvPr id="12" name="TextBox 11"/>
+          <p:cNvSpPr txBox="1"/>
+          <p:nvPr/>
+        </p:nvSpPr>
+        <p:spPr>
+          <a:xfrm>
+            <a:off x="5560000" y="4320000"/>
+            <a:ext cx="4600000" cy="500000"/>
+          </a:xfrm>
+          <a:prstGeom prst="rect">
+            <a:avLst/>
+          </a:prstGeom>
+          <a:noFill/>
+        </p:spPr>
+        <p:txBody>
+          <a:bodyPr wrap="square" anchor="ctr">
+            <a:spAutoFit/>
+          </a:bodyPr>
+          <a:lstStyle/>
+          <a:p>
+            <a:pPr algn="ctr">
+              <a:lnSpc>
+                <a:spcPct val="110000"/>
+              </a:lnSpc>
+              <a:spcAft>
+                <a:spcPts val="600"/>
+              </a:spcAft>
+            </a:pPr>
+            <a:r>
+              <a:rPr sz="1100" b="0">
+                <a:solidFill>
+                  <a:srgbClr val="1B2B28"/>
+                </a:solidFill>
+              </a:rPr>
+              <a:t>4. pytest 测试通过</a:t>
+            </a:r>
           </a:p>
         </p:txBody>
       </p:sp>
@@ -5567,14 +7746,14 @@
         </p:nvSpPr>
         <p:spPr>
           <a:xfrm>
-            <a:off x="457200" y="1783080"/>
-            <a:ext cx="5532120" cy="365760"/>
+            <a:off x="500000" y="6500000"/>
+            <a:ext cx="11100000" cy="20000"/>
           </a:xfrm>
           <a:prstGeom prst="rect">
             <a:avLst/>
           </a:prstGeom>
           <a:solidFill>
-            <a:srgbClr val="2F5D8C"/>
+            <a:srgbClr val="C9D4EE"/>
           </a:solidFill>
           <a:ln>
             <a:noFill/>
@@ -5596,7 +7775,7 @@
           </a:fontRef>
         </p:style>
         <p:txBody>
-          <a:bodyPr rtlCol="0" anchor="ctr" wrap="square"/>
+          <a:bodyPr rtlCol="0" anchor="ctr"/>
           <a:lstStyle/>
           <a:p>
             <a:pPr algn="ctr"/>
@@ -5611,8 +7790,8 @@
         </p:nvSpPr>
         <p:spPr>
           <a:xfrm>
-            <a:off x="566928" y="1819656"/>
-            <a:ext cx="5312664" cy="292608"/>
+            <a:off x="500000" y="6540000"/>
+            <a:ext cx="7000000" cy="300000"/>
           </a:xfrm>
           <a:prstGeom prst="rect">
             <a:avLst/>
@@ -5620,18 +7799,27 @@
           <a:noFill/>
         </p:spPr>
         <p:txBody>
-          <a:bodyPr wrap="square">
+          <a:bodyPr wrap="square" anchor="t">
             <a:spAutoFit/>
           </a:bodyPr>
           <a:lstStyle/>
           <a:p>
-            <a:r>
-              <a:rPr sz="1150" b="1">
-                <a:solidFill>
-                  <a:srgbClr val="FFFFFF"/>
-                </a:solidFill>
-              </a:rPr>
-              <a:t>重点 · 必会必考（本课知识点全景）</a:t>
+            <a:pPr algn="l">
+              <a:lnSpc>
+                <a:spcPct val="110000"/>
+              </a:lnSpc>
+              <a:spcAft>
+                <a:spcPts val="600"/>
+              </a:spcAft>
+            </a:pPr>
+            <a:r>
+              <a:rPr sz="1000" b="0">
+                <a:solidFill>
+                  <a:srgbClr val="8A97B5"/>
+                </a:solidFill>
+                <a:latin typeface="微软雅黑"/>
+              </a:rPr>
+              <a:t>两江智造集团 · Python程序设计（项目实战）</a:t>
             </a:r>
           </a:p>
         </p:txBody>
@@ -5644,8 +7832,8 @@
         </p:nvSpPr>
         <p:spPr>
           <a:xfrm>
-            <a:off x="621792" y="2267712"/>
-            <a:ext cx="5257800" cy="2560320"/>
+            <a:off x="10600000" y="6540000"/>
+            <a:ext cx="1000000" cy="300000"/>
           </a:xfrm>
           <a:prstGeom prst="rect">
             <a:avLst/>
@@ -5653,643 +7841,55 @@
           <a:noFill/>
         </p:spPr>
         <p:txBody>
-          <a:bodyPr wrap="square">
+          <a:bodyPr wrap="square" anchor="t">
             <a:spAutoFit/>
           </a:bodyPr>
           <a:lstStyle/>
           <a:p>
-            <a:r>
-              <a:rPr sz="950" b="0">
-                <a:solidFill>
-                  <a:srgbClr val="2B2F36"/>
-                </a:solidFill>
-              </a:rPr>
-              <a:t>◆ B01 C→Python四映射｜四映射=C户口迁Python：声明→动态/大括号→缩进/指针→引用…</a:t>
-            </a:r>
-          </a:p>
-          <a:p>
-            <a:r>
-              <a:rPr sz="950" b="0">
-                <a:solidFill>
-                  <a:srgbClr val="2B2F36"/>
-                </a:solidFill>
-              </a:rPr>
-              <a:t>◆ B02 引用语义｜b=a不复制货只抄门牌号——两人开同一扇门，动b就是动a</a:t>
-            </a:r>
-          </a:p>
-          <a:p>
-            <a:r>
-              <a:rPr sz="950" b="0">
-                <a:solidFill>
-                  <a:srgbClr val="2B2F36"/>
-                </a:solidFill>
-              </a:rPr>
-              <a:t>◆ B03 列表扩容与字典｜列表append=货架自动加长；字典O(1)=储物柜直取不开抽屉翻</a:t>
-            </a:r>
-          </a:p>
-          <a:p>
-            <a:r>
-              <a:rPr sz="950" b="0">
-                <a:solidFill>
-                  <a:srgbClr val="2B2F36"/>
-                </a:solidFill>
-              </a:rPr>
-              <a:t>◆ B04 try/except替代错误码｜C层层if判错误码=快递每站验货；Python异常=坏件直接退回总站</a:t>
-            </a:r>
-          </a:p>
-          <a:p>
-            <a:r>
-              <a:rPr sz="950" b="0">
-                <a:solidFill>
-                  <a:srgbClr val="2B2F36"/>
-                </a:solidFill>
-              </a:rPr>
-              <a:t>◆ B05 类=struct+函数｜C的struct=数据仓库；Python类=仓库+员工——数据行为…</a:t>
-            </a:r>
-          </a:p>
-          <a:p>
-            <a:r>
-              <a:rPr sz="950" b="0">
-                <a:solidFill>
-                  <a:srgbClr val="2B2F36"/>
-                </a:solidFill>
-              </a:rPr>
-              <a:t>◆ B06 缩进规范｜缩进即语法块=用磅秤分装不许手掂——4空格统一禁Tab</a:t>
-            </a:r>
-          </a:p>
-        </p:txBody>
-      </p:sp>
-      <p:sp>
-        <p:nvSpPr>
-          <p:cNvPr id="16" name="Rectangle 15"/>
-          <p:cNvSpPr/>
-          <p:nvPr/>
-        </p:nvSpPr>
-        <p:spPr>
-          <a:xfrm>
-            <a:off x="6144768" y="1783080"/>
-            <a:ext cx="5586984" cy="1481328"/>
-          </a:xfrm>
-          <a:prstGeom prst="rect">
-            <a:avLst/>
-          </a:prstGeom>
-          <a:solidFill>
-            <a:srgbClr val="FFFFFF"/>
-          </a:solidFill>
-          <a:ln>
-            <a:solidFill>
-              <a:srgbClr val="D6DCE4"/>
-            </a:solidFill>
-          </a:ln>
-          <a:effectLst/>
-        </p:spPr>
-        <p:style>
-          <a:lnRef idx="1">
-            <a:schemeClr val="accent1"/>
-          </a:lnRef>
-          <a:fillRef idx="3">
-            <a:schemeClr val="accent1"/>
-          </a:fillRef>
-          <a:effectRef idx="2">
-            <a:schemeClr val="accent1"/>
-          </a:effectRef>
-          <a:fontRef idx="minor">
-            <a:schemeClr val="lt1"/>
-          </a:fontRef>
-        </p:style>
-        <p:txBody>
-          <a:bodyPr rtlCol="0" anchor="ctr" wrap="square"/>
-          <a:lstStyle/>
-          <a:p>
-            <a:pPr algn="ctr"/>
-          </a:p>
-        </p:txBody>
-      </p:sp>
-      <p:sp>
-        <p:nvSpPr>
-          <p:cNvPr id="17" name="Rectangle 16"/>
-          <p:cNvSpPr/>
-          <p:nvPr/>
-        </p:nvSpPr>
-        <p:spPr>
-          <a:xfrm>
-            <a:off x="6144768" y="1783080"/>
-            <a:ext cx="5586984" cy="365760"/>
-          </a:xfrm>
-          <a:prstGeom prst="rect">
-            <a:avLst/>
-          </a:prstGeom>
-          <a:solidFill>
-            <a:srgbClr val="8A4B2D"/>
-          </a:solidFill>
-          <a:ln>
-            <a:noFill/>
-          </a:ln>
-          <a:effectLst/>
-        </p:spPr>
-        <p:style>
-          <a:lnRef idx="1">
-            <a:schemeClr val="accent1"/>
-          </a:lnRef>
-          <a:fillRef idx="3">
-            <a:schemeClr val="accent1"/>
-          </a:fillRef>
-          <a:effectRef idx="2">
-            <a:schemeClr val="accent1"/>
-          </a:effectRef>
-          <a:fontRef idx="minor">
-            <a:schemeClr val="lt1"/>
-          </a:fontRef>
-        </p:style>
-        <p:txBody>
-          <a:bodyPr rtlCol="0" anchor="ctr" wrap="square"/>
-          <a:lstStyle/>
-          <a:p>
-            <a:pPr algn="ctr"/>
-          </a:p>
-        </p:txBody>
-      </p:sp>
-      <p:sp>
-        <p:nvSpPr>
-          <p:cNvPr id="18" name="TextBox 17"/>
-          <p:cNvSpPr txBox="1"/>
-          <p:nvPr/>
-        </p:nvSpPr>
-        <p:spPr>
-          <a:xfrm>
-            <a:off x="6254496" y="1819656"/>
-            <a:ext cx="5367528" cy="292608"/>
-          </a:xfrm>
-          <a:prstGeom prst="rect">
-            <a:avLst/>
-          </a:prstGeom>
-          <a:noFill/>
-        </p:spPr>
-        <p:txBody>
-          <a:bodyPr wrap="square">
-            <a:spAutoFit/>
-          </a:bodyPr>
-          <a:lstStyle/>
-          <a:p>
-            <a:r>
-              <a:rPr sz="1150" b="1">
-                <a:solidFill>
-                  <a:srgbClr val="FFFFFF"/>
-                </a:solidFill>
-              </a:rPr>
-              <a:t>难点 · 易卡壳（下一页逐个击破）</a:t>
-            </a:r>
-          </a:p>
-        </p:txBody>
-      </p:sp>
-      <p:sp>
-        <p:nvSpPr>
-          <p:cNvPr id="19" name="TextBox 18"/>
-          <p:cNvSpPr txBox="1"/>
-          <p:nvPr/>
-        </p:nvSpPr>
-        <p:spPr>
-          <a:xfrm>
-            <a:off x="6309360" y="2231136"/>
-            <a:ext cx="5303520" cy="960120"/>
-          </a:xfrm>
-          <a:prstGeom prst="rect">
-            <a:avLst/>
-          </a:prstGeom>
-          <a:noFill/>
-        </p:spPr>
-        <p:txBody>
-          <a:bodyPr wrap="square">
-            <a:spAutoFit/>
-          </a:bodyPr>
-          <a:lstStyle/>
-          <a:p>
-            <a:r>
-              <a:rPr sz="900" b="0">
-                <a:solidFill>
-                  <a:srgbClr val="2B2F36"/>
-                </a:solidFill>
-              </a:rPr>
-              <a:t>▲ 误区：Python变量无需声明≠无需理解类型——类型还在，只是贴在值上</a:t>
-            </a:r>
-          </a:p>
-          <a:p>
-            <a:r>
-              <a:rPr sz="900" b="0">
-                <a:solidFill>
-                  <a:srgbClr val="2B2F36"/>
-                </a:solidFill>
-              </a:rPr>
-              <a:t>▲ 误区：以为=是复制——嵌套列表必须deepcopy，浅拷贝只拷外壳</a:t>
-            </a:r>
-          </a:p>
-          <a:p>
-            <a:r>
-              <a:rPr sz="900" b="0">
-                <a:solidFill>
-                  <a:srgbClr val="2B2F36"/>
-                </a:solidFill>
-              </a:rPr>
-              <a:t>▲ 误区：C的malloc预分配习惯搬来——Python列表自增长已优化</a:t>
-            </a:r>
-          </a:p>
-        </p:txBody>
-      </p:sp>
-      <p:sp>
-        <p:nvSpPr>
-          <p:cNvPr id="20" name="Rectangle 19"/>
-          <p:cNvSpPr/>
-          <p:nvPr/>
-        </p:nvSpPr>
-        <p:spPr>
-          <a:xfrm>
-            <a:off x="6144768" y="3401568"/>
-            <a:ext cx="5586984" cy="1508760"/>
-          </a:xfrm>
-          <a:prstGeom prst="rect">
-            <a:avLst/>
-          </a:prstGeom>
-          <a:solidFill>
-            <a:srgbClr val="FFFFFF"/>
-          </a:solidFill>
-          <a:ln>
-            <a:solidFill>
-              <a:srgbClr val="D6DCE4"/>
-            </a:solidFill>
-          </a:ln>
-          <a:effectLst/>
-        </p:spPr>
-        <p:style>
-          <a:lnRef idx="1">
-            <a:schemeClr val="accent1"/>
-          </a:lnRef>
-          <a:fillRef idx="3">
-            <a:schemeClr val="accent1"/>
-          </a:fillRef>
-          <a:effectRef idx="2">
-            <a:schemeClr val="accent1"/>
-          </a:effectRef>
-          <a:fontRef idx="minor">
-            <a:schemeClr val="lt1"/>
-          </a:fontRef>
-        </p:style>
-        <p:txBody>
-          <a:bodyPr rtlCol="0" anchor="ctr" wrap="square"/>
-          <a:lstStyle/>
-          <a:p>
-            <a:pPr algn="ctr"/>
-          </a:p>
-        </p:txBody>
-      </p:sp>
-      <p:sp>
-        <p:nvSpPr>
-          <p:cNvPr id="21" name="Rectangle 20"/>
-          <p:cNvSpPr/>
-          <p:nvPr/>
-        </p:nvSpPr>
-        <p:spPr>
-          <a:xfrm>
-            <a:off x="6144768" y="3401568"/>
-            <a:ext cx="5586984" cy="365760"/>
-          </a:xfrm>
-          <a:prstGeom prst="rect">
-            <a:avLst/>
-          </a:prstGeom>
-          <a:solidFill>
-            <a:srgbClr val="9A3B3B"/>
-          </a:solidFill>
-          <a:ln>
-            <a:noFill/>
-          </a:ln>
-          <a:effectLst/>
-        </p:spPr>
-        <p:style>
-          <a:lnRef idx="1">
-            <a:schemeClr val="accent1"/>
-          </a:lnRef>
-          <a:fillRef idx="3">
-            <a:schemeClr val="accent1"/>
-          </a:fillRef>
-          <a:effectRef idx="2">
-            <a:schemeClr val="accent1"/>
-          </a:effectRef>
-          <a:fontRef idx="minor">
-            <a:schemeClr val="lt1"/>
-          </a:fontRef>
-        </p:style>
-        <p:txBody>
-          <a:bodyPr rtlCol="0" anchor="ctr" wrap="square"/>
-          <a:lstStyle/>
-          <a:p>
-            <a:pPr algn="ctr"/>
-          </a:p>
-        </p:txBody>
-      </p:sp>
-      <p:sp>
-        <p:nvSpPr>
-          <p:cNvPr id="22" name="TextBox 21"/>
-          <p:cNvSpPr txBox="1"/>
-          <p:nvPr/>
-        </p:nvSpPr>
-        <p:spPr>
-          <a:xfrm>
-            <a:off x="6254496" y="3438144"/>
-            <a:ext cx="5367528" cy="292608"/>
-          </a:xfrm>
-          <a:prstGeom prst="rect">
-            <a:avLst/>
-          </a:prstGeom>
-          <a:noFill/>
-        </p:spPr>
-        <p:txBody>
-          <a:bodyPr wrap="square">
-            <a:spAutoFit/>
-          </a:bodyPr>
-          <a:lstStyle/>
-          <a:p>
-            <a:r>
-              <a:rPr sz="1150" b="1">
-                <a:solidFill>
-                  <a:srgbClr val="FFFFFF"/>
-                </a:solidFill>
-              </a:rPr>
-              <a:t>高频易错 · 动手前先记住</a:t>
-            </a:r>
-          </a:p>
-        </p:txBody>
-      </p:sp>
-      <p:sp>
-        <p:nvSpPr>
-          <p:cNvPr id="23" name="TextBox 22"/>
-          <p:cNvSpPr txBox="1"/>
-          <p:nvPr/>
-        </p:nvSpPr>
-        <p:spPr>
-          <a:xfrm>
-            <a:off x="6309360" y="3849624"/>
-            <a:ext cx="5303520" cy="960120"/>
-          </a:xfrm>
-          <a:prstGeom prst="rect">
-            <a:avLst/>
-          </a:prstGeom>
-          <a:noFill/>
-        </p:spPr>
-        <p:txBody>
-          <a:bodyPr wrap="square">
-            <a:spAutoFit/>
-          </a:bodyPr>
-          <a:lstStyle/>
-          <a:p>
-            <a:r>
-              <a:rPr sz="900" b="0">
-                <a:solidFill>
-                  <a:srgbClr val="2B2F36"/>
-                </a:solidFill>
-              </a:rPr>
-              <a:t>✗ b改a也变 → list(a)或a.copy()</a:t>
-            </a:r>
-          </a:p>
-          <a:p>
-            <a:r>
-              <a:rPr sz="900" b="0">
-                <a:solidFill>
-                  <a:srgbClr val="2B2F36"/>
-                </a:solidFill>
-              </a:rPr>
-              <a:t>✗ 混用Tab → 统一4空格</a:t>
-            </a:r>
-          </a:p>
-          <a:p>
-            <a:r>
-              <a:rPr sz="900" b="0">
-                <a:solidFill>
-                  <a:srgbClr val="2B2F36"/>
-                </a:solidFill>
-              </a:rPr>
-              <a:t>✗ =当== → 比较用==</a:t>
-            </a:r>
-          </a:p>
-        </p:txBody>
-      </p:sp>
-      <p:sp>
-        <p:nvSpPr>
-          <p:cNvPr id="24" name="Rectangle 23"/>
-          <p:cNvSpPr/>
-          <p:nvPr/>
-        </p:nvSpPr>
-        <p:spPr>
-          <a:xfrm>
-            <a:off x="457200" y="5047488"/>
-            <a:ext cx="11274552" cy="1207008"/>
-          </a:xfrm>
-          <a:prstGeom prst="rect">
-            <a:avLst/>
-          </a:prstGeom>
-          <a:solidFill>
-            <a:srgbClr val="FFFFFF"/>
-          </a:solidFill>
-          <a:ln>
-            <a:solidFill>
-              <a:srgbClr val="D6DCE4"/>
-            </a:solidFill>
-          </a:ln>
-          <a:effectLst/>
-        </p:spPr>
-        <p:style>
-          <a:lnRef idx="1">
-            <a:schemeClr val="accent1"/>
-          </a:lnRef>
-          <a:fillRef idx="3">
-            <a:schemeClr val="accent1"/>
-          </a:fillRef>
-          <a:effectRef idx="2">
-            <a:schemeClr val="accent1"/>
-          </a:effectRef>
-          <a:fontRef idx="minor">
-            <a:schemeClr val="lt1"/>
-          </a:fontRef>
-        </p:style>
-        <p:txBody>
-          <a:bodyPr rtlCol="0" anchor="ctr" wrap="square"/>
-          <a:lstStyle/>
-          <a:p>
-            <a:pPr algn="ctr"/>
-          </a:p>
-        </p:txBody>
-      </p:sp>
-      <p:sp>
-        <p:nvSpPr>
-          <p:cNvPr id="25" name="Rectangle 24"/>
-          <p:cNvSpPr/>
-          <p:nvPr/>
-        </p:nvSpPr>
-        <p:spPr>
-          <a:xfrm>
-            <a:off x="457200" y="5047488"/>
-            <a:ext cx="11274552" cy="365760"/>
-          </a:xfrm>
-          <a:prstGeom prst="rect">
-            <a:avLst/>
-          </a:prstGeom>
-          <a:solidFill>
-            <a:srgbClr val="2E7D46"/>
-          </a:solidFill>
-          <a:ln>
-            <a:noFill/>
-          </a:ln>
-          <a:effectLst/>
-        </p:spPr>
-        <p:style>
-          <a:lnRef idx="1">
-            <a:schemeClr val="accent1"/>
-          </a:lnRef>
-          <a:fillRef idx="3">
-            <a:schemeClr val="accent1"/>
-          </a:fillRef>
-          <a:effectRef idx="2">
-            <a:schemeClr val="accent1"/>
-          </a:effectRef>
-          <a:fontRef idx="minor">
-            <a:schemeClr val="lt1"/>
-          </a:fontRef>
-        </p:style>
-        <p:txBody>
-          <a:bodyPr rtlCol="0" anchor="ctr" wrap="square"/>
-          <a:lstStyle/>
-          <a:p>
-            <a:pPr algn="ctr"/>
-          </a:p>
-        </p:txBody>
-      </p:sp>
-      <p:sp>
-        <p:nvSpPr>
-          <p:cNvPr id="26" name="TextBox 25"/>
-          <p:cNvSpPr txBox="1"/>
-          <p:nvPr/>
-        </p:nvSpPr>
-        <p:spPr>
-          <a:xfrm>
-            <a:off x="566928" y="5084064"/>
-            <a:ext cx="11055096" cy="292608"/>
-          </a:xfrm>
-          <a:prstGeom prst="rect">
-            <a:avLst/>
-          </a:prstGeom>
-          <a:noFill/>
-        </p:spPr>
-        <p:txBody>
-          <a:bodyPr wrap="square">
-            <a:spAutoFit/>
-          </a:bodyPr>
-          <a:lstStyle/>
-          <a:p>
-            <a:r>
-              <a:rPr sz="1150" b="1">
-                <a:solidFill>
-                  <a:srgbClr val="FFFFFF"/>
-                </a:solidFill>
-              </a:rPr>
-              <a:t>达标自问 · 学没学会，问自己这四句（当堂评分同口径）</a:t>
-            </a:r>
-          </a:p>
-        </p:txBody>
-      </p:sp>
-      <p:sp>
-        <p:nvSpPr>
-          <p:cNvPr id="27" name="TextBox 26"/>
-          <p:cNvSpPr txBox="1"/>
-          <p:nvPr/>
-        </p:nvSpPr>
-        <p:spPr>
-          <a:xfrm>
-            <a:off x="621792" y="5458968"/>
-            <a:ext cx="10972800" cy="768096"/>
-          </a:xfrm>
-          <a:prstGeom prst="rect">
-            <a:avLst/>
-          </a:prstGeom>
-          <a:noFill/>
-        </p:spPr>
-        <p:txBody>
-          <a:bodyPr wrap="square">
-            <a:spAutoFit/>
-          </a:bodyPr>
-          <a:lstStyle/>
-          <a:p>
-            <a:r>
-              <a:rPr sz="900" b="0">
-                <a:solidFill>
-                  <a:srgbClr val="2B2F36"/>
-                </a:solidFill>
-              </a:rPr>
-              <a:t>① 及格线我能过吗——≥3题正确+PEP8≥75%</a:t>
-            </a:r>
-          </a:p>
-          <a:p>
-            <a:r>
-              <a:rPr sz="900" b="0">
-                <a:solidFill>
-                  <a:srgbClr val="2B2F36"/>
-                </a:solidFill>
-              </a:rPr>
-              <a:t>② 优秀线我够吗——5题全对+PEP8≥85%</a:t>
-            </a:r>
-          </a:p>
-          <a:p>
-            <a:r>
-              <a:rPr sz="900" b="0">
-                <a:solidFill>
-                  <a:srgbClr val="2B2F36"/>
-                </a:solidFill>
-              </a:rPr>
-              <a:t>③ 技能点我能独立做出来吗——双栏对照法完成语法迁移；五题渐进练习全通过pytest断言</a:t>
-            </a:r>
-          </a:p>
-          <a:p>
-            <a:r>
-              <a:rPr sz="900" b="0">
-                <a:solidFill>
-                  <a:srgbClr val="2B2F36"/>
-                </a:solidFill>
-              </a:rPr>
-              <a:t>④ 报错了先查「常见错误速查」页再举手——错误信息逐字读一遍，八成自己能修</a:t>
-            </a:r>
-          </a:p>
-        </p:txBody>
-      </p:sp>
-      <p:sp>
-        <p:nvSpPr>
-          <p:cNvPr id="28" name="TextBox 27"/>
-          <p:cNvSpPr txBox="1"/>
-          <p:nvPr/>
-        </p:nvSpPr>
-        <p:spPr>
-          <a:xfrm>
-            <a:off x="457200" y="6281928"/>
-            <a:ext cx="9601200" cy="182880"/>
-          </a:xfrm>
-          <a:prstGeom prst="rect">
-            <a:avLst/>
-          </a:prstGeom>
-          <a:noFill/>
-        </p:spPr>
-        <p:txBody>
-          <a:bodyPr wrap="square">
-            <a:spAutoFit/>
-          </a:bodyPr>
-          <a:lstStyle/>
-          <a:p>
-            <a:r>
-              <a:rPr sz="750" b="0">
-                <a:solidFill>
-                  <a:srgbClr val="6B7280"/>
-                </a:solidFill>
-              </a:rPr>
-              <a:t>素材来源：同周《第1次课-带着C语言底子学Pyth…》知识卡与避坑清单（逐字摘录）</a:t>
-            </a:r>
-          </a:p>
-        </p:txBody>
-      </p:sp>
+            <a:pPr algn="r">
+              <a:lnSpc>
+                <a:spcPct val="110000"/>
+              </a:lnSpc>
+              <a:spcAft>
+                <a:spcPts val="600"/>
+              </a:spcAft>
+            </a:pPr>
+            <a:r>
+              <a:rPr sz="1000" b="0">
+                <a:solidFill>
+                  <a:srgbClr val="8A97B5"/>
+                </a:solidFill>
+                <a:latin typeface="微软雅黑"/>
+              </a:rPr>
+              <a:t>14 / 18</a:t>
+            </a:r>
+          </a:p>
+        </p:txBody>
+      </p:sp>
+      <p:pic>
+        <p:nvPicPr>
+          <p:cNvPr id="16" name="Picture 15" descr="image.png"/>
+          <p:cNvPicPr>
+            <a:picLocks noChangeAspect="1"/>
+          </p:cNvPicPr>
+          <p:nvPr/>
+        </p:nvPicPr>
+        <p:blipFill>
+          <a:blip r:embed="rId4"/>
+          <a:stretch>
+            <a:fillRect/>
+          </a:stretch>
+        </p:blipFill>
+        <p:spPr>
+          <a:xfrm>
+            <a:off x="1041494" y="1900000"/>
+            <a:ext cx="3917012" cy="1600000"/>
+          </a:xfrm>
+          <a:prstGeom prst="rect">
+            <a:avLst/>
+          </a:prstGeom>
+        </p:spPr>
+      </p:pic>
     </p:spTree>
   </p:cSld>
   <p:clrMapOvr>
@@ -6310,22 +7910,20 @@
       <p:grpSpPr/>
       <p:sp>
         <p:nvSpPr>
-          <p:cNvPr id="2" name="Rounded Rectangle 1"/>
+          <p:cNvPr id="2" name="Rectangle 1"/>
           <p:cNvSpPr/>
           <p:nvPr/>
         </p:nvSpPr>
         <p:spPr>
           <a:xfrm>
             <a:off x="0" y="0"/>
-            <a:ext cx="12191695" cy="64008"/>
-          </a:xfrm>
-          <a:prstGeom prst="roundRect">
-            <a:avLst>
-              <a:gd name="adj" fmla="val 50000"/>
-            </a:avLst>
+            <a:ext cx="12192000" cy="6858000"/>
+          </a:xfrm>
+          <a:prstGeom prst="rect">
+            <a:avLst/>
           </a:prstGeom>
           <a:solidFill>
-            <a:srgbClr val="0B5E54"/>
+            <a:srgbClr val="010328"/>
           </a:solidFill>
           <a:ln>
             <a:noFill/>
@@ -6356,60 +7954,20 @@
       </p:sp>
       <p:sp>
         <p:nvSpPr>
-          <p:cNvPr id="6" name="TextBox 5"/>
-          <p:cNvSpPr txBox="1"/>
-          <p:nvPr/>
-        </p:nvSpPr>
-        <p:spPr>
-          <a:xfrm>
-            <a:off x="475488" y="859536"/>
-            <a:ext cx="11237976" cy="502920"/>
-          </a:xfrm>
-          <a:prstGeom prst="rect">
-            <a:avLst/>
-          </a:prstGeom>
-          <a:noFill/>
-        </p:spPr>
-        <p:txBody>
-          <a:bodyPr wrap="square" anchor="t" lIns="0" rIns="0" tIns="0" bIns="0">
-            <a:spAutoFit/>
-          </a:bodyPr>
-          <a:lstStyle/>
-          <a:p>
-            <a:pPr algn="l">
-              <a:lnSpc>
-                <a:spcPct val="114000"/>
-              </a:lnSpc>
-            </a:pPr>
-            <a:r>
-              <a:rPr sz="2200" b="1">
-                <a:solidFill>
-                  <a:srgbClr val="1B2B28"/>
-                </a:solidFill>
-              </a:rPr>
-              <a:t>难点逐个击破 · 零基础照做就能会</a:t>
-            </a:r>
-          </a:p>
-        </p:txBody>
-      </p:sp>
-      <p:sp>
-        <p:nvSpPr>
-          <p:cNvPr id="8" name="Rounded Rectangle 7"/>
+          <p:cNvPr id="3" name="Rectangle 2"/>
           <p:cNvSpPr/>
           <p:nvPr/>
         </p:nvSpPr>
         <p:spPr>
           <a:xfrm>
-            <a:off x="475488" y="6419088"/>
-            <a:ext cx="11237976" cy="10972"/>
-          </a:xfrm>
-          <a:prstGeom prst="roundRect">
-            <a:avLst>
-              <a:gd name="adj" fmla="val 50000"/>
-            </a:avLst>
+            <a:off x="0" y="2880360"/>
+            <a:ext cx="12192000" cy="50000"/>
+          </a:xfrm>
+          <a:prstGeom prst="rect">
+            <a:avLst/>
           </a:prstGeom>
           <a:solidFill>
-            <a:srgbClr val="E4F1EE"/>
+            <a:srgbClr val="F5670F"/>
           </a:solidFill>
           <a:ln>
             <a:noFill/>
@@ -6440,14 +7998,14 @@
       </p:sp>
       <p:sp>
         <p:nvSpPr>
-          <p:cNvPr id="9" name="TextBox 8"/>
+          <p:cNvPr id="4" name="TextBox 3"/>
           <p:cNvSpPr txBox="1"/>
           <p:nvPr/>
         </p:nvSpPr>
         <p:spPr>
           <a:xfrm>
-            <a:off x="475488" y="6455664"/>
-            <a:ext cx="7315200" cy="292608"/>
+            <a:off x="0" y="1645920"/>
+            <a:ext cx="12192000" cy="1500000"/>
           </a:xfrm>
           <a:prstGeom prst="rect">
             <a:avLst/>
@@ -6455,37 +8013,41 @@
           <a:noFill/>
         </p:spPr>
         <p:txBody>
-          <a:bodyPr wrap="square" anchor="t" lIns="0" rIns="0" tIns="0" bIns="0">
+          <a:bodyPr wrap="square" anchor="t">
             <a:spAutoFit/>
           </a:bodyPr>
           <a:lstStyle/>
           <a:p>
-            <a:pPr algn="l">
+            <a:pPr algn="ctr">
               <a:lnSpc>
-                <a:spcPct val="114000"/>
+                <a:spcPct val="110000"/>
               </a:lnSpc>
+              <a:spcAft>
+                <a:spcPts val="600"/>
+              </a:spcAft>
             </a:pPr>
             <a:r>
-              <a:rPr sz="900" b="0">
-                <a:solidFill>
-                  <a:srgbClr val="5C6E6A"/>
-                </a:solidFill>
-              </a:rPr>
-              <a:t>两江智造集团 · Python程序设计（项目实战）</a:t>
-            </a:r>
-          </a:p>
-        </p:txBody>
-      </p:sp>
-      <p:sp>
-        <p:nvSpPr>
-          <p:cNvPr id="10" name="TextBox 9"/>
+              <a:rPr sz="5400" b="1">
+                <a:solidFill>
+                  <a:srgbClr val="FFFFFF"/>
+                </a:solidFill>
+                <a:latin typeface="微软雅黑"/>
+              </a:rPr>
+              <a:t>THANKS</a:t>
+            </a:r>
+          </a:p>
+        </p:txBody>
+      </p:sp>
+      <p:sp>
+        <p:nvSpPr>
+          <p:cNvPr id="5" name="TextBox 4"/>
           <p:cNvSpPr txBox="1"/>
           <p:nvPr/>
         </p:nvSpPr>
         <p:spPr>
           <a:xfrm>
-            <a:off x="10597896" y="6537960"/>
-            <a:ext cx="996696" cy="301752"/>
+            <a:off x="0" y="3429000"/>
+            <a:ext cx="12192000" cy="800000"/>
           </a:xfrm>
           <a:prstGeom prst="rect">
             <a:avLst/>
@@ -6493,37 +8055,41 @@
           <a:noFill/>
         </p:spPr>
         <p:txBody>
-          <a:bodyPr wrap="square" anchor="t" lIns="0" rIns="0" tIns="0" bIns="0">
+          <a:bodyPr wrap="square" anchor="t">
             <a:spAutoFit/>
           </a:bodyPr>
           <a:lstStyle/>
           <a:p>
-            <a:pPr algn="r">
+            <a:pPr algn="ctr">
               <a:lnSpc>
-                <a:spcPct val="114000"/>
+                <a:spcPct val="110000"/>
               </a:lnSpc>
+              <a:spcAft>
+                <a:spcPts val="600"/>
+              </a:spcAft>
             </a:pPr>
             <a:r>
-              <a:rPr sz="1000" b="0">
-                <a:solidFill>
-                  <a:srgbClr val="8A97B5"/>
-                </a:solidFill>
-              </a:rPr>
-              <a:t>9 / 16</a:t>
-            </a:r>
-          </a:p>
-        </p:txBody>
-      </p:sp>
-      <p:sp>
-        <p:nvSpPr>
-          <p:cNvPr id="11" name="TextBox 10"/>
+              <a:rPr sz="2200" b="1">
+                <a:solidFill>
+                  <a:srgbClr val="F5670F"/>
+                </a:solidFill>
+                <a:latin typeface="微软雅黑"/>
+              </a:rPr>
+              <a:t>感谢聆听 · 动手实践出真知</a:t>
+            </a:r>
+          </a:p>
+        </p:txBody>
+      </p:sp>
+      <p:sp>
+        <p:nvSpPr>
+          <p:cNvPr id="6" name="TextBox 5"/>
           <p:cNvSpPr txBox="1"/>
           <p:nvPr/>
         </p:nvSpPr>
         <p:spPr>
           <a:xfrm>
-            <a:off x="457200" y="1389888"/>
-            <a:ext cx="11274552" cy="274320"/>
+            <a:off x="0" y="4526280"/>
+            <a:ext cx="12192000" cy="600000"/>
           </a:xfrm>
           <a:prstGeom prst="rect">
             <a:avLst/>
@@ -6531,43 +8097,50 @@
           <a:noFill/>
         </p:spPr>
         <p:txBody>
-          <a:bodyPr wrap="square">
+          <a:bodyPr wrap="square" anchor="t">
             <a:spAutoFit/>
           </a:bodyPr>
           <a:lstStyle/>
           <a:p>
-            <a:r>
-              <a:rPr sz="1050" b="0">
-                <a:solidFill>
-                  <a:srgbClr val="6B7280"/>
-                </a:solidFill>
-              </a:rPr>
-              <a:t>每个难点四步走：先看「为什么容易栽」对号入座 → 记住「一招破解」→ 照「动手验证」做一遍 → 做不出回知识详解页。</a:t>
-            </a:r>
-          </a:p>
-        </p:txBody>
-      </p:sp>
-      <p:sp>
-        <p:nvSpPr>
-          <p:cNvPr id="12" name="Rectangle 11"/>
+            <a:pPr algn="ctr">
+              <a:lnSpc>
+                <a:spcPct val="110000"/>
+              </a:lnSpc>
+              <a:spcAft>
+                <a:spcPts val="600"/>
+              </a:spcAft>
+            </a:pPr>
+            <a:r>
+              <a:rPr sz="1400" b="0">
+                <a:solidFill>
+                  <a:srgbClr val="BBC6E6"/>
+                </a:solidFill>
+                <a:latin typeface="微软雅黑"/>
+              </a:rPr>
+              <a:t>以生为本   |   做中学 · 学中做</a:t>
+            </a:r>
+          </a:p>
+        </p:txBody>
+      </p:sp>
+      <p:sp>
+        <p:nvSpPr>
+          <p:cNvPr id="7" name="Rectangle 6"/>
           <p:cNvSpPr/>
           <p:nvPr/>
         </p:nvSpPr>
         <p:spPr>
           <a:xfrm>
-            <a:off x="457200" y="1783080"/>
-            <a:ext cx="11274552" cy="1481328"/>
+            <a:off x="500000" y="6500000"/>
+            <a:ext cx="11100000" cy="20000"/>
           </a:xfrm>
           <a:prstGeom prst="rect">
             <a:avLst/>
           </a:prstGeom>
           <a:solidFill>
-            <a:srgbClr val="F7F9FC"/>
+            <a:srgbClr val="C9D4EE"/>
           </a:solidFill>
           <a:ln>
-            <a:solidFill>
-              <a:srgbClr val="D6DCE4"/>
-            </a:solidFill>
+            <a:noFill/>
           </a:ln>
           <a:effectLst/>
         </p:spPr>
@@ -6586,7 +8159,7 @@
           </a:fontRef>
         </p:style>
         <p:txBody>
-          <a:bodyPr rtlCol="0" anchor="ctr" wrap="square"/>
+          <a:bodyPr rtlCol="0" anchor="ctr"/>
           <a:lstStyle/>
           <a:p>
             <a:pPr algn="ctr"/>
@@ -6595,58 +8168,14 @@
       </p:sp>
       <p:sp>
         <p:nvSpPr>
-          <p:cNvPr id="13" name="Rectangle 12"/>
-          <p:cNvSpPr/>
-          <p:nvPr/>
-        </p:nvSpPr>
-        <p:spPr>
-          <a:xfrm>
-            <a:off x="457200" y="1783080"/>
-            <a:ext cx="82296" cy="1481328"/>
-          </a:xfrm>
-          <a:prstGeom prst="rect">
-            <a:avLst/>
-          </a:prstGeom>
-          <a:solidFill>
-            <a:srgbClr val="8A4B2D"/>
-          </a:solidFill>
-          <a:ln>
-            <a:noFill/>
-          </a:ln>
-          <a:effectLst/>
-        </p:spPr>
-        <p:style>
-          <a:lnRef idx="1">
-            <a:schemeClr val="accent1"/>
-          </a:lnRef>
-          <a:fillRef idx="3">
-            <a:schemeClr val="accent1"/>
-          </a:fillRef>
-          <a:effectRef idx="2">
-            <a:schemeClr val="accent1"/>
-          </a:effectRef>
-          <a:fontRef idx="minor">
-            <a:schemeClr val="lt1"/>
-          </a:fontRef>
-        </p:style>
-        <p:txBody>
-          <a:bodyPr rtlCol="0" anchor="ctr" wrap="square"/>
-          <a:lstStyle/>
-          <a:p>
-            <a:pPr algn="ctr"/>
-          </a:p>
-        </p:txBody>
-      </p:sp>
-      <p:sp>
-        <p:nvSpPr>
-          <p:cNvPr id="14" name="TextBox 13"/>
+          <p:cNvPr id="8" name="TextBox 7"/>
           <p:cNvSpPr txBox="1"/>
           <p:nvPr/>
         </p:nvSpPr>
         <p:spPr>
           <a:xfrm>
-            <a:off x="658368" y="1828800"/>
-            <a:ext cx="10972800" cy="274320"/>
+            <a:off x="500000" y="6540000"/>
+            <a:ext cx="7000000" cy="300000"/>
           </a:xfrm>
           <a:prstGeom prst="rect">
             <a:avLst/>
@@ -6654,32 +8183,41 @@
           <a:noFill/>
         </p:spPr>
         <p:txBody>
-          <a:bodyPr wrap="square">
+          <a:bodyPr wrap="square" anchor="t">
             <a:spAutoFit/>
           </a:bodyPr>
           <a:lstStyle/>
           <a:p>
-            <a:r>
-              <a:rPr sz="1100" b="1">
-                <a:solidFill>
-                  <a:srgbClr val="8A4B2D"/>
-                </a:solidFill>
-              </a:rPr>
-              <a:t>难点1：B01 C→Python四映射</a:t>
-            </a:r>
-          </a:p>
-        </p:txBody>
-      </p:sp>
-      <p:sp>
-        <p:nvSpPr>
-          <p:cNvPr id="15" name="TextBox 14"/>
+            <a:pPr algn="l">
+              <a:lnSpc>
+                <a:spcPct val="110000"/>
+              </a:lnSpc>
+              <a:spcAft>
+                <a:spcPts val="600"/>
+              </a:spcAft>
+            </a:pPr>
+            <a:r>
+              <a:rPr sz="1000" b="0">
+                <a:solidFill>
+                  <a:srgbClr val="8A97B5"/>
+                </a:solidFill>
+                <a:latin typeface="微软雅黑"/>
+              </a:rPr>
+              <a:t>两江智造集团 · Python程序设计（项目实战）</a:t>
+            </a:r>
+          </a:p>
+        </p:txBody>
+      </p:sp>
+      <p:sp>
+        <p:nvSpPr>
+          <p:cNvPr id="9" name="TextBox 8"/>
           <p:cNvSpPr txBox="1"/>
           <p:nvPr/>
         </p:nvSpPr>
         <p:spPr>
           <a:xfrm>
-            <a:off x="658368" y="2148840"/>
-            <a:ext cx="3566160" cy="219456"/>
+            <a:off x="10600000" y="6540000"/>
+            <a:ext cx="1000000" cy="300000"/>
           </a:xfrm>
           <a:prstGeom prst="rect">
             <a:avLst/>
@@ -6687,825 +8225,27 @@
           <a:noFill/>
         </p:spPr>
         <p:txBody>
-          <a:bodyPr wrap="square">
+          <a:bodyPr wrap="square" anchor="ctr">
             <a:spAutoFit/>
           </a:bodyPr>
           <a:lstStyle/>
           <a:p>
-            <a:r>
-              <a:rPr sz="900" b="1">
-                <a:solidFill>
-                  <a:srgbClr val="B5533A"/>
-                </a:solidFill>
-              </a:rPr>
-              <a:t>为什么容易栽</a:t>
-            </a:r>
-          </a:p>
-        </p:txBody>
-      </p:sp>
-      <p:sp>
-        <p:nvSpPr>
-          <p:cNvPr id="16" name="TextBox 15"/>
-          <p:cNvSpPr txBox="1"/>
-          <p:nvPr/>
-        </p:nvSpPr>
-        <p:spPr>
-          <a:xfrm>
-            <a:off x="658368" y="2386584"/>
-            <a:ext cx="3584448" cy="822960"/>
-          </a:xfrm>
-          <a:prstGeom prst="rect">
-            <a:avLst/>
-          </a:prstGeom>
-          <a:noFill/>
-        </p:spPr>
-        <p:txBody>
-          <a:bodyPr wrap="square">
-            <a:spAutoFit/>
-          </a:bodyPr>
-          <a:lstStyle/>
-          <a:p>
-            <a:r>
-              <a:rPr sz="850" b="0">
-                <a:solidFill>
-                  <a:srgbClr val="2B2F36"/>
-                </a:solidFill>
-              </a:rPr>
-              <a:t>误区：Python变量无需声明≠无需理解类型——类型还在，只是贴在值上</a:t>
-            </a:r>
-          </a:p>
-        </p:txBody>
-      </p:sp>
-      <p:sp>
-        <p:nvSpPr>
-          <p:cNvPr id="17" name="TextBox 16"/>
-          <p:cNvSpPr txBox="1"/>
-          <p:nvPr/>
-        </p:nvSpPr>
-        <p:spPr>
-          <a:xfrm>
-            <a:off x="4334255" y="2148840"/>
-            <a:ext cx="3566160" cy="219456"/>
-          </a:xfrm>
-          <a:prstGeom prst="rect">
-            <a:avLst/>
-          </a:prstGeom>
-          <a:noFill/>
-        </p:spPr>
-        <p:txBody>
-          <a:bodyPr wrap="square">
-            <a:spAutoFit/>
-          </a:bodyPr>
-          <a:lstStyle/>
-          <a:p>
-            <a:r>
-              <a:rPr sz="900" b="1">
-                <a:solidFill>
-                  <a:srgbClr val="2E7D46"/>
-                </a:solidFill>
-              </a:rPr>
-              <a:t>一招破解（记住这句）</a:t>
-            </a:r>
-          </a:p>
-        </p:txBody>
-      </p:sp>
-      <p:sp>
-        <p:nvSpPr>
-          <p:cNvPr id="18" name="TextBox 17"/>
-          <p:cNvSpPr txBox="1"/>
-          <p:nvPr/>
-        </p:nvSpPr>
-        <p:spPr>
-          <a:xfrm>
-            <a:off x="4334255" y="2386584"/>
-            <a:ext cx="3584448" cy="822960"/>
-          </a:xfrm>
-          <a:prstGeom prst="rect">
-            <a:avLst/>
-          </a:prstGeom>
-          <a:noFill/>
-        </p:spPr>
-        <p:txBody>
-          <a:bodyPr wrap="square">
-            <a:spAutoFit/>
-          </a:bodyPr>
-          <a:lstStyle/>
-          <a:p>
-            <a:r>
-              <a:rPr sz="850" b="0">
-                <a:solidFill>
-                  <a:srgbClr val="2B2F36"/>
-                </a:solidFill>
-              </a:rPr>
-              <a:t>四映射=C户口迁Python：声明→动态/大括号→缩进/指针→引用/printf→f-string</a:t>
-            </a:r>
-          </a:p>
-        </p:txBody>
-      </p:sp>
-      <p:sp>
-        <p:nvSpPr>
-          <p:cNvPr id="19" name="TextBox 18"/>
-          <p:cNvSpPr txBox="1"/>
-          <p:nvPr/>
-        </p:nvSpPr>
-        <p:spPr>
-          <a:xfrm>
-            <a:off x="8010143" y="2148840"/>
-            <a:ext cx="3566160" cy="219456"/>
-          </a:xfrm>
-          <a:prstGeom prst="rect">
-            <a:avLst/>
-          </a:prstGeom>
-          <a:noFill/>
-        </p:spPr>
-        <p:txBody>
-          <a:bodyPr wrap="square">
-            <a:spAutoFit/>
-          </a:bodyPr>
-          <a:lstStyle/>
-          <a:p>
-            <a:r>
-              <a:rPr sz="900" b="1">
-                <a:solidFill>
-                  <a:srgbClr val="35506E"/>
-                </a:solidFill>
-              </a:rPr>
-              <a:t>动手验证（照做一遍）</a:t>
-            </a:r>
-          </a:p>
-        </p:txBody>
-      </p:sp>
-      <p:sp>
-        <p:nvSpPr>
-          <p:cNvPr id="20" name="TextBox 19"/>
-          <p:cNvSpPr txBox="1"/>
-          <p:nvPr/>
-        </p:nvSpPr>
-        <p:spPr>
-          <a:xfrm>
-            <a:off x="8010143" y="2386584"/>
-            <a:ext cx="3584448" cy="822960"/>
-          </a:xfrm>
-          <a:prstGeom prst="rect">
-            <a:avLst/>
-          </a:prstGeom>
-          <a:noFill/>
-        </p:spPr>
-        <p:txBody>
-          <a:bodyPr wrap="square">
-            <a:spAutoFit/>
-          </a:bodyPr>
-          <a:lstStyle/>
-          <a:p>
-            <a:r>
-              <a:rPr sz="850" b="0">
-                <a:solidFill>
-                  <a:srgbClr val="2B2F36"/>
-                </a:solidFill>
-              </a:rPr>
-              <a:t>C老手最快上手路径——心里有C对照着学少走弯路 int x=5 → x=5；printf("%d",x) → print(f'{x}')</a:t>
-            </a:r>
-          </a:p>
-        </p:txBody>
-      </p:sp>
-      <p:sp>
-        <p:nvSpPr>
-          <p:cNvPr id="21" name="Rectangle 20"/>
-          <p:cNvSpPr/>
-          <p:nvPr/>
-        </p:nvSpPr>
-        <p:spPr>
-          <a:xfrm>
-            <a:off x="457200" y="3383280"/>
-            <a:ext cx="11274552" cy="1481328"/>
-          </a:xfrm>
-          <a:prstGeom prst="rect">
-            <a:avLst/>
-          </a:prstGeom>
-          <a:solidFill>
-            <a:srgbClr val="F7F9FC"/>
-          </a:solidFill>
-          <a:ln>
-            <a:solidFill>
-              <a:srgbClr val="D6DCE4"/>
-            </a:solidFill>
-          </a:ln>
-          <a:effectLst/>
-        </p:spPr>
-        <p:style>
-          <a:lnRef idx="1">
-            <a:schemeClr val="accent1"/>
-          </a:lnRef>
-          <a:fillRef idx="3">
-            <a:schemeClr val="accent1"/>
-          </a:fillRef>
-          <a:effectRef idx="2">
-            <a:schemeClr val="accent1"/>
-          </a:effectRef>
-          <a:fontRef idx="minor">
-            <a:schemeClr val="lt1"/>
-          </a:fontRef>
-        </p:style>
-        <p:txBody>
-          <a:bodyPr rtlCol="0" anchor="ctr" wrap="square"/>
-          <a:lstStyle/>
-          <a:p>
-            <a:pPr algn="ctr"/>
-          </a:p>
-        </p:txBody>
-      </p:sp>
-      <p:sp>
-        <p:nvSpPr>
-          <p:cNvPr id="22" name="Rectangle 21"/>
-          <p:cNvSpPr/>
-          <p:nvPr/>
-        </p:nvSpPr>
-        <p:spPr>
-          <a:xfrm>
-            <a:off x="457200" y="3383280"/>
-            <a:ext cx="82296" cy="1481328"/>
-          </a:xfrm>
-          <a:prstGeom prst="rect">
-            <a:avLst/>
-          </a:prstGeom>
-          <a:solidFill>
-            <a:srgbClr val="8A4B2D"/>
-          </a:solidFill>
-          <a:ln>
-            <a:noFill/>
-          </a:ln>
-          <a:effectLst/>
-        </p:spPr>
-        <p:style>
-          <a:lnRef idx="1">
-            <a:schemeClr val="accent1"/>
-          </a:lnRef>
-          <a:fillRef idx="3">
-            <a:schemeClr val="accent1"/>
-          </a:fillRef>
-          <a:effectRef idx="2">
-            <a:schemeClr val="accent1"/>
-          </a:effectRef>
-          <a:fontRef idx="minor">
-            <a:schemeClr val="lt1"/>
-          </a:fontRef>
-        </p:style>
-        <p:txBody>
-          <a:bodyPr rtlCol="0" anchor="ctr" wrap="square"/>
-          <a:lstStyle/>
-          <a:p>
-            <a:pPr algn="ctr"/>
-          </a:p>
-        </p:txBody>
-      </p:sp>
-      <p:sp>
-        <p:nvSpPr>
-          <p:cNvPr id="23" name="TextBox 22"/>
-          <p:cNvSpPr txBox="1"/>
-          <p:nvPr/>
-        </p:nvSpPr>
-        <p:spPr>
-          <a:xfrm>
-            <a:off x="658368" y="3429000"/>
-            <a:ext cx="10972800" cy="274320"/>
-          </a:xfrm>
-          <a:prstGeom prst="rect">
-            <a:avLst/>
-          </a:prstGeom>
-          <a:noFill/>
-        </p:spPr>
-        <p:txBody>
-          <a:bodyPr wrap="square">
-            <a:spAutoFit/>
-          </a:bodyPr>
-          <a:lstStyle/>
-          <a:p>
-            <a:r>
-              <a:rPr sz="1100" b="1">
-                <a:solidFill>
-                  <a:srgbClr val="8A4B2D"/>
-                </a:solidFill>
-              </a:rPr>
-              <a:t>难点2：B02 引用语义</a:t>
-            </a:r>
-          </a:p>
-        </p:txBody>
-      </p:sp>
-      <p:sp>
-        <p:nvSpPr>
-          <p:cNvPr id="24" name="TextBox 23"/>
-          <p:cNvSpPr txBox="1"/>
-          <p:nvPr/>
-        </p:nvSpPr>
-        <p:spPr>
-          <a:xfrm>
-            <a:off x="658368" y="3749040"/>
-            <a:ext cx="3566160" cy="219456"/>
-          </a:xfrm>
-          <a:prstGeom prst="rect">
-            <a:avLst/>
-          </a:prstGeom>
-          <a:noFill/>
-        </p:spPr>
-        <p:txBody>
-          <a:bodyPr wrap="square">
-            <a:spAutoFit/>
-          </a:bodyPr>
-          <a:lstStyle/>
-          <a:p>
-            <a:r>
-              <a:rPr sz="900" b="1">
-                <a:solidFill>
-                  <a:srgbClr val="B5533A"/>
-                </a:solidFill>
-              </a:rPr>
-              <a:t>为什么容易栽</a:t>
-            </a:r>
-          </a:p>
-        </p:txBody>
-      </p:sp>
-      <p:sp>
-        <p:nvSpPr>
-          <p:cNvPr id="25" name="TextBox 24"/>
-          <p:cNvSpPr txBox="1"/>
-          <p:nvPr/>
-        </p:nvSpPr>
-        <p:spPr>
-          <a:xfrm>
-            <a:off x="658368" y="3986784"/>
-            <a:ext cx="3584448" cy="822960"/>
-          </a:xfrm>
-          <a:prstGeom prst="rect">
-            <a:avLst/>
-          </a:prstGeom>
-          <a:noFill/>
-        </p:spPr>
-        <p:txBody>
-          <a:bodyPr wrap="square">
-            <a:spAutoFit/>
-          </a:bodyPr>
-          <a:lstStyle/>
-          <a:p>
-            <a:r>
-              <a:rPr sz="850" b="0">
-                <a:solidFill>
-                  <a:srgbClr val="2B2F36"/>
-                </a:solidFill>
-              </a:rPr>
-              <a:t>误区：以为=是复制——嵌套列表必须deepcopy，浅拷贝只拷外壳</a:t>
-            </a:r>
-          </a:p>
-        </p:txBody>
-      </p:sp>
-      <p:sp>
-        <p:nvSpPr>
-          <p:cNvPr id="26" name="TextBox 25"/>
-          <p:cNvSpPr txBox="1"/>
-          <p:nvPr/>
-        </p:nvSpPr>
-        <p:spPr>
-          <a:xfrm>
-            <a:off x="4334255" y="3749040"/>
-            <a:ext cx="3566160" cy="219456"/>
-          </a:xfrm>
-          <a:prstGeom prst="rect">
-            <a:avLst/>
-          </a:prstGeom>
-          <a:noFill/>
-        </p:spPr>
-        <p:txBody>
-          <a:bodyPr wrap="square">
-            <a:spAutoFit/>
-          </a:bodyPr>
-          <a:lstStyle/>
-          <a:p>
-            <a:r>
-              <a:rPr sz="900" b="1">
-                <a:solidFill>
-                  <a:srgbClr val="2E7D46"/>
-                </a:solidFill>
-              </a:rPr>
-              <a:t>一招破解（记住这句）</a:t>
-            </a:r>
-          </a:p>
-        </p:txBody>
-      </p:sp>
-      <p:sp>
-        <p:nvSpPr>
-          <p:cNvPr id="27" name="TextBox 26"/>
-          <p:cNvSpPr txBox="1"/>
-          <p:nvPr/>
-        </p:nvSpPr>
-        <p:spPr>
-          <a:xfrm>
-            <a:off x="4334255" y="3986784"/>
-            <a:ext cx="3584448" cy="822960"/>
-          </a:xfrm>
-          <a:prstGeom prst="rect">
-            <a:avLst/>
-          </a:prstGeom>
-          <a:noFill/>
-        </p:spPr>
-        <p:txBody>
-          <a:bodyPr wrap="square">
-            <a:spAutoFit/>
-          </a:bodyPr>
-          <a:lstStyle/>
-          <a:p>
-            <a:r>
-              <a:rPr sz="850" b="0">
-                <a:solidFill>
-                  <a:srgbClr val="2B2F36"/>
-                </a:solidFill>
-              </a:rPr>
-              <a:t>b=a不复制货只抄门牌号——两人开同一扇门，动b就是动a</a:t>
-            </a:r>
-          </a:p>
-        </p:txBody>
-      </p:sp>
-      <p:sp>
-        <p:nvSpPr>
-          <p:cNvPr id="28" name="TextBox 27"/>
-          <p:cNvSpPr txBox="1"/>
-          <p:nvPr/>
-        </p:nvSpPr>
-        <p:spPr>
-          <a:xfrm>
-            <a:off x="8010143" y="3749040"/>
-            <a:ext cx="3566160" cy="219456"/>
-          </a:xfrm>
-          <a:prstGeom prst="rect">
-            <a:avLst/>
-          </a:prstGeom>
-          <a:noFill/>
-        </p:spPr>
-        <p:txBody>
-          <a:bodyPr wrap="square">
-            <a:spAutoFit/>
-          </a:bodyPr>
-          <a:lstStyle/>
-          <a:p>
-            <a:r>
-              <a:rPr sz="900" b="1">
-                <a:solidFill>
-                  <a:srgbClr val="35506E"/>
-                </a:solidFill>
-              </a:rPr>
-              <a:t>动手验证（照做一遍）</a:t>
-            </a:r>
-          </a:p>
-        </p:txBody>
-      </p:sp>
-      <p:sp>
-        <p:nvSpPr>
-          <p:cNvPr id="29" name="TextBox 28"/>
-          <p:cNvSpPr txBox="1"/>
-          <p:nvPr/>
-        </p:nvSpPr>
-        <p:spPr>
-          <a:xfrm>
-            <a:off x="8010143" y="3986784"/>
-            <a:ext cx="3584448" cy="822960"/>
-          </a:xfrm>
-          <a:prstGeom prst="rect">
-            <a:avLst/>
-          </a:prstGeom>
-          <a:noFill/>
-        </p:spPr>
-        <p:txBody>
-          <a:bodyPr wrap="square">
-            <a:spAutoFit/>
-          </a:bodyPr>
-          <a:lstStyle/>
-          <a:p>
-            <a:r>
-              <a:rPr sz="850" b="0">
-                <a:solidFill>
-                  <a:srgbClr val="2B2F36"/>
-                </a:solidFill>
-              </a:rPr>
-              <a:t>函数传参/复制数据时的隐性共享——改b连a一起变 b = a.copy()浅拷贝；copy.deepcopy(a)深拷贝</a:t>
-            </a:r>
-          </a:p>
-        </p:txBody>
-      </p:sp>
-      <p:sp>
-        <p:nvSpPr>
-          <p:cNvPr id="30" name="Rectangle 29"/>
-          <p:cNvSpPr/>
-          <p:nvPr/>
-        </p:nvSpPr>
-        <p:spPr>
-          <a:xfrm>
-            <a:off x="457200" y="4983480"/>
-            <a:ext cx="11274552" cy="1481328"/>
-          </a:xfrm>
-          <a:prstGeom prst="rect">
-            <a:avLst/>
-          </a:prstGeom>
-          <a:solidFill>
-            <a:srgbClr val="F7F9FC"/>
-          </a:solidFill>
-          <a:ln>
-            <a:solidFill>
-              <a:srgbClr val="D6DCE4"/>
-            </a:solidFill>
-          </a:ln>
-          <a:effectLst/>
-        </p:spPr>
-        <p:style>
-          <a:lnRef idx="1">
-            <a:schemeClr val="accent1"/>
-          </a:lnRef>
-          <a:fillRef idx="3">
-            <a:schemeClr val="accent1"/>
-          </a:fillRef>
-          <a:effectRef idx="2">
-            <a:schemeClr val="accent1"/>
-          </a:effectRef>
-          <a:fontRef idx="minor">
-            <a:schemeClr val="lt1"/>
-          </a:fontRef>
-        </p:style>
-        <p:txBody>
-          <a:bodyPr rtlCol="0" anchor="ctr" wrap="square"/>
-          <a:lstStyle/>
-          <a:p>
-            <a:pPr algn="ctr"/>
-          </a:p>
-        </p:txBody>
-      </p:sp>
-      <p:sp>
-        <p:nvSpPr>
-          <p:cNvPr id="31" name="Rectangle 30"/>
-          <p:cNvSpPr/>
-          <p:nvPr/>
-        </p:nvSpPr>
-        <p:spPr>
-          <a:xfrm>
-            <a:off x="457200" y="4983480"/>
-            <a:ext cx="82296" cy="1481328"/>
-          </a:xfrm>
-          <a:prstGeom prst="rect">
-            <a:avLst/>
-          </a:prstGeom>
-          <a:solidFill>
-            <a:srgbClr val="8A4B2D"/>
-          </a:solidFill>
-          <a:ln>
-            <a:noFill/>
-          </a:ln>
-          <a:effectLst/>
-        </p:spPr>
-        <p:style>
-          <a:lnRef idx="1">
-            <a:schemeClr val="accent1"/>
-          </a:lnRef>
-          <a:fillRef idx="3">
-            <a:schemeClr val="accent1"/>
-          </a:fillRef>
-          <a:effectRef idx="2">
-            <a:schemeClr val="accent1"/>
-          </a:effectRef>
-          <a:fontRef idx="minor">
-            <a:schemeClr val="lt1"/>
-          </a:fontRef>
-        </p:style>
-        <p:txBody>
-          <a:bodyPr rtlCol="0" anchor="ctr" wrap="square"/>
-          <a:lstStyle/>
-          <a:p>
-            <a:pPr algn="ctr"/>
-          </a:p>
-        </p:txBody>
-      </p:sp>
-      <p:sp>
-        <p:nvSpPr>
-          <p:cNvPr id="32" name="TextBox 31"/>
-          <p:cNvSpPr txBox="1"/>
-          <p:nvPr/>
-        </p:nvSpPr>
-        <p:spPr>
-          <a:xfrm>
-            <a:off x="658368" y="5029200"/>
-            <a:ext cx="10972800" cy="274320"/>
-          </a:xfrm>
-          <a:prstGeom prst="rect">
-            <a:avLst/>
-          </a:prstGeom>
-          <a:noFill/>
-        </p:spPr>
-        <p:txBody>
-          <a:bodyPr wrap="square">
-            <a:spAutoFit/>
-          </a:bodyPr>
-          <a:lstStyle/>
-          <a:p>
-            <a:r>
-              <a:rPr sz="1100" b="1">
-                <a:solidFill>
-                  <a:srgbClr val="8A4B2D"/>
-                </a:solidFill>
-              </a:rPr>
-              <a:t>难点3：B03 列表扩容与字典</a:t>
-            </a:r>
-          </a:p>
-        </p:txBody>
-      </p:sp>
-      <p:sp>
-        <p:nvSpPr>
-          <p:cNvPr id="33" name="TextBox 32"/>
-          <p:cNvSpPr txBox="1"/>
-          <p:nvPr/>
-        </p:nvSpPr>
-        <p:spPr>
-          <a:xfrm>
-            <a:off x="658368" y="5349240"/>
-            <a:ext cx="3566160" cy="219456"/>
-          </a:xfrm>
-          <a:prstGeom prst="rect">
-            <a:avLst/>
-          </a:prstGeom>
-          <a:noFill/>
-        </p:spPr>
-        <p:txBody>
-          <a:bodyPr wrap="square">
-            <a:spAutoFit/>
-          </a:bodyPr>
-          <a:lstStyle/>
-          <a:p>
-            <a:r>
-              <a:rPr sz="900" b="1">
-                <a:solidFill>
-                  <a:srgbClr val="B5533A"/>
-                </a:solidFill>
-              </a:rPr>
-              <a:t>为什么容易栽</a:t>
-            </a:r>
-          </a:p>
-        </p:txBody>
-      </p:sp>
-      <p:sp>
-        <p:nvSpPr>
-          <p:cNvPr id="34" name="TextBox 33"/>
-          <p:cNvSpPr txBox="1"/>
-          <p:nvPr/>
-        </p:nvSpPr>
-        <p:spPr>
-          <a:xfrm>
-            <a:off x="658368" y="5586984"/>
-            <a:ext cx="3584448" cy="822960"/>
-          </a:xfrm>
-          <a:prstGeom prst="rect">
-            <a:avLst/>
-          </a:prstGeom>
-          <a:noFill/>
-        </p:spPr>
-        <p:txBody>
-          <a:bodyPr wrap="square">
-            <a:spAutoFit/>
-          </a:bodyPr>
-          <a:lstStyle/>
-          <a:p>
-            <a:r>
-              <a:rPr sz="850" b="0">
-                <a:solidFill>
-                  <a:srgbClr val="2B2F36"/>
-                </a:solidFill>
-              </a:rPr>
-              <a:t>误区：C的malloc预分配习惯搬来——Python列表自增长已优化</a:t>
-            </a:r>
-          </a:p>
-        </p:txBody>
-      </p:sp>
-      <p:sp>
-        <p:nvSpPr>
-          <p:cNvPr id="35" name="TextBox 34"/>
-          <p:cNvSpPr txBox="1"/>
-          <p:nvPr/>
-        </p:nvSpPr>
-        <p:spPr>
-          <a:xfrm>
-            <a:off x="4334255" y="5349240"/>
-            <a:ext cx="3566160" cy="219456"/>
-          </a:xfrm>
-          <a:prstGeom prst="rect">
-            <a:avLst/>
-          </a:prstGeom>
-          <a:noFill/>
-        </p:spPr>
-        <p:txBody>
-          <a:bodyPr wrap="square">
-            <a:spAutoFit/>
-          </a:bodyPr>
-          <a:lstStyle/>
-          <a:p>
-            <a:r>
-              <a:rPr sz="900" b="1">
-                <a:solidFill>
-                  <a:srgbClr val="2E7D46"/>
-                </a:solidFill>
-              </a:rPr>
-              <a:t>一招破解（记住这句）</a:t>
-            </a:r>
-          </a:p>
-        </p:txBody>
-      </p:sp>
-      <p:sp>
-        <p:nvSpPr>
-          <p:cNvPr id="36" name="TextBox 35"/>
-          <p:cNvSpPr txBox="1"/>
-          <p:nvPr/>
-        </p:nvSpPr>
-        <p:spPr>
-          <a:xfrm>
-            <a:off x="4334255" y="5586984"/>
-            <a:ext cx="3584448" cy="822960"/>
-          </a:xfrm>
-          <a:prstGeom prst="rect">
-            <a:avLst/>
-          </a:prstGeom>
-          <a:noFill/>
-        </p:spPr>
-        <p:txBody>
-          <a:bodyPr wrap="square">
-            <a:spAutoFit/>
-          </a:bodyPr>
-          <a:lstStyle/>
-          <a:p>
-            <a:r>
-              <a:rPr sz="850" b="0">
-                <a:solidFill>
-                  <a:srgbClr val="2B2F36"/>
-                </a:solidFill>
-              </a:rPr>
-              <a:t>列表append=货架自动加长；字典O(1)=储物柜直取不开抽屉翻</a:t>
-            </a:r>
-          </a:p>
-        </p:txBody>
-      </p:sp>
-      <p:sp>
-        <p:nvSpPr>
-          <p:cNvPr id="37" name="TextBox 36"/>
-          <p:cNvSpPr txBox="1"/>
-          <p:nvPr/>
-        </p:nvSpPr>
-        <p:spPr>
-          <a:xfrm>
-            <a:off x="8010143" y="5349240"/>
-            <a:ext cx="3566160" cy="219456"/>
-          </a:xfrm>
-          <a:prstGeom prst="rect">
-            <a:avLst/>
-          </a:prstGeom>
-          <a:noFill/>
-        </p:spPr>
-        <p:txBody>
-          <a:bodyPr wrap="square">
-            <a:spAutoFit/>
-          </a:bodyPr>
-          <a:lstStyle/>
-          <a:p>
-            <a:r>
-              <a:rPr sz="900" b="1">
-                <a:solidFill>
-                  <a:srgbClr val="35506E"/>
-                </a:solidFill>
-              </a:rPr>
-              <a:t>动手验证（照做一遍）</a:t>
-            </a:r>
-          </a:p>
-        </p:txBody>
-      </p:sp>
-      <p:sp>
-        <p:nvSpPr>
-          <p:cNvPr id="38" name="TextBox 37"/>
-          <p:cNvSpPr txBox="1"/>
-          <p:nvPr/>
-        </p:nvSpPr>
-        <p:spPr>
-          <a:xfrm>
-            <a:off x="8010143" y="5586984"/>
-            <a:ext cx="3584448" cy="822960"/>
-          </a:xfrm>
-          <a:prstGeom prst="rect">
-            <a:avLst/>
-          </a:prstGeom>
-          <a:noFill/>
-        </p:spPr>
-        <p:txBody>
-          <a:bodyPr wrap="square">
-            <a:spAutoFit/>
-          </a:bodyPr>
-          <a:lstStyle/>
-          <a:p>
-            <a:r>
-              <a:rPr sz="850" b="0">
-                <a:solidFill>
-                  <a:srgbClr val="2B2F36"/>
-                </a:solidFill>
-              </a:rPr>
-              <a:t>采集缓冲攒够1000条批量入库——工程节奏控制 buffer.append(row)；if len(buffer)&gt;=1000: flush()</a:t>
+            <a:pPr algn="r">
+              <a:lnSpc>
+                <a:spcPct val="110000"/>
+              </a:lnSpc>
+              <a:spcAft>
+                <a:spcPts val="600"/>
+              </a:spcAft>
+            </a:pPr>
+            <a:r>
+              <a:rPr sz="1000" b="0">
+                <a:solidFill>
+                  <a:srgbClr val="8A97B5"/>
+                </a:solidFill>
+                <a:latin typeface="微软雅黑"/>
+              </a:rPr>
+              <a:t>15 / 18</a:t>
             </a:r>
           </a:p>
         </p:txBody>
@@ -7530,22 +8270,20 @@
       <p:grpSpPr/>
       <p:sp>
         <p:nvSpPr>
-          <p:cNvPr id="2" name="Rounded Rectangle 1"/>
+          <p:cNvPr id="2" name="Rectangle 1"/>
           <p:cNvSpPr/>
           <p:nvPr/>
         </p:nvSpPr>
         <p:spPr>
           <a:xfrm>
             <a:off x="0" y="0"/>
-            <a:ext cx="12191695" cy="64008"/>
-          </a:xfrm>
-          <a:prstGeom prst="roundRect">
-            <a:avLst>
-              <a:gd name="adj" fmla="val 50000"/>
-            </a:avLst>
+            <a:ext cx="12192000" cy="1150000"/>
+          </a:xfrm>
+          <a:prstGeom prst="rect">
+            <a:avLst/>
           </a:prstGeom>
           <a:solidFill>
-            <a:srgbClr val="0B5E54"/>
+            <a:srgbClr val="010328"/>
           </a:solidFill>
           <a:ln>
             <a:noFill/>
@@ -7576,60 +8314,20 @@
       </p:sp>
       <p:sp>
         <p:nvSpPr>
-          <p:cNvPr id="6" name="TextBox 5"/>
-          <p:cNvSpPr txBox="1"/>
-          <p:nvPr/>
-        </p:nvSpPr>
-        <p:spPr>
-          <a:xfrm>
-            <a:off x="475488" y="859536"/>
-            <a:ext cx="11237976" cy="502920"/>
-          </a:xfrm>
-          <a:prstGeom prst="rect">
-            <a:avLst/>
-          </a:prstGeom>
-          <a:noFill/>
-        </p:spPr>
-        <p:txBody>
-          <a:bodyPr wrap="square" anchor="t" lIns="0" rIns="0" tIns="0" bIns="0">
-            <a:spAutoFit/>
-          </a:bodyPr>
-          <a:lstStyle/>
-          <a:p>
-            <a:pPr algn="l">
-              <a:lnSpc>
-                <a:spcPct val="114000"/>
-              </a:lnSpc>
-            </a:pPr>
-            <a:r>
-              <a:rPr sz="2200" b="1">
-                <a:solidFill>
-                  <a:srgbClr val="1B2B28"/>
-                </a:solidFill>
-              </a:rPr>
-              <a:t>承上启下 · 动手前避坑清单</a:t>
-            </a:r>
-          </a:p>
-        </p:txBody>
-      </p:sp>
-      <p:sp>
-        <p:nvSpPr>
-          <p:cNvPr id="8" name="Rounded Rectangle 7"/>
+          <p:cNvPr id="3" name="Rectangle 2"/>
           <p:cNvSpPr/>
           <p:nvPr/>
         </p:nvSpPr>
         <p:spPr>
           <a:xfrm>
-            <a:off x="475488" y="6419088"/>
-            <a:ext cx="11237976" cy="10972"/>
-          </a:xfrm>
-          <a:prstGeom prst="roundRect">
-            <a:avLst>
-              <a:gd name="adj" fmla="val 50000"/>
-            </a:avLst>
+            <a:off x="0" y="1150000"/>
+            <a:ext cx="2600000" cy="70000"/>
+          </a:xfrm>
+          <a:prstGeom prst="rect">
+            <a:avLst/>
           </a:prstGeom>
           <a:solidFill>
-            <a:srgbClr val="E4F1EE"/>
+            <a:srgbClr val="F5670F"/>
           </a:solidFill>
           <a:ln>
             <a:noFill/>
@@ -7660,14 +8358,14 @@
       </p:sp>
       <p:sp>
         <p:nvSpPr>
-          <p:cNvPr id="9" name="TextBox 8"/>
+          <p:cNvPr id="4" name="TextBox 3"/>
           <p:cNvSpPr txBox="1"/>
           <p:nvPr/>
         </p:nvSpPr>
         <p:spPr>
           <a:xfrm>
-            <a:off x="475488" y="6455664"/>
-            <a:ext cx="7315200" cy="292608"/>
+            <a:off x="700000" y="300000"/>
+            <a:ext cx="10792000" cy="700000"/>
           </a:xfrm>
           <a:prstGeom prst="rect">
             <a:avLst/>
@@ -7675,119 +8373,50 @@
           <a:noFill/>
         </p:spPr>
         <p:txBody>
-          <a:bodyPr wrap="square" anchor="t" lIns="0" rIns="0" tIns="0" bIns="0">
+          <a:bodyPr wrap="square" anchor="t">
             <a:spAutoFit/>
           </a:bodyPr>
           <a:lstStyle/>
           <a:p>
             <a:pPr algn="l">
               <a:lnSpc>
-                <a:spcPct val="114000"/>
+                <a:spcPct val="110000"/>
               </a:lnSpc>
+              <a:spcAft>
+                <a:spcPts val="600"/>
+              </a:spcAft>
             </a:pPr>
             <a:r>
-              <a:rPr sz="900" b="0">
-                <a:solidFill>
-                  <a:srgbClr val="5C6E6A"/>
-                </a:solidFill>
-              </a:rPr>
-              <a:t>两江智造集团 · Python程序设计（项目实战）</a:t>
-            </a:r>
-          </a:p>
-        </p:txBody>
-      </p:sp>
-      <p:sp>
-        <p:nvSpPr>
-          <p:cNvPr id="10" name="TextBox 9"/>
-          <p:cNvSpPr txBox="1"/>
-          <p:nvPr/>
-        </p:nvSpPr>
-        <p:spPr>
-          <a:xfrm>
-            <a:off x="10597896" y="6537960"/>
-            <a:ext cx="996696" cy="301752"/>
-          </a:xfrm>
-          <a:prstGeom prst="rect">
-            <a:avLst/>
-          </a:prstGeom>
-          <a:noFill/>
-        </p:spPr>
-        <p:txBody>
-          <a:bodyPr wrap="square" anchor="t" lIns="0" rIns="0" tIns="0" bIns="0">
-            <a:spAutoFit/>
-          </a:bodyPr>
-          <a:lstStyle/>
-          <a:p>
-            <a:pPr algn="r">
-              <a:lnSpc>
-                <a:spcPct val="114000"/>
-              </a:lnSpc>
-            </a:pPr>
-            <a:r>
-              <a:rPr sz="1000" b="0">
-                <a:solidFill>
-                  <a:srgbClr val="8A97B5"/>
-                </a:solidFill>
-              </a:rPr>
-              <a:t>10 / 16</a:t>
-            </a:r>
-          </a:p>
-        </p:txBody>
-      </p:sp>
-      <p:sp>
-        <p:nvSpPr>
-          <p:cNvPr id="11" name="TextBox 10"/>
-          <p:cNvSpPr txBox="1"/>
-          <p:nvPr/>
-        </p:nvSpPr>
-        <p:spPr>
-          <a:xfrm>
-            <a:off x="457200" y="1389888"/>
-            <a:ext cx="11274552" cy="274320"/>
-          </a:xfrm>
-          <a:prstGeom prst="rect">
-            <a:avLst/>
-          </a:prstGeom>
-          <a:noFill/>
-        </p:spPr>
-        <p:txBody>
-          <a:bodyPr wrap="square">
-            <a:spAutoFit/>
-          </a:bodyPr>
-          <a:lstStyle/>
-          <a:p>
-            <a:r>
-              <a:rPr sz="1050" b="0">
-                <a:solidFill>
-                  <a:srgbClr val="6B7280"/>
-                </a:solidFill>
-              </a:rPr>
-              <a:t>本讲是动手冲刺课：先把上周完整讲解里的高频翻车点过一遍，再开工——每条都是历届学生真实踩过的坑。</a:t>
-            </a:r>
-          </a:p>
-        </p:txBody>
-      </p:sp>
-      <p:sp>
-        <p:nvSpPr>
-          <p:cNvPr id="12" name="Rectangle 11"/>
+              <a:rPr sz="2400" b="1">
+                <a:solidFill>
+                  <a:srgbClr val="FFFFFF"/>
+                </a:solidFill>
+                <a:latin typeface="微软雅黑"/>
+              </a:rPr>
+              <a:t>下次课预告（第2周）</a:t>
+            </a:r>
+          </a:p>
+        </p:txBody>
+      </p:sp>
+      <p:sp>
+        <p:nvSpPr>
+          <p:cNvPr id="5" name="Rectangle 4"/>
           <p:cNvSpPr/>
           <p:nvPr/>
         </p:nvSpPr>
         <p:spPr>
           <a:xfrm>
-            <a:off x="457200" y="1783080"/>
-            <a:ext cx="5532120" cy="2061972"/>
+            <a:off x="760000" y="1900000"/>
+            <a:ext cx="10900000" cy="1600000"/>
           </a:xfrm>
           <a:prstGeom prst="rect">
             <a:avLst/>
           </a:prstGeom>
           <a:solidFill>
-            <a:srgbClr val="FFFFFF"/>
+            <a:srgbClr val="F3F6FD"/>
           </a:solidFill>
           <a:ln>
-            <a:solidFill>
-              <a:srgbClr val="D6DCE4"/>
-            </a:solidFill>
+            <a:noFill/>
           </a:ln>
           <a:effectLst/>
         </p:spPr>
@@ -7806,7 +8435,7 @@
           </a:fontRef>
         </p:style>
         <p:txBody>
-          <a:bodyPr rtlCol="0" anchor="ctr" wrap="square"/>
+          <a:bodyPr rtlCol="0" anchor="ctr"/>
           <a:lstStyle/>
           <a:p>
             <a:pPr algn="ctr"/>
@@ -7815,20 +8444,20 @@
       </p:sp>
       <p:sp>
         <p:nvSpPr>
-          <p:cNvPr id="13" name="Rectangle 12"/>
+          <p:cNvPr id="6" name="Rectangle 5"/>
           <p:cNvSpPr/>
           <p:nvPr/>
         </p:nvSpPr>
         <p:spPr>
           <a:xfrm>
-            <a:off x="457200" y="1783080"/>
-            <a:ext cx="82296" cy="2061972"/>
+            <a:off x="760000" y="1900000"/>
+            <a:ext cx="150000" cy="1600000"/>
           </a:xfrm>
           <a:prstGeom prst="rect">
             <a:avLst/>
           </a:prstGeom>
           <a:solidFill>
-            <a:srgbClr val="9A3B3B"/>
+            <a:srgbClr val="F5670F"/>
           </a:solidFill>
           <a:ln>
             <a:noFill/>
@@ -7850,7 +8479,7 @@
           </a:fontRef>
         </p:style>
         <p:txBody>
-          <a:bodyPr rtlCol="0" anchor="ctr" wrap="square"/>
+          <a:bodyPr rtlCol="0" anchor="ctr"/>
           <a:lstStyle/>
           <a:p>
             <a:pPr algn="ctr"/>
@@ -7859,14 +8488,183 @@
       </p:sp>
       <p:sp>
         <p:nvSpPr>
-          <p:cNvPr id="14" name="TextBox 13"/>
+          <p:cNvPr id="7" name="TextBox 6"/>
           <p:cNvSpPr txBox="1"/>
           <p:nvPr/>
         </p:nvSpPr>
         <p:spPr>
           <a:xfrm>
-            <a:off x="658368" y="1847088"/>
-            <a:ext cx="5166359" cy="274320"/>
+            <a:off x="1020000" y="2050000"/>
+            <a:ext cx="10500000" cy="1400000"/>
+          </a:xfrm>
+          <a:prstGeom prst="rect">
+            <a:avLst/>
+          </a:prstGeom>
+          <a:noFill/>
+        </p:spPr>
+        <p:txBody>
+          <a:bodyPr wrap="square" anchor="t">
+            <a:spAutoFit/>
+          </a:bodyPr>
+          <a:lstStyle/>
+          <a:p>
+            <a:pPr algn="l">
+              <a:lnSpc>
+                <a:spcPct val="110000"/>
+              </a:lnSpc>
+              <a:spcAft>
+                <a:spcPts val="600"/>
+              </a:spcAft>
+            </a:pPr>
+            <a:r>
+              <a:rPr sz="1700" b="1">
+                <a:solidFill>
+                  <a:srgbClr val="010328"/>
+                </a:solidFill>
+                <a:latin typeface="微软雅黑"/>
+              </a:rPr>
+              <a:t>主题: 生成标准工程模板并推Git——应用：见工单sta</a:t>
+            </a:r>
+          </a:p>
+          <a:p>
+            <a:pPr algn="l">
+              <a:lnSpc>
+                <a:spcPct val="110000"/>
+              </a:lnSpc>
+              <a:spcAft>
+                <a:spcPts val="600"/>
+              </a:spcAft>
+            </a:pPr>
+            <a:r>
+              <a:rPr sz="1300" b="0">
+                <a:solidFill>
+                  <a:srgbClr val="44546A"/>
+                </a:solidFill>
+                <a:latin typeface="微软雅黑"/>
+              </a:rPr>
+              <a:t>预习快问: requirements.txt的作用？conda环境为什么不必进.gitignore？</a:t>
+            </a:r>
+          </a:p>
+        </p:txBody>
+      </p:sp>
+      <p:sp>
+        <p:nvSpPr>
+          <p:cNvPr id="8" name="TextBox 7"/>
+          <p:cNvSpPr txBox="1"/>
+          <p:nvPr/>
+        </p:nvSpPr>
+        <p:spPr>
+          <a:xfrm>
+            <a:off x="760000" y="3900000"/>
+            <a:ext cx="10900000" cy="900000"/>
+          </a:xfrm>
+          <a:prstGeom prst="rect">
+            <a:avLst/>
+          </a:prstGeom>
+          <a:noFill/>
+        </p:spPr>
+        <p:txBody>
+          <a:bodyPr wrap="square" anchor="t">
+            <a:spAutoFit/>
+          </a:bodyPr>
+          <a:lstStyle/>
+          <a:p>
+            <a:pPr algn="l">
+              <a:lnSpc>
+                <a:spcPct val="110000"/>
+              </a:lnSpc>
+              <a:spcAft>
+                <a:spcPts val="600"/>
+              </a:spcAft>
+            </a:pPr>
+            <a:r>
+              <a:rPr sz="1400" b="1">
+                <a:solidFill>
+                  <a:srgbClr val="0545E8"/>
+                </a:solidFill>
+                <a:latin typeface="微软雅黑"/>
+              </a:rPr>
+              <a:t>课前完成：导学单 + 预习自测 + starter环境自检</a:t>
+            </a:r>
+          </a:p>
+          <a:p>
+            <a:pPr algn="l">
+              <a:lnSpc>
+                <a:spcPct val="110000"/>
+              </a:lnSpc>
+              <a:spcAft>
+                <a:spcPts val="600"/>
+              </a:spcAft>
+            </a:pPr>
+            <a:r>
+              <a:rPr sz="1250" b="0">
+                <a:solidFill>
+                  <a:srgbClr val="44546A"/>
+                </a:solidFill>
+                <a:latin typeface="微软雅黑"/>
+              </a:rPr>
+              <a:t>带着问题来上课——Predict先于Run</a:t>
+            </a:r>
+          </a:p>
+        </p:txBody>
+      </p:sp>
+    </p:spTree>
+  </p:cSld>
+  <p:clrMapOvr>
+    <a:masterClrMapping/>
+  </p:clrMapOvr>
+</p:sld>
+</file>
+
+<file path=ppt/slides/slide17.xml><?xml version="1.0" encoding="utf-8"?>
+<p:sld xmlns:a="http://schemas.openxmlformats.org/drawingml/2006/main" xmlns:p="http://schemas.openxmlformats.org/presentationml/2006/main" xmlns:r="http://schemas.openxmlformats.org/officeDocument/2006/relationships">
+  <p:cSld>
+    <p:spTree>
+      <p:nvGrpSpPr>
+        <p:cNvPr id="1" name=""/>
+        <p:cNvGrpSpPr/>
+        <p:nvPr/>
+      </p:nvGrpSpPr>
+      <p:grpSpPr/>
+      <p:sp>
+        <p:nvSpPr>
+          <p:cNvPr id="2" name="TextBox 1"/>
+          <p:cNvSpPr txBox="1"/>
+          <p:nvPr/>
+        </p:nvSpPr>
+        <p:spPr>
+          <a:xfrm>
+            <a:off x="548640" y="320040"/>
+            <a:ext cx="11094720" cy="914400"/>
+          </a:xfrm>
+          <a:prstGeom prst="rect">
+            <a:avLst/>
+          </a:prstGeom>
+          <a:noFill/>
+        </p:spPr>
+        <p:txBody>
+          <a:bodyPr wrap="none">
+            <a:spAutoFit/>
+          </a:bodyPr>
+          <a:lstStyle/>
+          <a:p>
+            <a:r>
+              <a:rPr sz="3000" b="1"/>
+              <a:t>本任务六步法导航</a:t>
+            </a:r>
+          </a:p>
+        </p:txBody>
+      </p:sp>
+      <p:sp>
+        <p:nvSpPr>
+          <p:cNvPr id="3" name="TextBox 2"/>
+          <p:cNvSpPr txBox="1"/>
+          <p:nvPr/>
+        </p:nvSpPr>
+        <p:spPr>
+          <a:xfrm>
+            <a:off x="731520" y="1371600"/>
+            <a:ext cx="10728960" cy="4663440"/>
           </a:xfrm>
           <a:prstGeom prst="rect">
             <a:avLst/>
@@ -7879,27 +8677,108 @@
           </a:bodyPr>
           <a:lstStyle/>
           <a:p>
-            <a:r>
-              <a:rPr sz="1050" b="1">
-                <a:solidFill>
-                  <a:srgbClr val="B5533A"/>
-                </a:solidFill>
-              </a:rPr>
-              <a:t>✗ b改a也变</a:t>
-            </a:r>
-          </a:p>
-        </p:txBody>
-      </p:sp>
-      <p:sp>
-        <p:nvSpPr>
-          <p:cNvPr id="15" name="TextBox 14"/>
+            <a:pPr>
+              <a:spcAft>
+                <a:spcPts val="1000"/>
+              </a:spcAft>
+            </a:pPr>
+            <a:r>
+              <a:rPr sz="1800"/>
+              <a:t>六步法：资讯 → 计划 → 决策 → 实施 → 检查 → 评估</a:t>
+            </a:r>
+          </a:p>
+          <a:p>
+            <a:pPr>
+              <a:spcAft>
+                <a:spcPts val="1000"/>
+              </a:spcAft>
+            </a:pPr>
+            <a:r>
+              <a:rPr sz="1800"/>
+              <a:t>本讲对应工单：《Python程序设计-项目实战》分层任务工单</a:t>
+            </a:r>
+          </a:p>
+          <a:p>
+            <a:pPr>
+              <a:spcAft>
+                <a:spcPts val="1000"/>
+              </a:spcAft>
+            </a:pPr>
+            <a:r>
+              <a:rPr sz="1800"/>
+              <a:t>课堂产出：工单第六节实施记录须当堂填写，含操作前安全打勾与学生本人签字。</a:t>
+            </a:r>
+          </a:p>
+          <a:p>
+            <a:pPr>
+              <a:spcAft>
+                <a:spcPts val="1000"/>
+              </a:spcAft>
+            </a:pPr>
+            <a:r>
+              <a:rPr sz="1800"/>
+              <a:t>课后交付：班组长／操作员／教师三方联签后交回，缺签视为未交付。</a:t>
+            </a:r>
+          </a:p>
+        </p:txBody>
+      </p:sp>
+    </p:spTree>
+  </p:cSld>
+  <p:clrMapOvr>
+    <a:masterClrMapping/>
+  </p:clrMapOvr>
+</p:sld>
+</file>
+
+<file path=ppt/slides/slide18.xml><?xml version="1.0" encoding="utf-8"?>
+<p:sld xmlns:a="http://schemas.openxmlformats.org/drawingml/2006/main" xmlns:p="http://schemas.openxmlformats.org/presentationml/2006/main" xmlns:r="http://schemas.openxmlformats.org/officeDocument/2006/relationships">
+  <p:cSld>
+    <p:spTree>
+      <p:nvGrpSpPr>
+        <p:cNvPr id="1" name=""/>
+        <p:cNvGrpSpPr/>
+        <p:nvPr/>
+      </p:nvGrpSpPr>
+      <p:grpSpPr/>
+      <p:sp>
+        <p:nvSpPr>
+          <p:cNvPr id="2" name="TextBox 1"/>
           <p:cNvSpPr txBox="1"/>
           <p:nvPr/>
         </p:nvSpPr>
         <p:spPr>
           <a:xfrm>
-            <a:off x="658368" y="2167128"/>
-            <a:ext cx="5166359" cy="868680"/>
+            <a:off x="548640" y="320040"/>
+            <a:ext cx="11094720" cy="914400"/>
+          </a:xfrm>
+          <a:prstGeom prst="rect">
+            <a:avLst/>
+          </a:prstGeom>
+          <a:noFill/>
+        </p:spPr>
+        <p:txBody>
+          <a:bodyPr wrap="none">
+            <a:spAutoFit/>
+          </a:bodyPr>
+          <a:lstStyle/>
+          <a:p>
+            <a:r>
+              <a:rPr sz="3000" b="1"/>
+              <a:t>本讲与岗位任务单的衔接</a:t>
+            </a:r>
+          </a:p>
+        </p:txBody>
+      </p:sp>
+      <p:sp>
+        <p:nvSpPr>
+          <p:cNvPr id="3" name="TextBox 2"/>
+          <p:cNvSpPr txBox="1"/>
+          <p:nvPr/>
+        </p:nvSpPr>
+        <p:spPr>
+          <a:xfrm>
+            <a:off x="731520" y="1371600"/>
+            <a:ext cx="10728960" cy="4663440"/>
           </a:xfrm>
           <a:prstGeom prst="rect">
             <a:avLst/>
@@ -7912,388 +8791,47 @@
           </a:bodyPr>
           <a:lstStyle/>
           <a:p>
-            <a:r>
-              <a:rPr sz="900" b="0">
-                <a:solidFill>
-                  <a:srgbClr val="2B2F36"/>
-                </a:solidFill>
-              </a:rPr>
-              <a:t>原因：引用语义</a:t>
-            </a:r>
-          </a:p>
-          <a:p>
-            <a:r>
-              <a:rPr sz="900" b="0">
-                <a:solidFill>
-                  <a:srgbClr val="2B2F36"/>
-                </a:solidFill>
-              </a:rPr>
-              <a:t>✔ 解决：list(a)或a.copy()</a:t>
-            </a:r>
-          </a:p>
-        </p:txBody>
-      </p:sp>
-      <p:sp>
-        <p:nvSpPr>
-          <p:cNvPr id="16" name="Rectangle 15"/>
-          <p:cNvSpPr/>
-          <p:nvPr/>
-        </p:nvSpPr>
-        <p:spPr>
-          <a:xfrm>
-            <a:off x="6199632" y="1783080"/>
-            <a:ext cx="5532120" cy="2061972"/>
-          </a:xfrm>
-          <a:prstGeom prst="rect">
-            <a:avLst/>
-          </a:prstGeom>
-          <a:solidFill>
-            <a:srgbClr val="FFFFFF"/>
-          </a:solidFill>
-          <a:ln>
-            <a:solidFill>
-              <a:srgbClr val="D6DCE4"/>
-            </a:solidFill>
-          </a:ln>
-          <a:effectLst/>
-        </p:spPr>
-        <p:style>
-          <a:lnRef idx="1">
-            <a:schemeClr val="accent1"/>
-          </a:lnRef>
-          <a:fillRef idx="3">
-            <a:schemeClr val="accent1"/>
-          </a:fillRef>
-          <a:effectRef idx="2">
-            <a:schemeClr val="accent1"/>
-          </a:effectRef>
-          <a:fontRef idx="minor">
-            <a:schemeClr val="lt1"/>
-          </a:fontRef>
-        </p:style>
-        <p:txBody>
-          <a:bodyPr rtlCol="0" anchor="ctr" wrap="square"/>
-          <a:lstStyle/>
-          <a:p>
-            <a:pPr algn="ctr"/>
-          </a:p>
-        </p:txBody>
-      </p:sp>
-      <p:sp>
-        <p:nvSpPr>
-          <p:cNvPr id="17" name="Rectangle 16"/>
-          <p:cNvSpPr/>
-          <p:nvPr/>
-        </p:nvSpPr>
-        <p:spPr>
-          <a:xfrm>
-            <a:off x="6199632" y="1783080"/>
-            <a:ext cx="82296" cy="2061972"/>
-          </a:xfrm>
-          <a:prstGeom prst="rect">
-            <a:avLst/>
-          </a:prstGeom>
-          <a:solidFill>
-            <a:srgbClr val="9A3B3B"/>
-          </a:solidFill>
-          <a:ln>
-            <a:noFill/>
-          </a:ln>
-          <a:effectLst/>
-        </p:spPr>
-        <p:style>
-          <a:lnRef idx="1">
-            <a:schemeClr val="accent1"/>
-          </a:lnRef>
-          <a:fillRef idx="3">
-            <a:schemeClr val="accent1"/>
-          </a:fillRef>
-          <a:effectRef idx="2">
-            <a:schemeClr val="accent1"/>
-          </a:effectRef>
-          <a:fontRef idx="minor">
-            <a:schemeClr val="lt1"/>
-          </a:fontRef>
-        </p:style>
-        <p:txBody>
-          <a:bodyPr rtlCol="0" anchor="ctr" wrap="square"/>
-          <a:lstStyle/>
-          <a:p>
-            <a:pPr algn="ctr"/>
-          </a:p>
-        </p:txBody>
-      </p:sp>
-      <p:sp>
-        <p:nvSpPr>
-          <p:cNvPr id="18" name="TextBox 17"/>
-          <p:cNvSpPr txBox="1"/>
-          <p:nvPr/>
-        </p:nvSpPr>
-        <p:spPr>
-          <a:xfrm>
-            <a:off x="6400800" y="1847088"/>
-            <a:ext cx="5166359" cy="274320"/>
-          </a:xfrm>
-          <a:prstGeom prst="rect">
-            <a:avLst/>
-          </a:prstGeom>
-          <a:noFill/>
-        </p:spPr>
-        <p:txBody>
-          <a:bodyPr wrap="square">
-            <a:spAutoFit/>
-          </a:bodyPr>
-          <a:lstStyle/>
-          <a:p>
-            <a:r>
-              <a:rPr sz="1050" b="1">
-                <a:solidFill>
-                  <a:srgbClr val="B5533A"/>
-                </a:solidFill>
-              </a:rPr>
-              <a:t>✗ 混用Tab</a:t>
-            </a:r>
-          </a:p>
-        </p:txBody>
-      </p:sp>
-      <p:sp>
-        <p:nvSpPr>
-          <p:cNvPr id="19" name="TextBox 18"/>
-          <p:cNvSpPr txBox="1"/>
-          <p:nvPr/>
-        </p:nvSpPr>
-        <p:spPr>
-          <a:xfrm>
-            <a:off x="6400800" y="2167128"/>
-            <a:ext cx="5166359" cy="868680"/>
-          </a:xfrm>
-          <a:prstGeom prst="rect">
-            <a:avLst/>
-          </a:prstGeom>
-          <a:noFill/>
-        </p:spPr>
-        <p:txBody>
-          <a:bodyPr wrap="square">
-            <a:spAutoFit/>
-          </a:bodyPr>
-          <a:lstStyle/>
-          <a:p>
-            <a:r>
-              <a:rPr sz="900" b="0">
-                <a:solidFill>
-                  <a:srgbClr val="2B2F36"/>
-                </a:solidFill>
-              </a:rPr>
-              <a:t>原因：跨编辑器报错</a:t>
-            </a:r>
-          </a:p>
-          <a:p>
-            <a:r>
-              <a:rPr sz="900" b="0">
-                <a:solidFill>
-                  <a:srgbClr val="2B2F36"/>
-                </a:solidFill>
-              </a:rPr>
-              <a:t>✔ 解决：统一4空格</a:t>
-            </a:r>
-          </a:p>
-        </p:txBody>
-      </p:sp>
-      <p:sp>
-        <p:nvSpPr>
-          <p:cNvPr id="20" name="Rectangle 19"/>
-          <p:cNvSpPr/>
-          <p:nvPr/>
-        </p:nvSpPr>
-        <p:spPr>
-          <a:xfrm>
-            <a:off x="457200" y="3973068"/>
-            <a:ext cx="5532120" cy="2061972"/>
-          </a:xfrm>
-          <a:prstGeom prst="rect">
-            <a:avLst/>
-          </a:prstGeom>
-          <a:solidFill>
-            <a:srgbClr val="FFFFFF"/>
-          </a:solidFill>
-          <a:ln>
-            <a:solidFill>
-              <a:srgbClr val="D6DCE4"/>
-            </a:solidFill>
-          </a:ln>
-          <a:effectLst/>
-        </p:spPr>
-        <p:style>
-          <a:lnRef idx="1">
-            <a:schemeClr val="accent1"/>
-          </a:lnRef>
-          <a:fillRef idx="3">
-            <a:schemeClr val="accent1"/>
-          </a:fillRef>
-          <a:effectRef idx="2">
-            <a:schemeClr val="accent1"/>
-          </a:effectRef>
-          <a:fontRef idx="minor">
-            <a:schemeClr val="lt1"/>
-          </a:fontRef>
-        </p:style>
-        <p:txBody>
-          <a:bodyPr rtlCol="0" anchor="ctr" wrap="square"/>
-          <a:lstStyle/>
-          <a:p>
-            <a:pPr algn="ctr"/>
-          </a:p>
-        </p:txBody>
-      </p:sp>
-      <p:sp>
-        <p:nvSpPr>
-          <p:cNvPr id="21" name="Rectangle 20"/>
-          <p:cNvSpPr/>
-          <p:nvPr/>
-        </p:nvSpPr>
-        <p:spPr>
-          <a:xfrm>
-            <a:off x="457200" y="3973068"/>
-            <a:ext cx="82296" cy="2061972"/>
-          </a:xfrm>
-          <a:prstGeom prst="rect">
-            <a:avLst/>
-          </a:prstGeom>
-          <a:solidFill>
-            <a:srgbClr val="9A3B3B"/>
-          </a:solidFill>
-          <a:ln>
-            <a:noFill/>
-          </a:ln>
-          <a:effectLst/>
-        </p:spPr>
-        <p:style>
-          <a:lnRef idx="1">
-            <a:schemeClr val="accent1"/>
-          </a:lnRef>
-          <a:fillRef idx="3">
-            <a:schemeClr val="accent1"/>
-          </a:fillRef>
-          <a:effectRef idx="2">
-            <a:schemeClr val="accent1"/>
-          </a:effectRef>
-          <a:fontRef idx="minor">
-            <a:schemeClr val="lt1"/>
-          </a:fontRef>
-        </p:style>
-        <p:txBody>
-          <a:bodyPr rtlCol="0" anchor="ctr" wrap="square"/>
-          <a:lstStyle/>
-          <a:p>
-            <a:pPr algn="ctr"/>
-          </a:p>
-        </p:txBody>
-      </p:sp>
-      <p:sp>
-        <p:nvSpPr>
-          <p:cNvPr id="22" name="TextBox 21"/>
-          <p:cNvSpPr txBox="1"/>
-          <p:nvPr/>
-        </p:nvSpPr>
-        <p:spPr>
-          <a:xfrm>
-            <a:off x="658368" y="4037076"/>
-            <a:ext cx="5166359" cy="274320"/>
-          </a:xfrm>
-          <a:prstGeom prst="rect">
-            <a:avLst/>
-          </a:prstGeom>
-          <a:noFill/>
-        </p:spPr>
-        <p:txBody>
-          <a:bodyPr wrap="square">
-            <a:spAutoFit/>
-          </a:bodyPr>
-          <a:lstStyle/>
-          <a:p>
-            <a:r>
-              <a:rPr sz="1050" b="1">
-                <a:solidFill>
-                  <a:srgbClr val="B5533A"/>
-                </a:solidFill>
-              </a:rPr>
-              <a:t>✗ =当==</a:t>
-            </a:r>
-          </a:p>
-        </p:txBody>
-      </p:sp>
-      <p:sp>
-        <p:nvSpPr>
-          <p:cNvPr id="23" name="TextBox 22"/>
-          <p:cNvSpPr txBox="1"/>
-          <p:nvPr/>
-        </p:nvSpPr>
-        <p:spPr>
-          <a:xfrm>
-            <a:off x="658368" y="4357116"/>
-            <a:ext cx="5166359" cy="868680"/>
-          </a:xfrm>
-          <a:prstGeom prst="rect">
-            <a:avLst/>
-          </a:prstGeom>
-          <a:noFill/>
-        </p:spPr>
-        <p:txBody>
-          <a:bodyPr wrap="square">
-            <a:spAutoFit/>
-          </a:bodyPr>
-          <a:lstStyle/>
-          <a:p>
-            <a:r>
-              <a:rPr sz="900" b="0">
-                <a:solidFill>
-                  <a:srgbClr val="2B2F36"/>
-                </a:solidFill>
-              </a:rPr>
-              <a:t>原因：条件失效</a:t>
-            </a:r>
-          </a:p>
-          <a:p>
-            <a:r>
-              <a:rPr sz="900" b="0">
-                <a:solidFill>
-                  <a:srgbClr val="2B2F36"/>
-                </a:solidFill>
-              </a:rPr>
-              <a:t>✔ 解决：比较用==</a:t>
-            </a:r>
-          </a:p>
-        </p:txBody>
-      </p:sp>
-      <p:sp>
-        <p:nvSpPr>
-          <p:cNvPr id="24" name="TextBox 23"/>
-          <p:cNvSpPr txBox="1"/>
-          <p:nvPr/>
-        </p:nvSpPr>
-        <p:spPr>
-          <a:xfrm>
-            <a:off x="457200" y="6281928"/>
-            <a:ext cx="9601200" cy="182880"/>
-          </a:xfrm>
-          <a:prstGeom prst="rect">
-            <a:avLst/>
-          </a:prstGeom>
-          <a:noFill/>
-        </p:spPr>
-        <p:txBody>
-          <a:bodyPr wrap="square">
-            <a:spAutoFit/>
-          </a:bodyPr>
-          <a:lstStyle/>
-          <a:p>
-            <a:r>
-              <a:rPr sz="750" b="0">
-                <a:solidFill>
-                  <a:srgbClr val="6B7280"/>
-                </a:solidFill>
-              </a:rPr>
-              <a:t>素材来源：同周《第1次课-带着C语言底子学Pyth…》知识卡与避坑清单（逐字摘录）</a:t>
+            <a:pPr>
+              <a:spcAft>
+                <a:spcPts val="1000"/>
+              </a:spcAft>
+            </a:pPr>
+            <a:r>
+              <a:rPr sz="1800"/>
+              <a:t>本讲在工作过程系统化课程中承担的任务环节：任务实施</a:t>
+            </a:r>
+          </a:p>
+          <a:p>
+            <a:pPr>
+              <a:spcAft>
+                <a:spcPts val="1000"/>
+              </a:spcAft>
+            </a:pPr>
+            <a:r>
+              <a:rPr sz="1800"/>
+              <a:t>考核对齐：过程性成绩取自本讲工单第六节各模块得分合计（满分 100）。</a:t>
+            </a:r>
+          </a:p>
+          <a:p>
+            <a:pPr>
+              <a:spcAft>
+                <a:spcPts val="1000"/>
+              </a:spcAft>
+            </a:pPr>
+            <a:r>
+              <a:rPr sz="1800"/>
+              <a:t>达标线：综合成绩≥60 分，且无安全红线一票否决记录</a:t>
+            </a:r>
+          </a:p>
+          <a:p>
+            <a:pPr>
+              <a:spcAft>
+                <a:spcPts val="1000"/>
+              </a:spcAft>
+            </a:pPr>
+            <a:r>
+              <a:rPr sz="1800"/>
+              <a:t>无效工单判定：未打安全勾、无本人签字、无三方联签。</a:t>
             </a:r>
           </a:p>
         </p:txBody>
@@ -8898,7 +9436,7 @@
                 </a:solidFill>
                 <a:latin typeface="微软雅黑"/>
               </a:rPr>
-              <a:t>3 / 16</a:t>
+              <a:t>3 / 18</a:t>
             </a:r>
           </a:p>
         </p:txBody>
@@ -9690,7 +10228,7 @@
                 </a:solidFill>
                 <a:latin typeface="微软雅黑"/>
               </a:rPr>
-              <a:t>4 / 16</a:t>
+              <a:t>4 / 18</a:t>
             </a:r>
           </a:p>
         </p:txBody>
@@ -10082,7 +10620,7 @@
                   <a:srgbClr val="8A97B5"/>
                 </a:solidFill>
               </a:rPr>
-              <a:t>5 / 16</a:t>
+              <a:t>5 / 18</a:t>
             </a:r>
           </a:p>
         </p:txBody>
@@ -10301,7 +10839,7 @@
               <a:t>及格</a:t>
             </a:r>
             <a:r>
-              <a:rPr sz="850" b="0">
+              <a:rPr sz="900" b="0">
                 <a:solidFill>
                   <a:srgbClr val="5C6E6A"/>
                 </a:solidFill>
@@ -10309,7 +10847,7 @@
               <a:t>   验收口径：</a:t>
             </a:r>
             <a:r>
-              <a:rPr sz="850" b="0">
+              <a:rPr sz="900" b="0">
                 <a:solidFill>
                   <a:srgbClr val="5C6E6A"/>
                 </a:solidFill>
@@ -10393,7 +10931,7 @@
               </a:lnSpc>
             </a:pPr>
             <a:r>
-              <a:rPr sz="850" b="1">
+              <a:rPr sz="900" b="1">
                 <a:solidFill>
                   <a:srgbClr val="FFFFFF"/>
                 </a:solidFill>
@@ -10655,7 +11193,7 @@
               <a:t>良好</a:t>
             </a:r>
             <a:r>
-              <a:rPr sz="850" b="0">
+              <a:rPr sz="900" b="0">
                 <a:solidFill>
                   <a:srgbClr val="5C6E6A"/>
                 </a:solidFill>
@@ -10663,7 +11201,7 @@
               <a:t>   验收口径：</a:t>
             </a:r>
             <a:r>
-              <a:rPr sz="850" b="0">
+              <a:rPr sz="900" b="0">
                 <a:solidFill>
                   <a:srgbClr val="5C6E6A"/>
                 </a:solidFill>
@@ -10747,7 +11285,7 @@
               </a:lnSpc>
             </a:pPr>
             <a:r>
-              <a:rPr sz="850" b="1">
+              <a:rPr sz="900" b="1">
                 <a:solidFill>
                   <a:srgbClr val="FFFFFF"/>
                 </a:solidFill>
@@ -11009,7 +11547,7 @@
               <a:t>优秀</a:t>
             </a:r>
             <a:r>
-              <a:rPr sz="850" b="0">
+              <a:rPr sz="900" b="0">
                 <a:solidFill>
                   <a:srgbClr val="5C6E6A"/>
                 </a:solidFill>
@@ -11017,7 +11555,7 @@
               <a:t>   验收口径：</a:t>
             </a:r>
             <a:r>
-              <a:rPr sz="850" b="0">
+              <a:rPr sz="900" b="0">
                 <a:solidFill>
                   <a:srgbClr val="5C6E6A"/>
                 </a:solidFill>
@@ -11101,7 +11639,7 @@
               </a:lnSpc>
             </a:pPr>
             <a:r>
-              <a:rPr sz="850" b="1">
+              <a:rPr sz="900" b="1">
                 <a:solidFill>
                   <a:srgbClr val="FFFFFF"/>
                 </a:solidFill>
@@ -11363,7 +11901,7 @@
               <a:t>超优</a:t>
             </a:r>
             <a:r>
-              <a:rPr sz="850" b="0">
+              <a:rPr sz="900" b="0">
                 <a:solidFill>
                   <a:srgbClr val="5C6E6A"/>
                 </a:solidFill>
@@ -11371,7 +11909,7 @@
               <a:t>   验收口径：</a:t>
             </a:r>
             <a:r>
-              <a:rPr sz="850" b="0">
+              <a:rPr sz="900" b="0">
                 <a:solidFill>
                   <a:srgbClr val="5C6E6A"/>
                 </a:solidFill>
@@ -11455,7 +11993,7 @@
               </a:lnSpc>
             </a:pPr>
             <a:r>
-              <a:rPr sz="850" b="1">
+              <a:rPr sz="900" b="1">
                 <a:solidFill>
                   <a:srgbClr val="FFFFFF"/>
                 </a:solidFill>
@@ -11623,7 +12161,7 @@
               </a:lnSpc>
             </a:pPr>
             <a:r>
-              <a:rPr sz="850" b="0">
+              <a:rPr sz="900" b="0">
                 <a:solidFill>
                   <a:srgbClr val="1B2B28"/>
                 </a:solidFill>
@@ -11638,7 +12176,7 @@
               </a:lnSpc>
             </a:pPr>
             <a:r>
-              <a:rPr sz="850" b="0">
+              <a:rPr sz="900" b="0">
                 <a:solidFill>
                   <a:srgbClr val="1B2B28"/>
                 </a:solidFill>
@@ -11653,7 +12191,7 @@
               </a:lnSpc>
             </a:pPr>
             <a:r>
-              <a:rPr sz="850" b="0">
+              <a:rPr sz="900" b="0">
                 <a:solidFill>
                   <a:srgbClr val="1B2B28"/>
                 </a:solidFill>
@@ -12050,7 +12588,7 @@
                   <a:srgbClr val="8A97B5"/>
                 </a:solidFill>
               </a:rPr>
-              <a:t>6 / 16</a:t>
+              <a:t>6 / 18</a:t>
             </a:r>
           </a:p>
         </p:txBody>
@@ -12145,7 +12683,7 @@
               </a:lnSpc>
             </a:pPr>
             <a:r>
-              <a:rPr sz="850" b="0">
+              <a:rPr sz="900" b="0">
                 <a:solidFill>
                   <a:srgbClr val="5C6E6A"/>
                 </a:solidFill>
@@ -12542,7 +13080,7 @@
                   <a:srgbClr val="8A97B5"/>
                 </a:solidFill>
               </a:rPr>
-              <a:t>7 / 16</a:t>
+              <a:t>7 / 18</a:t>
             </a:r>
           </a:p>
         </p:txBody>
@@ -12637,7 +13175,7 @@
               </a:lnSpc>
             </a:pPr>
             <a:r>
-              <a:rPr sz="850" b="0">
+              <a:rPr sz="900" b="0">
                 <a:solidFill>
                   <a:srgbClr val="5C6E6A"/>
                 </a:solidFill>
@@ -12767,7 +13305,7 @@
               </a:lnSpc>
             </a:pPr>
             <a:r>
-              <a:rPr sz="850" b="0">
+              <a:rPr sz="900" b="0">
                 <a:solidFill>
                   <a:srgbClr val="1B2B28"/>
                 </a:solidFill>
@@ -12782,7 +13320,7 @@
               </a:lnSpc>
             </a:pPr>
             <a:r>
-              <a:rPr sz="850" b="0">
+              <a:rPr sz="900" b="0">
                 <a:solidFill>
                   <a:srgbClr val="1B2B28"/>
                 </a:solidFill>
@@ -12797,7 +13335,7 @@
               </a:lnSpc>
             </a:pPr>
             <a:r>
-              <a:rPr sz="850" b="0">
+              <a:rPr sz="900" b="0">
                 <a:solidFill>
                   <a:srgbClr val="1B2B28"/>
                 </a:solidFill>
@@ -12827,20 +13365,22 @@
       <p:grpSpPr/>
       <p:sp>
         <p:nvSpPr>
-          <p:cNvPr id="2" name="Rectangle 1"/>
+          <p:cNvPr id="2" name="Rounded Rectangle 1"/>
           <p:cNvSpPr/>
           <p:nvPr/>
         </p:nvSpPr>
         <p:spPr>
           <a:xfrm>
             <a:off x="0" y="0"/>
-            <a:ext cx="12192000" cy="1150000"/>
-          </a:xfrm>
-          <a:prstGeom prst="rect">
-            <a:avLst/>
+            <a:ext cx="12191695" cy="64008"/>
+          </a:xfrm>
+          <a:prstGeom prst="roundRect">
+            <a:avLst>
+              <a:gd name="adj" fmla="val 50000"/>
+            </a:avLst>
           </a:prstGeom>
           <a:solidFill>
-            <a:srgbClr val="010328"/>
+            <a:srgbClr val="0B5E54"/>
           </a:solidFill>
           <a:ln>
             <a:noFill/>
@@ -12871,20 +13411,60 @@
       </p:sp>
       <p:sp>
         <p:nvSpPr>
-          <p:cNvPr id="3" name="Rectangle 2"/>
+          <p:cNvPr id="6" name="TextBox 5"/>
+          <p:cNvSpPr txBox="1"/>
+          <p:nvPr/>
+        </p:nvSpPr>
+        <p:spPr>
+          <a:xfrm>
+            <a:off x="475488" y="859536"/>
+            <a:ext cx="11237976" cy="502920"/>
+          </a:xfrm>
+          <a:prstGeom prst="rect">
+            <a:avLst/>
+          </a:prstGeom>
+          <a:noFill/>
+        </p:spPr>
+        <p:txBody>
+          <a:bodyPr wrap="square" anchor="t" lIns="0" rIns="0" tIns="0" bIns="0">
+            <a:spAutoFit/>
+          </a:bodyPr>
+          <a:lstStyle/>
+          <a:p>
+            <a:pPr algn="l">
+              <a:lnSpc>
+                <a:spcPct val="114000"/>
+              </a:lnSpc>
+            </a:pPr>
+            <a:r>
+              <a:rPr sz="2200" b="1">
+                <a:solidFill>
+                  <a:srgbClr val="1B2B28"/>
+                </a:solidFill>
+              </a:rPr>
+              <a:t>本课重难点地图 · 老师划重点（动手前必看）</a:t>
+            </a:r>
+          </a:p>
+        </p:txBody>
+      </p:sp>
+      <p:sp>
+        <p:nvSpPr>
+          <p:cNvPr id="8" name="Rounded Rectangle 7"/>
           <p:cNvSpPr/>
           <p:nvPr/>
         </p:nvSpPr>
         <p:spPr>
           <a:xfrm>
-            <a:off x="0" y="1150000"/>
-            <a:ext cx="2600000" cy="70000"/>
-          </a:xfrm>
-          <a:prstGeom prst="rect">
-            <a:avLst/>
+            <a:off x="475488" y="6419088"/>
+            <a:ext cx="11237976" cy="10972"/>
+          </a:xfrm>
+          <a:prstGeom prst="roundRect">
+            <a:avLst>
+              <a:gd name="adj" fmla="val 50000"/>
+            </a:avLst>
           </a:prstGeom>
           <a:solidFill>
-            <a:srgbClr val="F5670F"/>
+            <a:srgbClr val="E4F1EE"/>
           </a:solidFill>
           <a:ln>
             <a:noFill/>
@@ -12915,14 +13495,14 @@
       </p:sp>
       <p:sp>
         <p:nvSpPr>
-          <p:cNvPr id="4" name="TextBox 3"/>
+          <p:cNvPr id="9" name="TextBox 8"/>
           <p:cNvSpPr txBox="1"/>
           <p:nvPr/>
         </p:nvSpPr>
         <p:spPr>
           <a:xfrm>
-            <a:off x="700000" y="300000"/>
-            <a:ext cx="10792000" cy="700000"/>
+            <a:off x="475488" y="6455664"/>
+            <a:ext cx="7315200" cy="292608"/>
           </a:xfrm>
           <a:prstGeom prst="rect">
             <a:avLst/>
@@ -12930,47 +13510,160 @@
           <a:noFill/>
         </p:spPr>
         <p:txBody>
-          <a:bodyPr wrap="square" anchor="t">
+          <a:bodyPr wrap="square" anchor="t" lIns="0" rIns="0" tIns="0" bIns="0">
             <a:spAutoFit/>
           </a:bodyPr>
           <a:lstStyle/>
           <a:p>
             <a:pPr algn="l">
               <a:lnSpc>
-                <a:spcPct val="110000"/>
+                <a:spcPct val="114000"/>
               </a:lnSpc>
-              <a:spcAft>
-                <a:spcPts val="600"/>
-              </a:spcAft>
             </a:pPr>
             <a:r>
-              <a:rPr sz="2400" b="1">
-                <a:solidFill>
-                  <a:srgbClr val="FFFFFF"/>
-                </a:solidFill>
-                <a:latin typeface="微软雅黑"/>
-              </a:rPr>
-              <a:t>总结评价与课后任务</a:t>
-            </a:r>
-          </a:p>
-        </p:txBody>
-      </p:sp>
-      <p:sp>
-        <p:nvSpPr>
-          <p:cNvPr id="5" name="Rectangle 4"/>
+              <a:rPr sz="900" b="0">
+                <a:solidFill>
+                  <a:srgbClr val="5C6E6A"/>
+                </a:solidFill>
+              </a:rPr>
+              <a:t>两江智造集团 · Python程序设计（项目实战）</a:t>
+            </a:r>
+          </a:p>
+        </p:txBody>
+      </p:sp>
+      <p:sp>
+        <p:nvSpPr>
+          <p:cNvPr id="10" name="TextBox 9"/>
+          <p:cNvSpPr txBox="1"/>
+          <p:nvPr/>
+        </p:nvSpPr>
+        <p:spPr>
+          <a:xfrm>
+            <a:off x="10597896" y="6537960"/>
+            <a:ext cx="996696" cy="301752"/>
+          </a:xfrm>
+          <a:prstGeom prst="rect">
+            <a:avLst/>
+          </a:prstGeom>
+          <a:noFill/>
+        </p:spPr>
+        <p:txBody>
+          <a:bodyPr wrap="square" anchor="t" lIns="0" rIns="0" tIns="0" bIns="0">
+            <a:spAutoFit/>
+          </a:bodyPr>
+          <a:lstStyle/>
+          <a:p>
+            <a:pPr algn="r">
+              <a:lnSpc>
+                <a:spcPct val="114000"/>
+              </a:lnSpc>
+            </a:pPr>
+            <a:r>
+              <a:rPr sz="1000" b="0">
+                <a:solidFill>
+                  <a:srgbClr val="8A97B5"/>
+                </a:solidFill>
+              </a:rPr>
+              <a:t>8 / 18</a:t>
+            </a:r>
+          </a:p>
+        </p:txBody>
+      </p:sp>
+      <p:sp>
+        <p:nvSpPr>
+          <p:cNvPr id="11" name="TextBox 10"/>
+          <p:cNvSpPr txBox="1"/>
+          <p:nvPr/>
+        </p:nvSpPr>
+        <p:spPr>
+          <a:xfrm>
+            <a:off x="457200" y="1389888"/>
+            <a:ext cx="11274552" cy="274320"/>
+          </a:xfrm>
+          <a:prstGeom prst="rect">
+            <a:avLst/>
+          </a:prstGeom>
+          <a:noFill/>
+        </p:spPr>
+        <p:txBody>
+          <a:bodyPr wrap="square">
+            <a:spAutoFit/>
+          </a:bodyPr>
+          <a:lstStyle/>
+          <a:p>
+            <a:r>
+              <a:rPr sz="1050" b="0">
+                <a:solidFill>
+                  <a:srgbClr val="6B7280"/>
+                </a:solidFill>
+              </a:rPr>
+              <a:t>动手前先看这页：重点要会什么、难点会卡在哪、哪里最容易错、学没学会怎么自测。</a:t>
+            </a:r>
+          </a:p>
+        </p:txBody>
+      </p:sp>
+      <p:sp>
+        <p:nvSpPr>
+          <p:cNvPr id="12" name="Rectangle 11"/>
           <p:cNvSpPr/>
           <p:nvPr/>
         </p:nvSpPr>
         <p:spPr>
           <a:xfrm>
-            <a:off x="800000" y="1950000"/>
-            <a:ext cx="10600000" cy="1500000"/>
+            <a:off x="457200" y="1783080"/>
+            <a:ext cx="5532120" cy="3127248"/>
           </a:xfrm>
           <a:prstGeom prst="rect">
             <a:avLst/>
           </a:prstGeom>
           <a:solidFill>
-            <a:srgbClr val="F3F6FD"/>
+            <a:srgbClr val="FFFFFF"/>
+          </a:solidFill>
+          <a:ln>
+            <a:solidFill>
+              <a:srgbClr val="D6DCE4"/>
+            </a:solidFill>
+          </a:ln>
+          <a:effectLst/>
+        </p:spPr>
+        <p:style>
+          <a:lnRef idx="1">
+            <a:schemeClr val="accent1"/>
+          </a:lnRef>
+          <a:fillRef idx="3">
+            <a:schemeClr val="accent1"/>
+          </a:fillRef>
+          <a:effectRef idx="2">
+            <a:schemeClr val="accent1"/>
+          </a:effectRef>
+          <a:fontRef idx="minor">
+            <a:schemeClr val="lt1"/>
+          </a:fontRef>
+        </p:style>
+        <p:txBody>
+          <a:bodyPr rtlCol="0" anchor="ctr" wrap="square"/>
+          <a:lstStyle/>
+          <a:p>
+            <a:pPr algn="ctr"/>
+          </a:p>
+        </p:txBody>
+      </p:sp>
+      <p:sp>
+        <p:nvSpPr>
+          <p:cNvPr id="13" name="Rectangle 12"/>
+          <p:cNvSpPr/>
+          <p:nvPr/>
+        </p:nvSpPr>
+        <p:spPr>
+          <a:xfrm>
+            <a:off x="457200" y="1783080"/>
+            <a:ext cx="5532120" cy="365760"/>
+          </a:xfrm>
+          <a:prstGeom prst="rect">
+            <a:avLst/>
+          </a:prstGeom>
+          <a:solidFill>
+            <a:srgbClr val="2F5D8C"/>
           </a:solidFill>
           <a:ln>
             <a:noFill/>
@@ -12992,7 +13685,7 @@
           </a:fontRef>
         </p:style>
         <p:txBody>
-          <a:bodyPr rtlCol="0" anchor="ctr"/>
+          <a:bodyPr rtlCol="0" anchor="ctr" wrap="square"/>
           <a:lstStyle/>
           <a:p>
             <a:pPr algn="ctr"/>
@@ -13001,14 +13694,14 @@
       </p:sp>
       <p:sp>
         <p:nvSpPr>
-          <p:cNvPr id="6" name="TextBox 5"/>
+          <p:cNvPr id="14" name="TextBox 13"/>
           <p:cNvSpPr txBox="1"/>
           <p:nvPr/>
         </p:nvSpPr>
         <p:spPr>
           <a:xfrm>
-            <a:off x="1000000" y="2050000"/>
-            <a:ext cx="10300000" cy="1400000"/>
+            <a:off x="566928" y="1819656"/>
+            <a:ext cx="5312664" cy="292608"/>
           </a:xfrm>
           <a:prstGeom prst="rect">
             <a:avLst/>
@@ -13016,60 +13709,32 @@
           <a:noFill/>
         </p:spPr>
         <p:txBody>
-          <a:bodyPr wrap="square" anchor="t">
+          <a:bodyPr wrap="square">
             <a:spAutoFit/>
           </a:bodyPr>
           <a:lstStyle/>
           <a:p>
-            <a:pPr algn="l">
-              <a:lnSpc>
-                <a:spcPct val="110000"/>
-              </a:lnSpc>
-              <a:spcAft>
-                <a:spcPts val="600"/>
-              </a:spcAft>
-            </a:pPr>
-            <a:r>
-              <a:rPr sz="1500" b="1">
-                <a:solidFill>
-                  <a:srgbClr val="0545E8"/>
-                </a:solidFill>
-                <a:latin typeface="微软雅黑"/>
-              </a:rPr>
-              <a:t>评价（10分钟）：</a:t>
-            </a:r>
-          </a:p>
-          <a:p>
-            <a:pPr algn="l">
-              <a:lnSpc>
-                <a:spcPct val="110000"/>
-              </a:lnSpc>
-              <a:spcAft>
-                <a:spcPts val="600"/>
-              </a:spcAft>
-            </a:pPr>
-            <a:r>
-              <a:rPr sz="1400" b="0">
-                <a:solidFill>
-                  <a:srgbClr val="010328"/>
-                </a:solidFill>
-                <a:latin typeface="微软雅黑"/>
-              </a:rPr>
-              <a:t>按D/C/B/A量表当堂评分；工单24小时内反馈评语与改进建议。</a:t>
-            </a:r>
-          </a:p>
-        </p:txBody>
-      </p:sp>
-      <p:sp>
-        <p:nvSpPr>
-          <p:cNvPr id="7" name="TextBox 6"/>
+            <a:r>
+              <a:rPr sz="1150" b="1">
+                <a:solidFill>
+                  <a:srgbClr val="FFFFFF"/>
+                </a:solidFill>
+              </a:rPr>
+              <a:t>重点 · 必会必考（本课知识点全景）</a:t>
+            </a:r>
+          </a:p>
+        </p:txBody>
+      </p:sp>
+      <p:sp>
+        <p:nvSpPr>
+          <p:cNvPr id="15" name="TextBox 14"/>
           <p:cNvSpPr txBox="1"/>
           <p:nvPr/>
         </p:nvSpPr>
         <p:spPr>
           <a:xfrm>
-            <a:off x="850000" y="3700000"/>
-            <a:ext cx="10600000" cy="700000"/>
+            <a:off x="621792" y="2267712"/>
+            <a:ext cx="5257800" cy="2560320"/>
           </a:xfrm>
           <a:prstGeom prst="rect">
             <a:avLst/>
@@ -13077,209 +13742,134 @@
           <a:noFill/>
         </p:spPr>
         <p:txBody>
-          <a:bodyPr wrap="square" anchor="t">
+          <a:bodyPr wrap="square">
             <a:spAutoFit/>
           </a:bodyPr>
           <a:lstStyle/>
           <a:p>
-            <a:pPr algn="l">
-              <a:lnSpc>
-                <a:spcPct val="120000"/>
-              </a:lnSpc>
-              <a:spcAft>
-                <a:spcPts val="600"/>
-              </a:spcAft>
-            </a:pPr>
-            <a:r>
-              <a:rPr sz="1400" b="1">
-                <a:solidFill>
-                  <a:srgbClr val="F5670F"/>
-                </a:solidFill>
-                <a:latin typeface="微软雅黑"/>
-              </a:rPr>
-              <a:t>1. </a:t>
-            </a:r>
-            <a:r>
-              <a:rPr sz="1400" b="0">
-                <a:solidFill>
-                  <a:srgbClr val="010328"/>
-                </a:solidFill>
-                <a:latin typeface="微软雅黑"/>
-              </a:rPr>
-              <a:t>1. 完成工单P1.1《Python基础练习五题》：及格标准≥3题正确+PEP 8≥75%；优秀标准5题全对+PEP 8≥85%+命名有意义；</a:t>
-            </a:r>
-          </a:p>
-        </p:txBody>
-      </p:sp>
-      <p:sp>
-        <p:nvSpPr>
-          <p:cNvPr id="8" name="TextBox 7"/>
-          <p:cNvSpPr txBox="1"/>
-          <p:nvPr/>
-        </p:nvSpPr>
-        <p:spPr>
-          <a:xfrm>
-            <a:off x="850000" y="4420000"/>
-            <a:ext cx="10600000" cy="700000"/>
-          </a:xfrm>
-          <a:prstGeom prst="rect">
-            <a:avLst/>
-          </a:prstGeom>
-          <a:noFill/>
-        </p:spPr>
-        <p:txBody>
-          <a:bodyPr wrap="square" anchor="t">
-            <a:spAutoFit/>
-          </a:bodyPr>
-          <a:lstStyle/>
-          <a:p>
-            <a:pPr algn="l">
-              <a:lnSpc>
-                <a:spcPct val="120000"/>
-              </a:lnSpc>
-              <a:spcAft>
-                <a:spcPts val="600"/>
-              </a:spcAft>
-            </a:pPr>
-            <a:r>
-              <a:rPr sz="1400" b="1">
-                <a:solidFill>
-                  <a:srgbClr val="F5670F"/>
-                </a:solidFill>
-                <a:latin typeface="微软雅黑"/>
-              </a:rPr>
-              <a:t>2. </a:t>
-            </a:r>
-            <a:r>
-              <a:rPr sz="1400" b="0">
-                <a:solidFill>
-                  <a:srgbClr val="010328"/>
-                </a:solidFill>
-                <a:latin typeface="微软雅黑"/>
-              </a:rPr>
-              <a:t>2. 整理个人《C→Python迁移对照笔记》；</a:t>
-            </a:r>
-          </a:p>
-        </p:txBody>
-      </p:sp>
-      <p:sp>
-        <p:nvSpPr>
-          <p:cNvPr id="9" name="TextBox 8"/>
-          <p:cNvSpPr txBox="1"/>
-          <p:nvPr/>
-        </p:nvSpPr>
-        <p:spPr>
-          <a:xfrm>
-            <a:off x="850000" y="5140000"/>
-            <a:ext cx="10600000" cy="700000"/>
-          </a:xfrm>
-          <a:prstGeom prst="rect">
-            <a:avLst/>
-          </a:prstGeom>
-          <a:noFill/>
-        </p:spPr>
-        <p:txBody>
-          <a:bodyPr wrap="square" anchor="t">
-            <a:spAutoFit/>
-          </a:bodyPr>
-          <a:lstStyle/>
-          <a:p>
-            <a:pPr algn="l">
-              <a:lnSpc>
-                <a:spcPct val="120000"/>
-              </a:lnSpc>
-              <a:spcAft>
-                <a:spcPts val="600"/>
-              </a:spcAft>
-            </a:pPr>
-            <a:r>
-              <a:rPr sz="1400" b="1">
-                <a:solidFill>
-                  <a:srgbClr val="F5670F"/>
-                </a:solidFill>
-                <a:latin typeface="微软雅黑"/>
-              </a:rPr>
-              <a:t>3. </a:t>
-            </a:r>
-            <a:r>
-              <a:rPr sz="1400" b="0">
-                <a:solidFill>
-                  <a:srgbClr val="010328"/>
-                </a:solidFill>
-                <a:latin typeface="微软雅黑"/>
-              </a:rPr>
-              <a:t>3. 预习PEP 8规范与Git基础操作。</a:t>
-            </a:r>
-          </a:p>
-        </p:txBody>
-      </p:sp>
-      <p:sp>
-        <p:nvSpPr>
-          <p:cNvPr id="10" name="TextBox 9"/>
-          <p:cNvSpPr txBox="1"/>
-          <p:nvPr/>
-        </p:nvSpPr>
-        <p:spPr>
-          <a:xfrm>
-            <a:off x="850000" y="5960000"/>
-            <a:ext cx="10600000" cy="500000"/>
-          </a:xfrm>
-          <a:prstGeom prst="rect">
-            <a:avLst/>
-          </a:prstGeom>
-          <a:noFill/>
-        </p:spPr>
-        <p:txBody>
-          <a:bodyPr wrap="square" anchor="t">
-            <a:spAutoFit/>
-          </a:bodyPr>
-          <a:lstStyle/>
-          <a:p>
-            <a:pPr algn="l">
-              <a:lnSpc>
-                <a:spcPct val="110000"/>
-              </a:lnSpc>
-              <a:spcAft>
-                <a:spcPts val="600"/>
-              </a:spcAft>
-            </a:pPr>
-            <a:r>
-              <a:rPr sz="1300" b="1">
-                <a:solidFill>
-                  <a:srgbClr val="0475B6"/>
-                </a:solidFill>
-                <a:latin typeface="微软雅黑"/>
-              </a:rPr>
-              <a:t>下次课预告：</a:t>
-            </a:r>
-            <a:r>
-              <a:rPr sz="1300" b="0">
-                <a:solidFill>
-                  <a:srgbClr val="44546A"/>
-                </a:solidFill>
-                <a:latin typeface="微软雅黑"/>
-              </a:rPr>
-              <a:t>见下次课工单任务书</a:t>
-            </a:r>
-          </a:p>
-        </p:txBody>
-      </p:sp>
-      <p:sp>
-        <p:nvSpPr>
-          <p:cNvPr id="11" name="Rectangle 10"/>
+            <a:r>
+              <a:rPr sz="950" b="0">
+                <a:solidFill>
+                  <a:srgbClr val="2B2F36"/>
+                </a:solidFill>
+              </a:rPr>
+              <a:t>◆ B01 C→Python四映射｜四映射=C户口迁Python：声明→动态/大括号→缩进/指针→引用…</a:t>
+            </a:r>
+          </a:p>
+          <a:p>
+            <a:r>
+              <a:rPr sz="950" b="0">
+                <a:solidFill>
+                  <a:srgbClr val="2B2F36"/>
+                </a:solidFill>
+              </a:rPr>
+              <a:t>◆ B02 引用语义｜b=a不复制货只抄门牌号——两人开同一扇门，动b就是动a</a:t>
+            </a:r>
+          </a:p>
+          <a:p>
+            <a:r>
+              <a:rPr sz="950" b="0">
+                <a:solidFill>
+                  <a:srgbClr val="2B2F36"/>
+                </a:solidFill>
+              </a:rPr>
+              <a:t>◆ B03 列表扩容与字典｜列表append=货架自动加长；字典O(1)=储物柜直取不开抽屉翻</a:t>
+            </a:r>
+          </a:p>
+          <a:p>
+            <a:r>
+              <a:rPr sz="950" b="0">
+                <a:solidFill>
+                  <a:srgbClr val="2B2F36"/>
+                </a:solidFill>
+              </a:rPr>
+              <a:t>◆ B04 try/except替代错误码｜C层层if判错误码=快递每站验货；Python异常=坏件直接退回总站</a:t>
+            </a:r>
+          </a:p>
+          <a:p>
+            <a:r>
+              <a:rPr sz="950" b="0">
+                <a:solidFill>
+                  <a:srgbClr val="2B2F36"/>
+                </a:solidFill>
+              </a:rPr>
+              <a:t>◆ B05 类=struct+函数｜C的struct=数据仓库；Python类=仓库+员工——数据行为…</a:t>
+            </a:r>
+          </a:p>
+          <a:p>
+            <a:r>
+              <a:rPr sz="950" b="0">
+                <a:solidFill>
+                  <a:srgbClr val="2B2F36"/>
+                </a:solidFill>
+              </a:rPr>
+              <a:t>◆ B06 缩进规范｜缩进即语法块=用磅秤分装不许手掂——4空格统一禁Tab</a:t>
+            </a:r>
+          </a:p>
+        </p:txBody>
+      </p:sp>
+      <p:sp>
+        <p:nvSpPr>
+          <p:cNvPr id="16" name="Rectangle 15"/>
           <p:cNvSpPr/>
           <p:nvPr/>
         </p:nvSpPr>
         <p:spPr>
           <a:xfrm>
-            <a:off x="500000" y="6500000"/>
-            <a:ext cx="11100000" cy="20000"/>
+            <a:off x="6144768" y="1783080"/>
+            <a:ext cx="5586984" cy="1481328"/>
           </a:xfrm>
           <a:prstGeom prst="rect">
             <a:avLst/>
           </a:prstGeom>
           <a:solidFill>
-            <a:srgbClr val="C9D4EE"/>
+            <a:srgbClr val="FFFFFF"/>
+          </a:solidFill>
+          <a:ln>
+            <a:solidFill>
+              <a:srgbClr val="D6DCE4"/>
+            </a:solidFill>
+          </a:ln>
+          <a:effectLst/>
+        </p:spPr>
+        <p:style>
+          <a:lnRef idx="1">
+            <a:schemeClr val="accent1"/>
+          </a:lnRef>
+          <a:fillRef idx="3">
+            <a:schemeClr val="accent1"/>
+          </a:fillRef>
+          <a:effectRef idx="2">
+            <a:schemeClr val="accent1"/>
+          </a:effectRef>
+          <a:fontRef idx="minor">
+            <a:schemeClr val="lt1"/>
+          </a:fontRef>
+        </p:style>
+        <p:txBody>
+          <a:bodyPr rtlCol="0" anchor="ctr" wrap="square"/>
+          <a:lstStyle/>
+          <a:p>
+            <a:pPr algn="ctr"/>
+          </a:p>
+        </p:txBody>
+      </p:sp>
+      <p:sp>
+        <p:nvSpPr>
+          <p:cNvPr id="17" name="Rectangle 16"/>
+          <p:cNvSpPr/>
+          <p:nvPr/>
+        </p:nvSpPr>
+        <p:spPr>
+          <a:xfrm>
+            <a:off x="6144768" y="1783080"/>
+            <a:ext cx="5586984" cy="365760"/>
+          </a:xfrm>
+          <a:prstGeom prst="rect">
+            <a:avLst/>
+          </a:prstGeom>
+          <a:solidFill>
+            <a:srgbClr val="8A4B2D"/>
           </a:solidFill>
           <a:ln>
             <a:noFill/>
@@ -13301,7 +13891,7 @@
           </a:fontRef>
         </p:style>
         <p:txBody>
-          <a:bodyPr rtlCol="0" anchor="ctr"/>
+          <a:bodyPr rtlCol="0" anchor="ctr" wrap="square"/>
           <a:lstStyle/>
           <a:p>
             <a:pPr algn="ctr"/>
@@ -13310,14 +13900,14 @@
       </p:sp>
       <p:sp>
         <p:nvSpPr>
-          <p:cNvPr id="12" name="TextBox 11"/>
+          <p:cNvPr id="18" name="TextBox 17"/>
           <p:cNvSpPr txBox="1"/>
           <p:nvPr/>
         </p:nvSpPr>
         <p:spPr>
           <a:xfrm>
-            <a:off x="500000" y="6540000"/>
-            <a:ext cx="7000000" cy="300000"/>
+            <a:off x="6254496" y="1819656"/>
+            <a:ext cx="5367528" cy="292608"/>
           </a:xfrm>
           <a:prstGeom prst="rect">
             <a:avLst/>
@@ -13325,41 +13915,32 @@
           <a:noFill/>
         </p:spPr>
         <p:txBody>
-          <a:bodyPr wrap="square" anchor="t">
+          <a:bodyPr wrap="square">
             <a:spAutoFit/>
           </a:bodyPr>
           <a:lstStyle/>
           <a:p>
-            <a:pPr algn="l">
-              <a:lnSpc>
-                <a:spcPct val="110000"/>
-              </a:lnSpc>
-              <a:spcAft>
-                <a:spcPts val="600"/>
-              </a:spcAft>
-            </a:pPr>
-            <a:r>
-              <a:rPr sz="1000" b="0">
-                <a:solidFill>
-                  <a:srgbClr val="8A97B5"/>
-                </a:solidFill>
-                <a:latin typeface="微软雅黑"/>
-              </a:rPr>
-              <a:t>两江智造集团 · Python程序设计（项目实战）</a:t>
-            </a:r>
-          </a:p>
-        </p:txBody>
-      </p:sp>
-      <p:sp>
-        <p:nvSpPr>
-          <p:cNvPr id="13" name="TextBox 12"/>
+            <a:r>
+              <a:rPr sz="1150" b="1">
+                <a:solidFill>
+                  <a:srgbClr val="FFFFFF"/>
+                </a:solidFill>
+              </a:rPr>
+              <a:t>难点 · 易卡壳（下一页逐个击破）</a:t>
+            </a:r>
+          </a:p>
+        </p:txBody>
+      </p:sp>
+      <p:sp>
+        <p:nvSpPr>
+          <p:cNvPr id="19" name="TextBox 18"/>
           <p:cNvSpPr txBox="1"/>
           <p:nvPr/>
         </p:nvSpPr>
         <p:spPr>
           <a:xfrm>
-            <a:off x="10600000" y="6540000"/>
-            <a:ext cx="1000000" cy="300000"/>
+            <a:off x="6309360" y="2231136"/>
+            <a:ext cx="5303520" cy="960120"/>
           </a:xfrm>
           <a:prstGeom prst="rect">
             <a:avLst/>
@@ -13367,27 +13948,433 @@
           <a:noFill/>
         </p:spPr>
         <p:txBody>
-          <a:bodyPr wrap="square" anchor="t">
+          <a:bodyPr wrap="square">
             <a:spAutoFit/>
           </a:bodyPr>
           <a:lstStyle/>
           <a:p>
-            <a:pPr algn="r">
-              <a:lnSpc>
-                <a:spcPct val="110000"/>
-              </a:lnSpc>
-              <a:spcAft>
-                <a:spcPts val="600"/>
-              </a:spcAft>
-            </a:pPr>
-            <a:r>
-              <a:rPr sz="1000" b="0">
-                <a:solidFill>
-                  <a:srgbClr val="8A97B5"/>
-                </a:solidFill>
-                <a:latin typeface="微软雅黑"/>
-              </a:rPr>
-              <a:t>11 / 16</a:t>
+            <a:r>
+              <a:rPr sz="900" b="0">
+                <a:solidFill>
+                  <a:srgbClr val="2B2F36"/>
+                </a:solidFill>
+              </a:rPr>
+              <a:t>▲ 误区：Python变量无需声明≠无需理解类型——类型还在，只是贴在值上</a:t>
+            </a:r>
+          </a:p>
+          <a:p>
+            <a:r>
+              <a:rPr sz="900" b="0">
+                <a:solidFill>
+                  <a:srgbClr val="2B2F36"/>
+                </a:solidFill>
+              </a:rPr>
+              <a:t>▲ 误区：以为=是复制——嵌套列表必须deepcopy，浅拷贝只拷外壳</a:t>
+            </a:r>
+          </a:p>
+          <a:p>
+            <a:r>
+              <a:rPr sz="900" b="0">
+                <a:solidFill>
+                  <a:srgbClr val="2B2F36"/>
+                </a:solidFill>
+              </a:rPr>
+              <a:t>▲ 误区：C的malloc预分配习惯搬来——Python列表自增长已优化</a:t>
+            </a:r>
+          </a:p>
+        </p:txBody>
+      </p:sp>
+      <p:sp>
+        <p:nvSpPr>
+          <p:cNvPr id="20" name="Rectangle 19"/>
+          <p:cNvSpPr/>
+          <p:nvPr/>
+        </p:nvSpPr>
+        <p:spPr>
+          <a:xfrm>
+            <a:off x="6144768" y="3401568"/>
+            <a:ext cx="5586984" cy="1508760"/>
+          </a:xfrm>
+          <a:prstGeom prst="rect">
+            <a:avLst/>
+          </a:prstGeom>
+          <a:solidFill>
+            <a:srgbClr val="FFFFFF"/>
+          </a:solidFill>
+          <a:ln>
+            <a:solidFill>
+              <a:srgbClr val="D6DCE4"/>
+            </a:solidFill>
+          </a:ln>
+          <a:effectLst/>
+        </p:spPr>
+        <p:style>
+          <a:lnRef idx="1">
+            <a:schemeClr val="accent1"/>
+          </a:lnRef>
+          <a:fillRef idx="3">
+            <a:schemeClr val="accent1"/>
+          </a:fillRef>
+          <a:effectRef idx="2">
+            <a:schemeClr val="accent1"/>
+          </a:effectRef>
+          <a:fontRef idx="minor">
+            <a:schemeClr val="lt1"/>
+          </a:fontRef>
+        </p:style>
+        <p:txBody>
+          <a:bodyPr rtlCol="0" anchor="ctr" wrap="square"/>
+          <a:lstStyle/>
+          <a:p>
+            <a:pPr algn="ctr"/>
+          </a:p>
+        </p:txBody>
+      </p:sp>
+      <p:sp>
+        <p:nvSpPr>
+          <p:cNvPr id="21" name="Rectangle 20"/>
+          <p:cNvSpPr/>
+          <p:nvPr/>
+        </p:nvSpPr>
+        <p:spPr>
+          <a:xfrm>
+            <a:off x="6144768" y="3401568"/>
+            <a:ext cx="5586984" cy="365760"/>
+          </a:xfrm>
+          <a:prstGeom prst="rect">
+            <a:avLst/>
+          </a:prstGeom>
+          <a:solidFill>
+            <a:srgbClr val="9A3B3B"/>
+          </a:solidFill>
+          <a:ln>
+            <a:noFill/>
+          </a:ln>
+          <a:effectLst/>
+        </p:spPr>
+        <p:style>
+          <a:lnRef idx="1">
+            <a:schemeClr val="accent1"/>
+          </a:lnRef>
+          <a:fillRef idx="3">
+            <a:schemeClr val="accent1"/>
+          </a:fillRef>
+          <a:effectRef idx="2">
+            <a:schemeClr val="accent1"/>
+          </a:effectRef>
+          <a:fontRef idx="minor">
+            <a:schemeClr val="lt1"/>
+          </a:fontRef>
+        </p:style>
+        <p:txBody>
+          <a:bodyPr rtlCol="0" anchor="ctr" wrap="square"/>
+          <a:lstStyle/>
+          <a:p>
+            <a:pPr algn="ctr"/>
+          </a:p>
+        </p:txBody>
+      </p:sp>
+      <p:sp>
+        <p:nvSpPr>
+          <p:cNvPr id="22" name="TextBox 21"/>
+          <p:cNvSpPr txBox="1"/>
+          <p:nvPr/>
+        </p:nvSpPr>
+        <p:spPr>
+          <a:xfrm>
+            <a:off x="6254496" y="3438144"/>
+            <a:ext cx="5367528" cy="292608"/>
+          </a:xfrm>
+          <a:prstGeom prst="rect">
+            <a:avLst/>
+          </a:prstGeom>
+          <a:noFill/>
+        </p:spPr>
+        <p:txBody>
+          <a:bodyPr wrap="square">
+            <a:spAutoFit/>
+          </a:bodyPr>
+          <a:lstStyle/>
+          <a:p>
+            <a:r>
+              <a:rPr sz="1150" b="1">
+                <a:solidFill>
+                  <a:srgbClr val="FFFFFF"/>
+                </a:solidFill>
+              </a:rPr>
+              <a:t>高频易错 · 动手前先记住</a:t>
+            </a:r>
+          </a:p>
+        </p:txBody>
+      </p:sp>
+      <p:sp>
+        <p:nvSpPr>
+          <p:cNvPr id="23" name="TextBox 22"/>
+          <p:cNvSpPr txBox="1"/>
+          <p:nvPr/>
+        </p:nvSpPr>
+        <p:spPr>
+          <a:xfrm>
+            <a:off x="6309360" y="3849624"/>
+            <a:ext cx="5303520" cy="960120"/>
+          </a:xfrm>
+          <a:prstGeom prst="rect">
+            <a:avLst/>
+          </a:prstGeom>
+          <a:noFill/>
+        </p:spPr>
+        <p:txBody>
+          <a:bodyPr wrap="square">
+            <a:spAutoFit/>
+          </a:bodyPr>
+          <a:lstStyle/>
+          <a:p>
+            <a:r>
+              <a:rPr sz="900" b="0">
+                <a:solidFill>
+                  <a:srgbClr val="2B2F36"/>
+                </a:solidFill>
+              </a:rPr>
+              <a:t>✗ b改a也变 → list(a)或a.copy()</a:t>
+            </a:r>
+          </a:p>
+          <a:p>
+            <a:r>
+              <a:rPr sz="900" b="0">
+                <a:solidFill>
+                  <a:srgbClr val="2B2F36"/>
+                </a:solidFill>
+              </a:rPr>
+              <a:t>✗ 混用Tab → 统一4空格</a:t>
+            </a:r>
+          </a:p>
+          <a:p>
+            <a:r>
+              <a:rPr sz="900" b="0">
+                <a:solidFill>
+                  <a:srgbClr val="2B2F36"/>
+                </a:solidFill>
+              </a:rPr>
+              <a:t>✗ =当== → 比较用==</a:t>
+            </a:r>
+          </a:p>
+        </p:txBody>
+      </p:sp>
+      <p:sp>
+        <p:nvSpPr>
+          <p:cNvPr id="24" name="Rectangle 23"/>
+          <p:cNvSpPr/>
+          <p:nvPr/>
+        </p:nvSpPr>
+        <p:spPr>
+          <a:xfrm>
+            <a:off x="457200" y="5047488"/>
+            <a:ext cx="11274552" cy="1207008"/>
+          </a:xfrm>
+          <a:prstGeom prst="rect">
+            <a:avLst/>
+          </a:prstGeom>
+          <a:solidFill>
+            <a:srgbClr val="FFFFFF"/>
+          </a:solidFill>
+          <a:ln>
+            <a:solidFill>
+              <a:srgbClr val="D6DCE4"/>
+            </a:solidFill>
+          </a:ln>
+          <a:effectLst/>
+        </p:spPr>
+        <p:style>
+          <a:lnRef idx="1">
+            <a:schemeClr val="accent1"/>
+          </a:lnRef>
+          <a:fillRef idx="3">
+            <a:schemeClr val="accent1"/>
+          </a:fillRef>
+          <a:effectRef idx="2">
+            <a:schemeClr val="accent1"/>
+          </a:effectRef>
+          <a:fontRef idx="minor">
+            <a:schemeClr val="lt1"/>
+          </a:fontRef>
+        </p:style>
+        <p:txBody>
+          <a:bodyPr rtlCol="0" anchor="ctr" wrap="square"/>
+          <a:lstStyle/>
+          <a:p>
+            <a:pPr algn="ctr"/>
+          </a:p>
+        </p:txBody>
+      </p:sp>
+      <p:sp>
+        <p:nvSpPr>
+          <p:cNvPr id="25" name="Rectangle 24"/>
+          <p:cNvSpPr/>
+          <p:nvPr/>
+        </p:nvSpPr>
+        <p:spPr>
+          <a:xfrm>
+            <a:off x="457200" y="5047488"/>
+            <a:ext cx="11274552" cy="365760"/>
+          </a:xfrm>
+          <a:prstGeom prst="rect">
+            <a:avLst/>
+          </a:prstGeom>
+          <a:solidFill>
+            <a:srgbClr val="2E7D46"/>
+          </a:solidFill>
+          <a:ln>
+            <a:noFill/>
+          </a:ln>
+          <a:effectLst/>
+        </p:spPr>
+        <p:style>
+          <a:lnRef idx="1">
+            <a:schemeClr val="accent1"/>
+          </a:lnRef>
+          <a:fillRef idx="3">
+            <a:schemeClr val="accent1"/>
+          </a:fillRef>
+          <a:effectRef idx="2">
+            <a:schemeClr val="accent1"/>
+          </a:effectRef>
+          <a:fontRef idx="minor">
+            <a:schemeClr val="lt1"/>
+          </a:fontRef>
+        </p:style>
+        <p:txBody>
+          <a:bodyPr rtlCol="0" anchor="ctr" wrap="square"/>
+          <a:lstStyle/>
+          <a:p>
+            <a:pPr algn="ctr"/>
+          </a:p>
+        </p:txBody>
+      </p:sp>
+      <p:sp>
+        <p:nvSpPr>
+          <p:cNvPr id="26" name="TextBox 25"/>
+          <p:cNvSpPr txBox="1"/>
+          <p:nvPr/>
+        </p:nvSpPr>
+        <p:spPr>
+          <a:xfrm>
+            <a:off x="566928" y="5084064"/>
+            <a:ext cx="11055096" cy="292608"/>
+          </a:xfrm>
+          <a:prstGeom prst="rect">
+            <a:avLst/>
+          </a:prstGeom>
+          <a:noFill/>
+        </p:spPr>
+        <p:txBody>
+          <a:bodyPr wrap="square">
+            <a:spAutoFit/>
+          </a:bodyPr>
+          <a:lstStyle/>
+          <a:p>
+            <a:r>
+              <a:rPr sz="1150" b="1">
+                <a:solidFill>
+                  <a:srgbClr val="FFFFFF"/>
+                </a:solidFill>
+              </a:rPr>
+              <a:t>达标自问 · 学没学会，问自己这四句（当堂评分同口径）</a:t>
+            </a:r>
+          </a:p>
+        </p:txBody>
+      </p:sp>
+      <p:sp>
+        <p:nvSpPr>
+          <p:cNvPr id="27" name="TextBox 26"/>
+          <p:cNvSpPr txBox="1"/>
+          <p:nvPr/>
+        </p:nvSpPr>
+        <p:spPr>
+          <a:xfrm>
+            <a:off x="621792" y="5458968"/>
+            <a:ext cx="10972800" cy="768096"/>
+          </a:xfrm>
+          <a:prstGeom prst="rect">
+            <a:avLst/>
+          </a:prstGeom>
+          <a:noFill/>
+        </p:spPr>
+        <p:txBody>
+          <a:bodyPr wrap="square">
+            <a:spAutoFit/>
+          </a:bodyPr>
+          <a:lstStyle/>
+          <a:p>
+            <a:r>
+              <a:rPr sz="900" b="0">
+                <a:solidFill>
+                  <a:srgbClr val="2B2F36"/>
+                </a:solidFill>
+              </a:rPr>
+              <a:t>① 及格线我能过吗——≥3题正确+PEP8≥75%</a:t>
+            </a:r>
+          </a:p>
+          <a:p>
+            <a:r>
+              <a:rPr sz="900" b="0">
+                <a:solidFill>
+                  <a:srgbClr val="2B2F36"/>
+                </a:solidFill>
+              </a:rPr>
+              <a:t>② 优秀线我够吗——5题全对+PEP8≥85%</a:t>
+            </a:r>
+          </a:p>
+          <a:p>
+            <a:r>
+              <a:rPr sz="900" b="0">
+                <a:solidFill>
+                  <a:srgbClr val="2B2F36"/>
+                </a:solidFill>
+              </a:rPr>
+              <a:t>③ 技能点我能独立做出来吗——双栏对照法完成语法迁移；五题渐进练习全通过pytest断言</a:t>
+            </a:r>
+          </a:p>
+          <a:p>
+            <a:r>
+              <a:rPr sz="900" b="0">
+                <a:solidFill>
+                  <a:srgbClr val="2B2F36"/>
+                </a:solidFill>
+              </a:rPr>
+              <a:t>④ 报错了先查「常见错误速查」页再举手——错误信息逐字读一遍，八成自己能修</a:t>
+            </a:r>
+          </a:p>
+        </p:txBody>
+      </p:sp>
+      <p:sp>
+        <p:nvSpPr>
+          <p:cNvPr id="28" name="TextBox 27"/>
+          <p:cNvSpPr txBox="1"/>
+          <p:nvPr/>
+        </p:nvSpPr>
+        <p:spPr>
+          <a:xfrm>
+            <a:off x="457200" y="6281928"/>
+            <a:ext cx="9601200" cy="182880"/>
+          </a:xfrm>
+          <a:prstGeom prst="rect">
+            <a:avLst/>
+          </a:prstGeom>
+          <a:noFill/>
+        </p:spPr>
+        <p:txBody>
+          <a:bodyPr wrap="square">
+            <a:spAutoFit/>
+          </a:bodyPr>
+          <a:lstStyle/>
+          <a:p>
+            <a:r>
+              <a:rPr sz="900" b="0">
+                <a:solidFill>
+                  <a:srgbClr val="6B7280"/>
+                </a:solidFill>
+              </a:rPr>
+              <a:t>素材来源：同周《第1次课-带着C语言底子学Pyth…》知识卡与避坑清单（逐字摘录）</a:t>
             </a:r>
           </a:p>
         </p:txBody>
@@ -13412,20 +14399,22 @@
       <p:grpSpPr/>
       <p:sp>
         <p:nvSpPr>
-          <p:cNvPr id="2" name="Rectangle 1"/>
+          <p:cNvPr id="2" name="Rounded Rectangle 1"/>
           <p:cNvSpPr/>
           <p:nvPr/>
         </p:nvSpPr>
         <p:spPr>
           <a:xfrm>
             <a:off x="0" y="0"/>
-            <a:ext cx="12192000" cy="1150000"/>
-          </a:xfrm>
-          <a:prstGeom prst="rect">
-            <a:avLst/>
+            <a:ext cx="12191695" cy="64008"/>
+          </a:xfrm>
+          <a:prstGeom prst="roundRect">
+            <a:avLst>
+              <a:gd name="adj" fmla="val 50000"/>
+            </a:avLst>
           </a:prstGeom>
           <a:solidFill>
-            <a:srgbClr val="010328"/>
+            <a:srgbClr val="0B5E54"/>
           </a:solidFill>
           <a:ln>
             <a:noFill/>
@@ -13456,20 +14445,60 @@
       </p:sp>
       <p:sp>
         <p:nvSpPr>
-          <p:cNvPr id="3" name="Rectangle 2"/>
+          <p:cNvPr id="6" name="TextBox 5"/>
+          <p:cNvSpPr txBox="1"/>
+          <p:nvPr/>
+        </p:nvSpPr>
+        <p:spPr>
+          <a:xfrm>
+            <a:off x="475488" y="859536"/>
+            <a:ext cx="11237976" cy="502920"/>
+          </a:xfrm>
+          <a:prstGeom prst="rect">
+            <a:avLst/>
+          </a:prstGeom>
+          <a:noFill/>
+        </p:spPr>
+        <p:txBody>
+          <a:bodyPr wrap="square" anchor="t" lIns="0" rIns="0" tIns="0" bIns="0">
+            <a:spAutoFit/>
+          </a:bodyPr>
+          <a:lstStyle/>
+          <a:p>
+            <a:pPr algn="l">
+              <a:lnSpc>
+                <a:spcPct val="114000"/>
+              </a:lnSpc>
+            </a:pPr>
+            <a:r>
+              <a:rPr sz="2200" b="1">
+                <a:solidFill>
+                  <a:srgbClr val="1B2B28"/>
+                </a:solidFill>
+              </a:rPr>
+              <a:t>难点逐个击破 · 零基础照做就能会</a:t>
+            </a:r>
+          </a:p>
+        </p:txBody>
+      </p:sp>
+      <p:sp>
+        <p:nvSpPr>
+          <p:cNvPr id="8" name="Rounded Rectangle 7"/>
           <p:cNvSpPr/>
           <p:nvPr/>
         </p:nvSpPr>
         <p:spPr>
           <a:xfrm>
-            <a:off x="0" y="1150000"/>
-            <a:ext cx="2600000" cy="70000"/>
-          </a:xfrm>
-          <a:prstGeom prst="rect">
-            <a:avLst/>
+            <a:off x="475488" y="6419088"/>
+            <a:ext cx="11237976" cy="10972"/>
+          </a:xfrm>
+          <a:prstGeom prst="roundRect">
+            <a:avLst>
+              <a:gd name="adj" fmla="val 50000"/>
+            </a:avLst>
           </a:prstGeom>
           <a:solidFill>
-            <a:srgbClr val="F5670F"/>
+            <a:srgbClr val="E4F1EE"/>
           </a:solidFill>
           <a:ln>
             <a:noFill/>
@@ -13500,14 +14529,14 @@
       </p:sp>
       <p:sp>
         <p:nvSpPr>
-          <p:cNvPr id="4" name="TextBox 3"/>
+          <p:cNvPr id="9" name="TextBox 8"/>
           <p:cNvSpPr txBox="1"/>
           <p:nvPr/>
         </p:nvSpPr>
         <p:spPr>
           <a:xfrm>
-            <a:off x="700000" y="300000"/>
-            <a:ext cx="10792000" cy="700000"/>
+            <a:off x="475488" y="6455664"/>
+            <a:ext cx="7315200" cy="292608"/>
           </a:xfrm>
           <a:prstGeom prst="rect">
             <a:avLst/>
@@ -13515,38 +14544,118 @@
           <a:noFill/>
         </p:spPr>
         <p:txBody>
-          <a:bodyPr wrap="square" anchor="t">
+          <a:bodyPr wrap="square" anchor="t" lIns="0" rIns="0" tIns="0" bIns="0">
             <a:spAutoFit/>
           </a:bodyPr>
           <a:lstStyle/>
           <a:p>
-            <a:r>
-              <a:rPr sz="2000"/>
-              <a:t>P1.2 工程模板生成完成态 · 完成后长这样（真实运行·参考实现）</a:t>
-            </a:r>
-          </a:p>
-        </p:txBody>
-      </p:sp>
-      <p:sp>
-        <p:nvSpPr>
-          <p:cNvPr id="5" name="Rectangle 4"/>
+            <a:pPr algn="l">
+              <a:lnSpc>
+                <a:spcPct val="114000"/>
+              </a:lnSpc>
+            </a:pPr>
+            <a:r>
+              <a:rPr sz="900" b="0">
+                <a:solidFill>
+                  <a:srgbClr val="5C6E6A"/>
+                </a:solidFill>
+              </a:rPr>
+              <a:t>两江智造集团 · Python程序设计（项目实战）</a:t>
+            </a:r>
+          </a:p>
+        </p:txBody>
+      </p:sp>
+      <p:sp>
+        <p:nvSpPr>
+          <p:cNvPr id="10" name="TextBox 9"/>
+          <p:cNvSpPr txBox="1"/>
+          <p:nvPr/>
+        </p:nvSpPr>
+        <p:spPr>
+          <a:xfrm>
+            <a:off x="10597896" y="6537960"/>
+            <a:ext cx="996696" cy="301752"/>
+          </a:xfrm>
+          <a:prstGeom prst="rect">
+            <a:avLst/>
+          </a:prstGeom>
+          <a:noFill/>
+        </p:spPr>
+        <p:txBody>
+          <a:bodyPr wrap="square" anchor="t" lIns="0" rIns="0" tIns="0" bIns="0">
+            <a:spAutoFit/>
+          </a:bodyPr>
+          <a:lstStyle/>
+          <a:p>
+            <a:pPr algn="r">
+              <a:lnSpc>
+                <a:spcPct val="114000"/>
+              </a:lnSpc>
+            </a:pPr>
+            <a:r>
+              <a:rPr sz="1000" b="0">
+                <a:solidFill>
+                  <a:srgbClr val="8A97B5"/>
+                </a:solidFill>
+              </a:rPr>
+              <a:t>9 / 18</a:t>
+            </a:r>
+          </a:p>
+        </p:txBody>
+      </p:sp>
+      <p:sp>
+        <p:nvSpPr>
+          <p:cNvPr id="11" name="TextBox 10"/>
+          <p:cNvSpPr txBox="1"/>
+          <p:nvPr/>
+        </p:nvSpPr>
+        <p:spPr>
+          <a:xfrm>
+            <a:off x="457200" y="1389888"/>
+            <a:ext cx="11274552" cy="274320"/>
+          </a:xfrm>
+          <a:prstGeom prst="rect">
+            <a:avLst/>
+          </a:prstGeom>
+          <a:noFill/>
+        </p:spPr>
+        <p:txBody>
+          <a:bodyPr wrap="square">
+            <a:spAutoFit/>
+          </a:bodyPr>
+          <a:lstStyle/>
+          <a:p>
+            <a:r>
+              <a:rPr sz="1050" b="0">
+                <a:solidFill>
+                  <a:srgbClr val="6B7280"/>
+                </a:solidFill>
+              </a:rPr>
+              <a:t>每个难点四步走：先看「为什么容易栽」对号入座 → 记住「一招破解」→ 照「动手验证」做一遍 → 做不出回知识详解页。</a:t>
+            </a:r>
+          </a:p>
+        </p:txBody>
+      </p:sp>
+      <p:sp>
+        <p:nvSpPr>
+          <p:cNvPr id="12" name="Rectangle 11"/>
           <p:cNvSpPr/>
           <p:nvPr/>
         </p:nvSpPr>
         <p:spPr>
           <a:xfrm>
-            <a:off x="700000" y="1900000"/>
-            <a:ext cx="4600000" cy="1600000"/>
+            <a:off x="457200" y="1783080"/>
+            <a:ext cx="11274552" cy="1481328"/>
           </a:xfrm>
           <a:prstGeom prst="rect">
             <a:avLst/>
           </a:prstGeom>
           <a:solidFill>
-            <a:srgbClr val="F3F6FD"/>
+            <a:srgbClr val="F7F9FC"/>
           </a:solidFill>
           <a:ln>
             <a:solidFill>
-              <a:srgbClr val="C9D4EE"/>
+              <a:srgbClr val="D6DCE4"/>
             </a:solidFill>
           </a:ln>
           <a:effectLst/>
@@ -13566,7 +14675,7 @@
           </a:fontRef>
         </p:style>
         <p:txBody>
-          <a:bodyPr rtlCol="0" anchor="ctr"/>
+          <a:bodyPr rtlCol="0" anchor="ctr" wrap="square"/>
           <a:lstStyle/>
           <a:p>
             <a:pPr algn="ctr"/>
@@ -13575,49 +14684,23 @@
       </p:sp>
       <p:sp>
         <p:nvSpPr>
-          <p:cNvPr id="6" name="TextBox 5"/>
-          <p:cNvSpPr txBox="1"/>
-          <p:nvPr/>
-        </p:nvSpPr>
-        <p:spPr>
-          <a:xfrm>
-            <a:off x="700000" y="2520000"/>
-            <a:ext cx="4600000" cy="500000"/>
-          </a:xfrm>
-          <a:prstGeom prst="rect">
-            <a:avLst/>
-          </a:prstGeom>
-          <a:noFill/>
-        </p:spPr>
-        <p:txBody>
-          <a:bodyPr wrap="square" anchor="t">
-            <a:spAutoFit/>
-          </a:bodyPr>
-          <a:lstStyle/>
-          <a:p/>
-        </p:txBody>
-      </p:sp>
-      <p:sp>
-        <p:nvSpPr>
-          <p:cNvPr id="7" name="Rectangle 6"/>
+          <p:cNvPr id="13" name="Rectangle 12"/>
           <p:cNvSpPr/>
           <p:nvPr/>
         </p:nvSpPr>
         <p:spPr>
           <a:xfrm>
-            <a:off x="700000" y="3700000"/>
-            <a:ext cx="4600000" cy="1600000"/>
+            <a:off x="457200" y="1783080"/>
+            <a:ext cx="82296" cy="1481328"/>
           </a:xfrm>
           <a:prstGeom prst="rect">
             <a:avLst/>
           </a:prstGeom>
           <a:solidFill>
-            <a:srgbClr val="F3F6FD"/>
+            <a:srgbClr val="8A4B2D"/>
           </a:solidFill>
           <a:ln>
-            <a:solidFill>
-              <a:srgbClr val="C9D4EE"/>
-            </a:solidFill>
+            <a:noFill/>
           </a:ln>
           <a:effectLst/>
         </p:spPr>
@@ -13636,7 +14719,7 @@
           </a:fontRef>
         </p:style>
         <p:txBody>
-          <a:bodyPr rtlCol="0" anchor="ctr"/>
+          <a:bodyPr rtlCol="0" anchor="ctr" wrap="square"/>
           <a:lstStyle/>
           <a:p>
             <a:pPr algn="ctr"/>
@@ -13645,14 +14728,14 @@
       </p:sp>
       <p:sp>
         <p:nvSpPr>
-          <p:cNvPr id="8" name="TextBox 7"/>
+          <p:cNvPr id="14" name="TextBox 13"/>
           <p:cNvSpPr txBox="1"/>
           <p:nvPr/>
         </p:nvSpPr>
         <p:spPr>
           <a:xfrm>
-            <a:off x="700000" y="4320000"/>
-            <a:ext cx="4600000" cy="500000"/>
+            <a:off x="658368" y="1828800"/>
+            <a:ext cx="10972800" cy="274320"/>
           </a:xfrm>
           <a:prstGeom prst="rect">
             <a:avLst/>
@@ -13660,50 +14743,240 @@
           <a:noFill/>
         </p:spPr>
         <p:txBody>
-          <a:bodyPr wrap="square" anchor="ctr">
+          <a:bodyPr wrap="square">
             <a:spAutoFit/>
           </a:bodyPr>
           <a:lstStyle/>
           <a:p>
-            <a:pPr algn="ctr">
-              <a:lnSpc>
-                <a:spcPct val="110000"/>
-              </a:lnSpc>
-              <a:spcAft>
-                <a:spcPts val="600"/>
-              </a:spcAft>
-            </a:pPr>
-            <a:r>
-              <a:rPr sz="1100" b="0">
-                <a:solidFill>
-                  <a:srgbClr val="1B2B28"/>
-                </a:solidFill>
-              </a:rPr>
-              <a:t>3. pylint 评分 ≥ 8.5</a:t>
-            </a:r>
-          </a:p>
-        </p:txBody>
-      </p:sp>
-      <p:sp>
-        <p:nvSpPr>
-          <p:cNvPr id="9" name="Rectangle 8"/>
+            <a:r>
+              <a:rPr sz="1100" b="1">
+                <a:solidFill>
+                  <a:srgbClr val="8A4B2D"/>
+                </a:solidFill>
+              </a:rPr>
+              <a:t>难点1：B01 C→Python四映射</a:t>
+            </a:r>
+          </a:p>
+        </p:txBody>
+      </p:sp>
+      <p:sp>
+        <p:nvSpPr>
+          <p:cNvPr id="15" name="TextBox 14"/>
+          <p:cNvSpPr txBox="1"/>
+          <p:nvPr/>
+        </p:nvSpPr>
+        <p:spPr>
+          <a:xfrm>
+            <a:off x="658368" y="2148840"/>
+            <a:ext cx="3566160" cy="219456"/>
+          </a:xfrm>
+          <a:prstGeom prst="rect">
+            <a:avLst/>
+          </a:prstGeom>
+          <a:noFill/>
+        </p:spPr>
+        <p:txBody>
+          <a:bodyPr wrap="square">
+            <a:spAutoFit/>
+          </a:bodyPr>
+          <a:lstStyle/>
+          <a:p>
+            <a:r>
+              <a:rPr sz="900" b="1">
+                <a:solidFill>
+                  <a:srgbClr val="B5533A"/>
+                </a:solidFill>
+              </a:rPr>
+              <a:t>为什么容易栽</a:t>
+            </a:r>
+          </a:p>
+        </p:txBody>
+      </p:sp>
+      <p:sp>
+        <p:nvSpPr>
+          <p:cNvPr id="16" name="TextBox 15"/>
+          <p:cNvSpPr txBox="1"/>
+          <p:nvPr/>
+        </p:nvSpPr>
+        <p:spPr>
+          <a:xfrm>
+            <a:off x="658368" y="2386584"/>
+            <a:ext cx="3584448" cy="822960"/>
+          </a:xfrm>
+          <a:prstGeom prst="rect">
+            <a:avLst/>
+          </a:prstGeom>
+          <a:noFill/>
+        </p:spPr>
+        <p:txBody>
+          <a:bodyPr wrap="square">
+            <a:spAutoFit/>
+          </a:bodyPr>
+          <a:lstStyle/>
+          <a:p>
+            <a:r>
+              <a:rPr sz="900" b="0">
+                <a:solidFill>
+                  <a:srgbClr val="2B2F36"/>
+                </a:solidFill>
+              </a:rPr>
+              <a:t>误区：Python变量无需声明≠无需理解类型——类型还在，只是贴在值上</a:t>
+            </a:r>
+          </a:p>
+        </p:txBody>
+      </p:sp>
+      <p:sp>
+        <p:nvSpPr>
+          <p:cNvPr id="17" name="TextBox 16"/>
+          <p:cNvSpPr txBox="1"/>
+          <p:nvPr/>
+        </p:nvSpPr>
+        <p:spPr>
+          <a:xfrm>
+            <a:off x="4334255" y="2148840"/>
+            <a:ext cx="3566160" cy="219456"/>
+          </a:xfrm>
+          <a:prstGeom prst="rect">
+            <a:avLst/>
+          </a:prstGeom>
+          <a:noFill/>
+        </p:spPr>
+        <p:txBody>
+          <a:bodyPr wrap="square">
+            <a:spAutoFit/>
+          </a:bodyPr>
+          <a:lstStyle/>
+          <a:p>
+            <a:r>
+              <a:rPr sz="900" b="1">
+                <a:solidFill>
+                  <a:srgbClr val="2E7D46"/>
+                </a:solidFill>
+              </a:rPr>
+              <a:t>一招破解（记住这句）</a:t>
+            </a:r>
+          </a:p>
+        </p:txBody>
+      </p:sp>
+      <p:sp>
+        <p:nvSpPr>
+          <p:cNvPr id="18" name="TextBox 17"/>
+          <p:cNvSpPr txBox="1"/>
+          <p:nvPr/>
+        </p:nvSpPr>
+        <p:spPr>
+          <a:xfrm>
+            <a:off x="4334255" y="2386584"/>
+            <a:ext cx="3584448" cy="822960"/>
+          </a:xfrm>
+          <a:prstGeom prst="rect">
+            <a:avLst/>
+          </a:prstGeom>
+          <a:noFill/>
+        </p:spPr>
+        <p:txBody>
+          <a:bodyPr wrap="square">
+            <a:spAutoFit/>
+          </a:bodyPr>
+          <a:lstStyle/>
+          <a:p>
+            <a:r>
+              <a:rPr sz="900" b="0">
+                <a:solidFill>
+                  <a:srgbClr val="2B2F36"/>
+                </a:solidFill>
+              </a:rPr>
+              <a:t>四映射=C户口迁Python：声明→动态/大括号→缩进/指针→引用/printf→f-string</a:t>
+            </a:r>
+          </a:p>
+        </p:txBody>
+      </p:sp>
+      <p:sp>
+        <p:nvSpPr>
+          <p:cNvPr id="19" name="TextBox 18"/>
+          <p:cNvSpPr txBox="1"/>
+          <p:nvPr/>
+        </p:nvSpPr>
+        <p:spPr>
+          <a:xfrm>
+            <a:off x="8010143" y="2148840"/>
+            <a:ext cx="3566160" cy="219456"/>
+          </a:xfrm>
+          <a:prstGeom prst="rect">
+            <a:avLst/>
+          </a:prstGeom>
+          <a:noFill/>
+        </p:spPr>
+        <p:txBody>
+          <a:bodyPr wrap="square">
+            <a:spAutoFit/>
+          </a:bodyPr>
+          <a:lstStyle/>
+          <a:p>
+            <a:r>
+              <a:rPr sz="900" b="1">
+                <a:solidFill>
+                  <a:srgbClr val="35506E"/>
+                </a:solidFill>
+              </a:rPr>
+              <a:t>动手验证（照做一遍）</a:t>
+            </a:r>
+          </a:p>
+        </p:txBody>
+      </p:sp>
+      <p:sp>
+        <p:nvSpPr>
+          <p:cNvPr id="20" name="TextBox 19"/>
+          <p:cNvSpPr txBox="1"/>
+          <p:nvPr/>
+        </p:nvSpPr>
+        <p:spPr>
+          <a:xfrm>
+            <a:off x="8010143" y="2386584"/>
+            <a:ext cx="3584448" cy="822960"/>
+          </a:xfrm>
+          <a:prstGeom prst="rect">
+            <a:avLst/>
+          </a:prstGeom>
+          <a:noFill/>
+        </p:spPr>
+        <p:txBody>
+          <a:bodyPr wrap="square">
+            <a:spAutoFit/>
+          </a:bodyPr>
+          <a:lstStyle/>
+          <a:p>
+            <a:r>
+              <a:rPr sz="900" b="0">
+                <a:solidFill>
+                  <a:srgbClr val="2B2F36"/>
+                </a:solidFill>
+              </a:rPr>
+              <a:t>C老手最快上手路径——心里有C对照着学少走弯路 int x=5 → x=5；printf("%d",x) → print(f'{x}')</a:t>
+            </a:r>
+          </a:p>
+        </p:txBody>
+      </p:sp>
+      <p:sp>
+        <p:nvSpPr>
+          <p:cNvPr id="21" name="Rectangle 20"/>
           <p:cNvSpPr/>
           <p:nvPr/>
         </p:nvSpPr>
         <p:spPr>
           <a:xfrm>
-            <a:off x="5560000" y="1900000"/>
-            <a:ext cx="4600000" cy="1600000"/>
+            <a:off x="457200" y="3383280"/>
+            <a:ext cx="11274552" cy="1481328"/>
           </a:xfrm>
           <a:prstGeom prst="rect">
             <a:avLst/>
           </a:prstGeom>
           <a:solidFill>
-            <a:srgbClr val="F3F6FD"/>
+            <a:srgbClr val="F7F9FC"/>
           </a:solidFill>
           <a:ln>
             <a:solidFill>
-              <a:srgbClr val="C9D4EE"/>
+              <a:srgbClr val="D6DCE4"/>
             </a:solidFill>
           </a:ln>
           <a:effectLst/>
@@ -13723,7 +14996,7 @@
           </a:fontRef>
         </p:style>
         <p:txBody>
-          <a:bodyPr rtlCol="0" anchor="ctr"/>
+          <a:bodyPr rtlCol="0" anchor="ctr" wrap="square"/>
           <a:lstStyle/>
           <a:p>
             <a:pPr algn="ctr"/>
@@ -13732,66 +15005,23 @@
       </p:sp>
       <p:sp>
         <p:nvSpPr>
-          <p:cNvPr id="10" name="TextBox 9"/>
-          <p:cNvSpPr txBox="1"/>
-          <p:nvPr/>
-        </p:nvSpPr>
-        <p:spPr>
-          <a:xfrm>
-            <a:off x="5560000" y="2520000"/>
-            <a:ext cx="4600000" cy="500000"/>
-          </a:xfrm>
-          <a:prstGeom prst="rect">
-            <a:avLst/>
-          </a:prstGeom>
-          <a:noFill/>
-        </p:spPr>
-        <p:txBody>
-          <a:bodyPr wrap="square" anchor="ctr">
-            <a:spAutoFit/>
-          </a:bodyPr>
-          <a:lstStyle/>
-          <a:p>
-            <a:pPr algn="ctr">
-              <a:lnSpc>
-                <a:spcPct val="110000"/>
-              </a:lnSpc>
-              <a:spcAft>
-                <a:spcPts val="600"/>
-              </a:spcAft>
-            </a:pPr>
-            <a:r>
-              <a:rPr sz="1100" b="0">
-                <a:solidFill>
-                  <a:srgbClr val="1B2B28"/>
-                </a:solidFill>
-              </a:rPr>
-              <a:t>2. git 五步命令逐条执行</a:t>
-            </a:r>
-          </a:p>
-        </p:txBody>
-      </p:sp>
-      <p:sp>
-        <p:nvSpPr>
-          <p:cNvPr id="11" name="Rectangle 10"/>
+          <p:cNvPr id="22" name="Rectangle 21"/>
           <p:cNvSpPr/>
           <p:nvPr/>
         </p:nvSpPr>
         <p:spPr>
           <a:xfrm>
-            <a:off x="5560000" y="3700000"/>
-            <a:ext cx="4600000" cy="1600000"/>
+            <a:off x="457200" y="3383280"/>
+            <a:ext cx="82296" cy="1481328"/>
           </a:xfrm>
           <a:prstGeom prst="rect">
             <a:avLst/>
           </a:prstGeom>
           <a:solidFill>
-            <a:srgbClr val="F3F6FD"/>
+            <a:srgbClr val="8A4B2D"/>
           </a:solidFill>
           <a:ln>
-            <a:solidFill>
-              <a:srgbClr val="C9D4EE"/>
-            </a:solidFill>
+            <a:noFill/>
           </a:ln>
           <a:effectLst/>
         </p:spPr>
@@ -13810,7 +15040,7 @@
           </a:fontRef>
         </p:style>
         <p:txBody>
-          <a:bodyPr rtlCol="0" anchor="ctr"/>
+          <a:bodyPr rtlCol="0" anchor="ctr" wrap="square"/>
           <a:lstStyle/>
           <a:p>
             <a:pPr algn="ctr"/>
@@ -13819,14 +15049,14 @@
       </p:sp>
       <p:sp>
         <p:nvSpPr>
-          <p:cNvPr id="12" name="TextBox 11"/>
+          <p:cNvPr id="23" name="TextBox 22"/>
           <p:cNvSpPr txBox="1"/>
           <p:nvPr/>
         </p:nvSpPr>
         <p:spPr>
           <a:xfrm>
-            <a:off x="5560000" y="4320000"/>
-            <a:ext cx="4600000" cy="500000"/>
+            <a:off x="658368" y="3429000"/>
+            <a:ext cx="10972800" cy="274320"/>
           </a:xfrm>
           <a:prstGeom prst="rect">
             <a:avLst/>
@@ -13834,46 +15064,282 @@
           <a:noFill/>
         </p:spPr>
         <p:txBody>
-          <a:bodyPr wrap="square" anchor="ctr">
+          <a:bodyPr wrap="square">
             <a:spAutoFit/>
           </a:bodyPr>
           <a:lstStyle/>
           <a:p>
-            <a:pPr algn="ctr">
-              <a:lnSpc>
-                <a:spcPct val="110000"/>
-              </a:lnSpc>
-              <a:spcAft>
-                <a:spcPts val="600"/>
-              </a:spcAft>
-            </a:pPr>
-            <a:r>
-              <a:rPr sz="1100" b="0">
-                <a:solidFill>
-                  <a:srgbClr val="1B2B28"/>
-                </a:solidFill>
-              </a:rPr>
-              <a:t>4. pytest 测试通过</a:t>
-            </a:r>
-          </a:p>
-        </p:txBody>
-      </p:sp>
-      <p:sp>
-        <p:nvSpPr>
-          <p:cNvPr id="13" name="Rectangle 12"/>
+            <a:r>
+              <a:rPr sz="1100" b="1">
+                <a:solidFill>
+                  <a:srgbClr val="8A4B2D"/>
+                </a:solidFill>
+              </a:rPr>
+              <a:t>难点2：B02 引用语义</a:t>
+            </a:r>
+          </a:p>
+        </p:txBody>
+      </p:sp>
+      <p:sp>
+        <p:nvSpPr>
+          <p:cNvPr id="24" name="TextBox 23"/>
+          <p:cNvSpPr txBox="1"/>
+          <p:nvPr/>
+        </p:nvSpPr>
+        <p:spPr>
+          <a:xfrm>
+            <a:off x="658368" y="3749040"/>
+            <a:ext cx="3566160" cy="219456"/>
+          </a:xfrm>
+          <a:prstGeom prst="rect">
+            <a:avLst/>
+          </a:prstGeom>
+          <a:noFill/>
+        </p:spPr>
+        <p:txBody>
+          <a:bodyPr wrap="square">
+            <a:spAutoFit/>
+          </a:bodyPr>
+          <a:lstStyle/>
+          <a:p>
+            <a:r>
+              <a:rPr sz="900" b="1">
+                <a:solidFill>
+                  <a:srgbClr val="B5533A"/>
+                </a:solidFill>
+              </a:rPr>
+              <a:t>为什么容易栽</a:t>
+            </a:r>
+          </a:p>
+        </p:txBody>
+      </p:sp>
+      <p:sp>
+        <p:nvSpPr>
+          <p:cNvPr id="25" name="TextBox 24"/>
+          <p:cNvSpPr txBox="1"/>
+          <p:nvPr/>
+        </p:nvSpPr>
+        <p:spPr>
+          <a:xfrm>
+            <a:off x="658368" y="3986784"/>
+            <a:ext cx="3584448" cy="822960"/>
+          </a:xfrm>
+          <a:prstGeom prst="rect">
+            <a:avLst/>
+          </a:prstGeom>
+          <a:noFill/>
+        </p:spPr>
+        <p:txBody>
+          <a:bodyPr wrap="square">
+            <a:spAutoFit/>
+          </a:bodyPr>
+          <a:lstStyle/>
+          <a:p>
+            <a:r>
+              <a:rPr sz="900" b="0">
+                <a:solidFill>
+                  <a:srgbClr val="2B2F36"/>
+                </a:solidFill>
+              </a:rPr>
+              <a:t>误区：以为=是复制——嵌套列表必须deepcopy，浅拷贝只拷外壳</a:t>
+            </a:r>
+          </a:p>
+        </p:txBody>
+      </p:sp>
+      <p:sp>
+        <p:nvSpPr>
+          <p:cNvPr id="26" name="TextBox 25"/>
+          <p:cNvSpPr txBox="1"/>
+          <p:nvPr/>
+        </p:nvSpPr>
+        <p:spPr>
+          <a:xfrm>
+            <a:off x="4334255" y="3749040"/>
+            <a:ext cx="3566160" cy="219456"/>
+          </a:xfrm>
+          <a:prstGeom prst="rect">
+            <a:avLst/>
+          </a:prstGeom>
+          <a:noFill/>
+        </p:spPr>
+        <p:txBody>
+          <a:bodyPr wrap="square">
+            <a:spAutoFit/>
+          </a:bodyPr>
+          <a:lstStyle/>
+          <a:p>
+            <a:r>
+              <a:rPr sz="900" b="1">
+                <a:solidFill>
+                  <a:srgbClr val="2E7D46"/>
+                </a:solidFill>
+              </a:rPr>
+              <a:t>一招破解（记住这句）</a:t>
+            </a:r>
+          </a:p>
+        </p:txBody>
+      </p:sp>
+      <p:sp>
+        <p:nvSpPr>
+          <p:cNvPr id="27" name="TextBox 26"/>
+          <p:cNvSpPr txBox="1"/>
+          <p:nvPr/>
+        </p:nvSpPr>
+        <p:spPr>
+          <a:xfrm>
+            <a:off x="4334255" y="3986784"/>
+            <a:ext cx="3584448" cy="822960"/>
+          </a:xfrm>
+          <a:prstGeom prst="rect">
+            <a:avLst/>
+          </a:prstGeom>
+          <a:noFill/>
+        </p:spPr>
+        <p:txBody>
+          <a:bodyPr wrap="square">
+            <a:spAutoFit/>
+          </a:bodyPr>
+          <a:lstStyle/>
+          <a:p>
+            <a:r>
+              <a:rPr sz="900" b="0">
+                <a:solidFill>
+                  <a:srgbClr val="2B2F36"/>
+                </a:solidFill>
+              </a:rPr>
+              <a:t>b=a不复制货只抄门牌号——两人开同一扇门，动b就是动a</a:t>
+            </a:r>
+          </a:p>
+        </p:txBody>
+      </p:sp>
+      <p:sp>
+        <p:nvSpPr>
+          <p:cNvPr id="28" name="TextBox 27"/>
+          <p:cNvSpPr txBox="1"/>
+          <p:nvPr/>
+        </p:nvSpPr>
+        <p:spPr>
+          <a:xfrm>
+            <a:off x="8010143" y="3749040"/>
+            <a:ext cx="3566160" cy="219456"/>
+          </a:xfrm>
+          <a:prstGeom prst="rect">
+            <a:avLst/>
+          </a:prstGeom>
+          <a:noFill/>
+        </p:spPr>
+        <p:txBody>
+          <a:bodyPr wrap="square">
+            <a:spAutoFit/>
+          </a:bodyPr>
+          <a:lstStyle/>
+          <a:p>
+            <a:r>
+              <a:rPr sz="900" b="1">
+                <a:solidFill>
+                  <a:srgbClr val="35506E"/>
+                </a:solidFill>
+              </a:rPr>
+              <a:t>动手验证（照做一遍）</a:t>
+            </a:r>
+          </a:p>
+        </p:txBody>
+      </p:sp>
+      <p:sp>
+        <p:nvSpPr>
+          <p:cNvPr id="29" name="TextBox 28"/>
+          <p:cNvSpPr txBox="1"/>
+          <p:nvPr/>
+        </p:nvSpPr>
+        <p:spPr>
+          <a:xfrm>
+            <a:off x="8010143" y="3986784"/>
+            <a:ext cx="3584448" cy="822960"/>
+          </a:xfrm>
+          <a:prstGeom prst="rect">
+            <a:avLst/>
+          </a:prstGeom>
+          <a:noFill/>
+        </p:spPr>
+        <p:txBody>
+          <a:bodyPr wrap="square">
+            <a:spAutoFit/>
+          </a:bodyPr>
+          <a:lstStyle/>
+          <a:p>
+            <a:r>
+              <a:rPr sz="900" b="0">
+                <a:solidFill>
+                  <a:srgbClr val="2B2F36"/>
+                </a:solidFill>
+              </a:rPr>
+              <a:t>函数传参/复制数据时的隐性共享——改b连a一起变 b = a.copy()浅拷贝；copy.deepcopy(a)深拷贝</a:t>
+            </a:r>
+          </a:p>
+        </p:txBody>
+      </p:sp>
+      <p:sp>
+        <p:nvSpPr>
+          <p:cNvPr id="30" name="Rectangle 29"/>
           <p:cNvSpPr/>
           <p:nvPr/>
         </p:nvSpPr>
         <p:spPr>
           <a:xfrm>
-            <a:off x="500000" y="6500000"/>
-            <a:ext cx="11100000" cy="20000"/>
+            <a:off x="457200" y="4983480"/>
+            <a:ext cx="11274552" cy="1481328"/>
           </a:xfrm>
           <a:prstGeom prst="rect">
             <a:avLst/>
           </a:prstGeom>
           <a:solidFill>
-            <a:srgbClr val="C9D4EE"/>
+            <a:srgbClr val="F7F9FC"/>
+          </a:solidFill>
+          <a:ln>
+            <a:solidFill>
+              <a:srgbClr val="D6DCE4"/>
+            </a:solidFill>
+          </a:ln>
+          <a:effectLst/>
+        </p:spPr>
+        <p:style>
+          <a:lnRef idx="1">
+            <a:schemeClr val="accent1"/>
+          </a:lnRef>
+          <a:fillRef idx="3">
+            <a:schemeClr val="accent1"/>
+          </a:fillRef>
+          <a:effectRef idx="2">
+            <a:schemeClr val="accent1"/>
+          </a:effectRef>
+          <a:fontRef idx="minor">
+            <a:schemeClr val="lt1"/>
+          </a:fontRef>
+        </p:style>
+        <p:txBody>
+          <a:bodyPr rtlCol="0" anchor="ctr" wrap="square"/>
+          <a:lstStyle/>
+          <a:p>
+            <a:pPr algn="ctr"/>
+          </a:p>
+        </p:txBody>
+      </p:sp>
+      <p:sp>
+        <p:nvSpPr>
+          <p:cNvPr id="31" name="Rectangle 30"/>
+          <p:cNvSpPr/>
+          <p:nvPr/>
+        </p:nvSpPr>
+        <p:spPr>
+          <a:xfrm>
+            <a:off x="457200" y="4983480"/>
+            <a:ext cx="82296" cy="1481328"/>
+          </a:xfrm>
+          <a:prstGeom prst="rect">
+            <a:avLst/>
+          </a:prstGeom>
+          <a:solidFill>
+            <a:srgbClr val="8A4B2D"/>
           </a:solidFill>
           <a:ln>
             <a:noFill/>
@@ -13895,7 +15361,7 @@
           </a:fontRef>
         </p:style>
         <p:txBody>
-          <a:bodyPr rtlCol="0" anchor="ctr"/>
+          <a:bodyPr rtlCol="0" anchor="ctr" wrap="square"/>
           <a:lstStyle/>
           <a:p>
             <a:pPr algn="ctr"/>
@@ -13904,14 +15370,14 @@
       </p:sp>
       <p:sp>
         <p:nvSpPr>
-          <p:cNvPr id="14" name="TextBox 13"/>
+          <p:cNvPr id="32" name="TextBox 31"/>
           <p:cNvSpPr txBox="1"/>
           <p:nvPr/>
         </p:nvSpPr>
         <p:spPr>
           <a:xfrm>
-            <a:off x="500000" y="6540000"/>
-            <a:ext cx="7000000" cy="300000"/>
+            <a:off x="658368" y="5029200"/>
+            <a:ext cx="10972800" cy="274320"/>
           </a:xfrm>
           <a:prstGeom prst="rect">
             <a:avLst/>
@@ -13919,41 +15385,32 @@
           <a:noFill/>
         </p:spPr>
         <p:txBody>
-          <a:bodyPr wrap="square" anchor="t">
+          <a:bodyPr wrap="square">
             <a:spAutoFit/>
           </a:bodyPr>
           <a:lstStyle/>
           <a:p>
-            <a:pPr algn="l">
-              <a:lnSpc>
-                <a:spcPct val="110000"/>
-              </a:lnSpc>
-              <a:spcAft>
-                <a:spcPts val="600"/>
-              </a:spcAft>
-            </a:pPr>
-            <a:r>
-              <a:rPr sz="1000" b="0">
-                <a:solidFill>
-                  <a:srgbClr val="8A97B5"/>
-                </a:solidFill>
-                <a:latin typeface="微软雅黑"/>
-              </a:rPr>
-              <a:t>两江智造集团 · Python程序设计（项目实战）</a:t>
-            </a:r>
-          </a:p>
-        </p:txBody>
-      </p:sp>
-      <p:sp>
-        <p:nvSpPr>
-          <p:cNvPr id="15" name="TextBox 14"/>
+            <a:r>
+              <a:rPr sz="1100" b="1">
+                <a:solidFill>
+                  <a:srgbClr val="8A4B2D"/>
+                </a:solidFill>
+              </a:rPr>
+              <a:t>难点3：B03 列表扩容与字典</a:t>
+            </a:r>
+          </a:p>
+        </p:txBody>
+      </p:sp>
+      <p:sp>
+        <p:nvSpPr>
+          <p:cNvPr id="33" name="TextBox 32"/>
           <p:cNvSpPr txBox="1"/>
           <p:nvPr/>
         </p:nvSpPr>
         <p:spPr>
           <a:xfrm>
-            <a:off x="10600000" y="6540000"/>
-            <a:ext cx="1000000" cy="300000"/>
+            <a:off x="658368" y="5349240"/>
+            <a:ext cx="3566160" cy="219456"/>
           </a:xfrm>
           <a:prstGeom prst="rect">
             <a:avLst/>
@@ -13961,55 +15418,187 @@
           <a:noFill/>
         </p:spPr>
         <p:txBody>
-          <a:bodyPr wrap="square" anchor="t">
+          <a:bodyPr wrap="square">
             <a:spAutoFit/>
           </a:bodyPr>
           <a:lstStyle/>
           <a:p>
-            <a:pPr algn="r">
-              <a:lnSpc>
-                <a:spcPct val="110000"/>
-              </a:lnSpc>
-              <a:spcAft>
-                <a:spcPts val="600"/>
-              </a:spcAft>
-            </a:pPr>
-            <a:r>
-              <a:rPr sz="1000" b="0">
-                <a:solidFill>
-                  <a:srgbClr val="8A97B5"/>
-                </a:solidFill>
-                <a:latin typeface="微软雅黑"/>
-              </a:rPr>
-              <a:t>12 / 16</a:t>
-            </a:r>
-          </a:p>
-        </p:txBody>
-      </p:sp>
-      <p:pic>
-        <p:nvPicPr>
-          <p:cNvPr id="16" name="Picture 15" descr="image.png"/>
-          <p:cNvPicPr>
-            <a:picLocks noChangeAspect="1"/>
-          </p:cNvPicPr>
-          <p:nvPr/>
-        </p:nvPicPr>
-        <p:blipFill>
-          <a:blip r:embed="rId4"/>
-          <a:stretch>
-            <a:fillRect/>
-          </a:stretch>
-        </p:blipFill>
-        <p:spPr>
-          <a:xfrm>
-            <a:off x="1041494" y="1900000"/>
-            <a:ext cx="3917012" cy="1600000"/>
-          </a:xfrm>
-          <a:prstGeom prst="rect">
-            <a:avLst/>
-          </a:prstGeom>
-        </p:spPr>
-      </p:pic>
+            <a:r>
+              <a:rPr sz="900" b="1">
+                <a:solidFill>
+                  <a:srgbClr val="B5533A"/>
+                </a:solidFill>
+              </a:rPr>
+              <a:t>为什么容易栽</a:t>
+            </a:r>
+          </a:p>
+        </p:txBody>
+      </p:sp>
+      <p:sp>
+        <p:nvSpPr>
+          <p:cNvPr id="34" name="TextBox 33"/>
+          <p:cNvSpPr txBox="1"/>
+          <p:nvPr/>
+        </p:nvSpPr>
+        <p:spPr>
+          <a:xfrm>
+            <a:off x="658368" y="5586984"/>
+            <a:ext cx="3584448" cy="822960"/>
+          </a:xfrm>
+          <a:prstGeom prst="rect">
+            <a:avLst/>
+          </a:prstGeom>
+          <a:noFill/>
+        </p:spPr>
+        <p:txBody>
+          <a:bodyPr wrap="square">
+            <a:spAutoFit/>
+          </a:bodyPr>
+          <a:lstStyle/>
+          <a:p>
+            <a:r>
+              <a:rPr sz="900" b="0">
+                <a:solidFill>
+                  <a:srgbClr val="2B2F36"/>
+                </a:solidFill>
+              </a:rPr>
+              <a:t>误区：C的malloc预分配习惯搬来——Python列表自增长已优化</a:t>
+            </a:r>
+          </a:p>
+        </p:txBody>
+      </p:sp>
+      <p:sp>
+        <p:nvSpPr>
+          <p:cNvPr id="35" name="TextBox 34"/>
+          <p:cNvSpPr txBox="1"/>
+          <p:nvPr/>
+        </p:nvSpPr>
+        <p:spPr>
+          <a:xfrm>
+            <a:off x="4334255" y="5349240"/>
+            <a:ext cx="3566160" cy="219456"/>
+          </a:xfrm>
+          <a:prstGeom prst="rect">
+            <a:avLst/>
+          </a:prstGeom>
+          <a:noFill/>
+        </p:spPr>
+        <p:txBody>
+          <a:bodyPr wrap="square">
+            <a:spAutoFit/>
+          </a:bodyPr>
+          <a:lstStyle/>
+          <a:p>
+            <a:r>
+              <a:rPr sz="900" b="1">
+                <a:solidFill>
+                  <a:srgbClr val="2E7D46"/>
+                </a:solidFill>
+              </a:rPr>
+              <a:t>一招破解（记住这句）</a:t>
+            </a:r>
+          </a:p>
+        </p:txBody>
+      </p:sp>
+      <p:sp>
+        <p:nvSpPr>
+          <p:cNvPr id="36" name="TextBox 35"/>
+          <p:cNvSpPr txBox="1"/>
+          <p:nvPr/>
+        </p:nvSpPr>
+        <p:spPr>
+          <a:xfrm>
+            <a:off x="4334255" y="5586984"/>
+            <a:ext cx="3584448" cy="822960"/>
+          </a:xfrm>
+          <a:prstGeom prst="rect">
+            <a:avLst/>
+          </a:prstGeom>
+          <a:noFill/>
+        </p:spPr>
+        <p:txBody>
+          <a:bodyPr wrap="square">
+            <a:spAutoFit/>
+          </a:bodyPr>
+          <a:lstStyle/>
+          <a:p>
+            <a:r>
+              <a:rPr sz="900" b="0">
+                <a:solidFill>
+                  <a:srgbClr val="2B2F36"/>
+                </a:solidFill>
+              </a:rPr>
+              <a:t>列表append=货架自动加长；字典O(1)=储物柜直取不开抽屉翻</a:t>
+            </a:r>
+          </a:p>
+        </p:txBody>
+      </p:sp>
+      <p:sp>
+        <p:nvSpPr>
+          <p:cNvPr id="37" name="TextBox 36"/>
+          <p:cNvSpPr txBox="1"/>
+          <p:nvPr/>
+        </p:nvSpPr>
+        <p:spPr>
+          <a:xfrm>
+            <a:off x="8010143" y="5349240"/>
+            <a:ext cx="3566160" cy="219456"/>
+          </a:xfrm>
+          <a:prstGeom prst="rect">
+            <a:avLst/>
+          </a:prstGeom>
+          <a:noFill/>
+        </p:spPr>
+        <p:txBody>
+          <a:bodyPr wrap="square">
+            <a:spAutoFit/>
+          </a:bodyPr>
+          <a:lstStyle/>
+          <a:p>
+            <a:r>
+              <a:rPr sz="900" b="1">
+                <a:solidFill>
+                  <a:srgbClr val="35506E"/>
+                </a:solidFill>
+              </a:rPr>
+              <a:t>动手验证（照做一遍）</a:t>
+            </a:r>
+          </a:p>
+        </p:txBody>
+      </p:sp>
+      <p:sp>
+        <p:nvSpPr>
+          <p:cNvPr id="38" name="TextBox 37"/>
+          <p:cNvSpPr txBox="1"/>
+          <p:nvPr/>
+        </p:nvSpPr>
+        <p:spPr>
+          <a:xfrm>
+            <a:off x="8010143" y="5586984"/>
+            <a:ext cx="3584448" cy="822960"/>
+          </a:xfrm>
+          <a:prstGeom prst="rect">
+            <a:avLst/>
+          </a:prstGeom>
+          <a:noFill/>
+        </p:spPr>
+        <p:txBody>
+          <a:bodyPr wrap="square">
+            <a:spAutoFit/>
+          </a:bodyPr>
+          <a:lstStyle/>
+          <a:p>
+            <a:r>
+              <a:rPr sz="900" b="0">
+                <a:solidFill>
+                  <a:srgbClr val="2B2F36"/>
+                </a:solidFill>
+              </a:rPr>
+              <a:t>采集缓冲攒够1000条批量入库——工程节奏控制 buffer.append(row)；if len(buffer)&gt;=1000: flush()</a:t>
+            </a:r>
+          </a:p>
+        </p:txBody>
+      </p:sp>
     </p:spTree>
   </p:cSld>
   <p:clrMapOvr>
